--- a/연구코드/aec/results/강남_TAMA_연구보고서.pptx
+++ b/연구코드/aec/results/강남_TAMA_연구보고서.pptx
@@ -5,22 +5,22 @@
     <p:sldMasterId id="2147483648" r:id="rId1"/>
   </p:sldMasterIdLst>
   <p:sldIdLst>
-    <p:sldId id="256" r:id="rId2"/>
-    <p:sldId id="257" r:id="rId3"/>
-    <p:sldId id="258" r:id="rId4"/>
-    <p:sldId id="259" r:id="rId5"/>
-    <p:sldId id="260" r:id="rId6"/>
-    <p:sldId id="261" r:id="rId7"/>
-    <p:sldId id="262" r:id="rId8"/>
-    <p:sldId id="263" r:id="rId9"/>
-    <p:sldId id="264" r:id="rId10"/>
-    <p:sldId id="265" r:id="rId11"/>
-    <p:sldId id="266" r:id="rId12"/>
-    <p:sldId id="267" r:id="rId13"/>
-    <p:sldId id="268" r:id="rId14"/>
-    <p:sldId id="269" r:id="rId15"/>
+    <p:sldId id="256" r:id="rId7"/>
+    <p:sldId id="257" r:id="rId8"/>
+    <p:sldId id="258" r:id="rId9"/>
+    <p:sldId id="259" r:id="rId10"/>
+    <p:sldId id="260" r:id="rId11"/>
+    <p:sldId id="261" r:id="rId12"/>
+    <p:sldId id="262" r:id="rId13"/>
+    <p:sldId id="263" r:id="rId14"/>
+    <p:sldId id="264" r:id="rId15"/>
+    <p:sldId id="265" r:id="rId16"/>
+    <p:sldId id="266" r:id="rId17"/>
+    <p:sldId id="267" r:id="rId18"/>
+    <p:sldId id="268" r:id="rId19"/>
+    <p:sldId id="269" r:id="rId20"/>
   </p:sldIdLst>
-  <p:sldSz cx="12188825" cy="6858000"/>
+  <p:sldSz cx="12188952" cy="6858000" type="screen4x3"/>
   <p:notesSz cx="6858000" cy="9144000"/>
   <p:defaultTextStyle>
     <a:defPPr>
@@ -117,22 +117,6 @@
       </a:defRPr>
     </a:lvl9pPr>
   </p:defaultTextStyle>
-  <p:extLst>
-    <p:ext uri="{EFAFB233-063F-42B5-8137-9DF3F51BA10A}">
-      <p15:sldGuideLst xmlns:p15="http://schemas.microsoft.com/office/powerpoint/2012/main">
-        <p15:guide id="1" orient="horz" pos="2160">
-          <p15:clr>
-            <a:srgbClr val="A4A3A4"/>
-          </p15:clr>
-        </p15:guide>
-        <p15:guide id="2" pos="2880">
-          <p15:clr>
-            <a:srgbClr val="A4A3A4"/>
-          </p15:clr>
-        </p15:guide>
-      </p15:sldGuideLst>
-    </p:ext>
-  </p:extLst>
 </p:presentation>
 </file>
 
@@ -174,9 +158,10 @@
           <a:lstStyle/>
           <a:p>
             <a:r>
-              <a:rPr lang="en-US"/>
+              <a:rPr lang="en-US" smtClean="0"/>
               <a:t>Click to edit Master title style</a:t>
             </a:r>
+            <a:endParaRPr lang="en-US"/>
           </a:p>
         </p:txBody>
       </p:sp>
@@ -292,9 +277,10 @@
           </a:lstStyle>
           <a:p>
             <a:r>
-              <a:rPr lang="en-US"/>
+              <a:rPr lang="en-US" smtClean="0"/>
               <a:t>Click to edit Master subtitle style</a:t>
             </a:r>
+            <a:endParaRPr lang="en-US"/>
           </a:p>
         </p:txBody>
       </p:sp>
@@ -315,7 +301,7 @@
           <a:p>
             <a:fld id="{5BCAD085-E8A6-8845-BD4E-CB4CCA059FC4}" type="datetimeFigureOut">
               <a:rPr lang="en-US" smtClean="0"/>
-              <a:t>4/22/2026</a:t>
+              <a:t>1/27/13</a:t>
             </a:fld>
             <a:endParaRPr lang="en-US"/>
           </a:p>
@@ -409,9 +395,10 @@
           <a:lstStyle/>
           <a:p>
             <a:r>
-              <a:rPr lang="en-US"/>
+              <a:rPr lang="en-US" smtClean="0"/>
               <a:t>Click to edit Master title style</a:t>
             </a:r>
+            <a:endParaRPr lang="en-US"/>
           </a:p>
         </p:txBody>
       </p:sp>
@@ -432,37 +419,38 @@
           <a:p>
             <a:pPr lvl="0"/>
             <a:r>
-              <a:rPr lang="en-US"/>
+              <a:rPr lang="en-US" smtClean="0"/>
               <a:t>Click to edit Master text styles</a:t>
             </a:r>
           </a:p>
           <a:p>
             <a:pPr lvl="1"/>
             <a:r>
-              <a:rPr lang="en-US"/>
+              <a:rPr lang="en-US" smtClean="0"/>
               <a:t>Second level</a:t>
             </a:r>
           </a:p>
           <a:p>
             <a:pPr lvl="2"/>
             <a:r>
-              <a:rPr lang="en-US"/>
+              <a:rPr lang="en-US" smtClean="0"/>
               <a:t>Third level</a:t>
             </a:r>
           </a:p>
           <a:p>
             <a:pPr lvl="3"/>
             <a:r>
-              <a:rPr lang="en-US"/>
+              <a:rPr lang="en-US" smtClean="0"/>
               <a:t>Fourth level</a:t>
             </a:r>
           </a:p>
           <a:p>
             <a:pPr lvl="4"/>
             <a:r>
-              <a:rPr lang="en-US"/>
+              <a:rPr lang="en-US" smtClean="0"/>
               <a:t>Fifth level</a:t>
             </a:r>
+            <a:endParaRPr lang="en-US"/>
           </a:p>
         </p:txBody>
       </p:sp>
@@ -483,7 +471,7 @@
           <a:p>
             <a:fld id="{5BCAD085-E8A6-8845-BD4E-CB4CCA059FC4}" type="datetimeFigureOut">
               <a:rPr lang="en-US" smtClean="0"/>
-              <a:t>4/22/2026</a:t>
+              <a:t>1/27/13</a:t>
             </a:fld>
             <a:endParaRPr lang="en-US"/>
           </a:p>
@@ -582,9 +570,10 @@
           <a:lstStyle/>
           <a:p>
             <a:r>
-              <a:rPr lang="en-US"/>
+              <a:rPr lang="en-US" smtClean="0"/>
               <a:t>Click to edit Master title style</a:t>
             </a:r>
+            <a:endParaRPr lang="en-US"/>
           </a:p>
         </p:txBody>
       </p:sp>
@@ -610,37 +599,38 @@
           <a:p>
             <a:pPr lvl="0"/>
             <a:r>
-              <a:rPr lang="en-US"/>
+              <a:rPr lang="en-US" smtClean="0"/>
               <a:t>Click to edit Master text styles</a:t>
             </a:r>
           </a:p>
           <a:p>
             <a:pPr lvl="1"/>
             <a:r>
-              <a:rPr lang="en-US"/>
+              <a:rPr lang="en-US" smtClean="0"/>
               <a:t>Second level</a:t>
             </a:r>
           </a:p>
           <a:p>
             <a:pPr lvl="2"/>
             <a:r>
-              <a:rPr lang="en-US"/>
+              <a:rPr lang="en-US" smtClean="0"/>
               <a:t>Third level</a:t>
             </a:r>
           </a:p>
           <a:p>
             <a:pPr lvl="3"/>
             <a:r>
-              <a:rPr lang="en-US"/>
+              <a:rPr lang="en-US" smtClean="0"/>
               <a:t>Fourth level</a:t>
             </a:r>
           </a:p>
           <a:p>
             <a:pPr lvl="4"/>
             <a:r>
-              <a:rPr lang="en-US"/>
+              <a:rPr lang="en-US" smtClean="0"/>
               <a:t>Fifth level</a:t>
             </a:r>
+            <a:endParaRPr lang="en-US"/>
           </a:p>
         </p:txBody>
       </p:sp>
@@ -661,7 +651,7 @@
           <a:p>
             <a:fld id="{5BCAD085-E8A6-8845-BD4E-CB4CCA059FC4}" type="datetimeFigureOut">
               <a:rPr lang="en-US" smtClean="0"/>
-              <a:t>4/22/2026</a:t>
+              <a:t>1/27/13</a:t>
             </a:fld>
             <a:endParaRPr lang="en-US"/>
           </a:p>
@@ -755,9 +745,10 @@
           <a:lstStyle/>
           <a:p>
             <a:r>
-              <a:rPr lang="en-US"/>
+              <a:rPr lang="en-US" smtClean="0"/>
               <a:t>Click to edit Master title style</a:t>
             </a:r>
+            <a:endParaRPr lang="en-US"/>
           </a:p>
         </p:txBody>
       </p:sp>
@@ -778,37 +769,38 @@
           <a:p>
             <a:pPr lvl="0"/>
             <a:r>
-              <a:rPr lang="en-US"/>
+              <a:rPr lang="en-US" smtClean="0"/>
               <a:t>Click to edit Master text styles</a:t>
             </a:r>
           </a:p>
           <a:p>
             <a:pPr lvl="1"/>
             <a:r>
-              <a:rPr lang="en-US"/>
+              <a:rPr lang="en-US" smtClean="0"/>
               <a:t>Second level</a:t>
             </a:r>
           </a:p>
           <a:p>
             <a:pPr lvl="2"/>
             <a:r>
-              <a:rPr lang="en-US"/>
+              <a:rPr lang="en-US" smtClean="0"/>
               <a:t>Third level</a:t>
             </a:r>
           </a:p>
           <a:p>
             <a:pPr lvl="3"/>
             <a:r>
-              <a:rPr lang="en-US"/>
+              <a:rPr lang="en-US" smtClean="0"/>
               <a:t>Fourth level</a:t>
             </a:r>
           </a:p>
           <a:p>
             <a:pPr lvl="4"/>
             <a:r>
-              <a:rPr lang="en-US"/>
+              <a:rPr lang="en-US" smtClean="0"/>
               <a:t>Fifth level</a:t>
             </a:r>
+            <a:endParaRPr lang="en-US"/>
           </a:p>
         </p:txBody>
       </p:sp>
@@ -829,7 +821,7 @@
           <a:p>
             <a:fld id="{5BCAD085-E8A6-8845-BD4E-CB4CCA059FC4}" type="datetimeFigureOut">
               <a:rPr lang="en-US" smtClean="0"/>
-              <a:t>4/22/2026</a:t>
+              <a:t>1/27/13</a:t>
             </a:fld>
             <a:endParaRPr lang="en-US"/>
           </a:p>
@@ -932,9 +924,10 @@
           </a:lstStyle>
           <a:p>
             <a:r>
-              <a:rPr lang="en-US"/>
+              <a:rPr lang="en-US" smtClean="0"/>
               <a:t>Click to edit Master title style</a:t>
             </a:r>
+            <a:endParaRPr lang="en-US"/>
           </a:p>
         </p:txBody>
       </p:sp>
@@ -1051,7 +1044,7 @@
           <a:p>
             <a:pPr lvl="0"/>
             <a:r>
-              <a:rPr lang="en-US"/>
+              <a:rPr lang="en-US" smtClean="0"/>
               <a:t>Click to edit Master text styles</a:t>
             </a:r>
           </a:p>
@@ -1074,7 +1067,7 @@
           <a:p>
             <a:fld id="{5BCAD085-E8A6-8845-BD4E-CB4CCA059FC4}" type="datetimeFigureOut">
               <a:rPr lang="en-US" smtClean="0"/>
-              <a:t>4/22/2026</a:t>
+              <a:t>1/27/13</a:t>
             </a:fld>
             <a:endParaRPr lang="en-US"/>
           </a:p>
@@ -1168,9 +1161,10 @@
           <a:lstStyle/>
           <a:p>
             <a:r>
-              <a:rPr lang="en-US"/>
+              <a:rPr lang="en-US" smtClean="0"/>
               <a:t>Click to edit Master title style</a:t>
             </a:r>
+            <a:endParaRPr lang="en-US"/>
           </a:p>
         </p:txBody>
       </p:sp>
@@ -1224,37 +1218,38 @@
           <a:p>
             <a:pPr lvl="0"/>
             <a:r>
-              <a:rPr lang="en-US"/>
+              <a:rPr lang="en-US" smtClean="0"/>
               <a:t>Click to edit Master text styles</a:t>
             </a:r>
           </a:p>
           <a:p>
             <a:pPr lvl="1"/>
             <a:r>
-              <a:rPr lang="en-US"/>
+              <a:rPr lang="en-US" smtClean="0"/>
               <a:t>Second level</a:t>
             </a:r>
           </a:p>
           <a:p>
             <a:pPr lvl="2"/>
             <a:r>
-              <a:rPr lang="en-US"/>
+              <a:rPr lang="en-US" smtClean="0"/>
               <a:t>Third level</a:t>
             </a:r>
           </a:p>
           <a:p>
             <a:pPr lvl="3"/>
             <a:r>
-              <a:rPr lang="en-US"/>
+              <a:rPr lang="en-US" smtClean="0"/>
               <a:t>Fourth level</a:t>
             </a:r>
           </a:p>
           <a:p>
             <a:pPr lvl="4"/>
             <a:r>
-              <a:rPr lang="en-US"/>
+              <a:rPr lang="en-US" smtClean="0"/>
               <a:t>Fifth level</a:t>
             </a:r>
+            <a:endParaRPr lang="en-US"/>
           </a:p>
         </p:txBody>
       </p:sp>
@@ -1308,37 +1303,38 @@
           <a:p>
             <a:pPr lvl="0"/>
             <a:r>
-              <a:rPr lang="en-US"/>
+              <a:rPr lang="en-US" smtClean="0"/>
               <a:t>Click to edit Master text styles</a:t>
             </a:r>
           </a:p>
           <a:p>
             <a:pPr lvl="1"/>
             <a:r>
-              <a:rPr lang="en-US"/>
+              <a:rPr lang="en-US" smtClean="0"/>
               <a:t>Second level</a:t>
             </a:r>
           </a:p>
           <a:p>
             <a:pPr lvl="2"/>
             <a:r>
-              <a:rPr lang="en-US"/>
+              <a:rPr lang="en-US" smtClean="0"/>
               <a:t>Third level</a:t>
             </a:r>
           </a:p>
           <a:p>
             <a:pPr lvl="3"/>
             <a:r>
-              <a:rPr lang="en-US"/>
+              <a:rPr lang="en-US" smtClean="0"/>
               <a:t>Fourth level</a:t>
             </a:r>
           </a:p>
           <a:p>
             <a:pPr lvl="4"/>
             <a:r>
-              <a:rPr lang="en-US"/>
+              <a:rPr lang="en-US" smtClean="0"/>
               <a:t>Fifth level</a:t>
             </a:r>
+            <a:endParaRPr lang="en-US"/>
           </a:p>
         </p:txBody>
       </p:sp>
@@ -1359,7 +1355,7 @@
           <a:p>
             <a:fld id="{5BCAD085-E8A6-8845-BD4E-CB4CCA059FC4}" type="datetimeFigureOut">
               <a:rPr lang="en-US" smtClean="0"/>
-              <a:t>4/22/2026</a:t>
+              <a:t>1/27/13</a:t>
             </a:fld>
             <a:endParaRPr lang="en-US"/>
           </a:p>
@@ -1457,9 +1453,10 @@
           </a:lstStyle>
           <a:p>
             <a:r>
-              <a:rPr lang="en-US"/>
+              <a:rPr lang="en-US" smtClean="0"/>
               <a:t>Click to edit Master title style</a:t>
             </a:r>
+            <a:endParaRPr lang="en-US"/>
           </a:p>
         </p:txBody>
       </p:sp>
@@ -1522,7 +1519,7 @@
           <a:p>
             <a:pPr lvl="0"/>
             <a:r>
-              <a:rPr lang="en-US"/>
+              <a:rPr lang="en-US" smtClean="0"/>
               <a:t>Click to edit Master text styles</a:t>
             </a:r>
           </a:p>
@@ -1578,37 +1575,38 @@
           <a:p>
             <a:pPr lvl="0"/>
             <a:r>
-              <a:rPr lang="en-US"/>
+              <a:rPr lang="en-US" smtClean="0"/>
               <a:t>Click to edit Master text styles</a:t>
             </a:r>
           </a:p>
           <a:p>
             <a:pPr lvl="1"/>
             <a:r>
-              <a:rPr lang="en-US"/>
+              <a:rPr lang="en-US" smtClean="0"/>
               <a:t>Second level</a:t>
             </a:r>
           </a:p>
           <a:p>
             <a:pPr lvl="2"/>
             <a:r>
-              <a:rPr lang="en-US"/>
+              <a:rPr lang="en-US" smtClean="0"/>
               <a:t>Third level</a:t>
             </a:r>
           </a:p>
           <a:p>
             <a:pPr lvl="3"/>
             <a:r>
-              <a:rPr lang="en-US"/>
+              <a:rPr lang="en-US" smtClean="0"/>
               <a:t>Fourth level</a:t>
             </a:r>
           </a:p>
           <a:p>
             <a:pPr lvl="4"/>
             <a:r>
-              <a:rPr lang="en-US"/>
+              <a:rPr lang="en-US" smtClean="0"/>
               <a:t>Fifth level</a:t>
             </a:r>
+            <a:endParaRPr lang="en-US"/>
           </a:p>
         </p:txBody>
       </p:sp>
@@ -1671,7 +1669,7 @@
           <a:p>
             <a:pPr lvl="0"/>
             <a:r>
-              <a:rPr lang="en-US"/>
+              <a:rPr lang="en-US" smtClean="0"/>
               <a:t>Click to edit Master text styles</a:t>
             </a:r>
           </a:p>
@@ -1727,37 +1725,38 @@
           <a:p>
             <a:pPr lvl="0"/>
             <a:r>
-              <a:rPr lang="en-US"/>
+              <a:rPr lang="en-US" smtClean="0"/>
               <a:t>Click to edit Master text styles</a:t>
             </a:r>
           </a:p>
           <a:p>
             <a:pPr lvl="1"/>
             <a:r>
-              <a:rPr lang="en-US"/>
+              <a:rPr lang="en-US" smtClean="0"/>
               <a:t>Second level</a:t>
             </a:r>
           </a:p>
           <a:p>
             <a:pPr lvl="2"/>
             <a:r>
-              <a:rPr lang="en-US"/>
+              <a:rPr lang="en-US" smtClean="0"/>
               <a:t>Third level</a:t>
             </a:r>
           </a:p>
           <a:p>
             <a:pPr lvl="3"/>
             <a:r>
-              <a:rPr lang="en-US"/>
+              <a:rPr lang="en-US" smtClean="0"/>
               <a:t>Fourth level</a:t>
             </a:r>
           </a:p>
           <a:p>
             <a:pPr lvl="4"/>
             <a:r>
-              <a:rPr lang="en-US"/>
+              <a:rPr lang="en-US" smtClean="0"/>
               <a:t>Fifth level</a:t>
             </a:r>
+            <a:endParaRPr lang="en-US"/>
           </a:p>
         </p:txBody>
       </p:sp>
@@ -1778,7 +1777,7 @@
           <a:p>
             <a:fld id="{5BCAD085-E8A6-8845-BD4E-CB4CCA059FC4}" type="datetimeFigureOut">
               <a:rPr lang="en-US" smtClean="0"/>
-              <a:t>4/22/2026</a:t>
+              <a:t>1/27/13</a:t>
             </a:fld>
             <a:endParaRPr lang="en-US"/>
           </a:p>
@@ -1872,9 +1871,10 @@
           <a:lstStyle/>
           <a:p>
             <a:r>
-              <a:rPr lang="en-US"/>
+              <a:rPr lang="en-US" smtClean="0"/>
               <a:t>Click to edit Master title style</a:t>
             </a:r>
+            <a:endParaRPr lang="en-US"/>
           </a:p>
         </p:txBody>
       </p:sp>
@@ -1895,7 +1895,7 @@
           <a:p>
             <a:fld id="{5BCAD085-E8A6-8845-BD4E-CB4CCA059FC4}" type="datetimeFigureOut">
               <a:rPr lang="en-US" smtClean="0"/>
-              <a:t>4/22/2026</a:t>
+              <a:t>1/27/13</a:t>
             </a:fld>
             <a:endParaRPr lang="en-US"/>
           </a:p>
@@ -1990,7 +1990,7 @@
           <a:p>
             <a:fld id="{5BCAD085-E8A6-8845-BD4E-CB4CCA059FC4}" type="datetimeFigureOut">
               <a:rPr lang="en-US" smtClean="0"/>
-              <a:t>4/22/2026</a:t>
+              <a:t>1/27/13</a:t>
             </a:fld>
             <a:endParaRPr lang="en-US"/>
           </a:p>
@@ -2093,9 +2093,10 @@
           </a:lstStyle>
           <a:p>
             <a:r>
-              <a:rPr lang="en-US"/>
+              <a:rPr lang="en-US" smtClean="0"/>
               <a:t>Click to edit Master title style</a:t>
             </a:r>
+            <a:endParaRPr lang="en-US"/>
           </a:p>
         </p:txBody>
       </p:sp>
@@ -2149,37 +2150,38 @@
           <a:p>
             <a:pPr lvl="0"/>
             <a:r>
-              <a:rPr lang="en-US"/>
+              <a:rPr lang="en-US" smtClean="0"/>
               <a:t>Click to edit Master text styles</a:t>
             </a:r>
           </a:p>
           <a:p>
             <a:pPr lvl="1"/>
             <a:r>
-              <a:rPr lang="en-US"/>
+              <a:rPr lang="en-US" smtClean="0"/>
               <a:t>Second level</a:t>
             </a:r>
           </a:p>
           <a:p>
             <a:pPr lvl="2"/>
             <a:r>
-              <a:rPr lang="en-US"/>
+              <a:rPr lang="en-US" smtClean="0"/>
               <a:t>Third level</a:t>
             </a:r>
           </a:p>
           <a:p>
             <a:pPr lvl="3"/>
             <a:r>
-              <a:rPr lang="en-US"/>
+              <a:rPr lang="en-US" smtClean="0"/>
               <a:t>Fourth level</a:t>
             </a:r>
           </a:p>
           <a:p>
             <a:pPr lvl="4"/>
             <a:r>
-              <a:rPr lang="en-US"/>
+              <a:rPr lang="en-US" smtClean="0"/>
               <a:t>Fifth level</a:t>
             </a:r>
+            <a:endParaRPr lang="en-US"/>
           </a:p>
         </p:txBody>
       </p:sp>
@@ -2242,7 +2244,7 @@
           <a:p>
             <a:pPr lvl="0"/>
             <a:r>
-              <a:rPr lang="en-US"/>
+              <a:rPr lang="en-US" smtClean="0"/>
               <a:t>Click to edit Master text styles</a:t>
             </a:r>
           </a:p>
@@ -2265,7 +2267,7 @@
           <a:p>
             <a:fld id="{5BCAD085-E8A6-8845-BD4E-CB4CCA059FC4}" type="datetimeFigureOut">
               <a:rPr lang="en-US" smtClean="0"/>
-              <a:t>4/22/2026</a:t>
+              <a:t>1/27/13</a:t>
             </a:fld>
             <a:endParaRPr lang="en-US"/>
           </a:p>
@@ -2368,9 +2370,10 @@
           </a:lstStyle>
           <a:p>
             <a:r>
-              <a:rPr lang="en-US"/>
+              <a:rPr lang="en-US" smtClean="0"/>
               <a:t>Click to edit Master title style</a:t>
             </a:r>
+            <a:endParaRPr lang="en-US"/>
           </a:p>
         </p:txBody>
       </p:sp>
@@ -2494,7 +2497,7 @@
           <a:p>
             <a:pPr lvl="0"/>
             <a:r>
-              <a:rPr lang="en-US"/>
+              <a:rPr lang="en-US" smtClean="0"/>
               <a:t>Click to edit Master text styles</a:t>
             </a:r>
           </a:p>
@@ -2517,7 +2520,7 @@
           <a:p>
             <a:fld id="{5BCAD085-E8A6-8845-BD4E-CB4CCA059FC4}" type="datetimeFigureOut">
               <a:rPr lang="en-US" smtClean="0"/>
-              <a:t>4/22/2026</a:t>
+              <a:t>1/27/13</a:t>
             </a:fld>
             <a:endParaRPr lang="en-US"/>
           </a:p>
@@ -2626,9 +2629,10 @@
           <a:lstStyle/>
           <a:p>
             <a:r>
-              <a:rPr lang="en-US"/>
+              <a:rPr lang="en-US" smtClean="0"/>
               <a:t>Click to edit Master title style</a:t>
             </a:r>
+            <a:endParaRPr lang="en-US"/>
           </a:p>
         </p:txBody>
       </p:sp>
@@ -2659,37 +2663,38 @@
           <a:p>
             <a:pPr lvl="0"/>
             <a:r>
-              <a:rPr lang="en-US"/>
+              <a:rPr lang="en-US" smtClean="0"/>
               <a:t>Click to edit Master text styles</a:t>
             </a:r>
           </a:p>
           <a:p>
             <a:pPr lvl="1"/>
             <a:r>
-              <a:rPr lang="en-US"/>
+              <a:rPr lang="en-US" smtClean="0"/>
               <a:t>Second level</a:t>
             </a:r>
           </a:p>
           <a:p>
             <a:pPr lvl="2"/>
             <a:r>
-              <a:rPr lang="en-US"/>
+              <a:rPr lang="en-US" smtClean="0"/>
               <a:t>Third level</a:t>
             </a:r>
           </a:p>
           <a:p>
             <a:pPr lvl="3"/>
             <a:r>
-              <a:rPr lang="en-US"/>
+              <a:rPr lang="en-US" smtClean="0"/>
               <a:t>Fourth level</a:t>
             </a:r>
           </a:p>
           <a:p>
             <a:pPr lvl="4"/>
             <a:r>
-              <a:rPr lang="en-US"/>
+              <a:rPr lang="en-US" smtClean="0"/>
               <a:t>Fifth level</a:t>
             </a:r>
+            <a:endParaRPr lang="en-US"/>
           </a:p>
         </p:txBody>
       </p:sp>
@@ -2728,7 +2733,7 @@
           <a:p>
             <a:fld id="{5BCAD085-E8A6-8845-BD4E-CB4CCA059FC4}" type="datetimeFigureOut">
               <a:rPr lang="en-US" smtClean="0"/>
-              <a:t>4/22/2026</a:t>
+              <a:t>1/27/13</a:t>
             </a:fld>
             <a:endParaRPr lang="en-US"/>
           </a:p>
@@ -3087,7 +3092,7 @@
 </file>
 
 <file path=ppt/slides/slide1.xml><?xml version="1.0" encoding="utf-8"?>
-<p:sld xmlns:a="http://schemas.openxmlformats.org/drawingml/2006/main" xmlns:r="http://schemas.openxmlformats.org/officeDocument/2006/relationships" xmlns:p="http://schemas.openxmlformats.org/presentationml/2006/main">
+<p:sld xmlns:a="http://schemas.openxmlformats.org/drawingml/2006/main" xmlns:p="http://schemas.openxmlformats.org/presentationml/2006/main" xmlns:r="http://schemas.openxmlformats.org/officeDocument/2006/relationships">
   <p:cSld>
     <p:spTree>
       <p:nvGrpSpPr>
@@ -3095,14 +3100,7 @@
         <p:cNvGrpSpPr/>
         <p:nvPr/>
       </p:nvGrpSpPr>
-      <p:grpSpPr>
-        <a:xfrm>
-          <a:off x="0" y="0"/>
-          <a:ext cx="0" cy="0"/>
-          <a:chOff x="0" y="0"/>
-          <a:chExt cx="0" cy="0"/>
-        </a:xfrm>
-      </p:grpSpPr>
+      <p:grpSpPr/>
       <p:sp>
         <p:nvSpPr>
           <p:cNvPr id="2" name="Rectangle 1"/>
@@ -3143,7 +3141,6 @@
           <a:lstStyle/>
           <a:p>
             <a:pPr algn="ctr"/>
-            <a:endParaRPr/>
           </a:p>
         </p:txBody>
       </p:sp>
@@ -3187,7 +3184,6 @@
           <a:lstStyle/>
           <a:p>
             <a:pPr algn="ctr"/>
-            <a:endParaRPr/>
           </a:p>
         </p:txBody>
       </p:sp>
@@ -3199,7 +3195,7 @@
         </p:nvSpPr>
         <p:spPr>
           <a:xfrm>
-            <a:off x="922283" y="1379483"/>
+            <a:off x="914400" y="1371600"/>
             <a:ext cx="10360152" cy="4114800"/>
           </a:xfrm>
           <a:prstGeom prst="rect">
@@ -3231,7 +3227,6 @@
           <a:lstStyle/>
           <a:p>
             <a:pPr algn="ctr"/>
-            <a:endParaRPr/>
           </a:p>
         </p:txBody>
       </p:sp>
@@ -3382,7 +3377,7 @@
 </file>
 
 <file path=ppt/slides/slide10.xml><?xml version="1.0" encoding="utf-8"?>
-<p:sld xmlns:a="http://schemas.openxmlformats.org/drawingml/2006/main" xmlns:r="http://schemas.openxmlformats.org/officeDocument/2006/relationships" xmlns:p="http://schemas.openxmlformats.org/presentationml/2006/main">
+<p:sld xmlns:a="http://schemas.openxmlformats.org/drawingml/2006/main" xmlns:p="http://schemas.openxmlformats.org/presentationml/2006/main" xmlns:r="http://schemas.openxmlformats.org/officeDocument/2006/relationships">
   <p:cSld>
     <p:spTree>
       <p:nvGrpSpPr>
@@ -3390,14 +3385,7 @@
         <p:cNvGrpSpPr/>
         <p:nvPr/>
       </p:nvGrpSpPr>
-      <p:grpSpPr>
-        <a:xfrm>
-          <a:off x="0" y="0"/>
-          <a:ext cx="0" cy="0"/>
-          <a:chOff x="0" y="0"/>
-          <a:chExt cx="0" cy="0"/>
-        </a:xfrm>
-      </p:grpSpPr>
+      <p:grpSpPr/>
       <p:sp>
         <p:nvSpPr>
           <p:cNvPr id="2" name="Rectangle 1"/>
@@ -3438,7 +3426,6 @@
           <a:lstStyle/>
           <a:p>
             <a:pPr algn="ctr"/>
-            <a:endParaRPr/>
           </a:p>
         </p:txBody>
       </p:sp>
@@ -3482,7 +3469,6 @@
           <a:lstStyle/>
           <a:p>
             <a:pPr algn="ctr"/>
-            <a:endParaRPr/>
           </a:p>
         </p:txBody>
       </p:sp>
@@ -3594,7 +3580,6 @@
           <a:lstStyle/>
           <a:p>
             <a:pPr algn="ctr"/>
-            <a:endParaRPr/>
           </a:p>
         </p:txBody>
       </p:sp>
@@ -3661,7 +3646,7 @@
                   <a:srgbClr val="FFFFFF"/>
                 </a:solidFill>
               </a:rPr>
-              <a:t>0.7522</a:t>
+              <a:t>0.7518</a:t>
             </a:r>
           </a:p>
         </p:txBody>
@@ -3706,7 +3691,6 @@
           <a:lstStyle/>
           <a:p>
             <a:pPr algn="ctr"/>
-            <a:endParaRPr/>
           </a:p>
         </p:txBody>
       </p:sp>
@@ -3773,7 +3757,7 @@
                   <a:srgbClr val="FFFFFF"/>
                 </a:solidFill>
               </a:rPr>
-              <a:t>[0.726 – 0.777]</a:t>
+              <a:t>[0.7268 – 0.7778]</a:t>
             </a:r>
           </a:p>
         </p:txBody>
@@ -3818,7 +3802,6 @@
           <a:lstStyle/>
           <a:p>
             <a:pPr algn="ctr"/>
-            <a:endParaRPr/>
           </a:p>
         </p:txBody>
       </p:sp>
@@ -3885,7 +3868,7 @@
                   <a:srgbClr val="FFFFFF"/>
                 </a:solidFill>
               </a:rPr>
-              <a:t>0.708</a:t>
+              <a:t>0.7075</a:t>
             </a:r>
           </a:p>
         </p:txBody>
@@ -3930,7 +3913,6 @@
           <a:lstStyle/>
           <a:p>
             <a:pPr algn="ctr"/>
-            <a:endParaRPr/>
           </a:p>
         </p:txBody>
       </p:sp>
@@ -3997,7 +3979,7 @@
                   <a:srgbClr val="FFFFFF"/>
                 </a:solidFill>
               </a:rPr>
-              <a:t>0.680</a:t>
+              <a:t>0.6803</a:t>
             </a:r>
           </a:p>
         </p:txBody>
@@ -4042,7 +4024,6 @@
           <a:lstStyle/>
           <a:p>
             <a:pPr algn="ctr"/>
-            <a:endParaRPr/>
           </a:p>
         </p:txBody>
       </p:sp>
@@ -4109,7 +4090,7 @@
                   <a:srgbClr val="FFFFFF"/>
                 </a:solidFill>
               </a:rPr>
-              <a:t>0.410 / 0.881</a:t>
+              <a:t>0.4101 / 0.8810</a:t>
             </a:r>
           </a:p>
         </p:txBody>
@@ -4154,7 +4135,6 @@
           <a:lstStyle/>
           <a:p>
             <a:pPr algn="ctr"/>
-            <a:endParaRPr/>
           </a:p>
         </p:txBody>
       </p:sp>
@@ -4279,27 +4259,9 @@
                 <a:tableStyleId>{5C22544A-7EE6-4342-B048-85BDC9FD1C3A}</a:tableStyleId>
               </a:tblPr>
               <a:tblGrid>
-                <a:gridCol w="2133600">
-                  <a:extLst>
-                    <a:ext uri="{9D8B030D-6E8A-4147-A177-3AD203B41FA5}">
-                      <a16:colId xmlns:a16="http://schemas.microsoft.com/office/drawing/2014/main" val="20000"/>
-                    </a:ext>
-                  </a:extLst>
-                </a:gridCol>
-                <a:gridCol w="2133600">
-                  <a:extLst>
-                    <a:ext uri="{9D8B030D-6E8A-4147-A177-3AD203B41FA5}">
-                      <a16:colId xmlns:a16="http://schemas.microsoft.com/office/drawing/2014/main" val="20001"/>
-                    </a:ext>
-                  </a:extLst>
-                </a:gridCol>
-                <a:gridCol w="2133600">
-                  <a:extLst>
-                    <a:ext uri="{9D8B030D-6E8A-4147-A177-3AD203B41FA5}">
-                      <a16:colId xmlns:a16="http://schemas.microsoft.com/office/drawing/2014/main" val="20002"/>
-                    </a:ext>
-                  </a:extLst>
-                </a:gridCol>
+                <a:gridCol w="2133600"/>
+                <a:gridCol w="2133600"/>
+                <a:gridCol w="2133600"/>
               </a:tblGrid>
               <a:tr h="377190">
                 <a:tc>
@@ -4309,7 +4271,7 @@
                     <a:p>
                       <a:pPr algn="ctr"/>
                       <a:r>
-                        <a:rPr sz="1100" b="1">
+                        <a:rPr b="1" sz="1100">
                           <a:solidFill>
                             <a:srgbClr val="FFFFFF"/>
                           </a:solidFill>
@@ -4331,7 +4293,7 @@
                     <a:p>
                       <a:pPr algn="ctr"/>
                       <a:r>
-                        <a:rPr sz="1100" b="1">
+                        <a:rPr b="1" sz="1100">
                           <a:solidFill>
                             <a:srgbClr val="FFFFFF"/>
                           </a:solidFill>
@@ -4353,7 +4315,7 @@
                     <a:p>
                       <a:pPr algn="ctr"/>
                       <a:r>
-                        <a:rPr sz="1100" b="1">
+                        <a:rPr b="1" sz="1100">
                           <a:solidFill>
                             <a:srgbClr val="FFFFFF"/>
                           </a:solidFill>
@@ -4368,11 +4330,6 @@
                     </a:solidFill>
                   </a:tcPr>
                 </a:tc>
-                <a:extLst>
-                  <a:ext uri="{0D108BD9-81ED-4DB2-BD59-A6C34878D82A}">
-                    <a16:rowId xmlns:a16="http://schemas.microsoft.com/office/drawing/2014/main" val="10000"/>
-                  </a:ext>
-                </a:extLst>
               </a:tr>
               <a:tr h="377190">
                 <a:tc>
@@ -4441,11 +4398,6 @@
                     </a:solidFill>
                   </a:tcPr>
                 </a:tc>
-                <a:extLst>
-                  <a:ext uri="{0D108BD9-81ED-4DB2-BD59-A6C34878D82A}">
-                    <a16:rowId xmlns:a16="http://schemas.microsoft.com/office/drawing/2014/main" val="10001"/>
-                  </a:ext>
-                </a:extLst>
               </a:tr>
               <a:tr h="377190">
                 <a:tc>
@@ -4514,11 +4466,6 @@
                     </a:solidFill>
                   </a:tcPr>
                 </a:tc>
-                <a:extLst>
-                  <a:ext uri="{0D108BD9-81ED-4DB2-BD59-A6C34878D82A}">
-                    <a16:rowId xmlns:a16="http://schemas.microsoft.com/office/drawing/2014/main" val="10002"/>
-                  </a:ext>
-                </a:extLst>
               </a:tr>
               <a:tr h="377190">
                 <a:tc>
@@ -4587,11 +4534,6 @@
                     </a:solidFill>
                   </a:tcPr>
                 </a:tc>
-                <a:extLst>
-                  <a:ext uri="{0D108BD9-81ED-4DB2-BD59-A6C34878D82A}">
-                    <a16:rowId xmlns:a16="http://schemas.microsoft.com/office/drawing/2014/main" val="10003"/>
-                  </a:ext>
-                </a:extLst>
               </a:tr>
             </a:tbl>
           </a:graphicData>
@@ -4722,7 +4664,7 @@
 </file>
 
 <file path=ppt/slides/slide11.xml><?xml version="1.0" encoding="utf-8"?>
-<p:sld xmlns:a="http://schemas.openxmlformats.org/drawingml/2006/main" xmlns:r="http://schemas.openxmlformats.org/officeDocument/2006/relationships" xmlns:p="http://schemas.openxmlformats.org/presentationml/2006/main">
+<p:sld xmlns:a="http://schemas.openxmlformats.org/drawingml/2006/main" xmlns:p="http://schemas.openxmlformats.org/presentationml/2006/main" xmlns:r="http://schemas.openxmlformats.org/officeDocument/2006/relationships">
   <p:cSld>
     <p:spTree>
       <p:nvGrpSpPr>
@@ -4730,14 +4672,7 @@
         <p:cNvGrpSpPr/>
         <p:nvPr/>
       </p:nvGrpSpPr>
-      <p:grpSpPr>
-        <a:xfrm>
-          <a:off x="0" y="0"/>
-          <a:ext cx="0" cy="0"/>
-          <a:chOff x="0" y="0"/>
-          <a:chExt cx="0" cy="0"/>
-        </a:xfrm>
-      </p:grpSpPr>
+      <p:grpSpPr/>
       <p:sp>
         <p:nvSpPr>
           <p:cNvPr id="2" name="Rectangle 1"/>
@@ -4778,7 +4713,6 @@
           <a:lstStyle/>
           <a:p>
             <a:pPr algn="ctr"/>
-            <a:endParaRPr/>
           </a:p>
         </p:txBody>
       </p:sp>
@@ -4822,7 +4756,6 @@
           <a:lstStyle/>
           <a:p>
             <a:pPr algn="ctr"/>
-            <a:endParaRPr/>
           </a:p>
         </p:txBody>
       </p:sp>
@@ -4913,48 +4846,12 @@
                 <a:tableStyleId>{5C22544A-7EE6-4342-B048-85BDC9FD1C3A}</a:tableStyleId>
               </a:tblPr>
               <a:tblGrid>
-                <a:gridCol w="1920240">
-                  <a:extLst>
-                    <a:ext uri="{9D8B030D-6E8A-4147-A177-3AD203B41FA5}">
-                      <a16:colId xmlns:a16="http://schemas.microsoft.com/office/drawing/2014/main" val="20000"/>
-                    </a:ext>
-                  </a:extLst>
-                </a:gridCol>
-                <a:gridCol w="1920240">
-                  <a:extLst>
-                    <a:ext uri="{9D8B030D-6E8A-4147-A177-3AD203B41FA5}">
-                      <a16:colId xmlns:a16="http://schemas.microsoft.com/office/drawing/2014/main" val="20001"/>
-                    </a:ext>
-                  </a:extLst>
-                </a:gridCol>
-                <a:gridCol w="1920240">
-                  <a:extLst>
-                    <a:ext uri="{9D8B030D-6E8A-4147-A177-3AD203B41FA5}">
-                      <a16:colId xmlns:a16="http://schemas.microsoft.com/office/drawing/2014/main" val="20002"/>
-                    </a:ext>
-                  </a:extLst>
-                </a:gridCol>
-                <a:gridCol w="1920240">
-                  <a:extLst>
-                    <a:ext uri="{9D8B030D-6E8A-4147-A177-3AD203B41FA5}">
-                      <a16:colId xmlns:a16="http://schemas.microsoft.com/office/drawing/2014/main" val="20003"/>
-                    </a:ext>
-                  </a:extLst>
-                </a:gridCol>
-                <a:gridCol w="1920240">
-                  <a:extLst>
-                    <a:ext uri="{9D8B030D-6E8A-4147-A177-3AD203B41FA5}">
-                      <a16:colId xmlns:a16="http://schemas.microsoft.com/office/drawing/2014/main" val="20004"/>
-                    </a:ext>
-                  </a:extLst>
-                </a:gridCol>
-                <a:gridCol w="1920240">
-                  <a:extLst>
-                    <a:ext uri="{9D8B030D-6E8A-4147-A177-3AD203B41FA5}">
-                      <a16:colId xmlns:a16="http://schemas.microsoft.com/office/drawing/2014/main" val="20005"/>
-                    </a:ext>
-                  </a:extLst>
-                </a:gridCol>
+                <a:gridCol w="1920240"/>
+                <a:gridCol w="1920240"/>
+                <a:gridCol w="1920240"/>
+                <a:gridCol w="1920240"/>
+                <a:gridCol w="1920240"/>
+                <a:gridCol w="1920240"/>
               </a:tblGrid>
               <a:tr h="420624">
                 <a:tc>
@@ -4964,7 +4861,7 @@
                     <a:p>
                       <a:pPr algn="ctr"/>
                       <a:r>
-                        <a:rPr sz="1200" b="1">
+                        <a:rPr b="1" sz="1200">
                           <a:solidFill>
                             <a:srgbClr val="FFFFFF"/>
                           </a:solidFill>
@@ -4986,7 +4883,7 @@
                     <a:p>
                       <a:pPr algn="ctr"/>
                       <a:r>
-                        <a:rPr sz="1200" b="1">
+                        <a:rPr b="1" sz="1200">
                           <a:solidFill>
                             <a:srgbClr val="FFFFFF"/>
                           </a:solidFill>
@@ -5013,7 +4910,7 @@
                     <a:p>
                       <a:pPr algn="ctr"/>
                       <a:r>
-                        <a:rPr sz="1200" b="1">
+                        <a:rPr b="1" sz="1200">
                           <a:solidFill>
                             <a:srgbClr val="FFFFFF"/>
                           </a:solidFill>
@@ -5040,7 +4937,7 @@
                     <a:p>
                       <a:pPr algn="ctr"/>
                       <a:r>
-                        <a:rPr sz="1200" b="1">
+                        <a:rPr b="1" sz="1200">
                           <a:solidFill>
                             <a:srgbClr val="FFFFFF"/>
                           </a:solidFill>
@@ -5067,7 +4964,7 @@
                     <a:p>
                       <a:pPr algn="ctr"/>
                       <a:r>
-                        <a:rPr sz="1200" b="1">
+                        <a:rPr b="1" sz="1200">
                           <a:solidFill>
                             <a:srgbClr val="FFFFFF"/>
                           </a:solidFill>
@@ -5089,7 +4986,7 @@
                     <a:p>
                       <a:pPr algn="ctr"/>
                       <a:r>
-                        <a:rPr sz="1200" b="1">
+                        <a:rPr b="1" sz="1200">
                           <a:solidFill>
                             <a:srgbClr val="FFFFFF"/>
                           </a:solidFill>
@@ -5104,11 +5001,6 @@
                     </a:solidFill>
                   </a:tcPr>
                 </a:tc>
-                <a:extLst>
-                  <a:ext uri="{0D108BD9-81ED-4DB2-BD59-A6C34878D82A}">
-                    <a16:rowId xmlns:a16="http://schemas.microsoft.com/office/drawing/2014/main" val="10000"/>
-                  </a:ext>
-                </a:extLst>
               </a:tr>
               <a:tr h="420624">
                 <a:tc>
@@ -5243,11 +5135,6 @@
                     </a:solidFill>
                   </a:tcPr>
                 </a:tc>
-                <a:extLst>
-                  <a:ext uri="{0D108BD9-81ED-4DB2-BD59-A6C34878D82A}">
-                    <a16:rowId xmlns:a16="http://schemas.microsoft.com/office/drawing/2014/main" val="10001"/>
-                  </a:ext>
-                </a:extLst>
               </a:tr>
               <a:tr h="420624">
                 <a:tc>
@@ -5382,11 +5269,6 @@
                     </a:solidFill>
                   </a:tcPr>
                 </a:tc>
-                <a:extLst>
-                  <a:ext uri="{0D108BD9-81ED-4DB2-BD59-A6C34878D82A}">
-                    <a16:rowId xmlns:a16="http://schemas.microsoft.com/office/drawing/2014/main" val="10002"/>
-                  </a:ext>
-                </a:extLst>
               </a:tr>
               <a:tr h="420624">
                 <a:tc>
@@ -5423,7 +5305,7 @@
                             <a:srgbClr val="1A1A2E"/>
                           </a:solidFill>
                         </a:rPr>
-                        <a:t>20.43</a:t>
+                        <a:t>20.4337</a:t>
                       </a:r>
                     </a:p>
                   </a:txBody>
@@ -5445,7 +5327,7 @@
                             <a:srgbClr val="1A1A2E"/>
                           </a:solidFill>
                         </a:rPr>
-                        <a:t>18.40</a:t>
+                        <a:t>18.3967</a:t>
                       </a:r>
                     </a:p>
                   </a:txBody>
@@ -5467,7 +5349,7 @@
                             <a:srgbClr val="1A1A2E"/>
                           </a:solidFill>
                         </a:rPr>
-                        <a:t>17.83</a:t>
+                        <a:t>17.8295</a:t>
                       </a:r>
                     </a:p>
                   </a:txBody>
@@ -5521,11 +5403,6 @@
                     </a:solidFill>
                   </a:tcPr>
                 </a:tc>
-                <a:extLst>
-                  <a:ext uri="{0D108BD9-81ED-4DB2-BD59-A6C34878D82A}">
-                    <a16:rowId xmlns:a16="http://schemas.microsoft.com/office/drawing/2014/main" val="10003"/>
-                  </a:ext>
-                </a:extLst>
               </a:tr>
               <a:tr h="420624">
                 <a:tc>
@@ -5562,7 +5439,7 @@
                             <a:srgbClr val="1A1A2E"/>
                           </a:solidFill>
                         </a:rPr>
-                        <a:t>14,849</a:t>
+                        <a:t>14849.28</a:t>
                       </a:r>
                     </a:p>
                   </a:txBody>
@@ -5584,7 +5461,7 @@
                             <a:srgbClr val="1A1A2E"/>
                           </a:solidFill>
                         </a:rPr>
-                        <a:t>14,508</a:t>
+                        <a:t>14507.89</a:t>
                       </a:r>
                     </a:p>
                   </a:txBody>
@@ -5606,7 +5483,7 @@
                             <a:srgbClr val="1A1A2E"/>
                           </a:solidFill>
                         </a:rPr>
-                        <a:t>14,463</a:t>
+                        <a:t>14463.11</a:t>
                       </a:r>
                     </a:p>
                   </a:txBody>
@@ -5660,11 +5537,6 @@
                     </a:solidFill>
                   </a:tcPr>
                 </a:tc>
-                <a:extLst>
-                  <a:ext uri="{0D108BD9-81ED-4DB2-BD59-A6C34878D82A}">
-                    <a16:rowId xmlns:a16="http://schemas.microsoft.com/office/drawing/2014/main" val="10004"/>
-                  </a:ext>
-                </a:extLst>
               </a:tr>
             </a:tbl>
           </a:graphicData>
@@ -5829,7 +5701,7 @@
 </file>
 
 <file path=ppt/slides/slide12.xml><?xml version="1.0" encoding="utf-8"?>
-<p:sld xmlns:a="http://schemas.openxmlformats.org/drawingml/2006/main" xmlns:r="http://schemas.openxmlformats.org/officeDocument/2006/relationships" xmlns:p="http://schemas.openxmlformats.org/presentationml/2006/main">
+<p:sld xmlns:a="http://schemas.openxmlformats.org/drawingml/2006/main" xmlns:p="http://schemas.openxmlformats.org/presentationml/2006/main" xmlns:r="http://schemas.openxmlformats.org/officeDocument/2006/relationships">
   <p:cSld>
     <p:spTree>
       <p:nvGrpSpPr>
@@ -5837,14 +5709,7 @@
         <p:cNvGrpSpPr/>
         <p:nvPr/>
       </p:nvGrpSpPr>
-      <p:grpSpPr>
-        <a:xfrm>
-          <a:off x="0" y="0"/>
-          <a:ext cx="0" cy="0"/>
-          <a:chOff x="0" y="0"/>
-          <a:chExt cx="0" cy="0"/>
-        </a:xfrm>
-      </p:grpSpPr>
+      <p:grpSpPr/>
       <p:sp>
         <p:nvSpPr>
           <p:cNvPr id="2" name="Rectangle 1"/>
@@ -5885,7 +5750,6 @@
           <a:lstStyle/>
           <a:p>
             <a:pPr algn="ctr"/>
-            <a:endParaRPr/>
           </a:p>
         </p:txBody>
       </p:sp>
@@ -5929,7 +5793,6 @@
           <a:lstStyle/>
           <a:p>
             <a:pPr algn="ctr"/>
-            <a:endParaRPr/>
           </a:p>
         </p:txBody>
       </p:sp>
@@ -6020,48 +5883,12 @@
                 <a:tableStyleId>{5C22544A-7EE6-4342-B048-85BDC9FD1C3A}</a:tableStyleId>
               </a:tblPr>
               <a:tblGrid>
-                <a:gridCol w="1920240">
-                  <a:extLst>
-                    <a:ext uri="{9D8B030D-6E8A-4147-A177-3AD203B41FA5}">
-                      <a16:colId xmlns:a16="http://schemas.microsoft.com/office/drawing/2014/main" val="20000"/>
-                    </a:ext>
-                  </a:extLst>
-                </a:gridCol>
-                <a:gridCol w="1920240">
-                  <a:extLst>
-                    <a:ext uri="{9D8B030D-6E8A-4147-A177-3AD203B41FA5}">
-                      <a16:colId xmlns:a16="http://schemas.microsoft.com/office/drawing/2014/main" val="20001"/>
-                    </a:ext>
-                  </a:extLst>
-                </a:gridCol>
-                <a:gridCol w="1920240">
-                  <a:extLst>
-                    <a:ext uri="{9D8B030D-6E8A-4147-A177-3AD203B41FA5}">
-                      <a16:colId xmlns:a16="http://schemas.microsoft.com/office/drawing/2014/main" val="20002"/>
-                    </a:ext>
-                  </a:extLst>
-                </a:gridCol>
-                <a:gridCol w="1920240">
-                  <a:extLst>
-                    <a:ext uri="{9D8B030D-6E8A-4147-A177-3AD203B41FA5}">
-                      <a16:colId xmlns:a16="http://schemas.microsoft.com/office/drawing/2014/main" val="20003"/>
-                    </a:ext>
-                  </a:extLst>
-                </a:gridCol>
-                <a:gridCol w="1920240">
-                  <a:extLst>
-                    <a:ext uri="{9D8B030D-6E8A-4147-A177-3AD203B41FA5}">
-                      <a16:colId xmlns:a16="http://schemas.microsoft.com/office/drawing/2014/main" val="20004"/>
-                    </a:ext>
-                  </a:extLst>
-                </a:gridCol>
-                <a:gridCol w="1920240">
-                  <a:extLst>
-                    <a:ext uri="{9D8B030D-6E8A-4147-A177-3AD203B41FA5}">
-                      <a16:colId xmlns:a16="http://schemas.microsoft.com/office/drawing/2014/main" val="20005"/>
-                    </a:ext>
-                  </a:extLst>
-                </a:gridCol>
+                <a:gridCol w="1920240"/>
+                <a:gridCol w="1920240"/>
+                <a:gridCol w="1920240"/>
+                <a:gridCol w="1920240"/>
+                <a:gridCol w="1920240"/>
+                <a:gridCol w="1920240"/>
               </a:tblGrid>
               <a:tr h="420624">
                 <a:tc>
@@ -6071,7 +5898,7 @@
                     <a:p>
                       <a:pPr algn="ctr"/>
                       <a:r>
-                        <a:rPr sz="1200" b="1">
+                        <a:rPr b="1" sz="1200">
                           <a:solidFill>
                             <a:srgbClr val="FFFFFF"/>
                           </a:solidFill>
@@ -6093,7 +5920,7 @@
                     <a:p>
                       <a:pPr algn="ctr"/>
                       <a:r>
-                        <a:rPr sz="1200" b="1">
+                        <a:rPr b="1" sz="1200">
                           <a:solidFill>
                             <a:srgbClr val="FFFFFF"/>
                           </a:solidFill>
@@ -6120,7 +5947,7 @@
                     <a:p>
                       <a:pPr algn="ctr"/>
                       <a:r>
-                        <a:rPr sz="1200" b="1">
+                        <a:rPr b="1" sz="1200">
                           <a:solidFill>
                             <a:srgbClr val="FFFFFF"/>
                           </a:solidFill>
@@ -6147,7 +5974,7 @@
                     <a:p>
                       <a:pPr algn="ctr"/>
                       <a:r>
-                        <a:rPr sz="1200" b="1">
+                        <a:rPr b="1" sz="1200">
                           <a:solidFill>
                             <a:srgbClr val="FFFFFF"/>
                           </a:solidFill>
@@ -6174,7 +6001,7 @@
                     <a:p>
                       <a:pPr algn="ctr"/>
                       <a:r>
-                        <a:rPr sz="1200" b="1">
+                        <a:rPr b="1" sz="1200">
                           <a:solidFill>
                             <a:srgbClr val="FFFFFF"/>
                           </a:solidFill>
@@ -6196,7 +6023,7 @@
                     <a:p>
                       <a:pPr algn="ctr"/>
                       <a:r>
-                        <a:rPr sz="1200" b="1">
+                        <a:rPr b="1" sz="1200">
                           <a:solidFill>
                             <a:srgbClr val="FFFFFF"/>
                           </a:solidFill>
@@ -6211,11 +6038,6 @@
                     </a:solidFill>
                   </a:tcPr>
                 </a:tc>
-                <a:extLst>
-                  <a:ext uri="{0D108BD9-81ED-4DB2-BD59-A6C34878D82A}">
-                    <a16:rowId xmlns:a16="http://schemas.microsoft.com/office/drawing/2014/main" val="10000"/>
-                  </a:ext>
-                </a:extLst>
               </a:tr>
               <a:tr h="420624">
                 <a:tc>
@@ -6274,7 +6096,7 @@
                             <a:srgbClr val="1A1A2E"/>
                           </a:solidFill>
                         </a:rPr>
-                        <a:t>0.720</a:t>
+                        <a:t>0.7196</a:t>
                       </a:r>
                     </a:p>
                   </a:txBody>
@@ -6296,7 +6118,7 @@
                             <a:srgbClr val="1A1A2E"/>
                           </a:solidFill>
                         </a:rPr>
-                        <a:t>0.7522</a:t>
+                        <a:t>0.7518</a:t>
                       </a:r>
                     </a:p>
                   </a:txBody>
@@ -6350,11 +6172,6 @@
                     </a:solidFill>
                   </a:tcPr>
                 </a:tc>
-                <a:extLst>
-                  <a:ext uri="{0D108BD9-81ED-4DB2-BD59-A6C34878D82A}">
-                    <a16:rowId xmlns:a16="http://schemas.microsoft.com/office/drawing/2014/main" val="10001"/>
-                  </a:ext>
-                </a:extLst>
               </a:tr>
               <a:tr h="420624">
                 <a:tc>
@@ -6489,11 +6306,6 @@
                     </a:solidFill>
                   </a:tcPr>
                 </a:tc>
-                <a:extLst>
-                  <a:ext uri="{0D108BD9-81ED-4DB2-BD59-A6C34878D82A}">
-                    <a16:rowId xmlns:a16="http://schemas.microsoft.com/office/drawing/2014/main" val="10002"/>
-                  </a:ext>
-                </a:extLst>
               </a:tr>
               <a:tr h="420624">
                 <a:tc>
@@ -6530,7 +6342,7 @@
                             <a:srgbClr val="1A1A2E"/>
                           </a:solidFill>
                         </a:rPr>
-                        <a:t>1,788</a:t>
+                        <a:t>1787.8</a:t>
                       </a:r>
                     </a:p>
                   </a:txBody>
@@ -6552,7 +6364,7 @@
                             <a:srgbClr val="1A1A2E"/>
                           </a:solidFill>
                         </a:rPr>
-                        <a:t>1,668</a:t>
+                        <a:t>1668.07</a:t>
                       </a:r>
                     </a:p>
                   </a:txBody>
@@ -6574,7 +6386,7 @@
                             <a:srgbClr val="1A1A2E"/>
                           </a:solidFill>
                         </a:rPr>
-                        <a:t>1,658</a:t>
+                        <a:t>1658.03</a:t>
                       </a:r>
                     </a:p>
                   </a:txBody>
@@ -6628,11 +6440,6 @@
                     </a:solidFill>
                   </a:tcPr>
                 </a:tc>
-                <a:extLst>
-                  <a:ext uri="{0D108BD9-81ED-4DB2-BD59-A6C34878D82A}">
-                    <a16:rowId xmlns:a16="http://schemas.microsoft.com/office/drawing/2014/main" val="10003"/>
-                  </a:ext>
-                </a:extLst>
               </a:tr>
               <a:tr h="420624">
                 <a:tc>
@@ -6767,11 +6574,6 @@
                     </a:solidFill>
                   </a:tcPr>
                 </a:tc>
-                <a:extLst>
-                  <a:ext uri="{0D108BD9-81ED-4DB2-BD59-A6C34878D82A}">
-                    <a16:rowId xmlns:a16="http://schemas.microsoft.com/office/drawing/2014/main" val="10004"/>
-                  </a:ext>
-                </a:extLst>
               </a:tr>
             </a:tbl>
           </a:graphicData>
@@ -6936,7 +6738,7 @@
 </file>
 
 <file path=ppt/slides/slide13.xml><?xml version="1.0" encoding="utf-8"?>
-<p:sld xmlns:a="http://schemas.openxmlformats.org/drawingml/2006/main" xmlns:r="http://schemas.openxmlformats.org/officeDocument/2006/relationships" xmlns:p="http://schemas.openxmlformats.org/presentationml/2006/main">
+<p:sld xmlns:a="http://schemas.openxmlformats.org/drawingml/2006/main" xmlns:p="http://schemas.openxmlformats.org/presentationml/2006/main" xmlns:r="http://schemas.openxmlformats.org/officeDocument/2006/relationships">
   <p:cSld>
     <p:spTree>
       <p:nvGrpSpPr>
@@ -6944,14 +6746,7 @@
         <p:cNvGrpSpPr/>
         <p:nvPr/>
       </p:nvGrpSpPr>
-      <p:grpSpPr>
-        <a:xfrm>
-          <a:off x="0" y="0"/>
-          <a:ext cx="0" cy="0"/>
-          <a:chOff x="0" y="0"/>
-          <a:chExt cx="0" cy="0"/>
-        </a:xfrm>
-      </p:grpSpPr>
+      <p:grpSpPr/>
       <p:sp>
         <p:nvSpPr>
           <p:cNvPr id="2" name="Rectangle 1"/>
@@ -6992,7 +6787,6 @@
           <a:lstStyle/>
           <a:p>
             <a:pPr algn="ctr"/>
-            <a:endParaRPr/>
           </a:p>
         </p:txBody>
       </p:sp>
@@ -7036,7 +6830,6 @@
           <a:lstStyle/>
           <a:p>
             <a:pPr algn="ctr"/>
-            <a:endParaRPr/>
           </a:p>
         </p:txBody>
       </p:sp>
@@ -7148,7 +6941,6 @@
           <a:lstStyle/>
           <a:p>
             <a:pPr algn="ctr"/>
-            <a:endParaRPr/>
           </a:p>
         </p:txBody>
       </p:sp>
@@ -7192,7 +6984,6 @@
           <a:lstStyle/>
           <a:p>
             <a:pPr algn="ctr"/>
-            <a:endParaRPr/>
           </a:p>
         </p:txBody>
       </p:sp>
@@ -7304,7 +7095,6 @@
           <a:lstStyle/>
           <a:p>
             <a:pPr algn="ctr"/>
-            <a:endParaRPr/>
           </a:p>
         </p:txBody>
       </p:sp>
@@ -7348,7 +7138,6 @@
           <a:lstStyle/>
           <a:p>
             <a:pPr algn="ctr"/>
-            <a:endParaRPr/>
           </a:p>
         </p:txBody>
       </p:sp>
@@ -7461,7 +7250,6 @@
           <a:lstStyle/>
           <a:p>
             <a:pPr algn="ctr"/>
-            <a:endParaRPr/>
           </a:p>
         </p:txBody>
       </p:sp>
@@ -7505,7 +7293,6 @@
           <a:lstStyle/>
           <a:p>
             <a:pPr algn="ctr"/>
-            <a:endParaRPr/>
           </a:p>
         </p:txBody>
       </p:sp>
@@ -7618,7 +7405,6 @@
           <a:lstStyle/>
           <a:p>
             <a:pPr algn="ctr"/>
-            <a:endParaRPr/>
           </a:p>
         </p:txBody>
       </p:sp>
@@ -7662,7 +7448,6 @@
           <a:lstStyle/>
           <a:p>
             <a:pPr algn="ctr"/>
-            <a:endParaRPr/>
           </a:p>
         </p:txBody>
       </p:sp>
@@ -7730,7 +7515,7 @@
                 </a:solidFill>
               </a:rPr>
               <a:t>선형: R²=0.6579, RMSE=17.83 cm²
-로지스틱: AUC=0.7522 [0.726–0.777]  |  HL p=0.825 (보정도 양호)</a:t>
+로지스틱: AUC=0.7518 [0.7268 – 0.7778]  |  HL p=0.825 (보정도 양호)</a:t>
             </a:r>
           </a:p>
         </p:txBody>
@@ -7778,7 +7563,7 @@
 </file>
 
 <file path=ppt/slides/slide14.xml><?xml version="1.0" encoding="utf-8"?>
-<p:sld xmlns:a="http://schemas.openxmlformats.org/drawingml/2006/main" xmlns:r="http://schemas.openxmlformats.org/officeDocument/2006/relationships" xmlns:p="http://schemas.openxmlformats.org/presentationml/2006/main">
+<p:sld xmlns:a="http://schemas.openxmlformats.org/drawingml/2006/main" xmlns:p="http://schemas.openxmlformats.org/presentationml/2006/main" xmlns:r="http://schemas.openxmlformats.org/officeDocument/2006/relationships">
   <p:cSld>
     <p:spTree>
       <p:nvGrpSpPr>
@@ -7786,14 +7571,7 @@
         <p:cNvGrpSpPr/>
         <p:nvPr/>
       </p:nvGrpSpPr>
-      <p:grpSpPr>
-        <a:xfrm>
-          <a:off x="0" y="0"/>
-          <a:ext cx="0" cy="0"/>
-          <a:chOff x="0" y="0"/>
-          <a:chExt cx="0" cy="0"/>
-        </a:xfrm>
-      </p:grpSpPr>
+      <p:grpSpPr/>
       <p:sp>
         <p:nvSpPr>
           <p:cNvPr id="2" name="Rectangle 1"/>
@@ -7834,7 +7612,6 @@
           <a:lstStyle/>
           <a:p>
             <a:pPr algn="ctr"/>
-            <a:endParaRPr/>
           </a:p>
         </p:txBody>
       </p:sp>
@@ -7878,7 +7655,6 @@
           <a:lstStyle/>
           <a:p>
             <a:pPr algn="ctr"/>
-            <a:endParaRPr/>
           </a:p>
         </p:txBody>
       </p:sp>
@@ -7992,7 +7768,6 @@
           <a:lstStyle/>
           <a:p>
             <a:pPr algn="ctr"/>
-            <a:endParaRPr/>
           </a:p>
         </p:txBody>
       </p:sp>
@@ -8208,7 +7983,6 @@
           <a:lstStyle/>
           <a:p>
             <a:pPr algn="ctr"/>
-            <a:endParaRPr/>
           </a:p>
         </p:txBody>
       </p:sp>
@@ -8456,7 +8230,6 @@
           <a:lstStyle/>
           <a:p>
             <a:pPr algn="ctr"/>
-            <a:endParaRPr/>
           </a:p>
         </p:txBody>
       </p:sp>
@@ -8538,7 +8311,7 @@
 </file>
 
 <file path=ppt/slides/slide2.xml><?xml version="1.0" encoding="utf-8"?>
-<p:sld xmlns:a="http://schemas.openxmlformats.org/drawingml/2006/main" xmlns:r="http://schemas.openxmlformats.org/officeDocument/2006/relationships" xmlns:p="http://schemas.openxmlformats.org/presentationml/2006/main">
+<p:sld xmlns:a="http://schemas.openxmlformats.org/drawingml/2006/main" xmlns:p="http://schemas.openxmlformats.org/presentationml/2006/main" xmlns:r="http://schemas.openxmlformats.org/officeDocument/2006/relationships">
   <p:cSld>
     <p:spTree>
       <p:nvGrpSpPr>
@@ -8546,14 +8319,7 @@
         <p:cNvGrpSpPr/>
         <p:nvPr/>
       </p:nvGrpSpPr>
-      <p:grpSpPr>
-        <a:xfrm>
-          <a:off x="0" y="0"/>
-          <a:ext cx="0" cy="0"/>
-          <a:chOff x="0" y="0"/>
-          <a:chExt cx="0" cy="0"/>
-        </a:xfrm>
-      </p:grpSpPr>
+      <p:grpSpPr/>
       <p:sp>
         <p:nvSpPr>
           <p:cNvPr id="2" name="Rectangle 1"/>
@@ -8594,7 +8360,6 @@
           <a:lstStyle/>
           <a:p>
             <a:pPr algn="ctr"/>
-            <a:endParaRPr/>
           </a:p>
         </p:txBody>
       </p:sp>
@@ -8638,7 +8403,6 @@
           <a:lstStyle/>
           <a:p>
             <a:pPr algn="ctr"/>
-            <a:endParaRPr/>
           </a:p>
         </p:txBody>
       </p:sp>
@@ -8750,7 +8514,6 @@
           <a:lstStyle/>
           <a:p>
             <a:pPr algn="ctr"/>
-            <a:endParaRPr/>
           </a:p>
         </p:txBody>
       </p:sp>
@@ -8896,7 +8659,6 @@
           <a:lstStyle/>
           <a:p>
             <a:pPr algn="ctr"/>
-            <a:endParaRPr/>
           </a:p>
         </p:txBody>
       </p:sp>
@@ -9042,7 +8804,6 @@
           <a:lstStyle/>
           <a:p>
             <a:pPr algn="ctr"/>
-            <a:endParaRPr/>
           </a:p>
         </p:txBody>
       </p:sp>
@@ -9188,7 +8949,6 @@
           <a:lstStyle/>
           <a:p>
             <a:pPr algn="ctr"/>
-            <a:endParaRPr/>
           </a:p>
         </p:txBody>
       </p:sp>
@@ -9334,7 +9094,6 @@
           <a:lstStyle/>
           <a:p>
             <a:pPr algn="ctr"/>
-            <a:endParaRPr/>
           </a:p>
         </p:txBody>
       </p:sp>
@@ -9480,7 +9239,6 @@
           <a:lstStyle/>
           <a:p>
             <a:pPr algn="ctr"/>
-            <a:endParaRPr/>
           </a:p>
         </p:txBody>
       </p:sp>
@@ -9626,7 +9384,6 @@
           <a:lstStyle/>
           <a:p>
             <a:pPr algn="ctr"/>
-            <a:endParaRPr/>
           </a:p>
         </p:txBody>
       </p:sp>
@@ -9741,7 +9498,7 @@
 </file>
 
 <file path=ppt/slides/slide3.xml><?xml version="1.0" encoding="utf-8"?>
-<p:sld xmlns:a="http://schemas.openxmlformats.org/drawingml/2006/main" xmlns:r="http://schemas.openxmlformats.org/officeDocument/2006/relationships" xmlns:p="http://schemas.openxmlformats.org/presentationml/2006/main">
+<p:sld xmlns:a="http://schemas.openxmlformats.org/drawingml/2006/main" xmlns:p="http://schemas.openxmlformats.org/presentationml/2006/main" xmlns:r="http://schemas.openxmlformats.org/officeDocument/2006/relationships">
   <p:cSld>
     <p:spTree>
       <p:nvGrpSpPr>
@@ -9749,14 +9506,7 @@
         <p:cNvGrpSpPr/>
         <p:nvPr/>
       </p:nvGrpSpPr>
-      <p:grpSpPr>
-        <a:xfrm>
-          <a:off x="0" y="0"/>
-          <a:ext cx="0" cy="0"/>
-          <a:chOff x="0" y="0"/>
-          <a:chExt cx="0" cy="0"/>
-        </a:xfrm>
-      </p:grpSpPr>
+      <p:grpSpPr/>
       <p:sp>
         <p:nvSpPr>
           <p:cNvPr id="2" name="Rectangle 1"/>
@@ -9797,7 +9547,6 @@
           <a:lstStyle/>
           <a:p>
             <a:pPr algn="ctr"/>
-            <a:endParaRPr/>
           </a:p>
         </p:txBody>
       </p:sp>
@@ -9841,7 +9590,6 @@
           <a:lstStyle/>
           <a:p>
             <a:pPr algn="ctr"/>
-            <a:endParaRPr/>
           </a:p>
         </p:txBody>
       </p:sp>
@@ -9953,7 +9701,6 @@
           <a:lstStyle/>
           <a:p>
             <a:pPr algn="ctr"/>
-            <a:endParaRPr/>
           </a:p>
         </p:txBody>
       </p:sp>
@@ -10067,7 +9814,6 @@
           <a:lstStyle/>
           <a:p>
             <a:pPr algn="ctr"/>
-            <a:endParaRPr/>
           </a:p>
         </p:txBody>
       </p:sp>
@@ -10216,7 +9962,6 @@
           <a:lstStyle/>
           <a:p>
             <a:pPr algn="ctr"/>
-            <a:endParaRPr/>
           </a:p>
         </p:txBody>
       </p:sp>
@@ -10365,7 +10110,6 @@
           <a:lstStyle/>
           <a:p>
             <a:pPr algn="ctr"/>
-            <a:endParaRPr/>
           </a:p>
         </p:txBody>
       </p:sp>
@@ -10525,20 +10269,8 @@
                 <a:tableStyleId>{5C22544A-7EE6-4342-B048-85BDC9FD1C3A}</a:tableStyleId>
               </a:tblPr>
               <a:tblGrid>
-                <a:gridCol w="5760720">
-                  <a:extLst>
-                    <a:ext uri="{9D8B030D-6E8A-4147-A177-3AD203B41FA5}">
-                      <a16:colId xmlns:a16="http://schemas.microsoft.com/office/drawing/2014/main" val="20000"/>
-                    </a:ext>
-                  </a:extLst>
-                </a:gridCol>
-                <a:gridCol w="5760720">
-                  <a:extLst>
-                    <a:ext uri="{9D8B030D-6E8A-4147-A177-3AD203B41FA5}">
-                      <a16:colId xmlns:a16="http://schemas.microsoft.com/office/drawing/2014/main" val="20001"/>
-                    </a:ext>
-                  </a:extLst>
-                </a:gridCol>
+                <a:gridCol w="5760720"/>
+                <a:gridCol w="5760720"/>
               </a:tblGrid>
               <a:tr h="434340">
                 <a:tc>
@@ -10548,7 +10280,7 @@
                     <a:p>
                       <a:pPr algn="ctr"/>
                       <a:r>
-                        <a:rPr sz="1100" b="1">
+                        <a:rPr b="1" sz="1100">
                           <a:solidFill>
                             <a:srgbClr val="FFFFFF"/>
                           </a:solidFill>
@@ -10570,7 +10302,7 @@
                     <a:p>
                       <a:pPr algn="ctr"/>
                       <a:r>
-                        <a:rPr sz="1100" b="1">
+                        <a:rPr b="1" sz="1100">
                           <a:solidFill>
                             <a:srgbClr val="FFFFFF"/>
                           </a:solidFill>
@@ -10585,11 +10317,6 @@
                     </a:solidFill>
                   </a:tcPr>
                 </a:tc>
-                <a:extLst>
-                  <a:ext uri="{0D108BD9-81ED-4DB2-BD59-A6C34878D82A}">
-                    <a16:rowId xmlns:a16="http://schemas.microsoft.com/office/drawing/2014/main" val="10000"/>
-                  </a:ext>
-                </a:extLst>
               </a:tr>
               <a:tr h="434340">
                 <a:tc>
@@ -10636,11 +10363,6 @@
                     </a:solidFill>
                   </a:tcPr>
                 </a:tc>
-                <a:extLst>
-                  <a:ext uri="{0D108BD9-81ED-4DB2-BD59-A6C34878D82A}">
-                    <a16:rowId xmlns:a16="http://schemas.microsoft.com/office/drawing/2014/main" val="10001"/>
-                  </a:ext>
-                </a:extLst>
               </a:tr>
               <a:tr h="434340">
                 <a:tc>
@@ -10687,11 +10409,6 @@
                     </a:solidFill>
                   </a:tcPr>
                 </a:tc>
-                <a:extLst>
-                  <a:ext uri="{0D108BD9-81ED-4DB2-BD59-A6C34878D82A}">
-                    <a16:rowId xmlns:a16="http://schemas.microsoft.com/office/drawing/2014/main" val="10002"/>
-                  </a:ext>
-                </a:extLst>
               </a:tr>
               <a:tr h="434340">
                 <a:tc>
@@ -10738,11 +10455,6 @@
                     </a:solidFill>
                   </a:tcPr>
                 </a:tc>
-                <a:extLst>
-                  <a:ext uri="{0D108BD9-81ED-4DB2-BD59-A6C34878D82A}">
-                    <a16:rowId xmlns:a16="http://schemas.microsoft.com/office/drawing/2014/main" val="10003"/>
-                  </a:ext>
-                </a:extLst>
               </a:tr>
             </a:tbl>
           </a:graphicData>
@@ -10757,7 +10469,7 @@
 </file>
 
 <file path=ppt/slides/slide4.xml><?xml version="1.0" encoding="utf-8"?>
-<p:sld xmlns:a="http://schemas.openxmlformats.org/drawingml/2006/main" xmlns:r="http://schemas.openxmlformats.org/officeDocument/2006/relationships" xmlns:p="http://schemas.openxmlformats.org/presentationml/2006/main">
+<p:sld xmlns:a="http://schemas.openxmlformats.org/drawingml/2006/main" xmlns:p="http://schemas.openxmlformats.org/presentationml/2006/main" xmlns:r="http://schemas.openxmlformats.org/officeDocument/2006/relationships">
   <p:cSld>
     <p:spTree>
       <p:nvGrpSpPr>
@@ -10765,14 +10477,7 @@
         <p:cNvGrpSpPr/>
         <p:nvPr/>
       </p:nvGrpSpPr>
-      <p:grpSpPr>
-        <a:xfrm>
-          <a:off x="0" y="0"/>
-          <a:ext cx="0" cy="0"/>
-          <a:chOff x="0" y="0"/>
-          <a:chExt cx="0" cy="0"/>
-        </a:xfrm>
-      </p:grpSpPr>
+      <p:grpSpPr/>
       <p:sp>
         <p:nvSpPr>
           <p:cNvPr id="2" name="Rectangle 1"/>
@@ -10813,7 +10518,6 @@
           <a:lstStyle/>
           <a:p>
             <a:pPr algn="ctr"/>
-            <a:endParaRPr/>
           </a:p>
         </p:txBody>
       </p:sp>
@@ -10857,7 +10561,6 @@
           <a:lstStyle/>
           <a:p>
             <a:pPr algn="ctr"/>
-            <a:endParaRPr/>
           </a:p>
         </p:txBody>
       </p:sp>
@@ -10971,7 +10674,6 @@
           <a:lstStyle/>
           <a:p>
             <a:pPr algn="ctr"/>
-            <a:endParaRPr/>
           </a:p>
         </p:txBody>
       </p:sp>
@@ -11085,7 +10787,6 @@
           <a:lstStyle/>
           <a:p>
             <a:pPr algn="ctr"/>
-            <a:endParaRPr/>
           </a:p>
         </p:txBody>
       </p:sp>
@@ -11199,7 +10900,6 @@
           <a:lstStyle/>
           <a:p>
             <a:pPr algn="ctr"/>
-            <a:endParaRPr/>
           </a:p>
         </p:txBody>
       </p:sp>
@@ -11313,7 +11013,6 @@
           <a:lstStyle/>
           <a:p>
             <a:pPr algn="ctr"/>
-            <a:endParaRPr/>
           </a:p>
         </p:txBody>
       </p:sp>
@@ -11427,7 +11126,6 @@
           <a:lstStyle/>
           <a:p>
             <a:pPr algn="ctr"/>
-            <a:endParaRPr/>
           </a:p>
         </p:txBody>
       </p:sp>
@@ -11541,7 +11239,6 @@
           <a:lstStyle/>
           <a:p>
             <a:pPr algn="ctr"/>
-            <a:endParaRPr/>
           </a:p>
         </p:txBody>
       </p:sp>
@@ -11666,55 +11363,13 @@
                 <a:tableStyleId>{5C22544A-7EE6-4342-B048-85BDC9FD1C3A}</a:tableStyleId>
               </a:tblPr>
               <a:tblGrid>
-                <a:gridCol w="979714">
-                  <a:extLst>
-                    <a:ext uri="{9D8B030D-6E8A-4147-A177-3AD203B41FA5}">
-                      <a16:colId xmlns:a16="http://schemas.microsoft.com/office/drawing/2014/main" val="20000"/>
-                    </a:ext>
-                  </a:extLst>
-                </a:gridCol>
-                <a:gridCol w="979714">
-                  <a:extLst>
-                    <a:ext uri="{9D8B030D-6E8A-4147-A177-3AD203B41FA5}">
-                      <a16:colId xmlns:a16="http://schemas.microsoft.com/office/drawing/2014/main" val="20001"/>
-                    </a:ext>
-                  </a:extLst>
-                </a:gridCol>
-                <a:gridCol w="979714">
-                  <a:extLst>
-                    <a:ext uri="{9D8B030D-6E8A-4147-A177-3AD203B41FA5}">
-                      <a16:colId xmlns:a16="http://schemas.microsoft.com/office/drawing/2014/main" val="20002"/>
-                    </a:ext>
-                  </a:extLst>
-                </a:gridCol>
-                <a:gridCol w="979714">
-                  <a:extLst>
-                    <a:ext uri="{9D8B030D-6E8A-4147-A177-3AD203B41FA5}">
-                      <a16:colId xmlns:a16="http://schemas.microsoft.com/office/drawing/2014/main" val="20003"/>
-                    </a:ext>
-                  </a:extLst>
-                </a:gridCol>
-                <a:gridCol w="979714">
-                  <a:extLst>
-                    <a:ext uri="{9D8B030D-6E8A-4147-A177-3AD203B41FA5}">
-                      <a16:colId xmlns:a16="http://schemas.microsoft.com/office/drawing/2014/main" val="20004"/>
-                    </a:ext>
-                  </a:extLst>
-                </a:gridCol>
-                <a:gridCol w="979714">
-                  <a:extLst>
-                    <a:ext uri="{9D8B030D-6E8A-4147-A177-3AD203B41FA5}">
-                      <a16:colId xmlns:a16="http://schemas.microsoft.com/office/drawing/2014/main" val="20005"/>
-                    </a:ext>
-                  </a:extLst>
-                </a:gridCol>
-                <a:gridCol w="979714">
-                  <a:extLst>
-                    <a:ext uri="{9D8B030D-6E8A-4147-A177-3AD203B41FA5}">
-                      <a16:colId xmlns:a16="http://schemas.microsoft.com/office/drawing/2014/main" val="20006"/>
-                    </a:ext>
-                  </a:extLst>
-                </a:gridCol>
+                <a:gridCol w="979714"/>
+                <a:gridCol w="979714"/>
+                <a:gridCol w="979714"/>
+                <a:gridCol w="979714"/>
+                <a:gridCol w="979714"/>
+                <a:gridCol w="979714"/>
+                <a:gridCol w="979714"/>
               </a:tblGrid>
               <a:tr h="411480">
                 <a:tc>
@@ -11724,7 +11379,7 @@
                     <a:p>
                       <a:pPr algn="ctr"/>
                       <a:r>
-                        <a:rPr sz="1100" b="1">
+                        <a:rPr b="1" sz="1100">
                           <a:solidFill>
                             <a:srgbClr val="FFFFFF"/>
                           </a:solidFill>
@@ -11746,7 +11401,7 @@
                     <a:p>
                       <a:pPr algn="ctr"/>
                       <a:r>
-                        <a:rPr sz="1100" b="1">
+                        <a:rPr b="1" sz="1100">
                           <a:solidFill>
                             <a:srgbClr val="FFFFFF"/>
                           </a:solidFill>
@@ -11768,7 +11423,7 @@
                     <a:p>
                       <a:pPr algn="ctr"/>
                       <a:r>
-                        <a:rPr sz="1100" b="1">
+                        <a:rPr b="1" sz="1100">
                           <a:solidFill>
                             <a:srgbClr val="FFFFFF"/>
                           </a:solidFill>
@@ -11790,7 +11445,7 @@
                     <a:p>
                       <a:pPr algn="ctr"/>
                       <a:r>
-                        <a:rPr sz="1100" b="1">
+                        <a:rPr b="1" sz="1100">
                           <a:solidFill>
                             <a:srgbClr val="FFFFFF"/>
                           </a:solidFill>
@@ -11812,7 +11467,7 @@
                     <a:p>
                       <a:pPr algn="ctr"/>
                       <a:r>
-                        <a:rPr sz="1100" b="1">
+                        <a:rPr b="1" sz="1100">
                           <a:solidFill>
                             <a:srgbClr val="FFFFFF"/>
                           </a:solidFill>
@@ -11834,7 +11489,7 @@
                     <a:p>
                       <a:pPr algn="ctr"/>
                       <a:r>
-                        <a:rPr sz="1100" b="1">
+                        <a:rPr b="1" sz="1100">
                           <a:solidFill>
                             <a:srgbClr val="FFFFFF"/>
                           </a:solidFill>
@@ -11856,7 +11511,7 @@
                     <a:p>
                       <a:pPr algn="ctr"/>
                       <a:r>
-                        <a:rPr sz="1100" b="1">
+                        <a:rPr b="1" sz="1100">
                           <a:solidFill>
                             <a:srgbClr val="FFFFFF"/>
                           </a:solidFill>
@@ -11871,11 +11526,6 @@
                     </a:solidFill>
                   </a:tcPr>
                 </a:tc>
-                <a:extLst>
-                  <a:ext uri="{0D108BD9-81ED-4DB2-BD59-A6C34878D82A}">
-                    <a16:rowId xmlns:a16="http://schemas.microsoft.com/office/drawing/2014/main" val="10000"/>
-                  </a:ext>
-                </a:extLst>
               </a:tr>
               <a:tr h="411480">
                 <a:tc>
@@ -12032,11 +11682,6 @@
                     </a:solidFill>
                   </a:tcPr>
                 </a:tc>
-                <a:extLst>
-                  <a:ext uri="{0D108BD9-81ED-4DB2-BD59-A6C34878D82A}">
-                    <a16:rowId xmlns:a16="http://schemas.microsoft.com/office/drawing/2014/main" val="10001"/>
-                  </a:ext>
-                </a:extLst>
               </a:tr>
               <a:tr h="411480">
                 <a:tc>
@@ -12073,7 +11718,7 @@
                             <a:srgbClr val="1A1A2E"/>
                           </a:solidFill>
                         </a:rPr>
-                        <a:t>1,008</a:t>
+                        <a:t>1008</a:t>
                       </a:r>
                     </a:p>
                   </a:txBody>
@@ -12193,11 +11838,6 @@
                     </a:solidFill>
                   </a:tcPr>
                 </a:tc>
-                <a:extLst>
-                  <a:ext uri="{0D108BD9-81ED-4DB2-BD59-A6C34878D82A}">
-                    <a16:rowId xmlns:a16="http://schemas.microsoft.com/office/drawing/2014/main" val="10002"/>
-                  </a:ext>
-                </a:extLst>
               </a:tr>
             </a:tbl>
           </a:graphicData>
@@ -12243,7 +11883,6 @@
           <a:lstStyle/>
           <a:p>
             <a:pPr algn="ctr"/>
-            <a:endParaRPr/>
           </a:p>
         </p:txBody>
       </p:sp>
@@ -12442,7 +12081,7 @@
 </file>
 
 <file path=ppt/slides/slide5.xml><?xml version="1.0" encoding="utf-8"?>
-<p:sld xmlns:a="http://schemas.openxmlformats.org/drawingml/2006/main" xmlns:r="http://schemas.openxmlformats.org/officeDocument/2006/relationships" xmlns:p="http://schemas.openxmlformats.org/presentationml/2006/main">
+<p:sld xmlns:a="http://schemas.openxmlformats.org/drawingml/2006/main" xmlns:p="http://schemas.openxmlformats.org/presentationml/2006/main" xmlns:r="http://schemas.openxmlformats.org/officeDocument/2006/relationships">
   <p:cSld>
     <p:spTree>
       <p:nvGrpSpPr>
@@ -12450,14 +12089,7 @@
         <p:cNvGrpSpPr/>
         <p:nvPr/>
       </p:nvGrpSpPr>
-      <p:grpSpPr>
-        <a:xfrm>
-          <a:off x="0" y="0"/>
-          <a:ext cx="0" cy="0"/>
-          <a:chOff x="0" y="0"/>
-          <a:chExt cx="0" cy="0"/>
-        </a:xfrm>
-      </p:grpSpPr>
+      <p:grpSpPr/>
       <p:sp>
         <p:nvSpPr>
           <p:cNvPr id="2" name="Rectangle 1"/>
@@ -12498,7 +12130,6 @@
           <a:lstStyle/>
           <a:p>
             <a:pPr algn="ctr"/>
-            <a:endParaRPr/>
           </a:p>
         </p:txBody>
       </p:sp>
@@ -12542,7 +12173,6 @@
           <a:lstStyle/>
           <a:p>
             <a:pPr algn="ctr"/>
-            <a:endParaRPr/>
           </a:p>
         </p:txBody>
       </p:sp>
@@ -12667,41 +12297,11 @@
                 <a:tableStyleId>{5C22544A-7EE6-4342-B048-85BDC9FD1C3A}</a:tableStyleId>
               </a:tblPr>
               <a:tblGrid>
-                <a:gridCol w="2304288">
-                  <a:extLst>
-                    <a:ext uri="{9D8B030D-6E8A-4147-A177-3AD203B41FA5}">
-                      <a16:colId xmlns:a16="http://schemas.microsoft.com/office/drawing/2014/main" val="20000"/>
-                    </a:ext>
-                  </a:extLst>
-                </a:gridCol>
-                <a:gridCol w="2304288">
-                  <a:extLst>
-                    <a:ext uri="{9D8B030D-6E8A-4147-A177-3AD203B41FA5}">
-                      <a16:colId xmlns:a16="http://schemas.microsoft.com/office/drawing/2014/main" val="20001"/>
-                    </a:ext>
-                  </a:extLst>
-                </a:gridCol>
-                <a:gridCol w="2304288">
-                  <a:extLst>
-                    <a:ext uri="{9D8B030D-6E8A-4147-A177-3AD203B41FA5}">
-                      <a16:colId xmlns:a16="http://schemas.microsoft.com/office/drawing/2014/main" val="20002"/>
-                    </a:ext>
-                  </a:extLst>
-                </a:gridCol>
-                <a:gridCol w="2304288">
-                  <a:extLst>
-                    <a:ext uri="{9D8B030D-6E8A-4147-A177-3AD203B41FA5}">
-                      <a16:colId xmlns:a16="http://schemas.microsoft.com/office/drawing/2014/main" val="20003"/>
-                    </a:ext>
-                  </a:extLst>
-                </a:gridCol>
-                <a:gridCol w="2304288">
-                  <a:extLst>
-                    <a:ext uri="{9D8B030D-6E8A-4147-A177-3AD203B41FA5}">
-                      <a16:colId xmlns:a16="http://schemas.microsoft.com/office/drawing/2014/main" val="20004"/>
-                    </a:ext>
-                  </a:extLst>
-                </a:gridCol>
+                <a:gridCol w="2304288"/>
+                <a:gridCol w="2304288"/>
+                <a:gridCol w="2304288"/>
+                <a:gridCol w="2304288"/>
+                <a:gridCol w="2304288"/>
               </a:tblGrid>
               <a:tr h="339634">
                 <a:tc>
@@ -12711,7 +12311,7 @@
                     <a:p>
                       <a:pPr algn="ctr"/>
                       <a:r>
-                        <a:rPr sz="1100" b="1">
+                        <a:rPr b="1" sz="1100">
                           <a:solidFill>
                             <a:srgbClr val="FFFFFF"/>
                           </a:solidFill>
@@ -12733,7 +12333,7 @@
                     <a:p>
                       <a:pPr algn="ctr"/>
                       <a:r>
-                        <a:rPr sz="1100" b="1">
+                        <a:rPr b="1" sz="1100">
                           <a:solidFill>
                             <a:srgbClr val="FFFFFF"/>
                           </a:solidFill>
@@ -12755,7 +12355,7 @@
                     <a:p>
                       <a:pPr algn="ctr"/>
                       <a:r>
-                        <a:rPr sz="1100" b="1">
+                        <a:rPr b="1" sz="1100">
                           <a:solidFill>
                             <a:srgbClr val="FFFFFF"/>
                           </a:solidFill>
@@ -12777,7 +12377,7 @@
                     <a:p>
                       <a:pPr algn="ctr"/>
                       <a:r>
-                        <a:rPr sz="1100" b="1">
+                        <a:rPr b="1" sz="1100">
                           <a:solidFill>
                             <a:srgbClr val="FFFFFF"/>
                           </a:solidFill>
@@ -12799,7 +12399,7 @@
                     <a:p>
                       <a:pPr algn="ctr"/>
                       <a:r>
-                        <a:rPr sz="1100" b="1">
+                        <a:rPr b="1" sz="1100">
                           <a:solidFill>
                             <a:srgbClr val="FFFFFF"/>
                           </a:solidFill>
@@ -12814,11 +12414,6 @@
                     </a:solidFill>
                   </a:tcPr>
                 </a:tc>
-                <a:extLst>
-                  <a:ext uri="{0D108BD9-81ED-4DB2-BD59-A6C34878D82A}">
-                    <a16:rowId xmlns:a16="http://schemas.microsoft.com/office/drawing/2014/main" val="10000"/>
-                  </a:ext>
-                </a:extLst>
               </a:tr>
               <a:tr h="339634">
                 <a:tc>
@@ -12931,11 +12526,6 @@
                     </a:solidFill>
                   </a:tcPr>
                 </a:tc>
-                <a:extLst>
-                  <a:ext uri="{0D108BD9-81ED-4DB2-BD59-A6C34878D82A}">
-                    <a16:rowId xmlns:a16="http://schemas.microsoft.com/office/drawing/2014/main" val="10001"/>
-                  </a:ext>
-                </a:extLst>
               </a:tr>
               <a:tr h="339634">
                 <a:tc>
@@ -13048,11 +12638,6 @@
                     </a:solidFill>
                   </a:tcPr>
                 </a:tc>
-                <a:extLst>
-                  <a:ext uri="{0D108BD9-81ED-4DB2-BD59-A6C34878D82A}">
-                    <a16:rowId xmlns:a16="http://schemas.microsoft.com/office/drawing/2014/main" val="10002"/>
-                  </a:ext>
-                </a:extLst>
               </a:tr>
               <a:tr h="339634">
                 <a:tc>
@@ -13165,11 +12750,6 @@
                     </a:solidFill>
                   </a:tcPr>
                 </a:tc>
-                <a:extLst>
-                  <a:ext uri="{0D108BD9-81ED-4DB2-BD59-A6C34878D82A}">
-                    <a16:rowId xmlns:a16="http://schemas.microsoft.com/office/drawing/2014/main" val="10003"/>
-                  </a:ext>
-                </a:extLst>
               </a:tr>
               <a:tr h="339634">
                 <a:tc>
@@ -13282,11 +12862,6 @@
                     </a:solidFill>
                   </a:tcPr>
                 </a:tc>
-                <a:extLst>
-                  <a:ext uri="{0D108BD9-81ED-4DB2-BD59-A6C34878D82A}">
-                    <a16:rowId xmlns:a16="http://schemas.microsoft.com/office/drawing/2014/main" val="10004"/>
-                  </a:ext>
-                </a:extLst>
               </a:tr>
               <a:tr h="339634">
                 <a:tc>
@@ -13399,11 +12974,6 @@
                     </a:solidFill>
                   </a:tcPr>
                 </a:tc>
-                <a:extLst>
-                  <a:ext uri="{0D108BD9-81ED-4DB2-BD59-A6C34878D82A}">
-                    <a16:rowId xmlns:a16="http://schemas.microsoft.com/office/drawing/2014/main" val="10005"/>
-                  </a:ext>
-                </a:extLst>
               </a:tr>
               <a:tr h="339636">
                 <a:tc>
@@ -13516,11 +13086,6 @@
                     </a:solidFill>
                   </a:tcPr>
                 </a:tc>
-                <a:extLst>
-                  <a:ext uri="{0D108BD9-81ED-4DB2-BD59-A6C34878D82A}">
-                    <a16:rowId xmlns:a16="http://schemas.microsoft.com/office/drawing/2014/main" val="10006"/>
-                  </a:ext>
-                </a:extLst>
               </a:tr>
             </a:tbl>
           </a:graphicData>
@@ -13685,7 +13250,7 @@
 </file>
 
 <file path=ppt/slides/slide6.xml><?xml version="1.0" encoding="utf-8"?>
-<p:sld xmlns:a="http://schemas.openxmlformats.org/drawingml/2006/main" xmlns:r="http://schemas.openxmlformats.org/officeDocument/2006/relationships" xmlns:p="http://schemas.openxmlformats.org/presentationml/2006/main">
+<p:sld xmlns:a="http://schemas.openxmlformats.org/drawingml/2006/main" xmlns:p="http://schemas.openxmlformats.org/presentationml/2006/main" xmlns:r="http://schemas.openxmlformats.org/officeDocument/2006/relationships">
   <p:cSld>
     <p:spTree>
       <p:nvGrpSpPr>
@@ -13693,14 +13258,7 @@
         <p:cNvGrpSpPr/>
         <p:nvPr/>
       </p:nvGrpSpPr>
-      <p:grpSpPr>
-        <a:xfrm>
-          <a:off x="0" y="0"/>
-          <a:ext cx="0" cy="0"/>
-          <a:chOff x="0" y="0"/>
-          <a:chExt cx="0" cy="0"/>
-        </a:xfrm>
-      </p:grpSpPr>
+      <p:grpSpPr/>
       <p:sp>
         <p:nvSpPr>
           <p:cNvPr id="2" name="Rectangle 1"/>
@@ -13741,7 +13299,6 @@
           <a:lstStyle/>
           <a:p>
             <a:pPr algn="ctr"/>
-            <a:endParaRPr/>
           </a:p>
         </p:txBody>
       </p:sp>
@@ -13785,7 +13342,6 @@
           <a:lstStyle/>
           <a:p>
             <a:pPr algn="ctr"/>
-            <a:endParaRPr/>
           </a:p>
         </p:txBody>
       </p:sp>
@@ -13910,20 +13466,8 @@
                 <a:tableStyleId>{5C22544A-7EE6-4342-B048-85BDC9FD1C3A}</a:tableStyleId>
               </a:tblPr>
               <a:tblGrid>
-                <a:gridCol w="2743200">
-                  <a:extLst>
-                    <a:ext uri="{9D8B030D-6E8A-4147-A177-3AD203B41FA5}">
-                      <a16:colId xmlns:a16="http://schemas.microsoft.com/office/drawing/2014/main" val="20000"/>
-                    </a:ext>
-                  </a:extLst>
-                </a:gridCol>
-                <a:gridCol w="2743200">
-                  <a:extLst>
-                    <a:ext uri="{9D8B030D-6E8A-4147-A177-3AD203B41FA5}">
-                      <a16:colId xmlns:a16="http://schemas.microsoft.com/office/drawing/2014/main" val="20001"/>
-                    </a:ext>
-                  </a:extLst>
-                </a:gridCol>
+                <a:gridCol w="2743200"/>
+                <a:gridCol w="2743200"/>
               </a:tblGrid>
               <a:tr h="384048">
                 <a:tc>
@@ -13933,7 +13477,7 @@
                     <a:p>
                       <a:pPr algn="ctr"/>
                       <a:r>
-                        <a:rPr sz="1100" b="1">
+                        <a:rPr b="1" sz="1100">
                           <a:solidFill>
                             <a:srgbClr val="FFFFFF"/>
                           </a:solidFill>
@@ -13955,7 +13499,7 @@
                     <a:p>
                       <a:pPr algn="ctr"/>
                       <a:r>
-                        <a:rPr sz="1100" b="1">
+                        <a:rPr b="1" sz="1100">
                           <a:solidFill>
                             <a:srgbClr val="FFFFFF"/>
                           </a:solidFill>
@@ -13970,11 +13514,6 @@
                     </a:solidFill>
                   </a:tcPr>
                 </a:tc>
-                <a:extLst>
-                  <a:ext uri="{0D108BD9-81ED-4DB2-BD59-A6C34878D82A}">
-                    <a16:rowId xmlns:a16="http://schemas.microsoft.com/office/drawing/2014/main" val="10000"/>
-                  </a:ext>
-                </a:extLst>
               </a:tr>
               <a:tr h="384048">
                 <a:tc>
@@ -14021,11 +13560,6 @@
                     </a:solidFill>
                   </a:tcPr>
                 </a:tc>
-                <a:extLst>
-                  <a:ext uri="{0D108BD9-81ED-4DB2-BD59-A6C34878D82A}">
-                    <a16:rowId xmlns:a16="http://schemas.microsoft.com/office/drawing/2014/main" val="10001"/>
-                  </a:ext>
-                </a:extLst>
               </a:tr>
               <a:tr h="384048">
                 <a:tc>
@@ -14072,11 +13606,6 @@
                     </a:solidFill>
                   </a:tcPr>
                 </a:tc>
-                <a:extLst>
-                  <a:ext uri="{0D108BD9-81ED-4DB2-BD59-A6C34878D82A}">
-                    <a16:rowId xmlns:a16="http://schemas.microsoft.com/office/drawing/2014/main" val="10002"/>
-                  </a:ext>
-                </a:extLst>
               </a:tr>
               <a:tr h="384048">
                 <a:tc>
@@ -14123,11 +13652,6 @@
                     </a:solidFill>
                   </a:tcPr>
                 </a:tc>
-                <a:extLst>
-                  <a:ext uri="{0D108BD9-81ED-4DB2-BD59-A6C34878D82A}">
-                    <a16:rowId xmlns:a16="http://schemas.microsoft.com/office/drawing/2014/main" val="10003"/>
-                  </a:ext>
-                </a:extLst>
               </a:tr>
               <a:tr h="384048">
                 <a:tc>
@@ -14174,11 +13698,6 @@
                     </a:solidFill>
                   </a:tcPr>
                 </a:tc>
-                <a:extLst>
-                  <a:ext uri="{0D108BD9-81ED-4DB2-BD59-A6C34878D82A}">
-                    <a16:rowId xmlns:a16="http://schemas.microsoft.com/office/drawing/2014/main" val="10004"/>
-                  </a:ext>
-                </a:extLst>
               </a:tr>
             </a:tbl>
           </a:graphicData>
@@ -14260,7 +13779,6 @@
           <a:lstStyle/>
           <a:p>
             <a:pPr algn="ctr"/>
-            <a:endParaRPr/>
           </a:p>
         </p:txBody>
       </p:sp>
@@ -14375,7 +13893,6 @@
           <a:lstStyle/>
           <a:p>
             <a:pPr algn="ctr"/>
-            <a:endParaRPr/>
           </a:p>
         </p:txBody>
       </p:sp>
@@ -14501,20 +14018,8 @@
                 <a:tableStyleId>{5C22544A-7EE6-4342-B048-85BDC9FD1C3A}</a:tableStyleId>
               </a:tblPr>
               <a:tblGrid>
-                <a:gridCol w="5760720">
-                  <a:extLst>
-                    <a:ext uri="{9D8B030D-6E8A-4147-A177-3AD203B41FA5}">
-                      <a16:colId xmlns:a16="http://schemas.microsoft.com/office/drawing/2014/main" val="20000"/>
-                    </a:ext>
-                  </a:extLst>
-                </a:gridCol>
-                <a:gridCol w="5760720">
-                  <a:extLst>
-                    <a:ext uri="{9D8B030D-6E8A-4147-A177-3AD203B41FA5}">
-                      <a16:colId xmlns:a16="http://schemas.microsoft.com/office/drawing/2014/main" val="20001"/>
-                    </a:ext>
-                  </a:extLst>
-                </a:gridCol>
+                <a:gridCol w="5760720"/>
+                <a:gridCol w="5760720"/>
               </a:tblGrid>
               <a:tr h="384048">
                 <a:tc>
@@ -14524,7 +14029,7 @@
                     <a:p>
                       <a:pPr algn="ctr"/>
                       <a:r>
-                        <a:rPr sz="1100" b="1">
+                        <a:rPr b="1" sz="1100">
                           <a:solidFill>
                             <a:srgbClr val="FFFFFF"/>
                           </a:solidFill>
@@ -14546,7 +14051,7 @@
                     <a:p>
                       <a:pPr algn="ctr"/>
                       <a:r>
-                        <a:rPr sz="1100" b="1">
+                        <a:rPr b="1" sz="1100">
                           <a:solidFill>
                             <a:srgbClr val="FFFFFF"/>
                           </a:solidFill>
@@ -14561,11 +14066,6 @@
                     </a:solidFill>
                   </a:tcPr>
                 </a:tc>
-                <a:extLst>
-                  <a:ext uri="{0D108BD9-81ED-4DB2-BD59-A6C34878D82A}">
-                    <a16:rowId xmlns:a16="http://schemas.microsoft.com/office/drawing/2014/main" val="10000"/>
-                  </a:ext>
-                </a:extLst>
               </a:tr>
               <a:tr h="384048">
                 <a:tc>
@@ -14612,11 +14112,6 @@
                     </a:solidFill>
                   </a:tcPr>
                 </a:tc>
-                <a:extLst>
-                  <a:ext uri="{0D108BD9-81ED-4DB2-BD59-A6C34878D82A}">
-                    <a16:rowId xmlns:a16="http://schemas.microsoft.com/office/drawing/2014/main" val="10001"/>
-                  </a:ext>
-                </a:extLst>
               </a:tr>
               <a:tr h="384048">
                 <a:tc>
@@ -14663,11 +14158,6 @@
                     </a:solidFill>
                   </a:tcPr>
                 </a:tc>
-                <a:extLst>
-                  <a:ext uri="{0D108BD9-81ED-4DB2-BD59-A6C34878D82A}">
-                    <a16:rowId xmlns:a16="http://schemas.microsoft.com/office/drawing/2014/main" val="10002"/>
-                  </a:ext>
-                </a:extLst>
               </a:tr>
               <a:tr h="384048">
                 <a:tc>
@@ -14714,11 +14204,6 @@
                     </a:solidFill>
                   </a:tcPr>
                 </a:tc>
-                <a:extLst>
-                  <a:ext uri="{0D108BD9-81ED-4DB2-BD59-A6C34878D82A}">
-                    <a16:rowId xmlns:a16="http://schemas.microsoft.com/office/drawing/2014/main" val="10003"/>
-                  </a:ext>
-                </a:extLst>
               </a:tr>
               <a:tr h="384048">
                 <a:tc>
@@ -14765,11 +14250,6 @@
                     </a:solidFill>
                   </a:tcPr>
                 </a:tc>
-                <a:extLst>
-                  <a:ext uri="{0D108BD9-81ED-4DB2-BD59-A6C34878D82A}">
-                    <a16:rowId xmlns:a16="http://schemas.microsoft.com/office/drawing/2014/main" val="10004"/>
-                  </a:ext>
-                </a:extLst>
               </a:tr>
             </a:tbl>
           </a:graphicData>
@@ -14818,7 +14298,7 @@
 </file>
 
 <file path=ppt/slides/slide7.xml><?xml version="1.0" encoding="utf-8"?>
-<p:sld xmlns:a="http://schemas.openxmlformats.org/drawingml/2006/main" xmlns:r="http://schemas.openxmlformats.org/officeDocument/2006/relationships" xmlns:p="http://schemas.openxmlformats.org/presentationml/2006/main">
+<p:sld xmlns:a="http://schemas.openxmlformats.org/drawingml/2006/main" xmlns:p="http://schemas.openxmlformats.org/presentationml/2006/main" xmlns:r="http://schemas.openxmlformats.org/officeDocument/2006/relationships">
   <p:cSld>
     <p:spTree>
       <p:nvGrpSpPr>
@@ -14826,14 +14306,7 @@
         <p:cNvGrpSpPr/>
         <p:nvPr/>
       </p:nvGrpSpPr>
-      <p:grpSpPr>
-        <a:xfrm>
-          <a:off x="0" y="0"/>
-          <a:ext cx="0" cy="0"/>
-          <a:chOff x="0" y="0"/>
-          <a:chExt cx="0" cy="0"/>
-        </a:xfrm>
-      </p:grpSpPr>
+      <p:grpSpPr/>
       <p:sp>
         <p:nvSpPr>
           <p:cNvPr id="2" name="Rectangle 1"/>
@@ -14874,7 +14347,6 @@
           <a:lstStyle/>
           <a:p>
             <a:pPr algn="ctr"/>
-            <a:endParaRPr/>
           </a:p>
         </p:txBody>
       </p:sp>
@@ -14918,7 +14390,6 @@
           <a:lstStyle/>
           <a:p>
             <a:pPr algn="ctr"/>
-            <a:endParaRPr/>
           </a:p>
         </p:txBody>
       </p:sp>
@@ -15009,41 +14480,11 @@
                 <a:tableStyleId>{5C22544A-7EE6-4342-B048-85BDC9FD1C3A}</a:tableStyleId>
               </a:tblPr>
               <a:tblGrid>
-                <a:gridCol w="2304288">
-                  <a:extLst>
-                    <a:ext uri="{9D8B030D-6E8A-4147-A177-3AD203B41FA5}">
-                      <a16:colId xmlns:a16="http://schemas.microsoft.com/office/drawing/2014/main" val="20000"/>
-                    </a:ext>
-                  </a:extLst>
-                </a:gridCol>
-                <a:gridCol w="2304288">
-                  <a:extLst>
-                    <a:ext uri="{9D8B030D-6E8A-4147-A177-3AD203B41FA5}">
-                      <a16:colId xmlns:a16="http://schemas.microsoft.com/office/drawing/2014/main" val="20001"/>
-                    </a:ext>
-                  </a:extLst>
-                </a:gridCol>
-                <a:gridCol w="2304288">
-                  <a:extLst>
-                    <a:ext uri="{9D8B030D-6E8A-4147-A177-3AD203B41FA5}">
-                      <a16:colId xmlns:a16="http://schemas.microsoft.com/office/drawing/2014/main" val="20002"/>
-                    </a:ext>
-                  </a:extLst>
-                </a:gridCol>
-                <a:gridCol w="2304288">
-                  <a:extLst>
-                    <a:ext uri="{9D8B030D-6E8A-4147-A177-3AD203B41FA5}">
-                      <a16:colId xmlns:a16="http://schemas.microsoft.com/office/drawing/2014/main" val="20003"/>
-                    </a:ext>
-                  </a:extLst>
-                </a:gridCol>
-                <a:gridCol w="2304288">
-                  <a:extLst>
-                    <a:ext uri="{9D8B030D-6E8A-4147-A177-3AD203B41FA5}">
-                      <a16:colId xmlns:a16="http://schemas.microsoft.com/office/drawing/2014/main" val="20004"/>
-                    </a:ext>
-                  </a:extLst>
-                </a:gridCol>
+                <a:gridCol w="2304288"/>
+                <a:gridCol w="2304288"/>
+                <a:gridCol w="2304288"/>
+                <a:gridCol w="2304288"/>
+                <a:gridCol w="2304288"/>
               </a:tblGrid>
               <a:tr h="335280">
                 <a:tc>
@@ -15053,7 +14494,7 @@
                     <a:p>
                       <a:pPr algn="ctr"/>
                       <a:r>
-                        <a:rPr sz="1100" b="1">
+                        <a:rPr b="1" sz="1100">
                           <a:solidFill>
                             <a:srgbClr val="FFFFFF"/>
                           </a:solidFill>
@@ -15075,7 +14516,7 @@
                     <a:p>
                       <a:pPr algn="ctr"/>
                       <a:r>
-                        <a:rPr sz="1100" b="1">
+                        <a:rPr b="1" sz="1100">
                           <a:solidFill>
                             <a:srgbClr val="FFFFFF"/>
                           </a:solidFill>
@@ -15097,7 +14538,7 @@
                     <a:p>
                       <a:pPr algn="ctr"/>
                       <a:r>
-                        <a:rPr sz="1100" b="1">
+                        <a:rPr b="1" sz="1100">
                           <a:solidFill>
                             <a:srgbClr val="FFFFFF"/>
                           </a:solidFill>
@@ -15119,7 +14560,7 @@
                     <a:p>
                       <a:pPr algn="ctr"/>
                       <a:r>
-                        <a:rPr sz="1100" b="1">
+                        <a:rPr b="1" sz="1100">
                           <a:solidFill>
                             <a:srgbClr val="FFFFFF"/>
                           </a:solidFill>
@@ -15141,7 +14582,7 @@
                     <a:p>
                       <a:pPr algn="ctr"/>
                       <a:r>
-                        <a:rPr sz="1100" b="1">
+                        <a:rPr b="1" sz="1100">
                           <a:solidFill>
                             <a:srgbClr val="FFFFFF"/>
                           </a:solidFill>
@@ -15156,11 +14597,6 @@
                     </a:solidFill>
                   </a:tcPr>
                 </a:tc>
-                <a:extLst>
-                  <a:ext uri="{0D108BD9-81ED-4DB2-BD59-A6C34878D82A}">
-                    <a16:rowId xmlns:a16="http://schemas.microsoft.com/office/drawing/2014/main" val="10000"/>
-                  </a:ext>
-                </a:extLst>
               </a:tr>
               <a:tr h="335280">
                 <a:tc>
@@ -15273,11 +14709,6 @@
                     </a:solidFill>
                   </a:tcPr>
                 </a:tc>
-                <a:extLst>
-                  <a:ext uri="{0D108BD9-81ED-4DB2-BD59-A6C34878D82A}">
-                    <a16:rowId xmlns:a16="http://schemas.microsoft.com/office/drawing/2014/main" val="10001"/>
-                  </a:ext>
-                </a:extLst>
               </a:tr>
               <a:tr h="335280">
                 <a:tc>
@@ -15390,11 +14821,6 @@
                     </a:solidFill>
                   </a:tcPr>
                 </a:tc>
-                <a:extLst>
-                  <a:ext uri="{0D108BD9-81ED-4DB2-BD59-A6C34878D82A}">
-                    <a16:rowId xmlns:a16="http://schemas.microsoft.com/office/drawing/2014/main" val="10002"/>
-                  </a:ext>
-                </a:extLst>
               </a:tr>
               <a:tr h="335280">
                 <a:tc>
@@ -15507,11 +14933,6 @@
                     </a:solidFill>
                   </a:tcPr>
                 </a:tc>
-                <a:extLst>
-                  <a:ext uri="{0D108BD9-81ED-4DB2-BD59-A6C34878D82A}">
-                    <a16:rowId xmlns:a16="http://schemas.microsoft.com/office/drawing/2014/main" val="10003"/>
-                  </a:ext>
-                </a:extLst>
               </a:tr>
               <a:tr h="335280">
                 <a:tc>
@@ -15624,11 +15045,6 @@
                     </a:solidFill>
                   </a:tcPr>
                 </a:tc>
-                <a:extLst>
-                  <a:ext uri="{0D108BD9-81ED-4DB2-BD59-A6C34878D82A}">
-                    <a16:rowId xmlns:a16="http://schemas.microsoft.com/office/drawing/2014/main" val="10004"/>
-                  </a:ext>
-                </a:extLst>
               </a:tr>
               <a:tr h="335280">
                 <a:tc>
@@ -15741,11 +15157,6 @@
                     </a:solidFill>
                   </a:tcPr>
                 </a:tc>
-                <a:extLst>
-                  <a:ext uri="{0D108BD9-81ED-4DB2-BD59-A6C34878D82A}">
-                    <a16:rowId xmlns:a16="http://schemas.microsoft.com/office/drawing/2014/main" val="10005"/>
-                  </a:ext>
-                </a:extLst>
               </a:tr>
               <a:tr h="335280">
                 <a:tc>
@@ -15858,11 +15269,6 @@
                     </a:solidFill>
                   </a:tcPr>
                 </a:tc>
-                <a:extLst>
-                  <a:ext uri="{0D108BD9-81ED-4DB2-BD59-A6C34878D82A}">
-                    <a16:rowId xmlns:a16="http://schemas.microsoft.com/office/drawing/2014/main" val="10006"/>
-                  </a:ext>
-                </a:extLst>
               </a:tr>
               <a:tr h="335280">
                 <a:tc>
@@ -15975,11 +15381,6 @@
                     </a:solidFill>
                   </a:tcPr>
                 </a:tc>
-                <a:extLst>
-                  <a:ext uri="{0D108BD9-81ED-4DB2-BD59-A6C34878D82A}">
-                    <a16:rowId xmlns:a16="http://schemas.microsoft.com/office/drawing/2014/main" val="10007"/>
-                  </a:ext>
-                </a:extLst>
               </a:tr>
               <a:tr h="335280">
                 <a:tc>
@@ -16016,7 +15417,7 @@
                             <a:srgbClr val="1A1A2E"/>
                           </a:solidFill>
                         </a:rPr>
-                        <a:t>N/A (범주형)*</a:t>
+                        <a:t>N/A (범주형) *</a:t>
                       </a:r>
                     </a:p>
                   </a:txBody>
@@ -16060,7 +15461,7 @@
                             <a:srgbClr val="1A1A2E"/>
                           </a:solidFill>
                         </a:rPr>
-                        <a:t>6.0e-06</a:t>
+                        <a:t>&lt; 0.001</a:t>
                       </a:r>
                     </a:p>
                   </a:txBody>
@@ -16092,11 +15493,6 @@
                     </a:solidFill>
                   </a:tcPr>
                 </a:tc>
-                <a:extLst>
-                  <a:ext uri="{0D108BD9-81ED-4DB2-BD59-A6C34878D82A}">
-                    <a16:rowId xmlns:a16="http://schemas.microsoft.com/office/drawing/2014/main" val="10008"/>
-                  </a:ext>
-                </a:extLst>
               </a:tr>
             </a:tbl>
           </a:graphicData>
@@ -16261,7 +15657,7 @@
 </file>
 
 <file path=ppt/slides/slide8.xml><?xml version="1.0" encoding="utf-8"?>
-<p:sld xmlns:a="http://schemas.openxmlformats.org/drawingml/2006/main" xmlns:r="http://schemas.openxmlformats.org/officeDocument/2006/relationships" xmlns:p="http://schemas.openxmlformats.org/presentationml/2006/main">
+<p:sld xmlns:a="http://schemas.openxmlformats.org/drawingml/2006/main" xmlns:p="http://schemas.openxmlformats.org/presentationml/2006/main" xmlns:r="http://schemas.openxmlformats.org/officeDocument/2006/relationships">
   <p:cSld>
     <p:spTree>
       <p:nvGrpSpPr>
@@ -16269,14 +15665,7 @@
         <p:cNvGrpSpPr/>
         <p:nvPr/>
       </p:nvGrpSpPr>
-      <p:grpSpPr>
-        <a:xfrm>
-          <a:off x="0" y="0"/>
-          <a:ext cx="0" cy="0"/>
-          <a:chOff x="0" y="0"/>
-          <a:chExt cx="0" cy="0"/>
-        </a:xfrm>
-      </p:grpSpPr>
+      <p:grpSpPr/>
       <p:sp>
         <p:nvSpPr>
           <p:cNvPr id="2" name="Rectangle 1"/>
@@ -16317,7 +15706,6 @@
           <a:lstStyle/>
           <a:p>
             <a:pPr algn="ctr"/>
-            <a:endParaRPr/>
           </a:p>
         </p:txBody>
       </p:sp>
@@ -16361,7 +15749,6 @@
           <a:lstStyle/>
           <a:p>
             <a:pPr algn="ctr"/>
-            <a:endParaRPr/>
           </a:p>
         </p:txBody>
       </p:sp>
@@ -16473,7 +15860,6 @@
           <a:lstStyle/>
           <a:p>
             <a:pPr algn="ctr"/>
-            <a:endParaRPr/>
           </a:p>
         </p:txBody>
       </p:sp>
@@ -16585,7 +15971,6 @@
           <a:lstStyle/>
           <a:p>
             <a:pPr algn="ctr"/>
-            <a:endParaRPr/>
           </a:p>
         </p:txBody>
       </p:sp>
@@ -16697,7 +16082,6 @@
           <a:lstStyle/>
           <a:p>
             <a:pPr algn="ctr"/>
-            <a:endParaRPr/>
           </a:p>
         </p:txBody>
       </p:sp>
@@ -16809,7 +16193,6 @@
           <a:lstStyle/>
           <a:p>
             <a:pPr algn="ctr"/>
-            <a:endParaRPr/>
           </a:p>
         </p:txBody>
       </p:sp>
@@ -16921,7 +16304,6 @@
           <a:lstStyle/>
           <a:p>
             <a:pPr algn="ctr"/>
-            <a:endParaRPr/>
           </a:p>
         </p:txBody>
       </p:sp>
@@ -16988,7 +16370,7 @@
                   <a:srgbClr val="FFFFFF"/>
                 </a:solidFill>
               </a:rPr>
-              <a:t>85.00
+              <a:t>84.99
 (p &lt; 0.001)</a:t>
             </a:r>
           </a:p>
@@ -17034,7 +16416,6 @@
           <a:lstStyle/>
           <a:p>
             <a:pPr algn="ctr"/>
-            <a:endParaRPr/>
           </a:p>
         </p:txBody>
       </p:sp>
@@ -17160,34 +16541,10 @@
                 <a:tableStyleId>{5C22544A-7EE6-4342-B048-85BDC9FD1C3A}</a:tableStyleId>
               </a:tblPr>
               <a:tblGrid>
-                <a:gridCol w="1485900">
-                  <a:extLst>
-                    <a:ext uri="{9D8B030D-6E8A-4147-A177-3AD203B41FA5}">
-                      <a16:colId xmlns:a16="http://schemas.microsoft.com/office/drawing/2014/main" val="20000"/>
-                    </a:ext>
-                  </a:extLst>
-                </a:gridCol>
-                <a:gridCol w="1485900">
-                  <a:extLst>
-                    <a:ext uri="{9D8B030D-6E8A-4147-A177-3AD203B41FA5}">
-                      <a16:colId xmlns:a16="http://schemas.microsoft.com/office/drawing/2014/main" val="20001"/>
-                    </a:ext>
-                  </a:extLst>
-                </a:gridCol>
-                <a:gridCol w="1485900">
-                  <a:extLst>
-                    <a:ext uri="{9D8B030D-6E8A-4147-A177-3AD203B41FA5}">
-                      <a16:colId xmlns:a16="http://schemas.microsoft.com/office/drawing/2014/main" val="20002"/>
-                    </a:ext>
-                  </a:extLst>
-                </a:gridCol>
-                <a:gridCol w="1485900">
-                  <a:extLst>
-                    <a:ext uri="{9D8B030D-6E8A-4147-A177-3AD203B41FA5}">
-                      <a16:colId xmlns:a16="http://schemas.microsoft.com/office/drawing/2014/main" val="20003"/>
-                    </a:ext>
-                  </a:extLst>
-                </a:gridCol>
+                <a:gridCol w="1485900"/>
+                <a:gridCol w="1485900"/>
+                <a:gridCol w="1485900"/>
+                <a:gridCol w="1485900"/>
               </a:tblGrid>
               <a:tr h="365760">
                 <a:tc>
@@ -17197,7 +16554,7 @@
                     <a:p>
                       <a:pPr algn="ctr"/>
                       <a:r>
-                        <a:rPr sz="1100" b="1">
+                        <a:rPr b="1" sz="1100">
                           <a:solidFill>
                             <a:srgbClr val="FFFFFF"/>
                           </a:solidFill>
@@ -17219,7 +16576,7 @@
                     <a:p>
                       <a:pPr algn="ctr"/>
                       <a:r>
-                        <a:rPr sz="1100" b="1">
+                        <a:rPr b="1" sz="1100">
                           <a:solidFill>
                             <a:srgbClr val="FFFFFF"/>
                           </a:solidFill>
@@ -17241,7 +16598,7 @@
                     <a:p>
                       <a:pPr algn="ctr"/>
                       <a:r>
-                        <a:rPr sz="1100" b="1">
+                        <a:rPr b="1" sz="1100">
                           <a:solidFill>
                             <a:srgbClr val="FFFFFF"/>
                           </a:solidFill>
@@ -17263,7 +16620,7 @@
                     <a:p>
                       <a:pPr algn="ctr"/>
                       <a:r>
-                        <a:rPr sz="1100" b="1">
+                        <a:rPr b="1" sz="1100">
                           <a:solidFill>
                             <a:srgbClr val="FFFFFF"/>
                           </a:solidFill>
@@ -17278,11 +16635,6 @@
                     </a:solidFill>
                   </a:tcPr>
                 </a:tc>
-                <a:extLst>
-                  <a:ext uri="{0D108BD9-81ED-4DB2-BD59-A6C34878D82A}">
-                    <a16:rowId xmlns:a16="http://schemas.microsoft.com/office/drawing/2014/main" val="10000"/>
-                  </a:ext>
-                </a:extLst>
               </a:tr>
               <a:tr h="365760">
                 <a:tc>
@@ -17319,7 +16671,7 @@
                             <a:srgbClr val="1A1A2E"/>
                           </a:solidFill>
                         </a:rPr>
-                        <a:t>0.936</a:t>
+                        <a:t>0.9593</a:t>
                       </a:r>
                     </a:p>
                   </a:txBody>
@@ -17341,7 +16693,7 @@
                             <a:srgbClr val="1A1A2E"/>
                           </a:solidFill>
                         </a:rPr>
-                        <a:t>&lt; 0.001</a:t>
+                        <a:t>0.00e+00</a:t>
                       </a:r>
                     </a:p>
                   </a:txBody>
@@ -17363,7 +16715,7 @@
                             <a:srgbClr val="1A1A2E"/>
                           </a:solidFill>
                         </a:rPr>
-                        <a:t>비정규 ⚠</a:t>
+                        <a:t>비정규</a:t>
                       </a:r>
                     </a:p>
                   </a:txBody>
@@ -17373,11 +16725,6 @@
                     </a:solidFill>
                   </a:tcPr>
                 </a:tc>
-                <a:extLst>
-                  <a:ext uri="{0D108BD9-81ED-4DB2-BD59-A6C34878D82A}">
-                    <a16:rowId xmlns:a16="http://schemas.microsoft.com/office/drawing/2014/main" val="10001"/>
-                  </a:ext>
-                </a:extLst>
               </a:tr>
               <a:tr h="365760">
                 <a:tc>
@@ -17436,7 +16783,7 @@
                             <a:srgbClr val="1A1A2E"/>
                           </a:solidFill>
                         </a:rPr>
-                        <a:t>&lt; 0.001</a:t>
+                        <a:t>0.00e+00</a:t>
                       </a:r>
                     </a:p>
                   </a:txBody>
@@ -17458,7 +16805,7 @@
                             <a:srgbClr val="1A1A2E"/>
                           </a:solidFill>
                         </a:rPr>
-                        <a:t>이분산 ⚠</a:t>
+                        <a:t>이분산</a:t>
                       </a:r>
                     </a:p>
                   </a:txBody>
@@ -17468,11 +16815,6 @@
                     </a:solidFill>
                   </a:tcPr>
                 </a:tc>
-                <a:extLst>
-                  <a:ext uri="{0D108BD9-81ED-4DB2-BD59-A6C34878D82A}">
-                    <a16:rowId xmlns:a16="http://schemas.microsoft.com/office/drawing/2014/main" val="10002"/>
-                  </a:ext>
-                </a:extLst>
               </a:tr>
               <a:tr h="365760">
                 <a:tc>
@@ -17509,7 +16851,7 @@
                             <a:srgbClr val="1A1A2E"/>
                           </a:solidFill>
                         </a:rPr>
-                        <a:t>1.9456</a:t>
+                        <a:t>1.9779</a:t>
                       </a:r>
                     </a:p>
                   </a:txBody>
@@ -17553,7 +16895,7 @@
                             <a:srgbClr val="1A1A2E"/>
                           </a:solidFill>
                         </a:rPr>
-                        <a:t>정상 ✔</a:t>
+                        <a:t>정상</a:t>
                       </a:r>
                     </a:p>
                   </a:txBody>
@@ -17563,11 +16905,6 @@
                     </a:solidFill>
                   </a:tcPr>
                 </a:tc>
-                <a:extLst>
-                  <a:ext uri="{0D108BD9-81ED-4DB2-BD59-A6C34878D82A}">
-                    <a16:rowId xmlns:a16="http://schemas.microsoft.com/office/drawing/2014/main" val="10003"/>
-                  </a:ext>
-                </a:extLst>
               </a:tr>
               <a:tr h="365760">
                 <a:tc>
@@ -17648,7 +16985,7 @@
                             <a:srgbClr val="1A1A2E"/>
                           </a:solidFill>
                         </a:rPr>
-                        <a:t>주의(κ&lt;1,000) ✔</a:t>
+                        <a:t>주의(κ&lt;1000)</a:t>
                       </a:r>
                     </a:p>
                   </a:txBody>
@@ -17658,11 +16995,6 @@
                     </a:solidFill>
                   </a:tcPr>
                 </a:tc>
-                <a:extLst>
-                  <a:ext uri="{0D108BD9-81ED-4DB2-BD59-A6C34878D82A}">
-                    <a16:rowId xmlns:a16="http://schemas.microsoft.com/office/drawing/2014/main" val="10004"/>
-                  </a:ext>
-                </a:extLst>
               </a:tr>
             </a:tbl>
           </a:graphicData>
@@ -17794,7 +17126,7 @@
 </file>
 
 <file path=ppt/slides/slide9.xml><?xml version="1.0" encoding="utf-8"?>
-<p:sld xmlns:a="http://schemas.openxmlformats.org/drawingml/2006/main" xmlns:r="http://schemas.openxmlformats.org/officeDocument/2006/relationships" xmlns:p="http://schemas.openxmlformats.org/presentationml/2006/main">
+<p:sld xmlns:a="http://schemas.openxmlformats.org/drawingml/2006/main" xmlns:p="http://schemas.openxmlformats.org/presentationml/2006/main" xmlns:r="http://schemas.openxmlformats.org/officeDocument/2006/relationships">
   <p:cSld>
     <p:spTree>
       <p:nvGrpSpPr>
@@ -17802,14 +17134,7 @@
         <p:cNvGrpSpPr/>
         <p:nvPr/>
       </p:nvGrpSpPr>
-      <p:grpSpPr>
-        <a:xfrm>
-          <a:off x="0" y="0"/>
-          <a:ext cx="0" cy="0"/>
-          <a:chOff x="0" y="0"/>
-          <a:chExt cx="0" cy="0"/>
-        </a:xfrm>
-      </p:grpSpPr>
+      <p:grpSpPr/>
       <p:sp>
         <p:nvSpPr>
           <p:cNvPr id="2" name="Rectangle 1"/>
@@ -17850,7 +17175,6 @@
           <a:lstStyle/>
           <a:p>
             <a:pPr algn="ctr"/>
-            <a:endParaRPr/>
           </a:p>
         </p:txBody>
       </p:sp>
@@ -17894,7 +17218,6 @@
           <a:lstStyle/>
           <a:p>
             <a:pPr algn="ctr"/>
-            <a:endParaRPr/>
           </a:p>
         </p:txBody>
       </p:sp>
@@ -17985,41 +17308,11 @@
                 <a:tableStyleId>{5C22544A-7EE6-4342-B048-85BDC9FD1C3A}</a:tableStyleId>
               </a:tblPr>
               <a:tblGrid>
-                <a:gridCol w="2304288">
-                  <a:extLst>
-                    <a:ext uri="{9D8B030D-6E8A-4147-A177-3AD203B41FA5}">
-                      <a16:colId xmlns:a16="http://schemas.microsoft.com/office/drawing/2014/main" val="20000"/>
-                    </a:ext>
-                  </a:extLst>
-                </a:gridCol>
-                <a:gridCol w="2304288">
-                  <a:extLst>
-                    <a:ext uri="{9D8B030D-6E8A-4147-A177-3AD203B41FA5}">
-                      <a16:colId xmlns:a16="http://schemas.microsoft.com/office/drawing/2014/main" val="20001"/>
-                    </a:ext>
-                  </a:extLst>
-                </a:gridCol>
-                <a:gridCol w="2304288">
-                  <a:extLst>
-                    <a:ext uri="{9D8B030D-6E8A-4147-A177-3AD203B41FA5}">
-                      <a16:colId xmlns:a16="http://schemas.microsoft.com/office/drawing/2014/main" val="20002"/>
-                    </a:ext>
-                  </a:extLst>
-                </a:gridCol>
-                <a:gridCol w="2304288">
-                  <a:extLst>
-                    <a:ext uri="{9D8B030D-6E8A-4147-A177-3AD203B41FA5}">
-                      <a16:colId xmlns:a16="http://schemas.microsoft.com/office/drawing/2014/main" val="20003"/>
-                    </a:ext>
-                  </a:extLst>
-                </a:gridCol>
-                <a:gridCol w="2304288">
-                  <a:extLst>
-                    <a:ext uri="{9D8B030D-6E8A-4147-A177-3AD203B41FA5}">
-                      <a16:colId xmlns:a16="http://schemas.microsoft.com/office/drawing/2014/main" val="20004"/>
-                    </a:ext>
-                  </a:extLst>
-                </a:gridCol>
+                <a:gridCol w="2304288"/>
+                <a:gridCol w="2304288"/>
+                <a:gridCol w="2304288"/>
+                <a:gridCol w="2304288"/>
+                <a:gridCol w="2304288"/>
               </a:tblGrid>
               <a:tr h="335280">
                 <a:tc>
@@ -18029,7 +17322,7 @@
                     <a:p>
                       <a:pPr algn="ctr"/>
                       <a:r>
-                        <a:rPr sz="1100" b="1">
+                        <a:rPr b="1" sz="1100">
                           <a:solidFill>
                             <a:srgbClr val="FFFFFF"/>
                           </a:solidFill>
@@ -18051,7 +17344,7 @@
                     <a:p>
                       <a:pPr algn="ctr"/>
                       <a:r>
-                        <a:rPr sz="1100" b="1">
+                        <a:rPr b="1" sz="1100">
                           <a:solidFill>
                             <a:srgbClr val="FFFFFF"/>
                           </a:solidFill>
@@ -18073,7 +17366,7 @@
                     <a:p>
                       <a:pPr algn="ctr"/>
                       <a:r>
-                        <a:rPr sz="1100" b="1">
+                        <a:rPr b="1" sz="1100">
                           <a:solidFill>
                             <a:srgbClr val="FFFFFF"/>
                           </a:solidFill>
@@ -18095,7 +17388,7 @@
                     <a:p>
                       <a:pPr algn="ctr"/>
                       <a:r>
-                        <a:rPr sz="1100" b="1">
+                        <a:rPr b="1" sz="1100">
                           <a:solidFill>
                             <a:srgbClr val="FFFFFF"/>
                           </a:solidFill>
@@ -18117,7 +17410,7 @@
                     <a:p>
                       <a:pPr algn="ctr"/>
                       <a:r>
-                        <a:rPr sz="1100" b="1">
+                        <a:rPr b="1" sz="1100">
                           <a:solidFill>
                             <a:srgbClr val="FFFFFF"/>
                           </a:solidFill>
@@ -18132,11 +17425,6 @@
                     </a:solidFill>
                   </a:tcPr>
                 </a:tc>
-                <a:extLst>
-                  <a:ext uri="{0D108BD9-81ED-4DB2-BD59-A6C34878D82A}">
-                    <a16:rowId xmlns:a16="http://schemas.microsoft.com/office/drawing/2014/main" val="10000"/>
-                  </a:ext>
-                </a:extLst>
               </a:tr>
               <a:tr h="335280">
                 <a:tc>
@@ -18249,11 +17537,6 @@
                     </a:solidFill>
                   </a:tcPr>
                 </a:tc>
-                <a:extLst>
-                  <a:ext uri="{0D108BD9-81ED-4DB2-BD59-A6C34878D82A}">
-                    <a16:rowId xmlns:a16="http://schemas.microsoft.com/office/drawing/2014/main" val="10001"/>
-                  </a:ext>
-                </a:extLst>
               </a:tr>
               <a:tr h="335280">
                 <a:tc>
@@ -18366,11 +17649,6 @@
                     </a:solidFill>
                   </a:tcPr>
                 </a:tc>
-                <a:extLst>
-                  <a:ext uri="{0D108BD9-81ED-4DB2-BD59-A6C34878D82A}">
-                    <a16:rowId xmlns:a16="http://schemas.microsoft.com/office/drawing/2014/main" val="10002"/>
-                  </a:ext>
-                </a:extLst>
               </a:tr>
               <a:tr h="335280">
                 <a:tc>
@@ -18483,11 +17761,6 @@
                     </a:solidFill>
                   </a:tcPr>
                 </a:tc>
-                <a:extLst>
-                  <a:ext uri="{0D108BD9-81ED-4DB2-BD59-A6C34878D82A}">
-                    <a16:rowId xmlns:a16="http://schemas.microsoft.com/office/drawing/2014/main" val="10003"/>
-                  </a:ext>
-                </a:extLst>
               </a:tr>
               <a:tr h="335280">
                 <a:tc>
@@ -18524,7 +17797,7 @@
                             <a:srgbClr val="1A1A2E"/>
                           </a:solidFill>
                         </a:rPr>
-                        <a:t>1.118 *</a:t>
+                        <a:t>1.117 *</a:t>
                       </a:r>
                     </a:p>
                   </a:txBody>
@@ -18600,11 +17873,6 @@
                     </a:solidFill>
                   </a:tcPr>
                 </a:tc>
-                <a:extLst>
-                  <a:ext uri="{0D108BD9-81ED-4DB2-BD59-A6C34878D82A}">
-                    <a16:rowId xmlns:a16="http://schemas.microsoft.com/office/drawing/2014/main" val="10004"/>
-                  </a:ext>
-                </a:extLst>
               </a:tr>
               <a:tr h="335280">
                 <a:tc>
@@ -18717,11 +17985,6 @@
                     </a:solidFill>
                   </a:tcPr>
                 </a:tc>
-                <a:extLst>
-                  <a:ext uri="{0D108BD9-81ED-4DB2-BD59-A6C34878D82A}">
-                    <a16:rowId xmlns:a16="http://schemas.microsoft.com/office/drawing/2014/main" val="10005"/>
-                  </a:ext>
-                </a:extLst>
               </a:tr>
               <a:tr h="335280">
                 <a:tc>
@@ -18834,11 +18097,6 @@
                     </a:solidFill>
                   </a:tcPr>
                 </a:tc>
-                <a:extLst>
-                  <a:ext uri="{0D108BD9-81ED-4DB2-BD59-A6C34878D82A}">
-                    <a16:rowId xmlns:a16="http://schemas.microsoft.com/office/drawing/2014/main" val="10006"/>
-                  </a:ext>
-                </a:extLst>
               </a:tr>
               <a:tr h="335280">
                 <a:tc>
@@ -18897,7 +18155,7 @@
                             <a:srgbClr val="1A1A2E"/>
                           </a:solidFill>
                         </a:rPr>
-                        <a:t>[0.520, 0.662]</a:t>
+                        <a:t>[0.520, 0.661]</a:t>
                       </a:r>
                     </a:p>
                   </a:txBody>
@@ -18951,11 +18209,6 @@
                     </a:solidFill>
                   </a:tcPr>
                 </a:tc>
-                <a:extLst>
-                  <a:ext uri="{0D108BD9-81ED-4DB2-BD59-A6C34878D82A}">
-                    <a16:rowId xmlns:a16="http://schemas.microsoft.com/office/drawing/2014/main" val="10007"/>
-                  </a:ext>
-                </a:extLst>
               </a:tr>
               <a:tr h="335280">
                 <a:tc>
@@ -18992,7 +18245,7 @@
                             <a:srgbClr val="1A1A2E"/>
                           </a:solidFill>
                         </a:rPr>
-                        <a:t>LR χ²=50.59 *</a:t>
+                        <a:t>LR_χ²=50.59 *</a:t>
                       </a:r>
                     </a:p>
                   </a:txBody>
@@ -19068,11 +18321,6 @@
                     </a:solidFill>
                   </a:tcPr>
                 </a:tc>
-                <a:extLst>
-                  <a:ext uri="{0D108BD9-81ED-4DB2-BD59-A6C34878D82A}">
-                    <a16:rowId xmlns:a16="http://schemas.microsoft.com/office/drawing/2014/main" val="10008"/>
-                  </a:ext>
-                </a:extLst>
               </a:tr>
             </a:tbl>
           </a:graphicData>

--- a/연구코드/aec/results/강남_TAMA_연구보고서.pptx
+++ b/연구코드/aec/results/강남_TAMA_연구보고서.pptx
@@ -5,29 +5,29 @@
     <p:sldMasterId id="2147483648" r:id="rId1"/>
   </p:sldMasterIdLst>
   <p:sldIdLst>
-    <p:sldId id="256" r:id="rId7"/>
-    <p:sldId id="257" r:id="rId8"/>
-    <p:sldId id="258" r:id="rId9"/>
-    <p:sldId id="259" r:id="rId10"/>
-    <p:sldId id="260" r:id="rId11"/>
-    <p:sldId id="261" r:id="rId12"/>
-    <p:sldId id="262" r:id="rId13"/>
-    <p:sldId id="263" r:id="rId14"/>
-    <p:sldId id="264" r:id="rId15"/>
-    <p:sldId id="265" r:id="rId16"/>
-    <p:sldId id="266" r:id="rId17"/>
-    <p:sldId id="267" r:id="rId18"/>
-    <p:sldId id="268" r:id="rId19"/>
-    <p:sldId id="269" r:id="rId20"/>
-    <p:sldId id="270" r:id="rId21"/>
-    <p:sldId id="271" r:id="rId22"/>
-    <p:sldId id="272" r:id="rId23"/>
-    <p:sldId id="273" r:id="rId24"/>
-    <p:sldId id="274" r:id="rId25"/>
-    <p:sldId id="275" r:id="rId26"/>
-    <p:sldId id="276" r:id="rId27"/>
+    <p:sldId id="256" r:id="rId2"/>
+    <p:sldId id="257" r:id="rId3"/>
+    <p:sldId id="258" r:id="rId4"/>
+    <p:sldId id="259" r:id="rId5"/>
+    <p:sldId id="260" r:id="rId6"/>
+    <p:sldId id="261" r:id="rId7"/>
+    <p:sldId id="262" r:id="rId8"/>
+    <p:sldId id="263" r:id="rId9"/>
+    <p:sldId id="264" r:id="rId10"/>
+    <p:sldId id="265" r:id="rId11"/>
+    <p:sldId id="266" r:id="rId12"/>
+    <p:sldId id="267" r:id="rId13"/>
+    <p:sldId id="268" r:id="rId14"/>
+    <p:sldId id="269" r:id="rId15"/>
+    <p:sldId id="270" r:id="rId16"/>
+    <p:sldId id="271" r:id="rId17"/>
+    <p:sldId id="272" r:id="rId18"/>
+    <p:sldId id="273" r:id="rId19"/>
+    <p:sldId id="274" r:id="rId20"/>
+    <p:sldId id="275" r:id="rId21"/>
+    <p:sldId id="276" r:id="rId22"/>
   </p:sldIdLst>
-  <p:sldSz cx="12188952" cy="6858000" type="screen4x3"/>
+  <p:sldSz cx="12188825" cy="6858000"/>
   <p:notesSz cx="6858000" cy="9144000"/>
   <p:defaultTextStyle>
     <a:defPPr>
@@ -124,6 +124,22 @@
       </a:defRPr>
     </a:lvl9pPr>
   </p:defaultTextStyle>
+  <p:extLst>
+    <p:ext uri="{EFAFB233-063F-42B5-8137-9DF3F51BA10A}">
+      <p15:sldGuideLst xmlns:p15="http://schemas.microsoft.com/office/powerpoint/2012/main">
+        <p15:guide id="1" orient="horz" pos="2160">
+          <p15:clr>
+            <a:srgbClr val="A4A3A4"/>
+          </p15:clr>
+        </p15:guide>
+        <p15:guide id="2" pos="2880">
+          <p15:clr>
+            <a:srgbClr val="A4A3A4"/>
+          </p15:clr>
+        </p15:guide>
+      </p15:sldGuideLst>
+    </p:ext>
+  </p:extLst>
 </p:presentation>
 </file>
 
@@ -165,10 +181,9 @@
           <a:lstStyle/>
           <a:p>
             <a:r>
-              <a:rPr lang="en-US" smtClean="0"/>
+              <a:rPr lang="en-US"/>
               <a:t>Click to edit Master title style</a:t>
             </a:r>
-            <a:endParaRPr lang="en-US"/>
           </a:p>
         </p:txBody>
       </p:sp>
@@ -284,10 +299,9 @@
           </a:lstStyle>
           <a:p>
             <a:r>
-              <a:rPr lang="en-US" smtClean="0"/>
+              <a:rPr lang="en-US"/>
               <a:t>Click to edit Master subtitle style</a:t>
             </a:r>
-            <a:endParaRPr lang="en-US"/>
           </a:p>
         </p:txBody>
       </p:sp>
@@ -308,7 +322,7 @@
           <a:p>
             <a:fld id="{5BCAD085-E8A6-8845-BD4E-CB4CCA059FC4}" type="datetimeFigureOut">
               <a:rPr lang="en-US" smtClean="0"/>
-              <a:t>1/27/13</a:t>
+              <a:t>4/23/2026</a:t>
             </a:fld>
             <a:endParaRPr lang="en-US"/>
           </a:p>
@@ -402,10 +416,9 @@
           <a:lstStyle/>
           <a:p>
             <a:r>
-              <a:rPr lang="en-US" smtClean="0"/>
+              <a:rPr lang="en-US"/>
               <a:t>Click to edit Master title style</a:t>
             </a:r>
-            <a:endParaRPr lang="en-US"/>
           </a:p>
         </p:txBody>
       </p:sp>
@@ -426,38 +439,37 @@
           <a:p>
             <a:pPr lvl="0"/>
             <a:r>
-              <a:rPr lang="en-US" smtClean="0"/>
+              <a:rPr lang="en-US"/>
               <a:t>Click to edit Master text styles</a:t>
             </a:r>
           </a:p>
           <a:p>
             <a:pPr lvl="1"/>
             <a:r>
-              <a:rPr lang="en-US" smtClean="0"/>
+              <a:rPr lang="en-US"/>
               <a:t>Second level</a:t>
             </a:r>
           </a:p>
           <a:p>
             <a:pPr lvl="2"/>
             <a:r>
-              <a:rPr lang="en-US" smtClean="0"/>
+              <a:rPr lang="en-US"/>
               <a:t>Third level</a:t>
             </a:r>
           </a:p>
           <a:p>
             <a:pPr lvl="3"/>
             <a:r>
-              <a:rPr lang="en-US" smtClean="0"/>
+              <a:rPr lang="en-US"/>
               <a:t>Fourth level</a:t>
             </a:r>
           </a:p>
           <a:p>
             <a:pPr lvl="4"/>
             <a:r>
-              <a:rPr lang="en-US" smtClean="0"/>
+              <a:rPr lang="en-US"/>
               <a:t>Fifth level</a:t>
             </a:r>
-            <a:endParaRPr lang="en-US"/>
           </a:p>
         </p:txBody>
       </p:sp>
@@ -478,7 +490,7 @@
           <a:p>
             <a:fld id="{5BCAD085-E8A6-8845-BD4E-CB4CCA059FC4}" type="datetimeFigureOut">
               <a:rPr lang="en-US" smtClean="0"/>
-              <a:t>1/27/13</a:t>
+              <a:t>4/23/2026</a:t>
             </a:fld>
             <a:endParaRPr lang="en-US"/>
           </a:p>
@@ -577,10 +589,9 @@
           <a:lstStyle/>
           <a:p>
             <a:r>
-              <a:rPr lang="en-US" smtClean="0"/>
+              <a:rPr lang="en-US"/>
               <a:t>Click to edit Master title style</a:t>
             </a:r>
-            <a:endParaRPr lang="en-US"/>
           </a:p>
         </p:txBody>
       </p:sp>
@@ -606,38 +617,37 @@
           <a:p>
             <a:pPr lvl="0"/>
             <a:r>
-              <a:rPr lang="en-US" smtClean="0"/>
+              <a:rPr lang="en-US"/>
               <a:t>Click to edit Master text styles</a:t>
             </a:r>
           </a:p>
           <a:p>
             <a:pPr lvl="1"/>
             <a:r>
-              <a:rPr lang="en-US" smtClean="0"/>
+              <a:rPr lang="en-US"/>
               <a:t>Second level</a:t>
             </a:r>
           </a:p>
           <a:p>
             <a:pPr lvl="2"/>
             <a:r>
-              <a:rPr lang="en-US" smtClean="0"/>
+              <a:rPr lang="en-US"/>
               <a:t>Third level</a:t>
             </a:r>
           </a:p>
           <a:p>
             <a:pPr lvl="3"/>
             <a:r>
-              <a:rPr lang="en-US" smtClean="0"/>
+              <a:rPr lang="en-US"/>
               <a:t>Fourth level</a:t>
             </a:r>
           </a:p>
           <a:p>
             <a:pPr lvl="4"/>
             <a:r>
-              <a:rPr lang="en-US" smtClean="0"/>
+              <a:rPr lang="en-US"/>
               <a:t>Fifth level</a:t>
             </a:r>
-            <a:endParaRPr lang="en-US"/>
           </a:p>
         </p:txBody>
       </p:sp>
@@ -658,7 +668,7 @@
           <a:p>
             <a:fld id="{5BCAD085-E8A6-8845-BD4E-CB4CCA059FC4}" type="datetimeFigureOut">
               <a:rPr lang="en-US" smtClean="0"/>
-              <a:t>1/27/13</a:t>
+              <a:t>4/23/2026</a:t>
             </a:fld>
             <a:endParaRPr lang="en-US"/>
           </a:p>
@@ -752,10 +762,9 @@
           <a:lstStyle/>
           <a:p>
             <a:r>
-              <a:rPr lang="en-US" smtClean="0"/>
+              <a:rPr lang="en-US"/>
               <a:t>Click to edit Master title style</a:t>
             </a:r>
-            <a:endParaRPr lang="en-US"/>
           </a:p>
         </p:txBody>
       </p:sp>
@@ -776,38 +785,37 @@
           <a:p>
             <a:pPr lvl="0"/>
             <a:r>
-              <a:rPr lang="en-US" smtClean="0"/>
+              <a:rPr lang="en-US"/>
               <a:t>Click to edit Master text styles</a:t>
             </a:r>
           </a:p>
           <a:p>
             <a:pPr lvl="1"/>
             <a:r>
-              <a:rPr lang="en-US" smtClean="0"/>
+              <a:rPr lang="en-US"/>
               <a:t>Second level</a:t>
             </a:r>
           </a:p>
           <a:p>
             <a:pPr lvl="2"/>
             <a:r>
-              <a:rPr lang="en-US" smtClean="0"/>
+              <a:rPr lang="en-US"/>
               <a:t>Third level</a:t>
             </a:r>
           </a:p>
           <a:p>
             <a:pPr lvl="3"/>
             <a:r>
-              <a:rPr lang="en-US" smtClean="0"/>
+              <a:rPr lang="en-US"/>
               <a:t>Fourth level</a:t>
             </a:r>
           </a:p>
           <a:p>
             <a:pPr lvl="4"/>
             <a:r>
-              <a:rPr lang="en-US" smtClean="0"/>
+              <a:rPr lang="en-US"/>
               <a:t>Fifth level</a:t>
             </a:r>
-            <a:endParaRPr lang="en-US"/>
           </a:p>
         </p:txBody>
       </p:sp>
@@ -828,7 +836,7 @@
           <a:p>
             <a:fld id="{5BCAD085-E8A6-8845-BD4E-CB4CCA059FC4}" type="datetimeFigureOut">
               <a:rPr lang="en-US" smtClean="0"/>
-              <a:t>1/27/13</a:t>
+              <a:t>4/23/2026</a:t>
             </a:fld>
             <a:endParaRPr lang="en-US"/>
           </a:p>
@@ -931,10 +939,9 @@
           </a:lstStyle>
           <a:p>
             <a:r>
-              <a:rPr lang="en-US" smtClean="0"/>
+              <a:rPr lang="en-US"/>
               <a:t>Click to edit Master title style</a:t>
             </a:r>
-            <a:endParaRPr lang="en-US"/>
           </a:p>
         </p:txBody>
       </p:sp>
@@ -1051,7 +1058,7 @@
           <a:p>
             <a:pPr lvl="0"/>
             <a:r>
-              <a:rPr lang="en-US" smtClean="0"/>
+              <a:rPr lang="en-US"/>
               <a:t>Click to edit Master text styles</a:t>
             </a:r>
           </a:p>
@@ -1074,7 +1081,7 @@
           <a:p>
             <a:fld id="{5BCAD085-E8A6-8845-BD4E-CB4CCA059FC4}" type="datetimeFigureOut">
               <a:rPr lang="en-US" smtClean="0"/>
-              <a:t>1/27/13</a:t>
+              <a:t>4/23/2026</a:t>
             </a:fld>
             <a:endParaRPr lang="en-US"/>
           </a:p>
@@ -1168,10 +1175,9 @@
           <a:lstStyle/>
           <a:p>
             <a:r>
-              <a:rPr lang="en-US" smtClean="0"/>
+              <a:rPr lang="en-US"/>
               <a:t>Click to edit Master title style</a:t>
             </a:r>
-            <a:endParaRPr lang="en-US"/>
           </a:p>
         </p:txBody>
       </p:sp>
@@ -1225,38 +1231,37 @@
           <a:p>
             <a:pPr lvl="0"/>
             <a:r>
-              <a:rPr lang="en-US" smtClean="0"/>
+              <a:rPr lang="en-US"/>
               <a:t>Click to edit Master text styles</a:t>
             </a:r>
           </a:p>
           <a:p>
             <a:pPr lvl="1"/>
             <a:r>
-              <a:rPr lang="en-US" smtClean="0"/>
+              <a:rPr lang="en-US"/>
               <a:t>Second level</a:t>
             </a:r>
           </a:p>
           <a:p>
             <a:pPr lvl="2"/>
             <a:r>
-              <a:rPr lang="en-US" smtClean="0"/>
+              <a:rPr lang="en-US"/>
               <a:t>Third level</a:t>
             </a:r>
           </a:p>
           <a:p>
             <a:pPr lvl="3"/>
             <a:r>
-              <a:rPr lang="en-US" smtClean="0"/>
+              <a:rPr lang="en-US"/>
               <a:t>Fourth level</a:t>
             </a:r>
           </a:p>
           <a:p>
             <a:pPr lvl="4"/>
             <a:r>
-              <a:rPr lang="en-US" smtClean="0"/>
+              <a:rPr lang="en-US"/>
               <a:t>Fifth level</a:t>
             </a:r>
-            <a:endParaRPr lang="en-US"/>
           </a:p>
         </p:txBody>
       </p:sp>
@@ -1310,38 +1315,37 @@
           <a:p>
             <a:pPr lvl="0"/>
             <a:r>
-              <a:rPr lang="en-US" smtClean="0"/>
+              <a:rPr lang="en-US"/>
               <a:t>Click to edit Master text styles</a:t>
             </a:r>
           </a:p>
           <a:p>
             <a:pPr lvl="1"/>
             <a:r>
-              <a:rPr lang="en-US" smtClean="0"/>
+              <a:rPr lang="en-US"/>
               <a:t>Second level</a:t>
             </a:r>
           </a:p>
           <a:p>
             <a:pPr lvl="2"/>
             <a:r>
-              <a:rPr lang="en-US" smtClean="0"/>
+              <a:rPr lang="en-US"/>
               <a:t>Third level</a:t>
             </a:r>
           </a:p>
           <a:p>
             <a:pPr lvl="3"/>
             <a:r>
-              <a:rPr lang="en-US" smtClean="0"/>
+              <a:rPr lang="en-US"/>
               <a:t>Fourth level</a:t>
             </a:r>
           </a:p>
           <a:p>
             <a:pPr lvl="4"/>
             <a:r>
-              <a:rPr lang="en-US" smtClean="0"/>
+              <a:rPr lang="en-US"/>
               <a:t>Fifth level</a:t>
             </a:r>
-            <a:endParaRPr lang="en-US"/>
           </a:p>
         </p:txBody>
       </p:sp>
@@ -1362,7 +1366,7 @@
           <a:p>
             <a:fld id="{5BCAD085-E8A6-8845-BD4E-CB4CCA059FC4}" type="datetimeFigureOut">
               <a:rPr lang="en-US" smtClean="0"/>
-              <a:t>1/27/13</a:t>
+              <a:t>4/23/2026</a:t>
             </a:fld>
             <a:endParaRPr lang="en-US"/>
           </a:p>
@@ -1460,10 +1464,9 @@
           </a:lstStyle>
           <a:p>
             <a:r>
-              <a:rPr lang="en-US" smtClean="0"/>
+              <a:rPr lang="en-US"/>
               <a:t>Click to edit Master title style</a:t>
             </a:r>
-            <a:endParaRPr lang="en-US"/>
           </a:p>
         </p:txBody>
       </p:sp>
@@ -1526,7 +1529,7 @@
           <a:p>
             <a:pPr lvl="0"/>
             <a:r>
-              <a:rPr lang="en-US" smtClean="0"/>
+              <a:rPr lang="en-US"/>
               <a:t>Click to edit Master text styles</a:t>
             </a:r>
           </a:p>
@@ -1582,38 +1585,37 @@
           <a:p>
             <a:pPr lvl="0"/>
             <a:r>
-              <a:rPr lang="en-US" smtClean="0"/>
+              <a:rPr lang="en-US"/>
               <a:t>Click to edit Master text styles</a:t>
             </a:r>
           </a:p>
           <a:p>
             <a:pPr lvl="1"/>
             <a:r>
-              <a:rPr lang="en-US" smtClean="0"/>
+              <a:rPr lang="en-US"/>
               <a:t>Second level</a:t>
             </a:r>
           </a:p>
           <a:p>
             <a:pPr lvl="2"/>
             <a:r>
-              <a:rPr lang="en-US" smtClean="0"/>
+              <a:rPr lang="en-US"/>
               <a:t>Third level</a:t>
             </a:r>
           </a:p>
           <a:p>
             <a:pPr lvl="3"/>
             <a:r>
-              <a:rPr lang="en-US" smtClean="0"/>
+              <a:rPr lang="en-US"/>
               <a:t>Fourth level</a:t>
             </a:r>
           </a:p>
           <a:p>
             <a:pPr lvl="4"/>
             <a:r>
-              <a:rPr lang="en-US" smtClean="0"/>
+              <a:rPr lang="en-US"/>
               <a:t>Fifth level</a:t>
             </a:r>
-            <a:endParaRPr lang="en-US"/>
           </a:p>
         </p:txBody>
       </p:sp>
@@ -1676,7 +1678,7 @@
           <a:p>
             <a:pPr lvl="0"/>
             <a:r>
-              <a:rPr lang="en-US" smtClean="0"/>
+              <a:rPr lang="en-US"/>
               <a:t>Click to edit Master text styles</a:t>
             </a:r>
           </a:p>
@@ -1732,38 +1734,37 @@
           <a:p>
             <a:pPr lvl="0"/>
             <a:r>
-              <a:rPr lang="en-US" smtClean="0"/>
+              <a:rPr lang="en-US"/>
               <a:t>Click to edit Master text styles</a:t>
             </a:r>
           </a:p>
           <a:p>
             <a:pPr lvl="1"/>
             <a:r>
-              <a:rPr lang="en-US" smtClean="0"/>
+              <a:rPr lang="en-US"/>
               <a:t>Second level</a:t>
             </a:r>
           </a:p>
           <a:p>
             <a:pPr lvl="2"/>
             <a:r>
-              <a:rPr lang="en-US" smtClean="0"/>
+              <a:rPr lang="en-US"/>
               <a:t>Third level</a:t>
             </a:r>
           </a:p>
           <a:p>
             <a:pPr lvl="3"/>
             <a:r>
-              <a:rPr lang="en-US" smtClean="0"/>
+              <a:rPr lang="en-US"/>
               <a:t>Fourth level</a:t>
             </a:r>
           </a:p>
           <a:p>
             <a:pPr lvl="4"/>
             <a:r>
-              <a:rPr lang="en-US" smtClean="0"/>
+              <a:rPr lang="en-US"/>
               <a:t>Fifth level</a:t>
             </a:r>
-            <a:endParaRPr lang="en-US"/>
           </a:p>
         </p:txBody>
       </p:sp>
@@ -1784,7 +1785,7 @@
           <a:p>
             <a:fld id="{5BCAD085-E8A6-8845-BD4E-CB4CCA059FC4}" type="datetimeFigureOut">
               <a:rPr lang="en-US" smtClean="0"/>
-              <a:t>1/27/13</a:t>
+              <a:t>4/23/2026</a:t>
             </a:fld>
             <a:endParaRPr lang="en-US"/>
           </a:p>
@@ -1878,10 +1879,9 @@
           <a:lstStyle/>
           <a:p>
             <a:r>
-              <a:rPr lang="en-US" smtClean="0"/>
+              <a:rPr lang="en-US"/>
               <a:t>Click to edit Master title style</a:t>
             </a:r>
-            <a:endParaRPr lang="en-US"/>
           </a:p>
         </p:txBody>
       </p:sp>
@@ -1902,7 +1902,7 @@
           <a:p>
             <a:fld id="{5BCAD085-E8A6-8845-BD4E-CB4CCA059FC4}" type="datetimeFigureOut">
               <a:rPr lang="en-US" smtClean="0"/>
-              <a:t>1/27/13</a:t>
+              <a:t>4/23/2026</a:t>
             </a:fld>
             <a:endParaRPr lang="en-US"/>
           </a:p>
@@ -1997,7 +1997,7 @@
           <a:p>
             <a:fld id="{5BCAD085-E8A6-8845-BD4E-CB4CCA059FC4}" type="datetimeFigureOut">
               <a:rPr lang="en-US" smtClean="0"/>
-              <a:t>1/27/13</a:t>
+              <a:t>4/23/2026</a:t>
             </a:fld>
             <a:endParaRPr lang="en-US"/>
           </a:p>
@@ -2100,10 +2100,9 @@
           </a:lstStyle>
           <a:p>
             <a:r>
-              <a:rPr lang="en-US" smtClean="0"/>
+              <a:rPr lang="en-US"/>
               <a:t>Click to edit Master title style</a:t>
             </a:r>
-            <a:endParaRPr lang="en-US"/>
           </a:p>
         </p:txBody>
       </p:sp>
@@ -2157,38 +2156,37 @@
           <a:p>
             <a:pPr lvl="0"/>
             <a:r>
-              <a:rPr lang="en-US" smtClean="0"/>
+              <a:rPr lang="en-US"/>
               <a:t>Click to edit Master text styles</a:t>
             </a:r>
           </a:p>
           <a:p>
             <a:pPr lvl="1"/>
             <a:r>
-              <a:rPr lang="en-US" smtClean="0"/>
+              <a:rPr lang="en-US"/>
               <a:t>Second level</a:t>
             </a:r>
           </a:p>
           <a:p>
             <a:pPr lvl="2"/>
             <a:r>
-              <a:rPr lang="en-US" smtClean="0"/>
+              <a:rPr lang="en-US"/>
               <a:t>Third level</a:t>
             </a:r>
           </a:p>
           <a:p>
             <a:pPr lvl="3"/>
             <a:r>
-              <a:rPr lang="en-US" smtClean="0"/>
+              <a:rPr lang="en-US"/>
               <a:t>Fourth level</a:t>
             </a:r>
           </a:p>
           <a:p>
             <a:pPr lvl="4"/>
             <a:r>
-              <a:rPr lang="en-US" smtClean="0"/>
+              <a:rPr lang="en-US"/>
               <a:t>Fifth level</a:t>
             </a:r>
-            <a:endParaRPr lang="en-US"/>
           </a:p>
         </p:txBody>
       </p:sp>
@@ -2251,7 +2249,7 @@
           <a:p>
             <a:pPr lvl="0"/>
             <a:r>
-              <a:rPr lang="en-US" smtClean="0"/>
+              <a:rPr lang="en-US"/>
               <a:t>Click to edit Master text styles</a:t>
             </a:r>
           </a:p>
@@ -2274,7 +2272,7 @@
           <a:p>
             <a:fld id="{5BCAD085-E8A6-8845-BD4E-CB4CCA059FC4}" type="datetimeFigureOut">
               <a:rPr lang="en-US" smtClean="0"/>
-              <a:t>1/27/13</a:t>
+              <a:t>4/23/2026</a:t>
             </a:fld>
             <a:endParaRPr lang="en-US"/>
           </a:p>
@@ -2377,10 +2375,9 @@
           </a:lstStyle>
           <a:p>
             <a:r>
-              <a:rPr lang="en-US" smtClean="0"/>
+              <a:rPr lang="en-US"/>
               <a:t>Click to edit Master title style</a:t>
             </a:r>
-            <a:endParaRPr lang="en-US"/>
           </a:p>
         </p:txBody>
       </p:sp>
@@ -2504,7 +2501,7 @@
           <a:p>
             <a:pPr lvl="0"/>
             <a:r>
-              <a:rPr lang="en-US" smtClean="0"/>
+              <a:rPr lang="en-US"/>
               <a:t>Click to edit Master text styles</a:t>
             </a:r>
           </a:p>
@@ -2527,7 +2524,7 @@
           <a:p>
             <a:fld id="{5BCAD085-E8A6-8845-BD4E-CB4CCA059FC4}" type="datetimeFigureOut">
               <a:rPr lang="en-US" smtClean="0"/>
-              <a:t>1/27/13</a:t>
+              <a:t>4/23/2026</a:t>
             </a:fld>
             <a:endParaRPr lang="en-US"/>
           </a:p>
@@ -2636,10 +2633,9 @@
           <a:lstStyle/>
           <a:p>
             <a:r>
-              <a:rPr lang="en-US" smtClean="0"/>
+              <a:rPr lang="en-US"/>
               <a:t>Click to edit Master title style</a:t>
             </a:r>
-            <a:endParaRPr lang="en-US"/>
           </a:p>
         </p:txBody>
       </p:sp>
@@ -2670,38 +2666,37 @@
           <a:p>
             <a:pPr lvl="0"/>
             <a:r>
-              <a:rPr lang="en-US" smtClean="0"/>
+              <a:rPr lang="en-US"/>
               <a:t>Click to edit Master text styles</a:t>
             </a:r>
           </a:p>
           <a:p>
             <a:pPr lvl="1"/>
             <a:r>
-              <a:rPr lang="en-US" smtClean="0"/>
+              <a:rPr lang="en-US"/>
               <a:t>Second level</a:t>
             </a:r>
           </a:p>
           <a:p>
             <a:pPr lvl="2"/>
             <a:r>
-              <a:rPr lang="en-US" smtClean="0"/>
+              <a:rPr lang="en-US"/>
               <a:t>Third level</a:t>
             </a:r>
           </a:p>
           <a:p>
             <a:pPr lvl="3"/>
             <a:r>
-              <a:rPr lang="en-US" smtClean="0"/>
+              <a:rPr lang="en-US"/>
               <a:t>Fourth level</a:t>
             </a:r>
           </a:p>
           <a:p>
             <a:pPr lvl="4"/>
             <a:r>
-              <a:rPr lang="en-US" smtClean="0"/>
+              <a:rPr lang="en-US"/>
               <a:t>Fifth level</a:t>
             </a:r>
-            <a:endParaRPr lang="en-US"/>
           </a:p>
         </p:txBody>
       </p:sp>
@@ -2740,7 +2735,7 @@
           <a:p>
             <a:fld id="{5BCAD085-E8A6-8845-BD4E-CB4CCA059FC4}" type="datetimeFigureOut">
               <a:rPr lang="en-US" smtClean="0"/>
-              <a:t>1/27/13</a:t>
+              <a:t>4/23/2026</a:t>
             </a:fld>
             <a:endParaRPr lang="en-US"/>
           </a:p>
@@ -3099,7 +3094,7 @@
 </file>
 
 <file path=ppt/slides/slide1.xml><?xml version="1.0" encoding="utf-8"?>
-<p:sld xmlns:a="http://schemas.openxmlformats.org/drawingml/2006/main" xmlns:p="http://schemas.openxmlformats.org/presentationml/2006/main" xmlns:r="http://schemas.openxmlformats.org/officeDocument/2006/relationships">
+<p:sld xmlns:a="http://schemas.openxmlformats.org/drawingml/2006/main" xmlns:r="http://schemas.openxmlformats.org/officeDocument/2006/relationships" xmlns:p="http://schemas.openxmlformats.org/presentationml/2006/main">
   <p:cSld>
     <p:spTree>
       <p:nvGrpSpPr>
@@ -3107,7 +3102,14 @@
         <p:cNvGrpSpPr/>
         <p:nvPr/>
       </p:nvGrpSpPr>
-      <p:grpSpPr/>
+      <p:grpSpPr>
+        <a:xfrm>
+          <a:off x="0" y="0"/>
+          <a:ext cx="0" cy="0"/>
+          <a:chOff x="0" y="0"/>
+          <a:chExt cx="0" cy="0"/>
+        </a:xfrm>
+      </p:grpSpPr>
       <p:sp>
         <p:nvSpPr>
           <p:cNvPr id="2" name="Rectangle 1"/>
@@ -3148,6 +3150,7 @@
           <a:lstStyle/>
           <a:p>
             <a:pPr algn="ctr"/>
+            <a:endParaRPr/>
           </a:p>
         </p:txBody>
       </p:sp>
@@ -3191,6 +3194,7 @@
           <a:lstStyle/>
           <a:p>
             <a:pPr algn="ctr"/>
+            <a:endParaRPr/>
           </a:p>
         </p:txBody>
       </p:sp>
@@ -3234,6 +3238,7 @@
           <a:lstStyle/>
           <a:p>
             <a:pPr algn="ctr"/>
+            <a:endParaRPr/>
           </a:p>
         </p:txBody>
       </p:sp>
@@ -3384,7 +3389,7 @@
 </file>
 
 <file path=ppt/slides/slide10.xml><?xml version="1.0" encoding="utf-8"?>
-<p:sld xmlns:a="http://schemas.openxmlformats.org/drawingml/2006/main" xmlns:p="http://schemas.openxmlformats.org/presentationml/2006/main" xmlns:r="http://schemas.openxmlformats.org/officeDocument/2006/relationships">
+<p:sld xmlns:a="http://schemas.openxmlformats.org/drawingml/2006/main" xmlns:r="http://schemas.openxmlformats.org/officeDocument/2006/relationships" xmlns:p="http://schemas.openxmlformats.org/presentationml/2006/main">
   <p:cSld>
     <p:spTree>
       <p:nvGrpSpPr>
@@ -3392,7 +3397,14 @@
         <p:cNvGrpSpPr/>
         <p:nvPr/>
       </p:nvGrpSpPr>
-      <p:grpSpPr/>
+      <p:grpSpPr>
+        <a:xfrm>
+          <a:off x="0" y="0"/>
+          <a:ext cx="0" cy="0"/>
+          <a:chOff x="0" y="0"/>
+          <a:chExt cx="0" cy="0"/>
+        </a:xfrm>
+      </p:grpSpPr>
       <p:sp>
         <p:nvSpPr>
           <p:cNvPr id="2" name="Rectangle 1"/>
@@ -3433,6 +3445,7 @@
           <a:lstStyle/>
           <a:p>
             <a:pPr algn="ctr"/>
+            <a:endParaRPr/>
           </a:p>
         </p:txBody>
       </p:sp>
@@ -3476,6 +3489,7 @@
           <a:lstStyle/>
           <a:p>
             <a:pPr algn="ctr"/>
+            <a:endParaRPr/>
           </a:p>
         </p:txBody>
       </p:sp>
@@ -3566,11 +3580,41 @@
                 <a:tableStyleId>{5C22544A-7EE6-4342-B048-85BDC9FD1C3A}</a:tableStyleId>
               </a:tblPr>
               <a:tblGrid>
-                <a:gridCol w="2304288"/>
-                <a:gridCol w="2304288"/>
-                <a:gridCol w="2304288"/>
-                <a:gridCol w="2304288"/>
-                <a:gridCol w="2304288"/>
+                <a:gridCol w="2304288">
+                  <a:extLst>
+                    <a:ext uri="{9D8B030D-6E8A-4147-A177-3AD203B41FA5}">
+                      <a16:colId xmlns:a16="http://schemas.microsoft.com/office/drawing/2014/main" val="20000"/>
+                    </a:ext>
+                  </a:extLst>
+                </a:gridCol>
+                <a:gridCol w="2304288">
+                  <a:extLst>
+                    <a:ext uri="{9D8B030D-6E8A-4147-A177-3AD203B41FA5}">
+                      <a16:colId xmlns:a16="http://schemas.microsoft.com/office/drawing/2014/main" val="20001"/>
+                    </a:ext>
+                  </a:extLst>
+                </a:gridCol>
+                <a:gridCol w="2304288">
+                  <a:extLst>
+                    <a:ext uri="{9D8B030D-6E8A-4147-A177-3AD203B41FA5}">
+                      <a16:colId xmlns:a16="http://schemas.microsoft.com/office/drawing/2014/main" val="20002"/>
+                    </a:ext>
+                  </a:extLst>
+                </a:gridCol>
+                <a:gridCol w="2304288">
+                  <a:extLst>
+                    <a:ext uri="{9D8B030D-6E8A-4147-A177-3AD203B41FA5}">
+                      <a16:colId xmlns:a16="http://schemas.microsoft.com/office/drawing/2014/main" val="20003"/>
+                    </a:ext>
+                  </a:extLst>
+                </a:gridCol>
+                <a:gridCol w="2304288">
+                  <a:extLst>
+                    <a:ext uri="{9D8B030D-6E8A-4147-A177-3AD203B41FA5}">
+                      <a16:colId xmlns:a16="http://schemas.microsoft.com/office/drawing/2014/main" val="20004"/>
+                    </a:ext>
+                  </a:extLst>
+                </a:gridCol>
               </a:tblGrid>
               <a:tr h="377190">
                 <a:tc>
@@ -3580,7 +3624,7 @@
                     <a:p>
                       <a:pPr algn="ctr"/>
                       <a:r>
-                        <a:rPr b="1" sz="1100">
+                        <a:rPr sz="1100" b="1">
                           <a:solidFill>
                             <a:srgbClr val="FFFFFF"/>
                           </a:solidFill>
@@ -3602,7 +3646,7 @@
                     <a:p>
                       <a:pPr algn="ctr"/>
                       <a:r>
-                        <a:rPr b="1" sz="1100">
+                        <a:rPr sz="1100" b="1">
                           <a:solidFill>
                             <a:srgbClr val="FFFFFF"/>
                           </a:solidFill>
@@ -3624,7 +3668,7 @@
                     <a:p>
                       <a:pPr algn="ctr"/>
                       <a:r>
-                        <a:rPr b="1" sz="1100">
+                        <a:rPr sz="1100" b="1">
                           <a:solidFill>
                             <a:srgbClr val="FFFFFF"/>
                           </a:solidFill>
@@ -3646,7 +3690,7 @@
                     <a:p>
                       <a:pPr algn="ctr"/>
                       <a:r>
-                        <a:rPr b="1" sz="1100">
+                        <a:rPr sz="1100" b="1">
                           <a:solidFill>
                             <a:srgbClr val="FFFFFF"/>
                           </a:solidFill>
@@ -3668,7 +3712,7 @@
                     <a:p>
                       <a:pPr algn="ctr"/>
                       <a:r>
-                        <a:rPr b="1" sz="1100">
+                        <a:rPr sz="1100" b="1">
                           <a:solidFill>
                             <a:srgbClr val="FFFFFF"/>
                           </a:solidFill>
@@ -3683,6 +3727,11 @@
                     </a:solidFill>
                   </a:tcPr>
                 </a:tc>
+                <a:extLst>
+                  <a:ext uri="{0D108BD9-81ED-4DB2-BD59-A6C34878D82A}">
+                    <a16:rowId xmlns:a16="http://schemas.microsoft.com/office/drawing/2014/main" val="10000"/>
+                  </a:ext>
+                </a:extLst>
               </a:tr>
               <a:tr h="377190">
                 <a:tc>
@@ -3795,6 +3844,11 @@
                     </a:solidFill>
                   </a:tcPr>
                 </a:tc>
+                <a:extLst>
+                  <a:ext uri="{0D108BD9-81ED-4DB2-BD59-A6C34878D82A}">
+                    <a16:rowId xmlns:a16="http://schemas.microsoft.com/office/drawing/2014/main" val="10001"/>
+                  </a:ext>
+                </a:extLst>
               </a:tr>
               <a:tr h="377190">
                 <a:tc>
@@ -3907,6 +3961,11 @@
                     </a:solidFill>
                   </a:tcPr>
                 </a:tc>
+                <a:extLst>
+                  <a:ext uri="{0D108BD9-81ED-4DB2-BD59-A6C34878D82A}">
+                    <a16:rowId xmlns:a16="http://schemas.microsoft.com/office/drawing/2014/main" val="10002"/>
+                  </a:ext>
+                </a:extLst>
               </a:tr>
               <a:tr h="377190">
                 <a:tc>
@@ -4019,6 +4078,11 @@
                     </a:solidFill>
                   </a:tcPr>
                 </a:tc>
+                <a:extLst>
+                  <a:ext uri="{0D108BD9-81ED-4DB2-BD59-A6C34878D82A}">
+                    <a16:rowId xmlns:a16="http://schemas.microsoft.com/office/drawing/2014/main" val="10003"/>
+                  </a:ext>
+                </a:extLst>
               </a:tr>
               <a:tr h="377190">
                 <a:tc>
@@ -4131,6 +4195,11 @@
                     </a:solidFill>
                   </a:tcPr>
                 </a:tc>
+                <a:extLst>
+                  <a:ext uri="{0D108BD9-81ED-4DB2-BD59-A6C34878D82A}">
+                    <a16:rowId xmlns:a16="http://schemas.microsoft.com/office/drawing/2014/main" val="10004"/>
+                  </a:ext>
+                </a:extLst>
               </a:tr>
               <a:tr h="377190">
                 <a:tc>
@@ -4243,6 +4312,11 @@
                     </a:solidFill>
                   </a:tcPr>
                 </a:tc>
+                <a:extLst>
+                  <a:ext uri="{0D108BD9-81ED-4DB2-BD59-A6C34878D82A}">
+                    <a16:rowId xmlns:a16="http://schemas.microsoft.com/office/drawing/2014/main" val="10005"/>
+                  </a:ext>
+                </a:extLst>
               </a:tr>
               <a:tr h="377190">
                 <a:tc>
@@ -4355,6 +4429,11 @@
                     </a:solidFill>
                   </a:tcPr>
                 </a:tc>
+                <a:extLst>
+                  <a:ext uri="{0D108BD9-81ED-4DB2-BD59-A6C34878D82A}">
+                    <a16:rowId xmlns:a16="http://schemas.microsoft.com/office/drawing/2014/main" val="10006"/>
+                  </a:ext>
+                </a:extLst>
               </a:tr>
               <a:tr h="377190">
                 <a:tc>
@@ -4452,7 +4531,7 @@
                     <a:p>
                       <a:pPr algn="ctr"/>
                       <a:r>
-                        <a:rPr sz="1100">
+                        <a:rPr sz="1100" dirty="0">
                           <a:solidFill>
                             <a:srgbClr val="1A1A2E"/>
                           </a:solidFill>
@@ -4467,6 +4546,11 @@
                     </a:solidFill>
                   </a:tcPr>
                 </a:tc>
+                <a:extLst>
+                  <a:ext uri="{0D108BD9-81ED-4DB2-BD59-A6C34878D82A}">
+                    <a16:rowId xmlns:a16="http://schemas.microsoft.com/office/drawing/2014/main" val="10007"/>
+                  </a:ext>
+                </a:extLst>
               </a:tr>
             </a:tbl>
           </a:graphicData>
@@ -4631,7 +4715,7 @@
 </file>
 
 <file path=ppt/slides/slide11.xml><?xml version="1.0" encoding="utf-8"?>
-<p:sld xmlns:a="http://schemas.openxmlformats.org/drawingml/2006/main" xmlns:p="http://schemas.openxmlformats.org/presentationml/2006/main" xmlns:r="http://schemas.openxmlformats.org/officeDocument/2006/relationships">
+<p:sld xmlns:a="http://schemas.openxmlformats.org/drawingml/2006/main" xmlns:r="http://schemas.openxmlformats.org/officeDocument/2006/relationships" xmlns:p="http://schemas.openxmlformats.org/presentationml/2006/main">
   <p:cSld>
     <p:spTree>
       <p:nvGrpSpPr>
@@ -4639,7 +4723,14 @@
         <p:cNvGrpSpPr/>
         <p:nvPr/>
       </p:nvGrpSpPr>
-      <p:grpSpPr/>
+      <p:grpSpPr>
+        <a:xfrm>
+          <a:off x="0" y="0"/>
+          <a:ext cx="0" cy="0"/>
+          <a:chOff x="0" y="0"/>
+          <a:chExt cx="0" cy="0"/>
+        </a:xfrm>
+      </p:grpSpPr>
       <p:sp>
         <p:nvSpPr>
           <p:cNvPr id="2" name="Rectangle 1"/>
@@ -4680,6 +4771,7 @@
           <a:lstStyle/>
           <a:p>
             <a:pPr algn="ctr"/>
+            <a:endParaRPr/>
           </a:p>
         </p:txBody>
       </p:sp>
@@ -4723,6 +4815,7 @@
           <a:lstStyle/>
           <a:p>
             <a:pPr algn="ctr"/>
+            <a:endParaRPr/>
           </a:p>
         </p:txBody>
       </p:sp>
@@ -4834,6 +4927,7 @@
           <a:lstStyle/>
           <a:p>
             <a:pPr algn="ctr"/>
+            <a:endParaRPr/>
           </a:p>
         </p:txBody>
       </p:sp>
@@ -4945,6 +5039,7 @@
           <a:lstStyle/>
           <a:p>
             <a:pPr algn="ctr"/>
+            <a:endParaRPr/>
           </a:p>
         </p:txBody>
       </p:sp>
@@ -5056,6 +5151,7 @@
           <a:lstStyle/>
           <a:p>
             <a:pPr algn="ctr"/>
+            <a:endParaRPr/>
           </a:p>
         </p:txBody>
       </p:sp>
@@ -5167,6 +5263,7 @@
           <a:lstStyle/>
           <a:p>
             <a:pPr algn="ctr"/>
+            <a:endParaRPr/>
           </a:p>
         </p:txBody>
       </p:sp>
@@ -5278,6 +5375,7 @@
           <a:lstStyle/>
           <a:p>
             <a:pPr algn="ctr"/>
+            <a:endParaRPr/>
           </a:p>
         </p:txBody>
       </p:sp>
@@ -5390,6 +5488,7 @@
           <a:lstStyle/>
           <a:p>
             <a:pPr algn="ctr"/>
+            <a:endParaRPr/>
           </a:p>
         </p:txBody>
       </p:sp>
@@ -5515,10 +5614,34 @@
                 <a:tableStyleId>{5C22544A-7EE6-4342-B048-85BDC9FD1C3A}</a:tableStyleId>
               </a:tblPr>
               <a:tblGrid>
-                <a:gridCol w="1485900"/>
-                <a:gridCol w="1485900"/>
-                <a:gridCol w="1485900"/>
-                <a:gridCol w="1485900"/>
+                <a:gridCol w="1485900">
+                  <a:extLst>
+                    <a:ext uri="{9D8B030D-6E8A-4147-A177-3AD203B41FA5}">
+                      <a16:colId xmlns:a16="http://schemas.microsoft.com/office/drawing/2014/main" val="20000"/>
+                    </a:ext>
+                  </a:extLst>
+                </a:gridCol>
+                <a:gridCol w="1485900">
+                  <a:extLst>
+                    <a:ext uri="{9D8B030D-6E8A-4147-A177-3AD203B41FA5}">
+                      <a16:colId xmlns:a16="http://schemas.microsoft.com/office/drawing/2014/main" val="20001"/>
+                    </a:ext>
+                  </a:extLst>
+                </a:gridCol>
+                <a:gridCol w="1485900">
+                  <a:extLst>
+                    <a:ext uri="{9D8B030D-6E8A-4147-A177-3AD203B41FA5}">
+                      <a16:colId xmlns:a16="http://schemas.microsoft.com/office/drawing/2014/main" val="20002"/>
+                    </a:ext>
+                  </a:extLst>
+                </a:gridCol>
+                <a:gridCol w="1485900">
+                  <a:extLst>
+                    <a:ext uri="{9D8B030D-6E8A-4147-A177-3AD203B41FA5}">
+                      <a16:colId xmlns:a16="http://schemas.microsoft.com/office/drawing/2014/main" val="20003"/>
+                    </a:ext>
+                  </a:extLst>
+                </a:gridCol>
               </a:tblGrid>
               <a:tr h="365760">
                 <a:tc>
@@ -5528,7 +5651,7 @@
                     <a:p>
                       <a:pPr algn="ctr"/>
                       <a:r>
-                        <a:rPr b="1" sz="1100">
+                        <a:rPr sz="1100" b="1">
                           <a:solidFill>
                             <a:srgbClr val="FFFFFF"/>
                           </a:solidFill>
@@ -5550,7 +5673,7 @@
                     <a:p>
                       <a:pPr algn="ctr"/>
                       <a:r>
-                        <a:rPr b="1" sz="1100">
+                        <a:rPr sz="1100" b="1">
                           <a:solidFill>
                             <a:srgbClr val="FFFFFF"/>
                           </a:solidFill>
@@ -5572,7 +5695,7 @@
                     <a:p>
                       <a:pPr algn="ctr"/>
                       <a:r>
-                        <a:rPr b="1" sz="1100">
+                        <a:rPr sz="1100" b="1">
                           <a:solidFill>
                             <a:srgbClr val="FFFFFF"/>
                           </a:solidFill>
@@ -5594,7 +5717,7 @@
                     <a:p>
                       <a:pPr algn="ctr"/>
                       <a:r>
-                        <a:rPr b="1" sz="1100">
+                        <a:rPr sz="1100" b="1">
                           <a:solidFill>
                             <a:srgbClr val="FFFFFF"/>
                           </a:solidFill>
@@ -5609,6 +5732,11 @@
                     </a:solidFill>
                   </a:tcPr>
                 </a:tc>
+                <a:extLst>
+                  <a:ext uri="{0D108BD9-81ED-4DB2-BD59-A6C34878D82A}">
+                    <a16:rowId xmlns:a16="http://schemas.microsoft.com/office/drawing/2014/main" val="10000"/>
+                  </a:ext>
+                </a:extLst>
               </a:tr>
               <a:tr h="365760">
                 <a:tc>
@@ -5699,6 +5827,11 @@
                     </a:solidFill>
                   </a:tcPr>
                 </a:tc>
+                <a:extLst>
+                  <a:ext uri="{0D108BD9-81ED-4DB2-BD59-A6C34878D82A}">
+                    <a16:rowId xmlns:a16="http://schemas.microsoft.com/office/drawing/2014/main" val="10001"/>
+                  </a:ext>
+                </a:extLst>
               </a:tr>
               <a:tr h="365760">
                 <a:tc>
@@ -5789,6 +5922,11 @@
                     </a:solidFill>
                   </a:tcPr>
                 </a:tc>
+                <a:extLst>
+                  <a:ext uri="{0D108BD9-81ED-4DB2-BD59-A6C34878D82A}">
+                    <a16:rowId xmlns:a16="http://schemas.microsoft.com/office/drawing/2014/main" val="10002"/>
+                  </a:ext>
+                </a:extLst>
               </a:tr>
               <a:tr h="365760">
                 <a:tc>
@@ -5879,6 +6017,11 @@
                     </a:solidFill>
                   </a:tcPr>
                 </a:tc>
+                <a:extLst>
+                  <a:ext uri="{0D108BD9-81ED-4DB2-BD59-A6C34878D82A}">
+                    <a16:rowId xmlns:a16="http://schemas.microsoft.com/office/drawing/2014/main" val="10003"/>
+                  </a:ext>
+                </a:extLst>
               </a:tr>
               <a:tr h="365760">
                 <a:tc>
@@ -5969,6 +6112,11 @@
                     </a:solidFill>
                   </a:tcPr>
                 </a:tc>
+                <a:extLst>
+                  <a:ext uri="{0D108BD9-81ED-4DB2-BD59-A6C34878D82A}">
+                    <a16:rowId xmlns:a16="http://schemas.microsoft.com/office/drawing/2014/main" val="10004"/>
+                  </a:ext>
+                </a:extLst>
               </a:tr>
             </a:tbl>
           </a:graphicData>
@@ -6100,7 +6248,7 @@
 </file>
 
 <file path=ppt/slides/slide12.xml><?xml version="1.0" encoding="utf-8"?>
-<p:sld xmlns:a="http://schemas.openxmlformats.org/drawingml/2006/main" xmlns:p="http://schemas.openxmlformats.org/presentationml/2006/main" xmlns:r="http://schemas.openxmlformats.org/officeDocument/2006/relationships">
+<p:sld xmlns:a="http://schemas.openxmlformats.org/drawingml/2006/main" xmlns:r="http://schemas.openxmlformats.org/officeDocument/2006/relationships" xmlns:p="http://schemas.openxmlformats.org/presentationml/2006/main">
   <p:cSld>
     <p:spTree>
       <p:nvGrpSpPr>
@@ -6108,7 +6256,14 @@
         <p:cNvGrpSpPr/>
         <p:nvPr/>
       </p:nvGrpSpPr>
-      <p:grpSpPr/>
+      <p:grpSpPr>
+        <a:xfrm>
+          <a:off x="0" y="0"/>
+          <a:ext cx="0" cy="0"/>
+          <a:chOff x="0" y="0"/>
+          <a:chExt cx="0" cy="0"/>
+        </a:xfrm>
+      </p:grpSpPr>
       <p:sp>
         <p:nvSpPr>
           <p:cNvPr id="2" name="Rectangle 1"/>
@@ -6149,6 +6304,7 @@
           <a:lstStyle/>
           <a:p>
             <a:pPr algn="ctr"/>
+            <a:endParaRPr/>
           </a:p>
         </p:txBody>
       </p:sp>
@@ -6192,6 +6348,7 @@
           <a:lstStyle/>
           <a:p>
             <a:pPr algn="ctr"/>
+            <a:endParaRPr/>
           </a:p>
         </p:txBody>
       </p:sp>
@@ -6282,12 +6439,48 @@
                 <a:tableStyleId>{5C22544A-7EE6-4342-B048-85BDC9FD1C3A}</a:tableStyleId>
               </a:tblPr>
               <a:tblGrid>
-                <a:gridCol w="1920240"/>
-                <a:gridCol w="1920240"/>
-                <a:gridCol w="1920240"/>
-                <a:gridCol w="1920240"/>
-                <a:gridCol w="1920240"/>
-                <a:gridCol w="1920240"/>
+                <a:gridCol w="1920240">
+                  <a:extLst>
+                    <a:ext uri="{9D8B030D-6E8A-4147-A177-3AD203B41FA5}">
+                      <a16:colId xmlns:a16="http://schemas.microsoft.com/office/drawing/2014/main" val="20000"/>
+                    </a:ext>
+                  </a:extLst>
+                </a:gridCol>
+                <a:gridCol w="1920240">
+                  <a:extLst>
+                    <a:ext uri="{9D8B030D-6E8A-4147-A177-3AD203B41FA5}">
+                      <a16:colId xmlns:a16="http://schemas.microsoft.com/office/drawing/2014/main" val="20001"/>
+                    </a:ext>
+                  </a:extLst>
+                </a:gridCol>
+                <a:gridCol w="1920240">
+                  <a:extLst>
+                    <a:ext uri="{9D8B030D-6E8A-4147-A177-3AD203B41FA5}">
+                      <a16:colId xmlns:a16="http://schemas.microsoft.com/office/drawing/2014/main" val="20002"/>
+                    </a:ext>
+                  </a:extLst>
+                </a:gridCol>
+                <a:gridCol w="1920240">
+                  <a:extLst>
+                    <a:ext uri="{9D8B030D-6E8A-4147-A177-3AD203B41FA5}">
+                      <a16:colId xmlns:a16="http://schemas.microsoft.com/office/drawing/2014/main" val="20003"/>
+                    </a:ext>
+                  </a:extLst>
+                </a:gridCol>
+                <a:gridCol w="1920240">
+                  <a:extLst>
+                    <a:ext uri="{9D8B030D-6E8A-4147-A177-3AD203B41FA5}">
+                      <a16:colId xmlns:a16="http://schemas.microsoft.com/office/drawing/2014/main" val="20004"/>
+                    </a:ext>
+                  </a:extLst>
+                </a:gridCol>
+                <a:gridCol w="1920240">
+                  <a:extLst>
+                    <a:ext uri="{9D8B030D-6E8A-4147-A177-3AD203B41FA5}">
+                      <a16:colId xmlns:a16="http://schemas.microsoft.com/office/drawing/2014/main" val="20005"/>
+                    </a:ext>
+                  </a:extLst>
+                </a:gridCol>
               </a:tblGrid>
               <a:tr h="489857">
                 <a:tc>
@@ -6297,13 +6490,18 @@
                     <a:p>
                       <a:pPr algn="ctr"/>
                       <a:r>
-                        <a:rPr b="1" sz="1100">
+                        <a:rPr sz="1100" b="1" dirty="0" err="1">
                           <a:solidFill>
                             <a:srgbClr val="FFFFFF"/>
                           </a:solidFill>
                         </a:rPr>
                         <a:t>변수</a:t>
                       </a:r>
+                      <a:endParaRPr sz="1100" b="1" dirty="0">
+                        <a:solidFill>
+                          <a:srgbClr val="FFFFFF"/>
+                        </a:solidFill>
+                      </a:endParaRPr>
                     </a:p>
                   </a:txBody>
                   <a:tcPr>
@@ -6319,7 +6517,7 @@
                     <a:p>
                       <a:pPr algn="ctr"/>
                       <a:r>
-                        <a:rPr b="1" sz="1100">
+                        <a:rPr sz="1100" b="1">
                           <a:solidFill>
                             <a:srgbClr val="FFFFFF"/>
                           </a:solidFill>
@@ -6341,7 +6539,7 @@
                     <a:p>
                       <a:pPr algn="ctr"/>
                       <a:r>
-                        <a:rPr b="1" sz="1100">
+                        <a:rPr sz="1100" b="1">
                           <a:solidFill>
                             <a:srgbClr val="FFFFFF"/>
                           </a:solidFill>
@@ -6363,7 +6561,7 @@
                     <a:p>
                       <a:pPr algn="ctr"/>
                       <a:r>
-                        <a:rPr b="1" sz="1100">
+                        <a:rPr sz="1100" b="1">
                           <a:solidFill>
                             <a:srgbClr val="FFFFFF"/>
                           </a:solidFill>
@@ -6385,7 +6583,7 @@
                     <a:p>
                       <a:pPr algn="ctr"/>
                       <a:r>
-                        <a:rPr b="1" sz="1100">
+                        <a:rPr sz="1100" b="1">
                           <a:solidFill>
                             <a:srgbClr val="FFFFFF"/>
                           </a:solidFill>
@@ -6407,7 +6605,7 @@
                     <a:p>
                       <a:pPr algn="ctr"/>
                       <a:r>
-                        <a:rPr b="1" sz="1100">
+                        <a:rPr sz="1100" b="1">
                           <a:solidFill>
                             <a:srgbClr val="FFFFFF"/>
                           </a:solidFill>
@@ -6422,6 +6620,11 @@
                     </a:solidFill>
                   </a:tcPr>
                 </a:tc>
+                <a:extLst>
+                  <a:ext uri="{0D108BD9-81ED-4DB2-BD59-A6C34878D82A}">
+                    <a16:rowId xmlns:a16="http://schemas.microsoft.com/office/drawing/2014/main" val="10000"/>
+                  </a:ext>
+                </a:extLst>
               </a:tr>
               <a:tr h="489857">
                 <a:tc>
@@ -6556,6 +6759,11 @@
                     </a:solidFill>
                   </a:tcPr>
                 </a:tc>
+                <a:extLst>
+                  <a:ext uri="{0D108BD9-81ED-4DB2-BD59-A6C34878D82A}">
+                    <a16:rowId xmlns:a16="http://schemas.microsoft.com/office/drawing/2014/main" val="10001"/>
+                  </a:ext>
+                </a:extLst>
               </a:tr>
               <a:tr h="489857">
                 <a:tc>
@@ -6690,6 +6898,11 @@
                     </a:solidFill>
                   </a:tcPr>
                 </a:tc>
+                <a:extLst>
+                  <a:ext uri="{0D108BD9-81ED-4DB2-BD59-A6C34878D82A}">
+                    <a16:rowId xmlns:a16="http://schemas.microsoft.com/office/drawing/2014/main" val="10002"/>
+                  </a:ext>
+                </a:extLst>
               </a:tr>
               <a:tr h="489857">
                 <a:tc>
@@ -6824,6 +7037,11 @@
                     </a:solidFill>
                   </a:tcPr>
                 </a:tc>
+                <a:extLst>
+                  <a:ext uri="{0D108BD9-81ED-4DB2-BD59-A6C34878D82A}">
+                    <a16:rowId xmlns:a16="http://schemas.microsoft.com/office/drawing/2014/main" val="10003"/>
+                  </a:ext>
+                </a:extLst>
               </a:tr>
               <a:tr h="489857">
                 <a:tc>
@@ -6958,6 +7176,11 @@
                     </a:solidFill>
                   </a:tcPr>
                 </a:tc>
+                <a:extLst>
+                  <a:ext uri="{0D108BD9-81ED-4DB2-BD59-A6C34878D82A}">
+                    <a16:rowId xmlns:a16="http://schemas.microsoft.com/office/drawing/2014/main" val="10004"/>
+                  </a:ext>
+                </a:extLst>
               </a:tr>
               <a:tr h="489857">
                 <a:tc>
@@ -7092,6 +7315,11 @@
                     </a:solidFill>
                   </a:tcPr>
                 </a:tc>
+                <a:extLst>
+                  <a:ext uri="{0D108BD9-81ED-4DB2-BD59-A6C34878D82A}">
+                    <a16:rowId xmlns:a16="http://schemas.microsoft.com/office/drawing/2014/main" val="10005"/>
+                  </a:ext>
+                </a:extLst>
               </a:tr>
               <a:tr h="489858">
                 <a:tc>
@@ -7211,7 +7439,7 @@
                     <a:p>
                       <a:pPr algn="ctr"/>
                       <a:r>
-                        <a:rPr sz="1100">
+                        <a:rPr sz="1100" dirty="0">
                           <a:solidFill>
                             <a:srgbClr val="1A1A2E"/>
                           </a:solidFill>
@@ -7226,6 +7454,11 @@
                     </a:solidFill>
                   </a:tcPr>
                 </a:tc>
+                <a:extLst>
+                  <a:ext uri="{0D108BD9-81ED-4DB2-BD59-A6C34878D82A}">
+                    <a16:rowId xmlns:a16="http://schemas.microsoft.com/office/drawing/2014/main" val="10006"/>
+                  </a:ext>
+                </a:extLst>
               </a:tr>
             </a:tbl>
           </a:graphicData>
@@ -7332,7 +7565,7 @@
 </file>
 
 <file path=ppt/slides/slide13.xml><?xml version="1.0" encoding="utf-8"?>
-<p:sld xmlns:a="http://schemas.openxmlformats.org/drawingml/2006/main" xmlns:p="http://schemas.openxmlformats.org/presentationml/2006/main" xmlns:r="http://schemas.openxmlformats.org/officeDocument/2006/relationships">
+<p:sld xmlns:a="http://schemas.openxmlformats.org/drawingml/2006/main" xmlns:r="http://schemas.openxmlformats.org/officeDocument/2006/relationships" xmlns:p="http://schemas.openxmlformats.org/presentationml/2006/main">
   <p:cSld>
     <p:spTree>
       <p:nvGrpSpPr>
@@ -7340,7 +7573,14 @@
         <p:cNvGrpSpPr/>
         <p:nvPr/>
       </p:nvGrpSpPr>
-      <p:grpSpPr/>
+      <p:grpSpPr>
+        <a:xfrm>
+          <a:off x="0" y="0"/>
+          <a:ext cx="0" cy="0"/>
+          <a:chOff x="0" y="0"/>
+          <a:chExt cx="0" cy="0"/>
+        </a:xfrm>
+      </p:grpSpPr>
       <p:sp>
         <p:nvSpPr>
           <p:cNvPr id="2" name="Rectangle 1"/>
@@ -7381,6 +7621,7 @@
           <a:lstStyle/>
           <a:p>
             <a:pPr algn="ctr"/>
+            <a:endParaRPr/>
           </a:p>
         </p:txBody>
       </p:sp>
@@ -7424,6 +7665,7 @@
           <a:lstStyle/>
           <a:p>
             <a:pPr algn="ctr"/>
+            <a:endParaRPr/>
           </a:p>
         </p:txBody>
       </p:sp>
@@ -7514,11 +7756,41 @@
                 <a:tableStyleId>{5C22544A-7EE6-4342-B048-85BDC9FD1C3A}</a:tableStyleId>
               </a:tblPr>
               <a:tblGrid>
-                <a:gridCol w="2304288"/>
-                <a:gridCol w="2304288"/>
-                <a:gridCol w="2304288"/>
-                <a:gridCol w="2304288"/>
-                <a:gridCol w="2304288"/>
+                <a:gridCol w="2304288">
+                  <a:extLst>
+                    <a:ext uri="{9D8B030D-6E8A-4147-A177-3AD203B41FA5}">
+                      <a16:colId xmlns:a16="http://schemas.microsoft.com/office/drawing/2014/main" val="20000"/>
+                    </a:ext>
+                  </a:extLst>
+                </a:gridCol>
+                <a:gridCol w="2304288">
+                  <a:extLst>
+                    <a:ext uri="{9D8B030D-6E8A-4147-A177-3AD203B41FA5}">
+                      <a16:colId xmlns:a16="http://schemas.microsoft.com/office/drawing/2014/main" val="20001"/>
+                    </a:ext>
+                  </a:extLst>
+                </a:gridCol>
+                <a:gridCol w="2304288">
+                  <a:extLst>
+                    <a:ext uri="{9D8B030D-6E8A-4147-A177-3AD203B41FA5}">
+                      <a16:colId xmlns:a16="http://schemas.microsoft.com/office/drawing/2014/main" val="20002"/>
+                    </a:ext>
+                  </a:extLst>
+                </a:gridCol>
+                <a:gridCol w="2304288">
+                  <a:extLst>
+                    <a:ext uri="{9D8B030D-6E8A-4147-A177-3AD203B41FA5}">
+                      <a16:colId xmlns:a16="http://schemas.microsoft.com/office/drawing/2014/main" val="20003"/>
+                    </a:ext>
+                  </a:extLst>
+                </a:gridCol>
+                <a:gridCol w="2304288">
+                  <a:extLst>
+                    <a:ext uri="{9D8B030D-6E8A-4147-A177-3AD203B41FA5}">
+                      <a16:colId xmlns:a16="http://schemas.microsoft.com/office/drawing/2014/main" val="20004"/>
+                    </a:ext>
+                  </a:extLst>
+                </a:gridCol>
               </a:tblGrid>
               <a:tr h="377190">
                 <a:tc>
@@ -7528,7 +7800,7 @@
                     <a:p>
                       <a:pPr algn="ctr"/>
                       <a:r>
-                        <a:rPr b="1" sz="1100">
+                        <a:rPr sz="1100" b="1">
                           <a:solidFill>
                             <a:srgbClr val="FFFFFF"/>
                           </a:solidFill>
@@ -7550,7 +7822,7 @@
                     <a:p>
                       <a:pPr algn="ctr"/>
                       <a:r>
-                        <a:rPr b="1" sz="1100">
+                        <a:rPr sz="1100" b="1">
                           <a:solidFill>
                             <a:srgbClr val="FFFFFF"/>
                           </a:solidFill>
@@ -7572,7 +7844,7 @@
                     <a:p>
                       <a:pPr algn="ctr"/>
                       <a:r>
-                        <a:rPr b="1" sz="1100">
+                        <a:rPr sz="1100" b="1">
                           <a:solidFill>
                             <a:srgbClr val="FFFFFF"/>
                           </a:solidFill>
@@ -7594,7 +7866,7 @@
                     <a:p>
                       <a:pPr algn="ctr"/>
                       <a:r>
-                        <a:rPr b="1" sz="1100">
+                        <a:rPr sz="1100" b="1">
                           <a:solidFill>
                             <a:srgbClr val="FFFFFF"/>
                           </a:solidFill>
@@ -7616,7 +7888,7 @@
                     <a:p>
                       <a:pPr algn="ctr"/>
                       <a:r>
-                        <a:rPr b="1" sz="1100">
+                        <a:rPr sz="1100" b="1">
                           <a:solidFill>
                             <a:srgbClr val="FFFFFF"/>
                           </a:solidFill>
@@ -7631,6 +7903,11 @@
                     </a:solidFill>
                   </a:tcPr>
                 </a:tc>
+                <a:extLst>
+                  <a:ext uri="{0D108BD9-81ED-4DB2-BD59-A6C34878D82A}">
+                    <a16:rowId xmlns:a16="http://schemas.microsoft.com/office/drawing/2014/main" val="10000"/>
+                  </a:ext>
+                </a:extLst>
               </a:tr>
               <a:tr h="377190">
                 <a:tc>
@@ -7743,6 +8020,11 @@
                     </a:solidFill>
                   </a:tcPr>
                 </a:tc>
+                <a:extLst>
+                  <a:ext uri="{0D108BD9-81ED-4DB2-BD59-A6C34878D82A}">
+                    <a16:rowId xmlns:a16="http://schemas.microsoft.com/office/drawing/2014/main" val="10001"/>
+                  </a:ext>
+                </a:extLst>
               </a:tr>
               <a:tr h="377190">
                 <a:tc>
@@ -7855,6 +8137,11 @@
                     </a:solidFill>
                   </a:tcPr>
                 </a:tc>
+                <a:extLst>
+                  <a:ext uri="{0D108BD9-81ED-4DB2-BD59-A6C34878D82A}">
+                    <a16:rowId xmlns:a16="http://schemas.microsoft.com/office/drawing/2014/main" val="10002"/>
+                  </a:ext>
+                </a:extLst>
               </a:tr>
               <a:tr h="377190">
                 <a:tc>
@@ -7967,6 +8254,11 @@
                     </a:solidFill>
                   </a:tcPr>
                 </a:tc>
+                <a:extLst>
+                  <a:ext uri="{0D108BD9-81ED-4DB2-BD59-A6C34878D82A}">
+                    <a16:rowId xmlns:a16="http://schemas.microsoft.com/office/drawing/2014/main" val="10003"/>
+                  </a:ext>
+                </a:extLst>
               </a:tr>
               <a:tr h="377190">
                 <a:tc>
@@ -8079,6 +8371,11 @@
                     </a:solidFill>
                   </a:tcPr>
                 </a:tc>
+                <a:extLst>
+                  <a:ext uri="{0D108BD9-81ED-4DB2-BD59-A6C34878D82A}">
+                    <a16:rowId xmlns:a16="http://schemas.microsoft.com/office/drawing/2014/main" val="10004"/>
+                  </a:ext>
+                </a:extLst>
               </a:tr>
               <a:tr h="377190">
                 <a:tc>
@@ -8191,6 +8488,11 @@
                     </a:solidFill>
                   </a:tcPr>
                 </a:tc>
+                <a:extLst>
+                  <a:ext uri="{0D108BD9-81ED-4DB2-BD59-A6C34878D82A}">
+                    <a16:rowId xmlns:a16="http://schemas.microsoft.com/office/drawing/2014/main" val="10005"/>
+                  </a:ext>
+                </a:extLst>
               </a:tr>
               <a:tr h="377190">
                 <a:tc>
@@ -8303,6 +8605,11 @@
                     </a:solidFill>
                   </a:tcPr>
                 </a:tc>
+                <a:extLst>
+                  <a:ext uri="{0D108BD9-81ED-4DB2-BD59-A6C34878D82A}">
+                    <a16:rowId xmlns:a16="http://schemas.microsoft.com/office/drawing/2014/main" val="10006"/>
+                  </a:ext>
+                </a:extLst>
               </a:tr>
               <a:tr h="377190">
                 <a:tc>
@@ -8415,6 +8722,11 @@
                     </a:solidFill>
                   </a:tcPr>
                 </a:tc>
+                <a:extLst>
+                  <a:ext uri="{0D108BD9-81ED-4DB2-BD59-A6C34878D82A}">
+                    <a16:rowId xmlns:a16="http://schemas.microsoft.com/office/drawing/2014/main" val="10007"/>
+                  </a:ext>
+                </a:extLst>
               </a:tr>
             </a:tbl>
           </a:graphicData>
@@ -8579,7 +8891,7 @@
 </file>
 
 <file path=ppt/slides/slide14.xml><?xml version="1.0" encoding="utf-8"?>
-<p:sld xmlns:a="http://schemas.openxmlformats.org/drawingml/2006/main" xmlns:p="http://schemas.openxmlformats.org/presentationml/2006/main" xmlns:r="http://schemas.openxmlformats.org/officeDocument/2006/relationships">
+<p:sld xmlns:a="http://schemas.openxmlformats.org/drawingml/2006/main" xmlns:r="http://schemas.openxmlformats.org/officeDocument/2006/relationships" xmlns:p="http://schemas.openxmlformats.org/presentationml/2006/main">
   <p:cSld>
     <p:spTree>
       <p:nvGrpSpPr>
@@ -8587,7 +8899,14 @@
         <p:cNvGrpSpPr/>
         <p:nvPr/>
       </p:nvGrpSpPr>
-      <p:grpSpPr/>
+      <p:grpSpPr>
+        <a:xfrm>
+          <a:off x="0" y="0"/>
+          <a:ext cx="0" cy="0"/>
+          <a:chOff x="0" y="0"/>
+          <a:chExt cx="0" cy="0"/>
+        </a:xfrm>
+      </p:grpSpPr>
       <p:sp>
         <p:nvSpPr>
           <p:cNvPr id="2" name="Rectangle 1"/>
@@ -8628,6 +8947,7 @@
           <a:lstStyle/>
           <a:p>
             <a:pPr algn="ctr"/>
+            <a:endParaRPr/>
           </a:p>
         </p:txBody>
       </p:sp>
@@ -8671,6 +8991,7 @@
           <a:lstStyle/>
           <a:p>
             <a:pPr algn="ctr"/>
+            <a:endParaRPr/>
           </a:p>
         </p:txBody>
       </p:sp>
@@ -8782,6 +9103,7 @@
           <a:lstStyle/>
           <a:p>
             <a:pPr algn="ctr"/>
+            <a:endParaRPr/>
           </a:p>
         </p:txBody>
       </p:sp>
@@ -8893,6 +9215,7 @@
           <a:lstStyle/>
           <a:p>
             <a:pPr algn="ctr"/>
+            <a:endParaRPr/>
           </a:p>
         </p:txBody>
       </p:sp>
@@ -9004,6 +9327,7 @@
           <a:lstStyle/>
           <a:p>
             <a:pPr algn="ctr"/>
+            <a:endParaRPr/>
           </a:p>
         </p:txBody>
       </p:sp>
@@ -9115,6 +9439,7 @@
           <a:lstStyle/>
           <a:p>
             <a:pPr algn="ctr"/>
+            <a:endParaRPr/>
           </a:p>
         </p:txBody>
       </p:sp>
@@ -9226,6 +9551,7 @@
           <a:lstStyle/>
           <a:p>
             <a:pPr algn="ctr"/>
+            <a:endParaRPr/>
           </a:p>
         </p:txBody>
       </p:sp>
@@ -9337,6 +9663,7 @@
           <a:lstStyle/>
           <a:p>
             <a:pPr algn="ctr"/>
+            <a:endParaRPr/>
           </a:p>
         </p:txBody>
       </p:sp>
@@ -9452,7 +9779,7 @@
         </p:nvGraphicFramePr>
         <p:xfrm>
           <a:off x="320040" y="3749039"/>
-          <a:ext cx="6400800" cy="1508760"/>
+          <a:ext cx="6400800" cy="1558290"/>
         </p:xfrm>
         <a:graphic>
           <a:graphicData uri="http://schemas.openxmlformats.org/drawingml/2006/table">
@@ -9461,9 +9788,27 @@
                 <a:tableStyleId>{5C22544A-7EE6-4342-B048-85BDC9FD1C3A}</a:tableStyleId>
               </a:tblPr>
               <a:tblGrid>
-                <a:gridCol w="2133600"/>
-                <a:gridCol w="2133600"/>
-                <a:gridCol w="2133600"/>
+                <a:gridCol w="2133600">
+                  <a:extLst>
+                    <a:ext uri="{9D8B030D-6E8A-4147-A177-3AD203B41FA5}">
+                      <a16:colId xmlns:a16="http://schemas.microsoft.com/office/drawing/2014/main" val="20000"/>
+                    </a:ext>
+                  </a:extLst>
+                </a:gridCol>
+                <a:gridCol w="2133600">
+                  <a:extLst>
+                    <a:ext uri="{9D8B030D-6E8A-4147-A177-3AD203B41FA5}">
+                      <a16:colId xmlns:a16="http://schemas.microsoft.com/office/drawing/2014/main" val="20001"/>
+                    </a:ext>
+                  </a:extLst>
+                </a:gridCol>
+                <a:gridCol w="2133600">
+                  <a:extLst>
+                    <a:ext uri="{9D8B030D-6E8A-4147-A177-3AD203B41FA5}">
+                      <a16:colId xmlns:a16="http://schemas.microsoft.com/office/drawing/2014/main" val="20002"/>
+                    </a:ext>
+                  </a:extLst>
+                </a:gridCol>
               </a:tblGrid>
               <a:tr h="377190">
                 <a:tc>
@@ -9473,7 +9818,7 @@
                     <a:p>
                       <a:pPr algn="ctr"/>
                       <a:r>
-                        <a:rPr b="1" sz="1100">
+                        <a:rPr sz="1100" b="1">
                           <a:solidFill>
                             <a:srgbClr val="FFFFFF"/>
                           </a:solidFill>
@@ -9495,7 +9840,7 @@
                     <a:p>
                       <a:pPr algn="ctr"/>
                       <a:r>
-                        <a:rPr b="1" sz="1100">
+                        <a:rPr sz="1100" b="1">
                           <a:solidFill>
                             <a:srgbClr val="FFFFFF"/>
                           </a:solidFill>
@@ -9517,7 +9862,7 @@
                     <a:p>
                       <a:pPr algn="ctr"/>
                       <a:r>
-                        <a:rPr b="1" sz="1100">
+                        <a:rPr sz="1100" b="1">
                           <a:solidFill>
                             <a:srgbClr val="FFFFFF"/>
                           </a:solidFill>
@@ -9532,6 +9877,11 @@
                     </a:solidFill>
                   </a:tcPr>
                 </a:tc>
+                <a:extLst>
+                  <a:ext uri="{0D108BD9-81ED-4DB2-BD59-A6C34878D82A}">
+                    <a16:rowId xmlns:a16="http://schemas.microsoft.com/office/drawing/2014/main" val="10000"/>
+                  </a:ext>
+                </a:extLst>
               </a:tr>
               <a:tr h="377190">
                 <a:tc>
@@ -9600,6 +9950,11 @@
                     </a:solidFill>
                   </a:tcPr>
                 </a:tc>
+                <a:extLst>
+                  <a:ext uri="{0D108BD9-81ED-4DB2-BD59-A6C34878D82A}">
+                    <a16:rowId xmlns:a16="http://schemas.microsoft.com/office/drawing/2014/main" val="10001"/>
+                  </a:ext>
+                </a:extLst>
               </a:tr>
               <a:tr h="377190">
                 <a:tc>
@@ -9668,6 +10023,11 @@
                     </a:solidFill>
                   </a:tcPr>
                 </a:tc>
+                <a:extLst>
+                  <a:ext uri="{0D108BD9-81ED-4DB2-BD59-A6C34878D82A}">
+                    <a16:rowId xmlns:a16="http://schemas.microsoft.com/office/drawing/2014/main" val="10002"/>
+                  </a:ext>
+                </a:extLst>
               </a:tr>
               <a:tr h="377190">
                 <a:tc>
@@ -9736,6 +10096,11 @@
                     </a:solidFill>
                   </a:tcPr>
                 </a:tc>
+                <a:extLst>
+                  <a:ext uri="{0D108BD9-81ED-4DB2-BD59-A6C34878D82A}">
+                    <a16:rowId xmlns:a16="http://schemas.microsoft.com/office/drawing/2014/main" val="10003"/>
+                  </a:ext>
+                </a:extLst>
               </a:tr>
             </a:tbl>
           </a:graphicData>
@@ -9866,7 +10231,7 @@
 </file>
 
 <file path=ppt/slides/slide15.xml><?xml version="1.0" encoding="utf-8"?>
-<p:sld xmlns:a="http://schemas.openxmlformats.org/drawingml/2006/main" xmlns:p="http://schemas.openxmlformats.org/presentationml/2006/main" xmlns:r="http://schemas.openxmlformats.org/officeDocument/2006/relationships">
+<p:sld xmlns:a="http://schemas.openxmlformats.org/drawingml/2006/main" xmlns:r="http://schemas.openxmlformats.org/officeDocument/2006/relationships" xmlns:p="http://schemas.openxmlformats.org/presentationml/2006/main">
   <p:cSld>
     <p:spTree>
       <p:nvGrpSpPr>
@@ -9874,7 +10239,14 @@
         <p:cNvGrpSpPr/>
         <p:nvPr/>
       </p:nvGrpSpPr>
-      <p:grpSpPr/>
+      <p:grpSpPr>
+        <a:xfrm>
+          <a:off x="0" y="0"/>
+          <a:ext cx="0" cy="0"/>
+          <a:chOff x="0" y="0"/>
+          <a:chExt cx="0" cy="0"/>
+        </a:xfrm>
+      </p:grpSpPr>
       <p:sp>
         <p:nvSpPr>
           <p:cNvPr id="2" name="Rectangle 1"/>
@@ -9915,6 +10287,7 @@
           <a:lstStyle/>
           <a:p>
             <a:pPr algn="ctr"/>
+            <a:endParaRPr/>
           </a:p>
         </p:txBody>
       </p:sp>
@@ -9958,6 +10331,7 @@
           <a:lstStyle/>
           <a:p>
             <a:pPr algn="ctr"/>
+            <a:endParaRPr/>
           </a:p>
         </p:txBody>
       </p:sp>
@@ -10048,10 +10422,34 @@
                 <a:tableStyleId>{5C22544A-7EE6-4342-B048-85BDC9FD1C3A}</a:tableStyleId>
               </a:tblPr>
               <a:tblGrid>
-                <a:gridCol w="1828800"/>
-                <a:gridCol w="1828800"/>
-                <a:gridCol w="1828800"/>
-                <a:gridCol w="1828800"/>
+                <a:gridCol w="1828800">
+                  <a:extLst>
+                    <a:ext uri="{9D8B030D-6E8A-4147-A177-3AD203B41FA5}">
+                      <a16:colId xmlns:a16="http://schemas.microsoft.com/office/drawing/2014/main" val="20000"/>
+                    </a:ext>
+                  </a:extLst>
+                </a:gridCol>
+                <a:gridCol w="1828800">
+                  <a:extLst>
+                    <a:ext uri="{9D8B030D-6E8A-4147-A177-3AD203B41FA5}">
+                      <a16:colId xmlns:a16="http://schemas.microsoft.com/office/drawing/2014/main" val="20001"/>
+                    </a:ext>
+                  </a:extLst>
+                </a:gridCol>
+                <a:gridCol w="1828800">
+                  <a:extLst>
+                    <a:ext uri="{9D8B030D-6E8A-4147-A177-3AD203B41FA5}">
+                      <a16:colId xmlns:a16="http://schemas.microsoft.com/office/drawing/2014/main" val="20002"/>
+                    </a:ext>
+                  </a:extLst>
+                </a:gridCol>
+                <a:gridCol w="1828800">
+                  <a:extLst>
+                    <a:ext uri="{9D8B030D-6E8A-4147-A177-3AD203B41FA5}">
+                      <a16:colId xmlns:a16="http://schemas.microsoft.com/office/drawing/2014/main" val="20003"/>
+                    </a:ext>
+                  </a:extLst>
+                </a:gridCol>
               </a:tblGrid>
               <a:tr h="513370">
                 <a:tc>
@@ -10061,7 +10459,7 @@
                     <a:p>
                       <a:pPr algn="ctr"/>
                       <a:r>
-                        <a:rPr b="1" sz="1100">
+                        <a:rPr sz="1100" b="1">
                           <a:solidFill>
                             <a:srgbClr val="FFFFFF"/>
                           </a:solidFill>
@@ -10083,7 +10481,7 @@
                     <a:p>
                       <a:pPr algn="ctr"/>
                       <a:r>
-                        <a:rPr b="1" sz="1100">
+                        <a:rPr sz="1100" b="1">
                           <a:solidFill>
                             <a:srgbClr val="FFFFFF"/>
                           </a:solidFill>
@@ -10105,7 +10503,7 @@
                     <a:p>
                       <a:pPr algn="ctr"/>
                       <a:r>
-                        <a:rPr b="1" sz="1100">
+                        <a:rPr sz="1100" b="1">
                           <a:solidFill>
                             <a:srgbClr val="FFFFFF"/>
                           </a:solidFill>
@@ -10127,7 +10525,7 @@
                     <a:p>
                       <a:pPr algn="ctr"/>
                       <a:r>
-                        <a:rPr b="1" sz="1100">
+                        <a:rPr sz="1100" b="1">
                           <a:solidFill>
                             <a:srgbClr val="FFFFFF"/>
                           </a:solidFill>
@@ -10142,6 +10540,11 @@
                     </a:solidFill>
                   </a:tcPr>
                 </a:tc>
+                <a:extLst>
+                  <a:ext uri="{0D108BD9-81ED-4DB2-BD59-A6C34878D82A}">
+                    <a16:rowId xmlns:a16="http://schemas.microsoft.com/office/drawing/2014/main" val="10000"/>
+                  </a:ext>
+                </a:extLst>
               </a:tr>
               <a:tr h="513370">
                 <a:tc>
@@ -10232,6 +10635,11 @@
                     </a:solidFill>
                   </a:tcPr>
                 </a:tc>
+                <a:extLst>
+                  <a:ext uri="{0D108BD9-81ED-4DB2-BD59-A6C34878D82A}">
+                    <a16:rowId xmlns:a16="http://schemas.microsoft.com/office/drawing/2014/main" val="10001"/>
+                  </a:ext>
+                </a:extLst>
               </a:tr>
               <a:tr h="513370">
                 <a:tc>
@@ -10322,6 +10730,11 @@
                     </a:solidFill>
                   </a:tcPr>
                 </a:tc>
+                <a:extLst>
+                  <a:ext uri="{0D108BD9-81ED-4DB2-BD59-A6C34878D82A}">
+                    <a16:rowId xmlns:a16="http://schemas.microsoft.com/office/drawing/2014/main" val="10002"/>
+                  </a:ext>
+                </a:extLst>
               </a:tr>
               <a:tr h="513370">
                 <a:tc>
@@ -10412,6 +10825,11 @@
                     </a:solidFill>
                   </a:tcPr>
                 </a:tc>
+                <a:extLst>
+                  <a:ext uri="{0D108BD9-81ED-4DB2-BD59-A6C34878D82A}">
+                    <a16:rowId xmlns:a16="http://schemas.microsoft.com/office/drawing/2014/main" val="10003"/>
+                  </a:ext>
+                </a:extLst>
               </a:tr>
               <a:tr h="513370">
                 <a:tc>
@@ -10502,6 +10920,11 @@
                     </a:solidFill>
                   </a:tcPr>
                 </a:tc>
+                <a:extLst>
+                  <a:ext uri="{0D108BD9-81ED-4DB2-BD59-A6C34878D82A}">
+                    <a16:rowId xmlns:a16="http://schemas.microsoft.com/office/drawing/2014/main" val="10004"/>
+                  </a:ext>
+                </a:extLst>
               </a:tr>
               <a:tr h="513370">
                 <a:tc>
@@ -10592,6 +11015,11 @@
                     </a:solidFill>
                   </a:tcPr>
                 </a:tc>
+                <a:extLst>
+                  <a:ext uri="{0D108BD9-81ED-4DB2-BD59-A6C34878D82A}">
+                    <a16:rowId xmlns:a16="http://schemas.microsoft.com/office/drawing/2014/main" val="10005"/>
+                  </a:ext>
+                </a:extLst>
               </a:tr>
               <a:tr h="513371">
                 <a:tc>
@@ -10682,6 +11110,11 @@
                     </a:solidFill>
                   </a:tcPr>
                 </a:tc>
+                <a:extLst>
+                  <a:ext uri="{0D108BD9-81ED-4DB2-BD59-A6C34878D82A}">
+                    <a16:rowId xmlns:a16="http://schemas.microsoft.com/office/drawing/2014/main" val="10006"/>
+                  </a:ext>
+                </a:extLst>
               </a:tr>
             </a:tbl>
           </a:graphicData>
@@ -10789,7 +11222,7 @@
 </file>
 
 <file path=ppt/slides/slide16.xml><?xml version="1.0" encoding="utf-8"?>
-<p:sld xmlns:a="http://schemas.openxmlformats.org/drawingml/2006/main" xmlns:p="http://schemas.openxmlformats.org/presentationml/2006/main" xmlns:r="http://schemas.openxmlformats.org/officeDocument/2006/relationships">
+<p:sld xmlns:a="http://schemas.openxmlformats.org/drawingml/2006/main" xmlns:r="http://schemas.openxmlformats.org/officeDocument/2006/relationships" xmlns:p="http://schemas.openxmlformats.org/presentationml/2006/main">
   <p:cSld>
     <p:spTree>
       <p:nvGrpSpPr>
@@ -10797,7 +11230,14 @@
         <p:cNvGrpSpPr/>
         <p:nvPr/>
       </p:nvGrpSpPr>
-      <p:grpSpPr/>
+      <p:grpSpPr>
+        <a:xfrm>
+          <a:off x="0" y="0"/>
+          <a:ext cx="0" cy="0"/>
+          <a:chOff x="0" y="0"/>
+          <a:chExt cx="0" cy="0"/>
+        </a:xfrm>
+      </p:grpSpPr>
       <p:sp>
         <p:nvSpPr>
           <p:cNvPr id="2" name="Rectangle 1"/>
@@ -10838,6 +11278,7 @@
           <a:lstStyle/>
           <a:p>
             <a:pPr algn="ctr"/>
+            <a:endParaRPr/>
           </a:p>
         </p:txBody>
       </p:sp>
@@ -10881,6 +11322,7 @@
           <a:lstStyle/>
           <a:p>
             <a:pPr algn="ctr"/>
+            <a:endParaRPr/>
           </a:p>
         </p:txBody>
       </p:sp>
@@ -10962,7 +11404,7 @@
         </p:nvGraphicFramePr>
         <p:xfrm>
           <a:off x="320040" y="1143000"/>
-          <a:ext cx="11521440" cy="2103120"/>
+          <a:ext cx="11521440" cy="2200656"/>
         </p:xfrm>
         <a:graphic>
           <a:graphicData uri="http://schemas.openxmlformats.org/drawingml/2006/table">
@@ -10971,13 +11413,55 @@
                 <a:tableStyleId>{5C22544A-7EE6-4342-B048-85BDC9FD1C3A}</a:tableStyleId>
               </a:tblPr>
               <a:tblGrid>
-                <a:gridCol w="1645920"/>
-                <a:gridCol w="1645920"/>
-                <a:gridCol w="1645920"/>
-                <a:gridCol w="1645920"/>
-                <a:gridCol w="1645920"/>
-                <a:gridCol w="1645920"/>
-                <a:gridCol w="1645920"/>
+                <a:gridCol w="1645920">
+                  <a:extLst>
+                    <a:ext uri="{9D8B030D-6E8A-4147-A177-3AD203B41FA5}">
+                      <a16:colId xmlns:a16="http://schemas.microsoft.com/office/drawing/2014/main" val="20000"/>
+                    </a:ext>
+                  </a:extLst>
+                </a:gridCol>
+                <a:gridCol w="1645920">
+                  <a:extLst>
+                    <a:ext uri="{9D8B030D-6E8A-4147-A177-3AD203B41FA5}">
+                      <a16:colId xmlns:a16="http://schemas.microsoft.com/office/drawing/2014/main" val="20001"/>
+                    </a:ext>
+                  </a:extLst>
+                </a:gridCol>
+                <a:gridCol w="1645920">
+                  <a:extLst>
+                    <a:ext uri="{9D8B030D-6E8A-4147-A177-3AD203B41FA5}">
+                      <a16:colId xmlns:a16="http://schemas.microsoft.com/office/drawing/2014/main" val="20002"/>
+                    </a:ext>
+                  </a:extLst>
+                </a:gridCol>
+                <a:gridCol w="1645920">
+                  <a:extLst>
+                    <a:ext uri="{9D8B030D-6E8A-4147-A177-3AD203B41FA5}">
+                      <a16:colId xmlns:a16="http://schemas.microsoft.com/office/drawing/2014/main" val="20003"/>
+                    </a:ext>
+                  </a:extLst>
+                </a:gridCol>
+                <a:gridCol w="1645920">
+                  <a:extLst>
+                    <a:ext uri="{9D8B030D-6E8A-4147-A177-3AD203B41FA5}">
+                      <a16:colId xmlns:a16="http://schemas.microsoft.com/office/drawing/2014/main" val="20004"/>
+                    </a:ext>
+                  </a:extLst>
+                </a:gridCol>
+                <a:gridCol w="1645920">
+                  <a:extLst>
+                    <a:ext uri="{9D8B030D-6E8A-4147-A177-3AD203B41FA5}">
+                      <a16:colId xmlns:a16="http://schemas.microsoft.com/office/drawing/2014/main" val="20005"/>
+                    </a:ext>
+                  </a:extLst>
+                </a:gridCol>
+                <a:gridCol w="1645920">
+                  <a:extLst>
+                    <a:ext uri="{9D8B030D-6E8A-4147-A177-3AD203B41FA5}">
+                      <a16:colId xmlns:a16="http://schemas.microsoft.com/office/drawing/2014/main" val="20006"/>
+                    </a:ext>
+                  </a:extLst>
+                </a:gridCol>
               </a:tblGrid>
               <a:tr h="420624">
                 <a:tc>
@@ -10987,7 +11471,7 @@
                     <a:p>
                       <a:pPr algn="ctr"/>
                       <a:r>
-                        <a:rPr b="1" sz="1000">
+                        <a:rPr sz="1000" b="1">
                           <a:solidFill>
                             <a:srgbClr val="FFFFFF"/>
                           </a:solidFill>
@@ -11009,7 +11493,7 @@
                     <a:p>
                       <a:pPr algn="ctr"/>
                       <a:r>
-                        <a:rPr b="1" sz="1000">
+                        <a:rPr sz="1000" b="1">
                           <a:solidFill>
                             <a:srgbClr val="FFFFFF"/>
                           </a:solidFill>
@@ -11036,7 +11520,7 @@
                     <a:p>
                       <a:pPr algn="ctr"/>
                       <a:r>
-                        <a:rPr b="1" sz="1000">
+                        <a:rPr sz="1000" b="1">
                           <a:solidFill>
                             <a:srgbClr val="FFFFFF"/>
                           </a:solidFill>
@@ -11063,7 +11547,7 @@
                     <a:p>
                       <a:pPr algn="ctr"/>
                       <a:r>
-                        <a:rPr b="1" sz="1000">
+                        <a:rPr sz="1000" b="1">
                           <a:solidFill>
                             <a:srgbClr val="FFFFFF"/>
                           </a:solidFill>
@@ -11090,7 +11574,7 @@
                     <a:p>
                       <a:pPr algn="ctr"/>
                       <a:r>
-                        <a:rPr b="1" sz="1000">
+                        <a:rPr sz="1000" b="1">
                           <a:solidFill>
                             <a:srgbClr val="FFFFFF"/>
                           </a:solidFill>
@@ -11117,7 +11601,7 @@
                     <a:p>
                       <a:pPr algn="ctr"/>
                       <a:r>
-                        <a:rPr b="1" sz="1000">
+                        <a:rPr sz="1000" b="1">
                           <a:solidFill>
                             <a:srgbClr val="FFFFFF"/>
                           </a:solidFill>
@@ -11139,7 +11623,7 @@
                     <a:p>
                       <a:pPr algn="ctr"/>
                       <a:r>
-                        <a:rPr b="1" sz="1000">
+                        <a:rPr sz="1000" b="1">
                           <a:solidFill>
                             <a:srgbClr val="FFFFFF"/>
                           </a:solidFill>
@@ -11154,6 +11638,11 @@
                     </a:solidFill>
                   </a:tcPr>
                 </a:tc>
+                <a:extLst>
+                  <a:ext uri="{0D108BD9-81ED-4DB2-BD59-A6C34878D82A}">
+                    <a16:rowId xmlns:a16="http://schemas.microsoft.com/office/drawing/2014/main" val="10000"/>
+                  </a:ext>
+                </a:extLst>
               </a:tr>
               <a:tr h="420624">
                 <a:tc>
@@ -11310,6 +11799,11 @@
                     </a:solidFill>
                   </a:tcPr>
                 </a:tc>
+                <a:extLst>
+                  <a:ext uri="{0D108BD9-81ED-4DB2-BD59-A6C34878D82A}">
+                    <a16:rowId xmlns:a16="http://schemas.microsoft.com/office/drawing/2014/main" val="10001"/>
+                  </a:ext>
+                </a:extLst>
               </a:tr>
               <a:tr h="420624">
                 <a:tc>
@@ -11466,6 +11960,11 @@
                     </a:solidFill>
                   </a:tcPr>
                 </a:tc>
+                <a:extLst>
+                  <a:ext uri="{0D108BD9-81ED-4DB2-BD59-A6C34878D82A}">
+                    <a16:rowId xmlns:a16="http://schemas.microsoft.com/office/drawing/2014/main" val="10002"/>
+                  </a:ext>
+                </a:extLst>
               </a:tr>
               <a:tr h="420624">
                 <a:tc>
@@ -11622,6 +12121,11 @@
                     </a:solidFill>
                   </a:tcPr>
                 </a:tc>
+                <a:extLst>
+                  <a:ext uri="{0D108BD9-81ED-4DB2-BD59-A6C34878D82A}">
+                    <a16:rowId xmlns:a16="http://schemas.microsoft.com/office/drawing/2014/main" val="10003"/>
+                  </a:ext>
+                </a:extLst>
               </a:tr>
               <a:tr h="420624">
                 <a:tc>
@@ -11778,6 +12282,11 @@
                     </a:solidFill>
                   </a:tcPr>
                 </a:tc>
+                <a:extLst>
+                  <a:ext uri="{0D108BD9-81ED-4DB2-BD59-A6C34878D82A}">
+                    <a16:rowId xmlns:a16="http://schemas.microsoft.com/office/drawing/2014/main" val="10004"/>
+                  </a:ext>
+                </a:extLst>
               </a:tr>
             </a:tbl>
           </a:graphicData>
@@ -11807,12 +12316,124 @@
           <a:p>
             <a:pPr algn="l"/>
             <a:r>
-              <a:rPr sz="1300" b="1" i="0">
+              <a:rPr sz="1300" b="1" i="0" dirty="0">
                 <a:solidFill>
                   <a:srgbClr val="2E75B6"/>
                 </a:solidFill>
               </a:rPr>
-              <a:t>AEC 특징 추가(Case1→2)로 R² +8.5%p 향상  |  CT 모델명/kVp 추가(Case2→3)로 추가 +2.4%p</a:t>
+              <a:t>AEC </a:t>
+            </a:r>
+            <a:r>
+              <a:rPr sz="1300" b="1" i="0" dirty="0" err="1">
+                <a:solidFill>
+                  <a:srgbClr val="2E75B6"/>
+                </a:solidFill>
+              </a:rPr>
+              <a:t>특징</a:t>
+            </a:r>
+            <a:r>
+              <a:rPr sz="1300" b="1" i="0" dirty="0">
+                <a:solidFill>
+                  <a:srgbClr val="2E75B6"/>
+                </a:solidFill>
+              </a:rPr>
+              <a:t> </a:t>
+            </a:r>
+            <a:r>
+              <a:rPr sz="1300" b="1" i="0" dirty="0" err="1">
+                <a:solidFill>
+                  <a:srgbClr val="2E75B6"/>
+                </a:solidFill>
+              </a:rPr>
+              <a:t>추가</a:t>
+            </a:r>
+            <a:r>
+              <a:rPr sz="1300" b="1" i="0" dirty="0">
+                <a:solidFill>
+                  <a:srgbClr val="2E75B6"/>
+                </a:solidFill>
+              </a:rPr>
+              <a:t>(Case1→2)로 R² +8.5%p </a:t>
+            </a:r>
+            <a:r>
+              <a:rPr sz="1300" b="1" i="0" dirty="0" err="1">
+                <a:solidFill>
+                  <a:srgbClr val="2E75B6"/>
+                </a:solidFill>
+              </a:rPr>
+              <a:t>향상</a:t>
+            </a:r>
+            <a:r>
+              <a:rPr sz="1300" b="1" i="0" dirty="0">
+                <a:solidFill>
+                  <a:srgbClr val="2E75B6"/>
+                </a:solidFill>
+              </a:rPr>
+              <a:t>  |  CT </a:t>
+            </a:r>
+            <a:r>
+              <a:rPr sz="1300" b="1" i="0" dirty="0" err="1">
+                <a:solidFill>
+                  <a:srgbClr val="2E75B6"/>
+                </a:solidFill>
+              </a:rPr>
+              <a:t>모델명</a:t>
+            </a:r>
+            <a:r>
+              <a:rPr sz="1300" b="1" i="0" dirty="0">
+                <a:solidFill>
+                  <a:srgbClr val="2E75B6"/>
+                </a:solidFill>
+              </a:rPr>
+              <a:t>/</a:t>
+            </a:r>
+            <a:r>
+              <a:rPr sz="1300" b="1" i="0" dirty="0" err="1">
+                <a:solidFill>
+                  <a:srgbClr val="2E75B6"/>
+                </a:solidFill>
+              </a:rPr>
+              <a:t>kVp</a:t>
+            </a:r>
+            <a:r>
+              <a:rPr sz="1300" b="1" i="0" dirty="0">
+                <a:solidFill>
+                  <a:srgbClr val="2E75B6"/>
+                </a:solidFill>
+              </a:rPr>
+              <a:t> </a:t>
+            </a:r>
+            <a:r>
+              <a:rPr sz="1300" b="1" i="0" dirty="0" err="1">
+                <a:solidFill>
+                  <a:srgbClr val="2E75B6"/>
+                </a:solidFill>
+              </a:rPr>
+              <a:t>추가</a:t>
+            </a:r>
+            <a:r>
+              <a:rPr sz="1300" b="1" i="0" dirty="0">
+                <a:solidFill>
+                  <a:srgbClr val="2E75B6"/>
+                </a:solidFill>
+              </a:rPr>
+              <a:t>(Case2→3)로 </a:t>
+            </a:r>
+            <a:r>
+              <a:rPr sz="1300" b="1" i="0" dirty="0" err="1">
+                <a:solidFill>
+                  <a:srgbClr val="2E75B6"/>
+                </a:solidFill>
+              </a:rPr>
+              <a:t>추가</a:t>
+            </a:r>
+            <a:r>
+              <a:rPr sz="1300" b="1" i="0" dirty="0">
+                <a:solidFill>
+                  <a:srgbClr val="2E75B6"/>
+                </a:solidFill>
+              </a:rPr>
+              <a:t> +2.4%p</a:t>
             </a:r>
           </a:p>
         </p:txBody>
@@ -11942,7 +12563,7 @@
 </file>
 
 <file path=ppt/slides/slide17.xml><?xml version="1.0" encoding="utf-8"?>
-<p:sld xmlns:a="http://schemas.openxmlformats.org/drawingml/2006/main" xmlns:p="http://schemas.openxmlformats.org/presentationml/2006/main" xmlns:r="http://schemas.openxmlformats.org/officeDocument/2006/relationships">
+<p:sld xmlns:a="http://schemas.openxmlformats.org/drawingml/2006/main" xmlns:r="http://schemas.openxmlformats.org/officeDocument/2006/relationships" xmlns:p="http://schemas.openxmlformats.org/presentationml/2006/main">
   <p:cSld>
     <p:spTree>
       <p:nvGrpSpPr>
@@ -11950,7 +12571,14 @@
         <p:cNvGrpSpPr/>
         <p:nvPr/>
       </p:nvGrpSpPr>
-      <p:grpSpPr/>
+      <p:grpSpPr>
+        <a:xfrm>
+          <a:off x="0" y="0"/>
+          <a:ext cx="0" cy="0"/>
+          <a:chOff x="0" y="0"/>
+          <a:chExt cx="0" cy="0"/>
+        </a:xfrm>
+      </p:grpSpPr>
       <p:sp>
         <p:nvSpPr>
           <p:cNvPr id="2" name="Rectangle 1"/>
@@ -11991,6 +12619,7 @@
           <a:lstStyle/>
           <a:p>
             <a:pPr algn="ctr"/>
+            <a:endParaRPr/>
           </a:p>
         </p:txBody>
       </p:sp>
@@ -12034,6 +12663,7 @@
           <a:lstStyle/>
           <a:p>
             <a:pPr algn="ctr"/>
+            <a:endParaRPr/>
           </a:p>
         </p:txBody>
       </p:sp>
@@ -12115,7 +12745,7 @@
         </p:nvGraphicFramePr>
         <p:xfrm>
           <a:off x="320040" y="1143000"/>
-          <a:ext cx="11521440" cy="2103120"/>
+          <a:ext cx="11521440" cy="2200656"/>
         </p:xfrm>
         <a:graphic>
           <a:graphicData uri="http://schemas.openxmlformats.org/drawingml/2006/table">
@@ -12124,13 +12754,55 @@
                 <a:tableStyleId>{5C22544A-7EE6-4342-B048-85BDC9FD1C3A}</a:tableStyleId>
               </a:tblPr>
               <a:tblGrid>
-                <a:gridCol w="1645920"/>
-                <a:gridCol w="1645920"/>
-                <a:gridCol w="1645920"/>
-                <a:gridCol w="1645920"/>
-                <a:gridCol w="1645920"/>
-                <a:gridCol w="1645920"/>
-                <a:gridCol w="1645920"/>
+                <a:gridCol w="1645920">
+                  <a:extLst>
+                    <a:ext uri="{9D8B030D-6E8A-4147-A177-3AD203B41FA5}">
+                      <a16:colId xmlns:a16="http://schemas.microsoft.com/office/drawing/2014/main" val="20000"/>
+                    </a:ext>
+                  </a:extLst>
+                </a:gridCol>
+                <a:gridCol w="1645920">
+                  <a:extLst>
+                    <a:ext uri="{9D8B030D-6E8A-4147-A177-3AD203B41FA5}">
+                      <a16:colId xmlns:a16="http://schemas.microsoft.com/office/drawing/2014/main" val="20001"/>
+                    </a:ext>
+                  </a:extLst>
+                </a:gridCol>
+                <a:gridCol w="1645920">
+                  <a:extLst>
+                    <a:ext uri="{9D8B030D-6E8A-4147-A177-3AD203B41FA5}">
+                      <a16:colId xmlns:a16="http://schemas.microsoft.com/office/drawing/2014/main" val="20002"/>
+                    </a:ext>
+                  </a:extLst>
+                </a:gridCol>
+                <a:gridCol w="1645920">
+                  <a:extLst>
+                    <a:ext uri="{9D8B030D-6E8A-4147-A177-3AD203B41FA5}">
+                      <a16:colId xmlns:a16="http://schemas.microsoft.com/office/drawing/2014/main" val="20003"/>
+                    </a:ext>
+                  </a:extLst>
+                </a:gridCol>
+                <a:gridCol w="1645920">
+                  <a:extLst>
+                    <a:ext uri="{9D8B030D-6E8A-4147-A177-3AD203B41FA5}">
+                      <a16:colId xmlns:a16="http://schemas.microsoft.com/office/drawing/2014/main" val="20004"/>
+                    </a:ext>
+                  </a:extLst>
+                </a:gridCol>
+                <a:gridCol w="1645920">
+                  <a:extLst>
+                    <a:ext uri="{9D8B030D-6E8A-4147-A177-3AD203B41FA5}">
+                      <a16:colId xmlns:a16="http://schemas.microsoft.com/office/drawing/2014/main" val="20005"/>
+                    </a:ext>
+                  </a:extLst>
+                </a:gridCol>
+                <a:gridCol w="1645920">
+                  <a:extLst>
+                    <a:ext uri="{9D8B030D-6E8A-4147-A177-3AD203B41FA5}">
+                      <a16:colId xmlns:a16="http://schemas.microsoft.com/office/drawing/2014/main" val="20006"/>
+                    </a:ext>
+                  </a:extLst>
+                </a:gridCol>
               </a:tblGrid>
               <a:tr h="420624">
                 <a:tc>
@@ -12140,7 +12812,7 @@
                     <a:p>
                       <a:pPr algn="ctr"/>
                       <a:r>
-                        <a:rPr b="1" sz="1000">
+                        <a:rPr sz="1000" b="1">
                           <a:solidFill>
                             <a:srgbClr val="FFFFFF"/>
                           </a:solidFill>
@@ -12162,7 +12834,7 @@
                     <a:p>
                       <a:pPr algn="ctr"/>
                       <a:r>
-                        <a:rPr b="1" sz="1000">
+                        <a:rPr sz="1000" b="1">
                           <a:solidFill>
                             <a:srgbClr val="FFFFFF"/>
                           </a:solidFill>
@@ -12189,7 +12861,7 @@
                     <a:p>
                       <a:pPr algn="ctr"/>
                       <a:r>
-                        <a:rPr b="1" sz="1000">
+                        <a:rPr sz="1000" b="1">
                           <a:solidFill>
                             <a:srgbClr val="FFFFFF"/>
                           </a:solidFill>
@@ -12216,7 +12888,7 @@
                     <a:p>
                       <a:pPr algn="ctr"/>
                       <a:r>
-                        <a:rPr b="1" sz="1000">
+                        <a:rPr sz="1000" b="1">
                           <a:solidFill>
                             <a:srgbClr val="FFFFFF"/>
                           </a:solidFill>
@@ -12243,7 +12915,7 @@
                     <a:p>
                       <a:pPr algn="ctr"/>
                       <a:r>
-                        <a:rPr b="1" sz="1000">
+                        <a:rPr sz="1000" b="1">
                           <a:solidFill>
                             <a:srgbClr val="FFFFFF"/>
                           </a:solidFill>
@@ -12270,7 +12942,7 @@
                     <a:p>
                       <a:pPr algn="ctr"/>
                       <a:r>
-                        <a:rPr b="1" sz="1000">
+                        <a:rPr sz="1000" b="1">
                           <a:solidFill>
                             <a:srgbClr val="FFFFFF"/>
                           </a:solidFill>
@@ -12292,7 +12964,7 @@
                     <a:p>
                       <a:pPr algn="ctr"/>
                       <a:r>
-                        <a:rPr b="1" sz="1000">
+                        <a:rPr sz="1000" b="1">
                           <a:solidFill>
                             <a:srgbClr val="FFFFFF"/>
                           </a:solidFill>
@@ -12307,6 +12979,11 @@
                     </a:solidFill>
                   </a:tcPr>
                 </a:tc>
+                <a:extLst>
+                  <a:ext uri="{0D108BD9-81ED-4DB2-BD59-A6C34878D82A}">
+                    <a16:rowId xmlns:a16="http://schemas.microsoft.com/office/drawing/2014/main" val="10000"/>
+                  </a:ext>
+                </a:extLst>
               </a:tr>
               <a:tr h="420624">
                 <a:tc>
@@ -12463,6 +13140,11 @@
                     </a:solidFill>
                   </a:tcPr>
                 </a:tc>
+                <a:extLst>
+                  <a:ext uri="{0D108BD9-81ED-4DB2-BD59-A6C34878D82A}">
+                    <a16:rowId xmlns:a16="http://schemas.microsoft.com/office/drawing/2014/main" val="10001"/>
+                  </a:ext>
+                </a:extLst>
               </a:tr>
               <a:tr h="420624">
                 <a:tc>
@@ -12619,6 +13301,11 @@
                     </a:solidFill>
                   </a:tcPr>
                 </a:tc>
+                <a:extLst>
+                  <a:ext uri="{0D108BD9-81ED-4DB2-BD59-A6C34878D82A}">
+                    <a16:rowId xmlns:a16="http://schemas.microsoft.com/office/drawing/2014/main" val="10002"/>
+                  </a:ext>
+                </a:extLst>
               </a:tr>
               <a:tr h="420624">
                 <a:tc>
@@ -12775,6 +13462,11 @@
                     </a:solidFill>
                   </a:tcPr>
                 </a:tc>
+                <a:extLst>
+                  <a:ext uri="{0D108BD9-81ED-4DB2-BD59-A6C34878D82A}">
+                    <a16:rowId xmlns:a16="http://schemas.microsoft.com/office/drawing/2014/main" val="10003"/>
+                  </a:ext>
+                </a:extLst>
               </a:tr>
               <a:tr h="420624">
                 <a:tc>
@@ -12931,6 +13623,11 @@
                     </a:solidFill>
                   </a:tcPr>
                 </a:tc>
+                <a:extLst>
+                  <a:ext uri="{0D108BD9-81ED-4DB2-BD59-A6C34878D82A}">
+                    <a16:rowId xmlns:a16="http://schemas.microsoft.com/office/drawing/2014/main" val="10004"/>
+                  </a:ext>
+                </a:extLst>
               </a:tr>
             </a:tbl>
           </a:graphicData>
@@ -12960,13 +13657,122 @@
           <a:p>
             <a:pPr algn="l"/>
             <a:r>
-              <a:rPr sz="1300" b="1" i="0">
+              <a:rPr sz="1300" b="1" i="0" dirty="0">
                 <a:solidFill>
                   <a:srgbClr val="2E75B6"/>
                 </a:solidFill>
               </a:rPr>
-              <a:t>AEC 추가(Case1→2)로 AUC +9.5%p 향상  |  CT 모델명/kVp 추가(Case2→3)로 +3.5%p 추가 개선</a:t>
-            </a:r>
+              <a:t>AEC </a:t>
+            </a:r>
+            <a:r>
+              <a:rPr sz="1300" b="1" i="0" dirty="0" err="1">
+                <a:solidFill>
+                  <a:srgbClr val="2E75B6"/>
+                </a:solidFill>
+              </a:rPr>
+              <a:t>추가</a:t>
+            </a:r>
+            <a:r>
+              <a:rPr sz="1300" b="1" i="0" dirty="0">
+                <a:solidFill>
+                  <a:srgbClr val="2E75B6"/>
+                </a:solidFill>
+              </a:rPr>
+              <a:t>(Case1→2)로 AUC +9.5%p </a:t>
+            </a:r>
+            <a:r>
+              <a:rPr sz="1300" b="1" i="0" dirty="0" err="1">
+                <a:solidFill>
+                  <a:srgbClr val="2E75B6"/>
+                </a:solidFill>
+              </a:rPr>
+              <a:t>향상</a:t>
+            </a:r>
+            <a:r>
+              <a:rPr sz="1300" b="1" i="0" dirty="0">
+                <a:solidFill>
+                  <a:srgbClr val="2E75B6"/>
+                </a:solidFill>
+              </a:rPr>
+              <a:t>  |  CT </a:t>
+            </a:r>
+            <a:r>
+              <a:rPr sz="1300" b="1" i="0" dirty="0" err="1">
+                <a:solidFill>
+                  <a:srgbClr val="2E75B6"/>
+                </a:solidFill>
+              </a:rPr>
+              <a:t>모델명</a:t>
+            </a:r>
+            <a:r>
+              <a:rPr sz="1300" b="1" i="0" dirty="0">
+                <a:solidFill>
+                  <a:srgbClr val="2E75B6"/>
+                </a:solidFill>
+              </a:rPr>
+              <a:t>/</a:t>
+            </a:r>
+            <a:r>
+              <a:rPr sz="1300" b="1" i="0" dirty="0" err="1">
+                <a:solidFill>
+                  <a:srgbClr val="2E75B6"/>
+                </a:solidFill>
+              </a:rPr>
+              <a:t>kVp</a:t>
+            </a:r>
+            <a:r>
+              <a:rPr sz="1300" b="1" i="0" dirty="0">
+                <a:solidFill>
+                  <a:srgbClr val="2E75B6"/>
+                </a:solidFill>
+              </a:rPr>
+              <a:t> </a:t>
+            </a:r>
+            <a:r>
+              <a:rPr sz="1300" b="1" i="0" dirty="0" err="1">
+                <a:solidFill>
+                  <a:srgbClr val="2E75B6"/>
+                </a:solidFill>
+              </a:rPr>
+              <a:t>추가</a:t>
+            </a:r>
+            <a:r>
+              <a:rPr sz="1300" b="1" i="0" dirty="0">
+                <a:solidFill>
+                  <a:srgbClr val="2E75B6"/>
+                </a:solidFill>
+              </a:rPr>
+              <a:t>(Case2→3)로 +3.5%p </a:t>
+            </a:r>
+            <a:r>
+              <a:rPr sz="1300" b="1" i="0" dirty="0" err="1">
+                <a:solidFill>
+                  <a:srgbClr val="2E75B6"/>
+                </a:solidFill>
+              </a:rPr>
+              <a:t>추가</a:t>
+            </a:r>
+            <a:r>
+              <a:rPr sz="1300" b="1" i="0" dirty="0">
+                <a:solidFill>
+                  <a:srgbClr val="2E75B6"/>
+                </a:solidFill>
+              </a:rPr>
+              <a:t> </a:t>
+            </a:r>
+            <a:r>
+              <a:rPr sz="1300" b="1" i="0" dirty="0" err="1">
+                <a:solidFill>
+                  <a:srgbClr val="2E75B6"/>
+                </a:solidFill>
+              </a:rPr>
+              <a:t>개선</a:t>
+            </a:r>
+            <a:endParaRPr sz="1300" b="1" i="0" dirty="0">
+              <a:solidFill>
+                <a:srgbClr val="2E75B6"/>
+              </a:solidFill>
+            </a:endParaRPr>
           </a:p>
         </p:txBody>
       </p:sp>
@@ -13095,7 +13901,7 @@
 </file>
 
 <file path=ppt/slides/slide18.xml><?xml version="1.0" encoding="utf-8"?>
-<p:sld xmlns:a="http://schemas.openxmlformats.org/drawingml/2006/main" xmlns:p="http://schemas.openxmlformats.org/presentationml/2006/main" xmlns:r="http://schemas.openxmlformats.org/officeDocument/2006/relationships">
+<p:sld xmlns:a="http://schemas.openxmlformats.org/drawingml/2006/main" xmlns:r="http://schemas.openxmlformats.org/officeDocument/2006/relationships" xmlns:p="http://schemas.openxmlformats.org/presentationml/2006/main">
   <p:cSld>
     <p:spTree>
       <p:nvGrpSpPr>
@@ -13103,7 +13909,14 @@
         <p:cNvGrpSpPr/>
         <p:nvPr/>
       </p:nvGrpSpPr>
-      <p:grpSpPr/>
+      <p:grpSpPr>
+        <a:xfrm>
+          <a:off x="0" y="0"/>
+          <a:ext cx="0" cy="0"/>
+          <a:chOff x="0" y="0"/>
+          <a:chExt cx="0" cy="0"/>
+        </a:xfrm>
+      </p:grpSpPr>
       <p:sp>
         <p:nvSpPr>
           <p:cNvPr id="2" name="Rectangle 1"/>
@@ -13144,6 +13957,7 @@
           <a:lstStyle/>
           <a:p>
             <a:pPr algn="ctr"/>
+            <a:endParaRPr/>
           </a:p>
         </p:txBody>
       </p:sp>
@@ -13187,6 +14001,7 @@
           <a:lstStyle/>
           <a:p>
             <a:pPr algn="ctr"/>
+            <a:endParaRPr/>
           </a:p>
         </p:txBody>
       </p:sp>
@@ -13332,6 +14147,7 @@
           <a:lstStyle/>
           <a:p>
             <a:pPr algn="ctr"/>
+            <a:endParaRPr/>
           </a:p>
         </p:txBody>
       </p:sp>
@@ -13478,6 +14294,7 @@
           <a:lstStyle/>
           <a:p>
             <a:pPr algn="ctr"/>
+            <a:endParaRPr/>
           </a:p>
         </p:txBody>
       </p:sp>
@@ -13624,6 +14441,7 @@
           <a:lstStyle/>
           <a:p>
             <a:pPr algn="ctr"/>
+            <a:endParaRPr/>
           </a:p>
         </p:txBody>
       </p:sp>
@@ -13770,6 +14588,7 @@
           <a:lstStyle/>
           <a:p>
             <a:pPr algn="ctr"/>
+            <a:endParaRPr/>
           </a:p>
         </p:txBody>
       </p:sp>
@@ -13886,7 +14705,7 @@
         </p:nvGraphicFramePr>
         <p:xfrm>
           <a:off x="320040" y="3200400"/>
-          <a:ext cx="11521440" cy="2103120"/>
+          <a:ext cx="11521440" cy="2200656"/>
         </p:xfrm>
         <a:graphic>
           <a:graphicData uri="http://schemas.openxmlformats.org/drawingml/2006/table">
@@ -13895,11 +14714,41 @@
                 <a:tableStyleId>{5C22544A-7EE6-4342-B048-85BDC9FD1C3A}</a:tableStyleId>
               </a:tblPr>
               <a:tblGrid>
-                <a:gridCol w="2304288"/>
-                <a:gridCol w="2304288"/>
-                <a:gridCol w="2304288"/>
-                <a:gridCol w="2304288"/>
-                <a:gridCol w="2304288"/>
+                <a:gridCol w="2304288">
+                  <a:extLst>
+                    <a:ext uri="{9D8B030D-6E8A-4147-A177-3AD203B41FA5}">
+                      <a16:colId xmlns:a16="http://schemas.microsoft.com/office/drawing/2014/main" val="20000"/>
+                    </a:ext>
+                  </a:extLst>
+                </a:gridCol>
+                <a:gridCol w="2304288">
+                  <a:extLst>
+                    <a:ext uri="{9D8B030D-6E8A-4147-A177-3AD203B41FA5}">
+                      <a16:colId xmlns:a16="http://schemas.microsoft.com/office/drawing/2014/main" val="20001"/>
+                    </a:ext>
+                  </a:extLst>
+                </a:gridCol>
+                <a:gridCol w="2304288">
+                  <a:extLst>
+                    <a:ext uri="{9D8B030D-6E8A-4147-A177-3AD203B41FA5}">
+                      <a16:colId xmlns:a16="http://schemas.microsoft.com/office/drawing/2014/main" val="20002"/>
+                    </a:ext>
+                  </a:extLst>
+                </a:gridCol>
+                <a:gridCol w="2304288">
+                  <a:extLst>
+                    <a:ext uri="{9D8B030D-6E8A-4147-A177-3AD203B41FA5}">
+                      <a16:colId xmlns:a16="http://schemas.microsoft.com/office/drawing/2014/main" val="20003"/>
+                    </a:ext>
+                  </a:extLst>
+                </a:gridCol>
+                <a:gridCol w="2304288">
+                  <a:extLst>
+                    <a:ext uri="{9D8B030D-6E8A-4147-A177-3AD203B41FA5}">
+                      <a16:colId xmlns:a16="http://schemas.microsoft.com/office/drawing/2014/main" val="20004"/>
+                    </a:ext>
+                  </a:extLst>
+                </a:gridCol>
               </a:tblGrid>
               <a:tr h="420624">
                 <a:tc>
@@ -13909,7 +14758,7 @@
                     <a:p>
                       <a:pPr algn="ctr"/>
                       <a:r>
-                        <a:rPr b="1" sz="1000">
+                        <a:rPr sz="1000" b="1">
                           <a:solidFill>
                             <a:srgbClr val="FFFFFF"/>
                           </a:solidFill>
@@ -13931,7 +14780,7 @@
                     <a:p>
                       <a:pPr algn="ctr"/>
                       <a:r>
-                        <a:rPr b="1" sz="1000">
+                        <a:rPr sz="1000" b="1">
                           <a:solidFill>
                             <a:srgbClr val="FFFFFF"/>
                           </a:solidFill>
@@ -13958,7 +14807,7 @@
                     <a:p>
                       <a:pPr algn="ctr"/>
                       <a:r>
-                        <a:rPr b="1" sz="1000">
+                        <a:rPr sz="1000" b="1">
                           <a:solidFill>
                             <a:srgbClr val="FFFFFF"/>
                           </a:solidFill>
@@ -13985,7 +14834,7 @@
                     <a:p>
                       <a:pPr algn="ctr"/>
                       <a:r>
-                        <a:rPr b="1" sz="1000">
+                        <a:rPr sz="1000" b="1">
                           <a:solidFill>
                             <a:srgbClr val="FFFFFF"/>
                           </a:solidFill>
@@ -14007,7 +14856,7 @@
                     <a:p>
                       <a:pPr algn="ctr"/>
                       <a:r>
-                        <a:rPr b="1" sz="1000">
+                        <a:rPr sz="1000" b="1">
                           <a:solidFill>
                             <a:srgbClr val="FFFFFF"/>
                           </a:solidFill>
@@ -14022,6 +14871,11 @@
                     </a:solidFill>
                   </a:tcPr>
                 </a:tc>
+                <a:extLst>
+                  <a:ext uri="{0D108BD9-81ED-4DB2-BD59-A6C34878D82A}">
+                    <a16:rowId xmlns:a16="http://schemas.microsoft.com/office/drawing/2014/main" val="10000"/>
+                  </a:ext>
+                </a:extLst>
               </a:tr>
               <a:tr h="420624">
                 <a:tc>
@@ -14134,6 +14988,11 @@
                     </a:solidFill>
                   </a:tcPr>
                 </a:tc>
+                <a:extLst>
+                  <a:ext uri="{0D108BD9-81ED-4DB2-BD59-A6C34878D82A}">
+                    <a16:rowId xmlns:a16="http://schemas.microsoft.com/office/drawing/2014/main" val="10001"/>
+                  </a:ext>
+                </a:extLst>
               </a:tr>
               <a:tr h="420624">
                 <a:tc>
@@ -14246,6 +15105,11 @@
                     </a:solidFill>
                   </a:tcPr>
                 </a:tc>
+                <a:extLst>
+                  <a:ext uri="{0D108BD9-81ED-4DB2-BD59-A6C34878D82A}">
+                    <a16:rowId xmlns:a16="http://schemas.microsoft.com/office/drawing/2014/main" val="10002"/>
+                  </a:ext>
+                </a:extLst>
               </a:tr>
               <a:tr h="420624">
                 <a:tc>
@@ -14358,6 +15222,11 @@
                     </a:solidFill>
                   </a:tcPr>
                 </a:tc>
+                <a:extLst>
+                  <a:ext uri="{0D108BD9-81ED-4DB2-BD59-A6C34878D82A}">
+                    <a16:rowId xmlns:a16="http://schemas.microsoft.com/office/drawing/2014/main" val="10003"/>
+                  </a:ext>
+                </a:extLst>
               </a:tr>
               <a:tr h="420624">
                 <a:tc>
@@ -14470,6 +15339,11 @@
                     </a:solidFill>
                   </a:tcPr>
                 </a:tc>
+                <a:extLst>
+                  <a:ext uri="{0D108BD9-81ED-4DB2-BD59-A6C34878D82A}">
+                    <a16:rowId xmlns:a16="http://schemas.microsoft.com/office/drawing/2014/main" val="10004"/>
+                  </a:ext>
+                </a:extLst>
               </a:tr>
             </a:tbl>
           </a:graphicData>
@@ -14515,6 +15389,7 @@
           <a:lstStyle/>
           <a:p>
             <a:pPr algn="ctr"/>
+            <a:endParaRPr/>
           </a:p>
         </p:txBody>
       </p:sp>
@@ -14561,7 +15436,7 @@
 </file>
 
 <file path=ppt/slides/slide19.xml><?xml version="1.0" encoding="utf-8"?>
-<p:sld xmlns:a="http://schemas.openxmlformats.org/drawingml/2006/main" xmlns:p="http://schemas.openxmlformats.org/presentationml/2006/main" xmlns:r="http://schemas.openxmlformats.org/officeDocument/2006/relationships">
+<p:sld xmlns:a="http://schemas.openxmlformats.org/drawingml/2006/main" xmlns:r="http://schemas.openxmlformats.org/officeDocument/2006/relationships" xmlns:p="http://schemas.openxmlformats.org/presentationml/2006/main">
   <p:cSld>
     <p:spTree>
       <p:nvGrpSpPr>
@@ -14569,7 +15444,14 @@
         <p:cNvGrpSpPr/>
         <p:nvPr/>
       </p:nvGrpSpPr>
-      <p:grpSpPr/>
+      <p:grpSpPr>
+        <a:xfrm>
+          <a:off x="0" y="0"/>
+          <a:ext cx="0" cy="0"/>
+          <a:chOff x="0" y="0"/>
+          <a:chExt cx="0" cy="0"/>
+        </a:xfrm>
+      </p:grpSpPr>
       <p:sp>
         <p:nvSpPr>
           <p:cNvPr id="2" name="Rectangle 1"/>
@@ -14610,6 +15492,7 @@
           <a:lstStyle/>
           <a:p>
             <a:pPr algn="ctr"/>
+            <a:endParaRPr/>
           </a:p>
         </p:txBody>
       </p:sp>
@@ -14653,6 +15536,7 @@
           <a:lstStyle/>
           <a:p>
             <a:pPr algn="ctr"/>
+            <a:endParaRPr/>
           </a:p>
         </p:txBody>
       </p:sp>
@@ -14777,8 +15661,20 @@
                 <a:tableStyleId>{5C22544A-7EE6-4342-B048-85BDC9FD1C3A}</a:tableStyleId>
               </a:tblPr>
               <a:tblGrid>
-                <a:gridCol w="2880360"/>
-                <a:gridCol w="2880360"/>
+                <a:gridCol w="2880360">
+                  <a:extLst>
+                    <a:ext uri="{9D8B030D-6E8A-4147-A177-3AD203B41FA5}">
+                      <a16:colId xmlns:a16="http://schemas.microsoft.com/office/drawing/2014/main" val="20000"/>
+                    </a:ext>
+                  </a:extLst>
+                </a:gridCol>
+                <a:gridCol w="2880360">
+                  <a:extLst>
+                    <a:ext uri="{9D8B030D-6E8A-4147-A177-3AD203B41FA5}">
+                      <a16:colId xmlns:a16="http://schemas.microsoft.com/office/drawing/2014/main" val="20001"/>
+                    </a:ext>
+                  </a:extLst>
+                </a:gridCol>
               </a:tblGrid>
               <a:tr h="431074">
                 <a:tc>
@@ -14788,7 +15684,7 @@
                     <a:p>
                       <a:pPr algn="ctr"/>
                       <a:r>
-                        <a:rPr b="1" sz="1000">
+                        <a:rPr sz="1000" b="1">
                           <a:solidFill>
                             <a:srgbClr val="FFFFFF"/>
                           </a:solidFill>
@@ -14810,7 +15706,7 @@
                     <a:p>
                       <a:pPr algn="ctr"/>
                       <a:r>
-                        <a:rPr b="1" sz="1000">
+                        <a:rPr sz="1000" b="1">
                           <a:solidFill>
                             <a:srgbClr val="FFFFFF"/>
                           </a:solidFill>
@@ -14825,6 +15721,11 @@
                     </a:solidFill>
                   </a:tcPr>
                 </a:tc>
+                <a:extLst>
+                  <a:ext uri="{0D108BD9-81ED-4DB2-BD59-A6C34878D82A}">
+                    <a16:rowId xmlns:a16="http://schemas.microsoft.com/office/drawing/2014/main" val="10000"/>
+                  </a:ext>
+                </a:extLst>
               </a:tr>
               <a:tr h="431074">
                 <a:tc>
@@ -14871,6 +15772,11 @@
                     </a:solidFill>
                   </a:tcPr>
                 </a:tc>
+                <a:extLst>
+                  <a:ext uri="{0D108BD9-81ED-4DB2-BD59-A6C34878D82A}">
+                    <a16:rowId xmlns:a16="http://schemas.microsoft.com/office/drawing/2014/main" val="10001"/>
+                  </a:ext>
+                </a:extLst>
               </a:tr>
               <a:tr h="431074">
                 <a:tc>
@@ -14917,6 +15823,11 @@
                     </a:solidFill>
                   </a:tcPr>
                 </a:tc>
+                <a:extLst>
+                  <a:ext uri="{0D108BD9-81ED-4DB2-BD59-A6C34878D82A}">
+                    <a16:rowId xmlns:a16="http://schemas.microsoft.com/office/drawing/2014/main" val="10002"/>
+                  </a:ext>
+                </a:extLst>
               </a:tr>
               <a:tr h="431074">
                 <a:tc>
@@ -14963,6 +15874,11 @@
                     </a:solidFill>
                   </a:tcPr>
                 </a:tc>
+                <a:extLst>
+                  <a:ext uri="{0D108BD9-81ED-4DB2-BD59-A6C34878D82A}">
+                    <a16:rowId xmlns:a16="http://schemas.microsoft.com/office/drawing/2014/main" val="10003"/>
+                  </a:ext>
+                </a:extLst>
               </a:tr>
               <a:tr h="431074">
                 <a:tc>
@@ -15009,6 +15925,11 @@
                     </a:solidFill>
                   </a:tcPr>
                 </a:tc>
+                <a:extLst>
+                  <a:ext uri="{0D108BD9-81ED-4DB2-BD59-A6C34878D82A}">
+                    <a16:rowId xmlns:a16="http://schemas.microsoft.com/office/drawing/2014/main" val="10004"/>
+                  </a:ext>
+                </a:extLst>
               </a:tr>
               <a:tr h="431074">
                 <a:tc>
@@ -15055,6 +15976,11 @@
                     </a:solidFill>
                   </a:tcPr>
                 </a:tc>
+                <a:extLst>
+                  <a:ext uri="{0D108BD9-81ED-4DB2-BD59-A6C34878D82A}">
+                    <a16:rowId xmlns:a16="http://schemas.microsoft.com/office/drawing/2014/main" val="10005"/>
+                  </a:ext>
+                </a:extLst>
               </a:tr>
               <a:tr h="431076">
                 <a:tc>
@@ -15101,6 +16027,11 @@
                     </a:solidFill>
                   </a:tcPr>
                 </a:tc>
+                <a:extLst>
+                  <a:ext uri="{0D108BD9-81ED-4DB2-BD59-A6C34878D82A}">
+                    <a16:rowId xmlns:a16="http://schemas.microsoft.com/office/drawing/2014/main" val="10006"/>
+                  </a:ext>
+                </a:extLst>
               </a:tr>
             </a:tbl>
           </a:graphicData>
@@ -15159,8 +16090,20 @@
                 <a:tableStyleId>{5C22544A-7EE6-4342-B048-85BDC9FD1C3A}</a:tableStyleId>
               </a:tblPr>
               <a:tblGrid>
-                <a:gridCol w="2825496"/>
-                <a:gridCol w="2825496"/>
+                <a:gridCol w="2825496">
+                  <a:extLst>
+                    <a:ext uri="{9D8B030D-6E8A-4147-A177-3AD203B41FA5}">
+                      <a16:colId xmlns:a16="http://schemas.microsoft.com/office/drawing/2014/main" val="20000"/>
+                    </a:ext>
+                  </a:extLst>
+                </a:gridCol>
+                <a:gridCol w="2825496">
+                  <a:extLst>
+                    <a:ext uri="{9D8B030D-6E8A-4147-A177-3AD203B41FA5}">
+                      <a16:colId xmlns:a16="http://schemas.microsoft.com/office/drawing/2014/main" val="20001"/>
+                    </a:ext>
+                  </a:extLst>
+                </a:gridCol>
               </a:tblGrid>
               <a:tr h="422910">
                 <a:tc>
@@ -15170,7 +16113,7 @@
                     <a:p>
                       <a:pPr algn="ctr"/>
                       <a:r>
-                        <a:rPr b="1" sz="1000">
+                        <a:rPr sz="1000" b="1">
                           <a:solidFill>
                             <a:srgbClr val="FFFFFF"/>
                           </a:solidFill>
@@ -15192,7 +16135,7 @@
                     <a:p>
                       <a:pPr algn="ctr"/>
                       <a:r>
-                        <a:rPr b="1" sz="1000">
+                        <a:rPr sz="1000" b="1">
                           <a:solidFill>
                             <a:srgbClr val="FFFFFF"/>
                           </a:solidFill>
@@ -15207,6 +16150,11 @@
                     </a:solidFill>
                   </a:tcPr>
                 </a:tc>
+                <a:extLst>
+                  <a:ext uri="{0D108BD9-81ED-4DB2-BD59-A6C34878D82A}">
+                    <a16:rowId xmlns:a16="http://schemas.microsoft.com/office/drawing/2014/main" val="10000"/>
+                  </a:ext>
+                </a:extLst>
               </a:tr>
               <a:tr h="422910">
                 <a:tc>
@@ -15253,6 +16201,11 @@
                     </a:solidFill>
                   </a:tcPr>
                 </a:tc>
+                <a:extLst>
+                  <a:ext uri="{0D108BD9-81ED-4DB2-BD59-A6C34878D82A}">
+                    <a16:rowId xmlns:a16="http://schemas.microsoft.com/office/drawing/2014/main" val="10001"/>
+                  </a:ext>
+                </a:extLst>
               </a:tr>
               <a:tr h="422910">
                 <a:tc>
@@ -15299,6 +16252,11 @@
                     </a:solidFill>
                   </a:tcPr>
                 </a:tc>
+                <a:extLst>
+                  <a:ext uri="{0D108BD9-81ED-4DB2-BD59-A6C34878D82A}">
+                    <a16:rowId xmlns:a16="http://schemas.microsoft.com/office/drawing/2014/main" val="10002"/>
+                  </a:ext>
+                </a:extLst>
               </a:tr>
               <a:tr h="422910">
                 <a:tc>
@@ -15345,6 +16303,11 @@
                     </a:solidFill>
                   </a:tcPr>
                 </a:tc>
+                <a:extLst>
+                  <a:ext uri="{0D108BD9-81ED-4DB2-BD59-A6C34878D82A}">
+                    <a16:rowId xmlns:a16="http://schemas.microsoft.com/office/drawing/2014/main" val="10003"/>
+                  </a:ext>
+                </a:extLst>
               </a:tr>
               <a:tr h="422910">
                 <a:tc>
@@ -15391,6 +16354,11 @@
                     </a:solidFill>
                   </a:tcPr>
                 </a:tc>
+                <a:extLst>
+                  <a:ext uri="{0D108BD9-81ED-4DB2-BD59-A6C34878D82A}">
+                    <a16:rowId xmlns:a16="http://schemas.microsoft.com/office/drawing/2014/main" val="10004"/>
+                  </a:ext>
+                </a:extLst>
               </a:tr>
               <a:tr h="422910">
                 <a:tc>
@@ -15437,6 +16405,11 @@
                     </a:solidFill>
                   </a:tcPr>
                 </a:tc>
+                <a:extLst>
+                  <a:ext uri="{0D108BD9-81ED-4DB2-BD59-A6C34878D82A}">
+                    <a16:rowId xmlns:a16="http://schemas.microsoft.com/office/drawing/2014/main" val="10005"/>
+                  </a:ext>
+                </a:extLst>
               </a:tr>
               <a:tr h="422910">
                 <a:tc>
@@ -15483,6 +16456,11 @@
                     </a:solidFill>
                   </a:tcPr>
                 </a:tc>
+                <a:extLst>
+                  <a:ext uri="{0D108BD9-81ED-4DB2-BD59-A6C34878D82A}">
+                    <a16:rowId xmlns:a16="http://schemas.microsoft.com/office/drawing/2014/main" val="10006"/>
+                  </a:ext>
+                </a:extLst>
               </a:tr>
               <a:tr h="422910">
                 <a:tc>
@@ -15529,6 +16507,11 @@
                     </a:solidFill>
                   </a:tcPr>
                 </a:tc>
+                <a:extLst>
+                  <a:ext uri="{0D108BD9-81ED-4DB2-BD59-A6C34878D82A}">
+                    <a16:rowId xmlns:a16="http://schemas.microsoft.com/office/drawing/2014/main" val="10007"/>
+                  </a:ext>
+                </a:extLst>
               </a:tr>
             </a:tbl>
           </a:graphicData>
@@ -15574,6 +16557,7 @@
           <a:lstStyle/>
           <a:p>
             <a:pPr algn="ctr"/>
+            <a:endParaRPr/>
           </a:p>
         </p:txBody>
       </p:sp>
@@ -15687,6 +16671,7 @@
           <a:lstStyle/>
           <a:p>
             <a:pPr algn="ctr"/>
+            <a:endParaRPr/>
           </a:p>
         </p:txBody>
       </p:sp>
@@ -15769,7 +16754,7 @@
 </file>
 
 <file path=ppt/slides/slide2.xml><?xml version="1.0" encoding="utf-8"?>
-<p:sld xmlns:a="http://schemas.openxmlformats.org/drawingml/2006/main" xmlns:p="http://schemas.openxmlformats.org/presentationml/2006/main" xmlns:r="http://schemas.openxmlformats.org/officeDocument/2006/relationships">
+<p:sld xmlns:a="http://schemas.openxmlformats.org/drawingml/2006/main" xmlns:r="http://schemas.openxmlformats.org/officeDocument/2006/relationships" xmlns:p="http://schemas.openxmlformats.org/presentationml/2006/main">
   <p:cSld>
     <p:spTree>
       <p:nvGrpSpPr>
@@ -15777,7 +16762,14 @@
         <p:cNvGrpSpPr/>
         <p:nvPr/>
       </p:nvGrpSpPr>
-      <p:grpSpPr/>
+      <p:grpSpPr>
+        <a:xfrm>
+          <a:off x="0" y="0"/>
+          <a:ext cx="0" cy="0"/>
+          <a:chOff x="0" y="0"/>
+          <a:chExt cx="0" cy="0"/>
+        </a:xfrm>
+      </p:grpSpPr>
       <p:sp>
         <p:nvSpPr>
           <p:cNvPr id="2" name="Rectangle 1"/>
@@ -15818,6 +16810,7 @@
           <a:lstStyle/>
           <a:p>
             <a:pPr algn="ctr"/>
+            <a:endParaRPr/>
           </a:p>
         </p:txBody>
       </p:sp>
@@ -15861,6 +16854,7 @@
           <a:lstStyle/>
           <a:p>
             <a:pPr algn="ctr"/>
+            <a:endParaRPr/>
           </a:p>
         </p:txBody>
       </p:sp>
@@ -15972,6 +16966,7 @@
           <a:lstStyle/>
           <a:p>
             <a:pPr algn="ctr"/>
+            <a:endParaRPr/>
           </a:p>
         </p:txBody>
       </p:sp>
@@ -16117,6 +17112,7 @@
           <a:lstStyle/>
           <a:p>
             <a:pPr algn="ctr"/>
+            <a:endParaRPr/>
           </a:p>
         </p:txBody>
       </p:sp>
@@ -16262,6 +17258,7 @@
           <a:lstStyle/>
           <a:p>
             <a:pPr algn="ctr"/>
+            <a:endParaRPr/>
           </a:p>
         </p:txBody>
       </p:sp>
@@ -16407,6 +17404,7 @@
           <a:lstStyle/>
           <a:p>
             <a:pPr algn="ctr"/>
+            <a:endParaRPr/>
           </a:p>
         </p:txBody>
       </p:sp>
@@ -16552,6 +17550,7 @@
           <a:lstStyle/>
           <a:p>
             <a:pPr algn="ctr"/>
+            <a:endParaRPr/>
           </a:p>
         </p:txBody>
       </p:sp>
@@ -16697,6 +17696,7 @@
           <a:lstStyle/>
           <a:p>
             <a:pPr algn="ctr"/>
+            <a:endParaRPr/>
           </a:p>
         </p:txBody>
       </p:sp>
@@ -16842,6 +17842,7 @@
           <a:lstStyle/>
           <a:p>
             <a:pPr algn="ctr"/>
+            <a:endParaRPr/>
           </a:p>
         </p:txBody>
       </p:sp>
@@ -16956,7 +17957,7 @@
 </file>
 
 <file path=ppt/slides/slide20.xml><?xml version="1.0" encoding="utf-8"?>
-<p:sld xmlns:a="http://schemas.openxmlformats.org/drawingml/2006/main" xmlns:p="http://schemas.openxmlformats.org/presentationml/2006/main" xmlns:r="http://schemas.openxmlformats.org/officeDocument/2006/relationships">
+<p:sld xmlns:a="http://schemas.openxmlformats.org/drawingml/2006/main" xmlns:r="http://schemas.openxmlformats.org/officeDocument/2006/relationships" xmlns:p="http://schemas.openxmlformats.org/presentationml/2006/main">
   <p:cSld>
     <p:spTree>
       <p:nvGrpSpPr>
@@ -16964,7 +17965,14 @@
         <p:cNvGrpSpPr/>
         <p:nvPr/>
       </p:nvGrpSpPr>
-      <p:grpSpPr/>
+      <p:grpSpPr>
+        <a:xfrm>
+          <a:off x="0" y="0"/>
+          <a:ext cx="0" cy="0"/>
+          <a:chOff x="0" y="0"/>
+          <a:chExt cx="0" cy="0"/>
+        </a:xfrm>
+      </p:grpSpPr>
       <p:sp>
         <p:nvSpPr>
           <p:cNvPr id="2" name="Rectangle 1"/>
@@ -17005,6 +18013,7 @@
           <a:lstStyle/>
           <a:p>
             <a:pPr algn="ctr"/>
+            <a:endParaRPr/>
           </a:p>
         </p:txBody>
       </p:sp>
@@ -17048,6 +18057,7 @@
           <a:lstStyle/>
           <a:p>
             <a:pPr algn="ctr"/>
+            <a:endParaRPr/>
           </a:p>
         </p:txBody>
       </p:sp>
@@ -17159,6 +18169,7 @@
           <a:lstStyle/>
           <a:p>
             <a:pPr algn="ctr"/>
+            <a:endParaRPr/>
           </a:p>
         </p:txBody>
       </p:sp>
@@ -17202,6 +18213,7 @@
           <a:lstStyle/>
           <a:p>
             <a:pPr algn="ctr"/>
+            <a:endParaRPr/>
           </a:p>
         </p:txBody>
       </p:sp>
@@ -17314,6 +18326,7 @@
           <a:lstStyle/>
           <a:p>
             <a:pPr algn="ctr"/>
+            <a:endParaRPr/>
           </a:p>
         </p:txBody>
       </p:sp>
@@ -17357,6 +18370,7 @@
           <a:lstStyle/>
           <a:p>
             <a:pPr algn="ctr"/>
+            <a:endParaRPr/>
           </a:p>
         </p:txBody>
       </p:sp>
@@ -17470,6 +18484,7 @@
           <a:lstStyle/>
           <a:p>
             <a:pPr algn="ctr"/>
+            <a:endParaRPr/>
           </a:p>
         </p:txBody>
       </p:sp>
@@ -17513,6 +18528,7 @@
           <a:lstStyle/>
           <a:p>
             <a:pPr algn="ctr"/>
+            <a:endParaRPr/>
           </a:p>
         </p:txBody>
       </p:sp>
@@ -17625,6 +18641,7 @@
           <a:lstStyle/>
           <a:p>
             <a:pPr algn="ctr"/>
+            <a:endParaRPr/>
           </a:p>
         </p:txBody>
       </p:sp>
@@ -17668,6 +18685,7 @@
           <a:lstStyle/>
           <a:p>
             <a:pPr algn="ctr"/>
+            <a:endParaRPr/>
           </a:p>
         </p:txBody>
       </p:sp>
@@ -17784,7 +18802,7 @@
 </file>
 
 <file path=ppt/slides/slide21.xml><?xml version="1.0" encoding="utf-8"?>
-<p:sld xmlns:a="http://schemas.openxmlformats.org/drawingml/2006/main" xmlns:p="http://schemas.openxmlformats.org/presentationml/2006/main" xmlns:r="http://schemas.openxmlformats.org/officeDocument/2006/relationships">
+<p:sld xmlns:a="http://schemas.openxmlformats.org/drawingml/2006/main" xmlns:r="http://schemas.openxmlformats.org/officeDocument/2006/relationships" xmlns:p="http://schemas.openxmlformats.org/presentationml/2006/main">
   <p:cSld>
     <p:spTree>
       <p:nvGrpSpPr>
@@ -17792,7 +18810,14 @@
         <p:cNvGrpSpPr/>
         <p:nvPr/>
       </p:nvGrpSpPr>
-      <p:grpSpPr/>
+      <p:grpSpPr>
+        <a:xfrm>
+          <a:off x="0" y="0"/>
+          <a:ext cx="0" cy="0"/>
+          <a:chOff x="0" y="0"/>
+          <a:chExt cx="0" cy="0"/>
+        </a:xfrm>
+      </p:grpSpPr>
       <p:sp>
         <p:nvSpPr>
           <p:cNvPr id="2" name="Rectangle 1"/>
@@ -17833,6 +18858,7 @@
           <a:lstStyle/>
           <a:p>
             <a:pPr algn="ctr"/>
+            <a:endParaRPr/>
           </a:p>
         </p:txBody>
       </p:sp>
@@ -17876,6 +18902,7 @@
           <a:lstStyle/>
           <a:p>
             <a:pPr algn="ctr"/>
+            <a:endParaRPr/>
           </a:p>
         </p:txBody>
       </p:sp>
@@ -17989,6 +19016,7 @@
           <a:lstStyle/>
           <a:p>
             <a:pPr algn="ctr"/>
+            <a:endParaRPr/>
           </a:p>
         </p:txBody>
       </p:sp>
@@ -18204,6 +19232,7 @@
           <a:lstStyle/>
           <a:p>
             <a:pPr algn="ctr"/>
+            <a:endParaRPr/>
           </a:p>
         </p:txBody>
       </p:sp>
@@ -18451,6 +19480,7 @@
           <a:lstStyle/>
           <a:p>
             <a:pPr algn="ctr"/>
+            <a:endParaRPr/>
           </a:p>
         </p:txBody>
       </p:sp>
@@ -18532,7 +19562,7 @@
 </file>
 
 <file path=ppt/slides/slide3.xml><?xml version="1.0" encoding="utf-8"?>
-<p:sld xmlns:a="http://schemas.openxmlformats.org/drawingml/2006/main" xmlns:p="http://schemas.openxmlformats.org/presentationml/2006/main" xmlns:r="http://schemas.openxmlformats.org/officeDocument/2006/relationships">
+<p:sld xmlns:a="http://schemas.openxmlformats.org/drawingml/2006/main" xmlns:r="http://schemas.openxmlformats.org/officeDocument/2006/relationships" xmlns:p="http://schemas.openxmlformats.org/presentationml/2006/main">
   <p:cSld>
     <p:spTree>
       <p:nvGrpSpPr>
@@ -18540,7 +19570,14 @@
         <p:cNvGrpSpPr/>
         <p:nvPr/>
       </p:nvGrpSpPr>
-      <p:grpSpPr/>
+      <p:grpSpPr>
+        <a:xfrm>
+          <a:off x="0" y="0"/>
+          <a:ext cx="0" cy="0"/>
+          <a:chOff x="0" y="0"/>
+          <a:chExt cx="0" cy="0"/>
+        </a:xfrm>
+      </p:grpSpPr>
       <p:sp>
         <p:nvSpPr>
           <p:cNvPr id="2" name="Rectangle 1"/>
@@ -18581,6 +19618,7 @@
           <a:lstStyle/>
           <a:p>
             <a:pPr algn="ctr"/>
+            <a:endParaRPr/>
           </a:p>
         </p:txBody>
       </p:sp>
@@ -18624,6 +19662,7 @@
           <a:lstStyle/>
           <a:p>
             <a:pPr algn="ctr"/>
+            <a:endParaRPr/>
           </a:p>
         </p:txBody>
       </p:sp>
@@ -18735,6 +19774,7 @@
           <a:lstStyle/>
           <a:p>
             <a:pPr algn="ctr"/>
+            <a:endParaRPr/>
           </a:p>
         </p:txBody>
       </p:sp>
@@ -18848,6 +19888,7 @@
           <a:lstStyle/>
           <a:p>
             <a:pPr algn="ctr"/>
+            <a:endParaRPr/>
           </a:p>
         </p:txBody>
       </p:sp>
@@ -18996,6 +20037,7 @@
           <a:lstStyle/>
           <a:p>
             <a:pPr algn="ctr"/>
+            <a:endParaRPr/>
           </a:p>
         </p:txBody>
       </p:sp>
@@ -19144,6 +20186,7 @@
           <a:lstStyle/>
           <a:p>
             <a:pPr algn="ctr"/>
+            <a:endParaRPr/>
           </a:p>
         </p:txBody>
       </p:sp>
@@ -19324,7 +20367,13 @@
           <p:cNvGraphicFramePr>
             <a:graphicFrameLocks noGrp="1"/>
           </p:cNvGraphicFramePr>
-          <p:nvPr/>
+          <p:nvPr>
+            <p:extLst>
+              <p:ext uri="{D42A27DB-BD31-4B8C-83A1-F6EECF244321}">
+                <p14:modId xmlns:p14="http://schemas.microsoft.com/office/powerpoint/2010/main" val="3935484648"/>
+              </p:ext>
+            </p:extLst>
+          </p:nvPr>
         </p:nvGraphicFramePr>
         <p:xfrm>
           <a:off x="320040" y="4800600"/>
@@ -19337,9 +20386,27 @@
                 <a:tableStyleId>{5C22544A-7EE6-4342-B048-85BDC9FD1C3A}</a:tableStyleId>
               </a:tblPr>
               <a:tblGrid>
-                <a:gridCol w="3840480"/>
-                <a:gridCol w="3840480"/>
-                <a:gridCol w="3840480"/>
+                <a:gridCol w="3840480">
+                  <a:extLst>
+                    <a:ext uri="{9D8B030D-6E8A-4147-A177-3AD203B41FA5}">
+                      <a16:colId xmlns:a16="http://schemas.microsoft.com/office/drawing/2014/main" val="20000"/>
+                    </a:ext>
+                  </a:extLst>
+                </a:gridCol>
+                <a:gridCol w="3840480">
+                  <a:extLst>
+                    <a:ext uri="{9D8B030D-6E8A-4147-A177-3AD203B41FA5}">
+                      <a16:colId xmlns:a16="http://schemas.microsoft.com/office/drawing/2014/main" val="20001"/>
+                    </a:ext>
+                  </a:extLst>
+                </a:gridCol>
+                <a:gridCol w="3840480">
+                  <a:extLst>
+                    <a:ext uri="{9D8B030D-6E8A-4147-A177-3AD203B41FA5}">
+                      <a16:colId xmlns:a16="http://schemas.microsoft.com/office/drawing/2014/main" val="20002"/>
+                    </a:ext>
+                  </a:extLst>
+                </a:gridCol>
               </a:tblGrid>
               <a:tr h="365760">
                 <a:tc>
@@ -19349,7 +20416,7 @@
                     <a:p>
                       <a:pPr algn="ctr"/>
                       <a:r>
-                        <a:rPr b="1" sz="1000">
+                        <a:rPr sz="1000" b="1">
                           <a:solidFill>
                             <a:srgbClr val="FFFFFF"/>
                           </a:solidFill>
@@ -19371,7 +20438,7 @@
                     <a:p>
                       <a:pPr algn="ctr"/>
                       <a:r>
-                        <a:rPr b="1" sz="1000">
+                        <a:rPr sz="1000" b="1">
                           <a:solidFill>
                             <a:srgbClr val="FFFFFF"/>
                           </a:solidFill>
@@ -19393,7 +20460,7 @@
                     <a:p>
                       <a:pPr algn="ctr"/>
                       <a:r>
-                        <a:rPr b="1" sz="1000">
+                        <a:rPr sz="1000" b="1">
                           <a:solidFill>
                             <a:srgbClr val="FFFFFF"/>
                           </a:solidFill>
@@ -19408,6 +20475,11 @@
                     </a:solidFill>
                   </a:tcPr>
                 </a:tc>
+                <a:extLst>
+                  <a:ext uri="{0D108BD9-81ED-4DB2-BD59-A6C34878D82A}">
+                    <a16:rowId xmlns:a16="http://schemas.microsoft.com/office/drawing/2014/main" val="10000"/>
+                  </a:ext>
+                </a:extLst>
               </a:tr>
               <a:tr h="365760">
                 <a:tc>
@@ -19417,17 +20489,34 @@
                     <a:p>
                       <a:pPr algn="ctr"/>
                       <a:r>
+                        <a:rPr sz="1000" dirty="0">
+                          <a:solidFill>
+                            <a:srgbClr val="1A1A2E"/>
+                          </a:solidFill>
+                        </a:rPr>
+                        <a:t>Case 0</a:t>
+                      </a:r>
+                    </a:p>
+                  </a:txBody>
+                  <a:tcPr>
+                    <a:solidFill>
+                      <a:srgbClr val="F2F2F2"/>
+                    </a:solidFill>
+                  </a:tcPr>
+                </a:tc>
+                <a:tc>
+                  <a:txBody>
+                    <a:bodyPr/>
+                    <a:lstStyle/>
+                    <a:p>
+                      <a:pPr algn="ctr"/>
+                      <a:r>
                         <a:rPr sz="1000">
                           <a:solidFill>
                             <a:srgbClr val="1A1A2E"/>
                           </a:solidFill>
                         </a:rPr>
-                        <a:t>Case 0</a:t>
-                      </a:r>
-                    </a:p>
-                    <a:p>
-                      <a:r>
-                        <a:t>(AEC 단독)</a:t>
+                        <a:t>AEC 특징 (mean, CV, skewness, slope_abs_mean)</a:t>
                       </a:r>
                     </a:p>
                   </a:txBody>
@@ -19449,7 +20538,7 @@
                             <a:srgbClr val="1A1A2E"/>
                           </a:solidFill>
                         </a:rPr>
-                        <a:t>AEC 특징 (mean, CV, skewness, slope_abs_mean)</a:t>
+                        <a:t>AEC 독립 진단력 확인</a:t>
                       </a:r>
                     </a:p>
                   </a:txBody>
@@ -19459,28 +20548,11 @@
                     </a:solidFill>
                   </a:tcPr>
                 </a:tc>
-                <a:tc>
-                  <a:txBody>
-                    <a:bodyPr/>
-                    <a:lstStyle/>
-                    <a:p>
-                      <a:pPr algn="ctr"/>
-                      <a:r>
-                        <a:rPr sz="1000">
-                          <a:solidFill>
-                            <a:srgbClr val="1A1A2E"/>
-                          </a:solidFill>
-                        </a:rPr>
-                        <a:t>AEC 독립 진단력 확인</a:t>
-                      </a:r>
-                    </a:p>
-                  </a:txBody>
-                  <a:tcPr>
-                    <a:solidFill>
-                      <a:srgbClr val="F2F2F2"/>
-                    </a:solidFill>
-                  </a:tcPr>
-                </a:tc>
+                <a:extLst>
+                  <a:ext uri="{0D108BD9-81ED-4DB2-BD59-A6C34878D82A}">
+                    <a16:rowId xmlns:a16="http://schemas.microsoft.com/office/drawing/2014/main" val="10001"/>
+                  </a:ext>
+                </a:extLst>
               </a:tr>
               <a:tr h="365760">
                 <a:tc>
@@ -19549,6 +20621,11 @@
                     </a:solidFill>
                   </a:tcPr>
                 </a:tc>
+                <a:extLst>
+                  <a:ext uri="{0D108BD9-81ED-4DB2-BD59-A6C34878D82A}">
+                    <a16:rowId xmlns:a16="http://schemas.microsoft.com/office/drawing/2014/main" val="10002"/>
+                  </a:ext>
+                </a:extLst>
               </a:tr>
               <a:tr h="365760">
                 <a:tc>
@@ -19617,6 +20694,11 @@
                     </a:solidFill>
                   </a:tcPr>
                 </a:tc>
+                <a:extLst>
+                  <a:ext uri="{0D108BD9-81ED-4DB2-BD59-A6C34878D82A}">
+                    <a16:rowId xmlns:a16="http://schemas.microsoft.com/office/drawing/2014/main" val="10003"/>
+                  </a:ext>
+                </a:extLst>
               </a:tr>
               <a:tr h="365760">
                 <a:tc>
@@ -19670,13 +20752,34 @@
                     <a:p>
                       <a:pPr algn="ctr"/>
                       <a:r>
-                        <a:rPr sz="1000">
-                          <a:solidFill>
-                            <a:srgbClr val="1A1A2E"/>
-                          </a:solidFill>
-                        </a:rPr>
-                        <a:t>스캐너·전압 보정</a:t>
-                      </a:r>
+                        <a:rPr sz="1000" dirty="0" err="1">
+                          <a:solidFill>
+                            <a:srgbClr val="1A1A2E"/>
+                          </a:solidFill>
+                        </a:rPr>
+                        <a:t>스캐너·전압</a:t>
+                      </a:r>
+                      <a:r>
+                        <a:rPr sz="1000" dirty="0">
+                          <a:solidFill>
+                            <a:srgbClr val="1A1A2E"/>
+                          </a:solidFill>
+                        </a:rPr>
+                        <a:t> </a:t>
+                      </a:r>
+                      <a:r>
+                        <a:rPr sz="1000" dirty="0" err="1">
+                          <a:solidFill>
+                            <a:srgbClr val="1A1A2E"/>
+                          </a:solidFill>
+                        </a:rPr>
+                        <a:t>보정</a:t>
+                      </a:r>
+                      <a:endParaRPr sz="1000" dirty="0">
+                        <a:solidFill>
+                          <a:srgbClr val="1A1A2E"/>
+                        </a:solidFill>
+                      </a:endParaRPr>
                     </a:p>
                   </a:txBody>
                   <a:tcPr>
@@ -19685,6 +20788,11 @@
                     </a:solidFill>
                   </a:tcPr>
                 </a:tc>
+                <a:extLst>
+                  <a:ext uri="{0D108BD9-81ED-4DB2-BD59-A6C34878D82A}">
+                    <a16:rowId xmlns:a16="http://schemas.microsoft.com/office/drawing/2014/main" val="10004"/>
+                  </a:ext>
+                </a:extLst>
               </a:tr>
             </a:tbl>
           </a:graphicData>
@@ -19699,7 +20807,7 @@
 </file>
 
 <file path=ppt/slides/slide4.xml><?xml version="1.0" encoding="utf-8"?>
-<p:sld xmlns:a="http://schemas.openxmlformats.org/drawingml/2006/main" xmlns:p="http://schemas.openxmlformats.org/presentationml/2006/main" xmlns:r="http://schemas.openxmlformats.org/officeDocument/2006/relationships">
+<p:sld xmlns:a="http://schemas.openxmlformats.org/drawingml/2006/main" xmlns:r="http://schemas.openxmlformats.org/officeDocument/2006/relationships" xmlns:p="http://schemas.openxmlformats.org/presentationml/2006/main">
   <p:cSld>
     <p:spTree>
       <p:nvGrpSpPr>
@@ -19707,7 +20815,14 @@
         <p:cNvGrpSpPr/>
         <p:nvPr/>
       </p:nvGrpSpPr>
-      <p:grpSpPr/>
+      <p:grpSpPr>
+        <a:xfrm>
+          <a:off x="0" y="0"/>
+          <a:ext cx="0" cy="0"/>
+          <a:chOff x="0" y="0"/>
+          <a:chExt cx="0" cy="0"/>
+        </a:xfrm>
+      </p:grpSpPr>
       <p:sp>
         <p:nvSpPr>
           <p:cNvPr id="2" name="Rectangle 1"/>
@@ -19748,6 +20863,7 @@
           <a:lstStyle/>
           <a:p>
             <a:pPr algn="ctr"/>
+            <a:endParaRPr/>
           </a:p>
         </p:txBody>
       </p:sp>
@@ -19791,6 +20907,7 @@
           <a:lstStyle/>
           <a:p>
             <a:pPr algn="ctr"/>
+            <a:endParaRPr/>
           </a:p>
         </p:txBody>
       </p:sp>
@@ -19904,6 +21021,7 @@
           <a:lstStyle/>
           <a:p>
             <a:pPr algn="ctr"/>
+            <a:endParaRPr/>
           </a:p>
         </p:txBody>
       </p:sp>
@@ -20017,6 +21135,7 @@
           <a:lstStyle/>
           <a:p>
             <a:pPr algn="ctr"/>
+            <a:endParaRPr/>
           </a:p>
         </p:txBody>
       </p:sp>
@@ -20130,6 +21249,7 @@
           <a:lstStyle/>
           <a:p>
             <a:pPr algn="ctr"/>
+            <a:endParaRPr/>
           </a:p>
         </p:txBody>
       </p:sp>
@@ -20243,6 +21363,7 @@
           <a:lstStyle/>
           <a:p>
             <a:pPr algn="ctr"/>
+            <a:endParaRPr/>
           </a:p>
         </p:txBody>
       </p:sp>
@@ -20356,6 +21477,7 @@
           <a:lstStyle/>
           <a:p>
             <a:pPr algn="ctr"/>
+            <a:endParaRPr/>
           </a:p>
         </p:txBody>
       </p:sp>
@@ -20469,6 +21591,7 @@
           <a:lstStyle/>
           <a:p>
             <a:pPr algn="ctr"/>
+            <a:endParaRPr/>
           </a:p>
         </p:txBody>
       </p:sp>
@@ -20593,13 +21716,55 @@
                 <a:tableStyleId>{5C22544A-7EE6-4342-B048-85BDC9FD1C3A}</a:tableStyleId>
               </a:tblPr>
               <a:tblGrid>
-                <a:gridCol w="979714"/>
-                <a:gridCol w="979714"/>
-                <a:gridCol w="979714"/>
-                <a:gridCol w="979714"/>
-                <a:gridCol w="979714"/>
-                <a:gridCol w="979714"/>
-                <a:gridCol w="979714"/>
+                <a:gridCol w="979714">
+                  <a:extLst>
+                    <a:ext uri="{9D8B030D-6E8A-4147-A177-3AD203B41FA5}">
+                      <a16:colId xmlns:a16="http://schemas.microsoft.com/office/drawing/2014/main" val="20000"/>
+                    </a:ext>
+                  </a:extLst>
+                </a:gridCol>
+                <a:gridCol w="979714">
+                  <a:extLst>
+                    <a:ext uri="{9D8B030D-6E8A-4147-A177-3AD203B41FA5}">
+                      <a16:colId xmlns:a16="http://schemas.microsoft.com/office/drawing/2014/main" val="20001"/>
+                    </a:ext>
+                  </a:extLst>
+                </a:gridCol>
+                <a:gridCol w="979714">
+                  <a:extLst>
+                    <a:ext uri="{9D8B030D-6E8A-4147-A177-3AD203B41FA5}">
+                      <a16:colId xmlns:a16="http://schemas.microsoft.com/office/drawing/2014/main" val="20002"/>
+                    </a:ext>
+                  </a:extLst>
+                </a:gridCol>
+                <a:gridCol w="979714">
+                  <a:extLst>
+                    <a:ext uri="{9D8B030D-6E8A-4147-A177-3AD203B41FA5}">
+                      <a16:colId xmlns:a16="http://schemas.microsoft.com/office/drawing/2014/main" val="20003"/>
+                    </a:ext>
+                  </a:extLst>
+                </a:gridCol>
+                <a:gridCol w="979714">
+                  <a:extLst>
+                    <a:ext uri="{9D8B030D-6E8A-4147-A177-3AD203B41FA5}">
+                      <a16:colId xmlns:a16="http://schemas.microsoft.com/office/drawing/2014/main" val="20004"/>
+                    </a:ext>
+                  </a:extLst>
+                </a:gridCol>
+                <a:gridCol w="979714">
+                  <a:extLst>
+                    <a:ext uri="{9D8B030D-6E8A-4147-A177-3AD203B41FA5}">
+                      <a16:colId xmlns:a16="http://schemas.microsoft.com/office/drawing/2014/main" val="20005"/>
+                    </a:ext>
+                  </a:extLst>
+                </a:gridCol>
+                <a:gridCol w="979714">
+                  <a:extLst>
+                    <a:ext uri="{9D8B030D-6E8A-4147-A177-3AD203B41FA5}">
+                      <a16:colId xmlns:a16="http://schemas.microsoft.com/office/drawing/2014/main" val="20006"/>
+                    </a:ext>
+                  </a:extLst>
+                </a:gridCol>
               </a:tblGrid>
               <a:tr h="411480">
                 <a:tc>
@@ -20609,7 +21774,7 @@
                     <a:p>
                       <a:pPr algn="ctr"/>
                       <a:r>
-                        <a:rPr b="1" sz="1100">
+                        <a:rPr sz="1100" b="1">
                           <a:solidFill>
                             <a:srgbClr val="FFFFFF"/>
                           </a:solidFill>
@@ -20631,7 +21796,7 @@
                     <a:p>
                       <a:pPr algn="ctr"/>
                       <a:r>
-                        <a:rPr b="1" sz="1100">
+                        <a:rPr sz="1100" b="1">
                           <a:solidFill>
                             <a:srgbClr val="FFFFFF"/>
                           </a:solidFill>
@@ -20653,7 +21818,7 @@
                     <a:p>
                       <a:pPr algn="ctr"/>
                       <a:r>
-                        <a:rPr b="1" sz="1100">
+                        <a:rPr sz="1100" b="1">
                           <a:solidFill>
                             <a:srgbClr val="FFFFFF"/>
                           </a:solidFill>
@@ -20675,7 +21840,7 @@
                     <a:p>
                       <a:pPr algn="ctr"/>
                       <a:r>
-                        <a:rPr b="1" sz="1100">
+                        <a:rPr sz="1100" b="1">
                           <a:solidFill>
                             <a:srgbClr val="FFFFFF"/>
                           </a:solidFill>
@@ -20697,7 +21862,7 @@
                     <a:p>
                       <a:pPr algn="ctr"/>
                       <a:r>
-                        <a:rPr b="1" sz="1100">
+                        <a:rPr sz="1100" b="1">
                           <a:solidFill>
                             <a:srgbClr val="FFFFFF"/>
                           </a:solidFill>
@@ -20719,7 +21884,7 @@
                     <a:p>
                       <a:pPr algn="ctr"/>
                       <a:r>
-                        <a:rPr b="1" sz="1100">
+                        <a:rPr sz="1100" b="1">
                           <a:solidFill>
                             <a:srgbClr val="FFFFFF"/>
                           </a:solidFill>
@@ -20741,7 +21906,7 @@
                     <a:p>
                       <a:pPr algn="ctr"/>
                       <a:r>
-                        <a:rPr b="1" sz="1100">
+                        <a:rPr sz="1100" b="1">
                           <a:solidFill>
                             <a:srgbClr val="FFFFFF"/>
                           </a:solidFill>
@@ -20756,6 +21921,11 @@
                     </a:solidFill>
                   </a:tcPr>
                 </a:tc>
+                <a:extLst>
+                  <a:ext uri="{0D108BD9-81ED-4DB2-BD59-A6C34878D82A}">
+                    <a16:rowId xmlns:a16="http://schemas.microsoft.com/office/drawing/2014/main" val="10000"/>
+                  </a:ext>
+                </a:extLst>
               </a:tr>
               <a:tr h="411480">
                 <a:tc>
@@ -20912,6 +22082,11 @@
                     </a:solidFill>
                   </a:tcPr>
                 </a:tc>
+                <a:extLst>
+                  <a:ext uri="{0D108BD9-81ED-4DB2-BD59-A6C34878D82A}">
+                    <a16:rowId xmlns:a16="http://schemas.microsoft.com/office/drawing/2014/main" val="10001"/>
+                  </a:ext>
+                </a:extLst>
               </a:tr>
               <a:tr h="411480">
                 <a:tc>
@@ -21068,6 +22243,11 @@
                     </a:solidFill>
                   </a:tcPr>
                 </a:tc>
+                <a:extLst>
+                  <a:ext uri="{0D108BD9-81ED-4DB2-BD59-A6C34878D82A}">
+                    <a16:rowId xmlns:a16="http://schemas.microsoft.com/office/drawing/2014/main" val="10002"/>
+                  </a:ext>
+                </a:extLst>
               </a:tr>
             </a:tbl>
           </a:graphicData>
@@ -21113,6 +22293,7 @@
           <a:lstStyle/>
           <a:p>
             <a:pPr algn="ctr"/>
+            <a:endParaRPr/>
           </a:p>
         </p:txBody>
       </p:sp>
@@ -21294,7 +22475,7 @@
         </p:blipFill>
         <p:spPr>
           <a:xfrm>
-            <a:off x="6080760" y="5230368"/>
+            <a:off x="6080760" y="5244436"/>
             <a:ext cx="5788152" cy="1417320"/>
           </a:xfrm>
           <a:prstGeom prst="rect">
@@ -21311,7 +22492,7 @@
 </file>
 
 <file path=ppt/slides/slide5.xml><?xml version="1.0" encoding="utf-8"?>
-<p:sld xmlns:a="http://schemas.openxmlformats.org/drawingml/2006/main" xmlns:p="http://schemas.openxmlformats.org/presentationml/2006/main" xmlns:r="http://schemas.openxmlformats.org/officeDocument/2006/relationships">
+<p:sld xmlns:a="http://schemas.openxmlformats.org/drawingml/2006/main" xmlns:r="http://schemas.openxmlformats.org/officeDocument/2006/relationships" xmlns:p="http://schemas.openxmlformats.org/presentationml/2006/main">
   <p:cSld>
     <p:spTree>
       <p:nvGrpSpPr>
@@ -21319,7 +22500,14 @@
         <p:cNvGrpSpPr/>
         <p:nvPr/>
       </p:nvGrpSpPr>
-      <p:grpSpPr/>
+      <p:grpSpPr>
+        <a:xfrm>
+          <a:off x="0" y="0"/>
+          <a:ext cx="0" cy="0"/>
+          <a:chOff x="0" y="0"/>
+          <a:chExt cx="0" cy="0"/>
+        </a:xfrm>
+      </p:grpSpPr>
       <p:sp>
         <p:nvSpPr>
           <p:cNvPr id="2" name="Rectangle 1"/>
@@ -21360,6 +22548,7 @@
           <a:lstStyle/>
           <a:p>
             <a:pPr algn="ctr"/>
+            <a:endParaRPr/>
           </a:p>
         </p:txBody>
       </p:sp>
@@ -21403,6 +22592,7 @@
           <a:lstStyle/>
           <a:p>
             <a:pPr algn="ctr"/>
+            <a:endParaRPr/>
           </a:p>
         </p:txBody>
       </p:sp>
@@ -21548,6 +22738,7 @@
           <a:lstStyle/>
           <a:p>
             <a:pPr algn="ctr"/>
+            <a:endParaRPr/>
           </a:p>
         </p:txBody>
       </p:sp>
@@ -21627,6 +22818,7 @@
           <a:lstStyle/>
           <a:p>
             <a:pPr algn="ctr"/>
+            <a:endParaRPr/>
           </a:p>
         </p:txBody>
       </p:sp>
@@ -21738,6 +22930,7 @@
           <a:lstStyle/>
           <a:p>
             <a:pPr algn="ctr"/>
+            <a:endParaRPr/>
           </a:p>
         </p:txBody>
       </p:sp>
@@ -21817,6 +23010,7 @@
           <a:lstStyle/>
           <a:p>
             <a:pPr algn="ctr"/>
+            <a:endParaRPr/>
           </a:p>
         </p:txBody>
       </p:sp>
@@ -21928,6 +23122,7 @@
           <a:lstStyle/>
           <a:p>
             <a:pPr algn="ctr"/>
+            <a:endParaRPr/>
           </a:p>
         </p:txBody>
       </p:sp>
@@ -22007,6 +23202,7 @@
           <a:lstStyle/>
           <a:p>
             <a:pPr algn="ctr"/>
+            <a:endParaRPr/>
           </a:p>
         </p:txBody>
       </p:sp>
@@ -22118,6 +23314,7 @@
           <a:lstStyle/>
           <a:p>
             <a:pPr algn="ctr"/>
+            <a:endParaRPr/>
           </a:p>
         </p:txBody>
       </p:sp>
@@ -22197,6 +23394,7 @@
           <a:lstStyle/>
           <a:p>
             <a:pPr algn="ctr"/>
+            <a:endParaRPr/>
           </a:p>
         </p:txBody>
       </p:sp>
@@ -22308,6 +23506,7 @@
           <a:lstStyle/>
           <a:p>
             <a:pPr algn="ctr"/>
+            <a:endParaRPr/>
           </a:p>
         </p:txBody>
       </p:sp>
@@ -22387,6 +23586,7 @@
           <a:lstStyle/>
           <a:p>
             <a:pPr algn="ctr"/>
+            <a:endParaRPr/>
           </a:p>
         </p:txBody>
       </p:sp>
@@ -22464,6 +23664,7 @@
           <a:lstStyle/>
           <a:p>
             <a:pPr algn="ctr"/>
+            <a:endParaRPr/>
           </a:p>
         </p:txBody>
       </p:sp>
@@ -22510,7 +23711,7 @@
 </file>
 
 <file path=ppt/slides/slide6.xml><?xml version="1.0" encoding="utf-8"?>
-<p:sld xmlns:a="http://schemas.openxmlformats.org/drawingml/2006/main" xmlns:p="http://schemas.openxmlformats.org/presentationml/2006/main" xmlns:r="http://schemas.openxmlformats.org/officeDocument/2006/relationships">
+<p:sld xmlns:a="http://schemas.openxmlformats.org/drawingml/2006/main" xmlns:r="http://schemas.openxmlformats.org/officeDocument/2006/relationships" xmlns:p="http://schemas.openxmlformats.org/presentationml/2006/main">
   <p:cSld>
     <p:spTree>
       <p:nvGrpSpPr>
@@ -22518,7 +23719,14 @@
         <p:cNvGrpSpPr/>
         <p:nvPr/>
       </p:nvGrpSpPr>
-      <p:grpSpPr/>
+      <p:grpSpPr>
+        <a:xfrm>
+          <a:off x="0" y="0"/>
+          <a:ext cx="0" cy="0"/>
+          <a:chOff x="0" y="0"/>
+          <a:chExt cx="0" cy="0"/>
+        </a:xfrm>
+      </p:grpSpPr>
       <p:sp>
         <p:nvSpPr>
           <p:cNvPr id="2" name="Rectangle 1"/>
@@ -22559,6 +23767,7 @@
           <a:lstStyle/>
           <a:p>
             <a:pPr algn="ctr"/>
+            <a:endParaRPr/>
           </a:p>
         </p:txBody>
       </p:sp>
@@ -22602,6 +23811,7 @@
           <a:lstStyle/>
           <a:p>
             <a:pPr algn="ctr"/>
+            <a:endParaRPr/>
           </a:p>
         </p:txBody>
       </p:sp>
@@ -22715,6 +23925,7 @@
           <a:lstStyle/>
           <a:p>
             <a:pPr algn="ctr"/>
+            <a:endParaRPr/>
           </a:p>
         </p:txBody>
       </p:sp>
@@ -22828,6 +24039,7 @@
           <a:lstStyle/>
           <a:p>
             <a:pPr algn="ctr"/>
+            <a:endParaRPr/>
           </a:p>
         </p:txBody>
       </p:sp>
@@ -22941,6 +24153,7 @@
           <a:lstStyle/>
           <a:p>
             <a:pPr algn="ctr"/>
+            <a:endParaRPr/>
           </a:p>
         </p:txBody>
       </p:sp>
@@ -23054,6 +24267,7 @@
           <a:lstStyle/>
           <a:p>
             <a:pPr algn="ctr"/>
+            <a:endParaRPr/>
           </a:p>
         </p:txBody>
       </p:sp>
@@ -23250,7 +24464,7 @@
 </file>
 
 <file path=ppt/slides/slide7.xml><?xml version="1.0" encoding="utf-8"?>
-<p:sld xmlns:a="http://schemas.openxmlformats.org/drawingml/2006/main" xmlns:p="http://schemas.openxmlformats.org/presentationml/2006/main" xmlns:r="http://schemas.openxmlformats.org/officeDocument/2006/relationships">
+<p:sld xmlns:a="http://schemas.openxmlformats.org/drawingml/2006/main" xmlns:r="http://schemas.openxmlformats.org/officeDocument/2006/relationships" xmlns:p="http://schemas.openxmlformats.org/presentationml/2006/main">
   <p:cSld>
     <p:spTree>
       <p:nvGrpSpPr>
@@ -23258,7 +24472,14 @@
         <p:cNvGrpSpPr/>
         <p:nvPr/>
       </p:nvGrpSpPr>
-      <p:grpSpPr/>
+      <p:grpSpPr>
+        <a:xfrm>
+          <a:off x="0" y="0"/>
+          <a:ext cx="0" cy="0"/>
+          <a:chOff x="0" y="0"/>
+          <a:chExt cx="0" cy="0"/>
+        </a:xfrm>
+      </p:grpSpPr>
       <p:sp>
         <p:nvSpPr>
           <p:cNvPr id="2" name="Rectangle 1"/>
@@ -23299,6 +24520,7 @@
           <a:lstStyle/>
           <a:p>
             <a:pPr algn="ctr"/>
+            <a:endParaRPr/>
           </a:p>
         </p:txBody>
       </p:sp>
@@ -23342,6 +24564,7 @@
           <a:lstStyle/>
           <a:p>
             <a:pPr algn="ctr"/>
+            <a:endParaRPr/>
           </a:p>
         </p:txBody>
       </p:sp>
@@ -23457,7 +24680,7 @@
         </p:nvGraphicFramePr>
         <p:xfrm>
           <a:off x="320040" y="1508760"/>
-          <a:ext cx="11521440" cy="2377440"/>
+          <a:ext cx="11521440" cy="2725784"/>
         </p:xfrm>
         <a:graphic>
           <a:graphicData uri="http://schemas.openxmlformats.org/drawingml/2006/table">
@@ -23466,11 +24689,41 @@
                 <a:tableStyleId>{5C22544A-7EE6-4342-B048-85BDC9FD1C3A}</a:tableStyleId>
               </a:tblPr>
               <a:tblGrid>
-                <a:gridCol w="2304288"/>
-                <a:gridCol w="2304288"/>
-                <a:gridCol w="2304288"/>
-                <a:gridCol w="2304288"/>
-                <a:gridCol w="2304288"/>
+                <a:gridCol w="2304288">
+                  <a:extLst>
+                    <a:ext uri="{9D8B030D-6E8A-4147-A177-3AD203B41FA5}">
+                      <a16:colId xmlns:a16="http://schemas.microsoft.com/office/drawing/2014/main" val="20000"/>
+                    </a:ext>
+                  </a:extLst>
+                </a:gridCol>
+                <a:gridCol w="2304288">
+                  <a:extLst>
+                    <a:ext uri="{9D8B030D-6E8A-4147-A177-3AD203B41FA5}">
+                      <a16:colId xmlns:a16="http://schemas.microsoft.com/office/drawing/2014/main" val="20001"/>
+                    </a:ext>
+                  </a:extLst>
+                </a:gridCol>
+                <a:gridCol w="2304288">
+                  <a:extLst>
+                    <a:ext uri="{9D8B030D-6E8A-4147-A177-3AD203B41FA5}">
+                      <a16:colId xmlns:a16="http://schemas.microsoft.com/office/drawing/2014/main" val="20002"/>
+                    </a:ext>
+                  </a:extLst>
+                </a:gridCol>
+                <a:gridCol w="2304288">
+                  <a:extLst>
+                    <a:ext uri="{9D8B030D-6E8A-4147-A177-3AD203B41FA5}">
+                      <a16:colId xmlns:a16="http://schemas.microsoft.com/office/drawing/2014/main" val="20003"/>
+                    </a:ext>
+                  </a:extLst>
+                </a:gridCol>
+                <a:gridCol w="2304288">
+                  <a:extLst>
+                    <a:ext uri="{9D8B030D-6E8A-4147-A177-3AD203B41FA5}">
+                      <a16:colId xmlns:a16="http://schemas.microsoft.com/office/drawing/2014/main" val="20004"/>
+                    </a:ext>
+                  </a:extLst>
+                </a:gridCol>
               </a:tblGrid>
               <a:tr h="339634">
                 <a:tc>
@@ -23480,7 +24733,7 @@
                     <a:p>
                       <a:pPr algn="ctr"/>
                       <a:r>
-                        <a:rPr b="1" sz="1100">
+                        <a:rPr sz="1100" b="1">
                           <a:solidFill>
                             <a:srgbClr val="FFFFFF"/>
                           </a:solidFill>
@@ -23502,7 +24755,7 @@
                     <a:p>
                       <a:pPr algn="ctr"/>
                       <a:r>
-                        <a:rPr b="1" sz="1100">
+                        <a:rPr sz="1100" b="1">
                           <a:solidFill>
                             <a:srgbClr val="FFFFFF"/>
                           </a:solidFill>
@@ -23524,7 +24777,7 @@
                     <a:p>
                       <a:pPr algn="ctr"/>
                       <a:r>
-                        <a:rPr b="1" sz="1100">
+                        <a:rPr sz="1100" b="1">
                           <a:solidFill>
                             <a:srgbClr val="FFFFFF"/>
                           </a:solidFill>
@@ -23546,7 +24799,7 @@
                     <a:p>
                       <a:pPr algn="ctr"/>
                       <a:r>
-                        <a:rPr b="1" sz="1100">
+                        <a:rPr sz="1100" b="1">
                           <a:solidFill>
                             <a:srgbClr val="FFFFFF"/>
                           </a:solidFill>
@@ -23568,7 +24821,7 @@
                     <a:p>
                       <a:pPr algn="ctr"/>
                       <a:r>
-                        <a:rPr b="1" sz="1100">
+                        <a:rPr sz="1100" b="1">
                           <a:solidFill>
                             <a:srgbClr val="FFFFFF"/>
                           </a:solidFill>
@@ -23583,6 +24836,11 @@
                     </a:solidFill>
                   </a:tcPr>
                 </a:tc>
+                <a:extLst>
+                  <a:ext uri="{0D108BD9-81ED-4DB2-BD59-A6C34878D82A}">
+                    <a16:rowId xmlns:a16="http://schemas.microsoft.com/office/drawing/2014/main" val="10000"/>
+                  </a:ext>
+                </a:extLst>
               </a:tr>
               <a:tr h="339634">
                 <a:tc>
@@ -23592,12 +24850,34 @@
                     <a:p>
                       <a:pPr algn="ctr"/>
                       <a:r>
+                        <a:rPr sz="1100" dirty="0">
+                          <a:solidFill>
+                            <a:srgbClr val="1A1A2E"/>
+                          </a:solidFill>
+                        </a:rPr>
+                        <a:t>mean</a:t>
+                      </a:r>
+                    </a:p>
+                  </a:txBody>
+                  <a:tcPr>
+                    <a:solidFill>
+                      <a:srgbClr val="F2F2F2"/>
+                    </a:solidFill>
+                  </a:tcPr>
+                </a:tc>
+                <a:tc>
+                  <a:txBody>
+                    <a:bodyPr/>
+                    <a:lstStyle/>
+                    <a:p>
+                      <a:pPr algn="ctr"/>
+                      <a:r>
                         <a:rPr sz="1100">
                           <a:solidFill>
                             <a:srgbClr val="1A1A2E"/>
                           </a:solidFill>
                         </a:rPr>
-                        <a:t>mean</a:t>
+                        <a:t>+0.297</a:t>
                       </a:r>
                     </a:p>
                   </a:txBody>
@@ -23619,7 +24899,7 @@
                             <a:srgbClr val="1A1A2E"/>
                           </a:solidFill>
                         </a:rPr>
-                        <a:t>+0.297</a:t>
+                        <a:t>AEC 평균값 → 체격 전반 반영 (amplitude 그룹 대표)</a:t>
                       </a:r>
                     </a:p>
                   </a:txBody>
@@ -23641,7 +24921,7 @@
                             <a:srgbClr val="1A1A2E"/>
                           </a:solidFill>
                         </a:rPr>
-                        <a:t>AEC 평균값 → 체격 전반 반영 (amplitude 그룹 대표)</a:t>
+                        <a:t>1.53</a:t>
                       </a:r>
                     </a:p>
                   </a:txBody>
@@ -23663,7 +24943,7 @@
                             <a:srgbClr val="1A1A2E"/>
                           </a:solidFill>
                         </a:rPr>
-                        <a:t>1.53</a:t>
+                        <a:t>✔</a:t>
                       </a:r>
                     </a:p>
                   </a:txBody>
@@ -23673,28 +24953,11 @@
                     </a:solidFill>
                   </a:tcPr>
                 </a:tc>
-                <a:tc>
-                  <a:txBody>
-                    <a:bodyPr/>
-                    <a:lstStyle/>
-                    <a:p>
-                      <a:pPr algn="ctr"/>
-                      <a:r>
-                        <a:rPr sz="1100">
-                          <a:solidFill>
-                            <a:srgbClr val="1A1A2E"/>
-                          </a:solidFill>
-                        </a:rPr>
-                        <a:t>✔</a:t>
-                      </a:r>
-                    </a:p>
-                  </a:txBody>
-                  <a:tcPr>
-                    <a:solidFill>
-                      <a:srgbClr val="F2F2F2"/>
-                    </a:solidFill>
-                  </a:tcPr>
-                </a:tc>
+                <a:extLst>
+                  <a:ext uri="{0D108BD9-81ED-4DB2-BD59-A6C34878D82A}">
+                    <a16:rowId xmlns:a16="http://schemas.microsoft.com/office/drawing/2014/main" val="10001"/>
+                  </a:ext>
+                </a:extLst>
               </a:tr>
               <a:tr h="339634">
                 <a:tc>
@@ -23726,12 +24989,34 @@
                     <a:p>
                       <a:pPr algn="ctr"/>
                       <a:r>
+                        <a:rPr sz="1100" dirty="0">
+                          <a:solidFill>
+                            <a:srgbClr val="1A1A2E"/>
+                          </a:solidFill>
+                        </a:rPr>
+                        <a:t>-0.349</a:t>
+                      </a:r>
+                    </a:p>
+                  </a:txBody>
+                  <a:tcPr>
+                    <a:solidFill>
+                      <a:srgbClr val="FFFFFF"/>
+                    </a:solidFill>
+                  </a:tcPr>
+                </a:tc>
+                <a:tc>
+                  <a:txBody>
+                    <a:bodyPr/>
+                    <a:lstStyle/>
+                    <a:p>
+                      <a:pPr algn="ctr"/>
+                      <a:r>
                         <a:rPr sz="1100">
                           <a:solidFill>
                             <a:srgbClr val="1A1A2E"/>
                           </a:solidFill>
                         </a:rPr>
-                        <a:t>-0.349</a:t>
+                        <a:t>변동계수(std/mean) → 체형 불균일성 반영</a:t>
                       </a:r>
                     </a:p>
                   </a:txBody>
@@ -23753,7 +25038,7 @@
                             <a:srgbClr val="1A1A2E"/>
                           </a:solidFill>
                         </a:rPr>
-                        <a:t>변동계수(std/mean) → 체형 불균일성 반영</a:t>
+                        <a:t>1.58</a:t>
                       </a:r>
                     </a:p>
                   </a:txBody>
@@ -23775,7 +25060,7 @@
                             <a:srgbClr val="1A1A2E"/>
                           </a:solidFill>
                         </a:rPr>
-                        <a:t>1.58</a:t>
+                        <a:t>✔</a:t>
                       </a:r>
                     </a:p>
                   </a:txBody>
@@ -23785,28 +25070,11 @@
                     </a:solidFill>
                   </a:tcPr>
                 </a:tc>
-                <a:tc>
-                  <a:txBody>
-                    <a:bodyPr/>
-                    <a:lstStyle/>
-                    <a:p>
-                      <a:pPr algn="ctr"/>
-                      <a:r>
-                        <a:rPr sz="1100">
-                          <a:solidFill>
-                            <a:srgbClr val="1A1A2E"/>
-                          </a:solidFill>
-                        </a:rPr>
-                        <a:t>✔</a:t>
-                      </a:r>
-                    </a:p>
-                  </a:txBody>
-                  <a:tcPr>
-                    <a:solidFill>
-                      <a:srgbClr val="FFFFFF"/>
-                    </a:solidFill>
-                  </a:tcPr>
-                </a:tc>
+                <a:extLst>
+                  <a:ext uri="{0D108BD9-81ED-4DB2-BD59-A6C34878D82A}">
+                    <a16:rowId xmlns:a16="http://schemas.microsoft.com/office/drawing/2014/main" val="10002"/>
+                  </a:ext>
+                </a:extLst>
               </a:tr>
               <a:tr h="339634">
                 <a:tc>
@@ -23838,12 +25106,133 @@
                     <a:p>
                       <a:pPr algn="ctr"/>
                       <a:r>
+                        <a:rPr sz="1100" dirty="0">
+                          <a:solidFill>
+                            <a:srgbClr val="1A1A2E"/>
+                          </a:solidFill>
+                        </a:rPr>
+                        <a:t>-0.343</a:t>
+                      </a:r>
+                    </a:p>
+                  </a:txBody>
+                  <a:tcPr>
+                    <a:solidFill>
+                      <a:srgbClr val="F2F2F2"/>
+                    </a:solidFill>
+                  </a:tcPr>
+                </a:tc>
+                <a:tc>
+                  <a:txBody>
+                    <a:bodyPr/>
+                    <a:lstStyle/>
+                    <a:p>
+                      <a:pPr algn="ctr"/>
+                      <a:r>
+                        <a:rPr sz="1100" dirty="0">
+                          <a:solidFill>
+                            <a:srgbClr val="1A1A2E"/>
+                          </a:solidFill>
+                        </a:rPr>
+                        <a:t>AEC </a:t>
+                      </a:r>
+                      <a:r>
+                        <a:rPr sz="1100" dirty="0" err="1">
+                          <a:solidFill>
+                            <a:srgbClr val="1A1A2E"/>
+                          </a:solidFill>
+                        </a:rPr>
+                        <a:t>곡선</a:t>
+                      </a:r>
+                      <a:r>
+                        <a:rPr sz="1100" dirty="0">
+                          <a:solidFill>
+                            <a:srgbClr val="1A1A2E"/>
+                          </a:solidFill>
+                        </a:rPr>
+                        <a:t> </a:t>
+                      </a:r>
+                      <a:r>
+                        <a:rPr sz="1100" dirty="0" err="1">
+                          <a:solidFill>
+                            <a:srgbClr val="1A1A2E"/>
+                          </a:solidFill>
+                        </a:rPr>
+                        <a:t>비대칭성</a:t>
+                      </a:r>
+                      <a:r>
+                        <a:rPr sz="1100" dirty="0">
+                          <a:solidFill>
+                            <a:srgbClr val="1A1A2E"/>
+                          </a:solidFill>
+                        </a:rPr>
+                        <a:t> → </a:t>
+                      </a:r>
+                      <a:r>
+                        <a:rPr sz="1100" dirty="0" err="1">
+                          <a:solidFill>
+                            <a:srgbClr val="1A1A2E"/>
+                          </a:solidFill>
+                        </a:rPr>
+                        <a:t>체형</a:t>
+                      </a:r>
+                      <a:r>
+                        <a:rPr sz="1100" dirty="0">
+                          <a:solidFill>
+                            <a:srgbClr val="1A1A2E"/>
+                          </a:solidFill>
+                        </a:rPr>
+                        <a:t> </a:t>
+                      </a:r>
+                      <a:r>
+                        <a:rPr sz="1100" dirty="0" err="1">
+                          <a:solidFill>
+                            <a:srgbClr val="1A1A2E"/>
+                          </a:solidFill>
+                        </a:rPr>
+                        <a:t>분포</a:t>
+                      </a:r>
+                      <a:r>
+                        <a:rPr sz="1100" dirty="0">
+                          <a:solidFill>
+                            <a:srgbClr val="1A1A2E"/>
+                          </a:solidFill>
+                        </a:rPr>
+                        <a:t> </a:t>
+                      </a:r>
+                      <a:r>
+                        <a:rPr sz="1100" dirty="0" err="1">
+                          <a:solidFill>
+                            <a:srgbClr val="1A1A2E"/>
+                          </a:solidFill>
+                        </a:rPr>
+                        <a:t>특성</a:t>
+                      </a:r>
+                      <a:endParaRPr sz="1100" dirty="0">
+                        <a:solidFill>
+                          <a:srgbClr val="1A1A2E"/>
+                        </a:solidFill>
+                      </a:endParaRPr>
+                    </a:p>
+                  </a:txBody>
+                  <a:tcPr>
+                    <a:solidFill>
+                      <a:srgbClr val="F2F2F2"/>
+                    </a:solidFill>
+                  </a:tcPr>
+                </a:tc>
+                <a:tc>
+                  <a:txBody>
+                    <a:bodyPr/>
+                    <a:lstStyle/>
+                    <a:p>
+                      <a:pPr algn="ctr"/>
+                      <a:r>
                         <a:rPr sz="1100">
                           <a:solidFill>
                             <a:srgbClr val="1A1A2E"/>
                           </a:solidFill>
                         </a:rPr>
-                        <a:t>-0.343</a:t>
+                        <a:t>1.49</a:t>
                       </a:r>
                     </a:p>
                   </a:txBody>
@@ -23865,7 +25254,7 @@
                             <a:srgbClr val="1A1A2E"/>
                           </a:solidFill>
                         </a:rPr>
-                        <a:t>AEC 곡선 비대칭성 → 체형 분포 특성</a:t>
+                        <a:t>✔</a:t>
                       </a:r>
                     </a:p>
                   </a:txBody>
@@ -23875,50 +25264,11 @@
                     </a:solidFill>
                   </a:tcPr>
                 </a:tc>
-                <a:tc>
-                  <a:txBody>
-                    <a:bodyPr/>
-                    <a:lstStyle/>
-                    <a:p>
-                      <a:pPr algn="ctr"/>
-                      <a:r>
-                        <a:rPr sz="1100">
-                          <a:solidFill>
-                            <a:srgbClr val="1A1A2E"/>
-                          </a:solidFill>
-                        </a:rPr>
-                        <a:t>1.49</a:t>
-                      </a:r>
-                    </a:p>
-                  </a:txBody>
-                  <a:tcPr>
-                    <a:solidFill>
-                      <a:srgbClr val="F2F2F2"/>
-                    </a:solidFill>
-                  </a:tcPr>
-                </a:tc>
-                <a:tc>
-                  <a:txBody>
-                    <a:bodyPr/>
-                    <a:lstStyle/>
-                    <a:p>
-                      <a:pPr algn="ctr"/>
-                      <a:r>
-                        <a:rPr sz="1100">
-                          <a:solidFill>
-                            <a:srgbClr val="1A1A2E"/>
-                          </a:solidFill>
-                        </a:rPr>
-                        <a:t>✔</a:t>
-                      </a:r>
-                    </a:p>
-                  </a:txBody>
-                  <a:tcPr>
-                    <a:solidFill>
-                      <a:srgbClr val="F2F2F2"/>
-                    </a:solidFill>
-                  </a:tcPr>
-                </a:tc>
+                <a:extLst>
+                  <a:ext uri="{0D108BD9-81ED-4DB2-BD59-A6C34878D82A}">
+                    <a16:rowId xmlns:a16="http://schemas.microsoft.com/office/drawing/2014/main" val="10003"/>
+                  </a:ext>
+                </a:extLst>
               </a:tr>
               <a:tr h="339634">
                 <a:tc>
@@ -23972,12 +25322,125 @@
                     <a:p>
                       <a:pPr algn="ctr"/>
                       <a:r>
+                        <a:rPr sz="1100" dirty="0" err="1">
+                          <a:solidFill>
+                            <a:srgbClr val="1A1A2E"/>
+                          </a:solidFill>
+                        </a:rPr>
+                        <a:t>평균</a:t>
+                      </a:r>
+                      <a:r>
+                        <a:rPr sz="1100" dirty="0">
+                          <a:solidFill>
+                            <a:srgbClr val="1A1A2E"/>
+                          </a:solidFill>
+                        </a:rPr>
+                        <a:t> </a:t>
+                      </a:r>
+                      <a:r>
+                        <a:rPr sz="1100" dirty="0" err="1">
+                          <a:solidFill>
+                            <a:srgbClr val="1A1A2E"/>
+                          </a:solidFill>
+                        </a:rPr>
+                        <a:t>절대</a:t>
+                      </a:r>
+                      <a:r>
+                        <a:rPr sz="1100" dirty="0">
+                          <a:solidFill>
+                            <a:srgbClr val="1A1A2E"/>
+                          </a:solidFill>
+                        </a:rPr>
+                        <a:t> </a:t>
+                      </a:r>
+                      <a:r>
+                        <a:rPr sz="1100" dirty="0" err="1">
+                          <a:solidFill>
+                            <a:srgbClr val="1A1A2E"/>
+                          </a:solidFill>
+                        </a:rPr>
+                        <a:t>기울기</a:t>
+                      </a:r>
+                      <a:r>
+                        <a:rPr sz="1100" dirty="0">
+                          <a:solidFill>
+                            <a:srgbClr val="1A1A2E"/>
+                          </a:solidFill>
+                        </a:rPr>
+                        <a:t> → </a:t>
+                      </a:r>
+                      <a:r>
+                        <a:rPr sz="1100" dirty="0" err="1">
+                          <a:solidFill>
+                            <a:srgbClr val="1A1A2E"/>
+                          </a:solidFill>
+                        </a:rPr>
+                        <a:t>곡선</a:t>
+                      </a:r>
+                      <a:r>
+                        <a:rPr sz="1100" dirty="0">
+                          <a:solidFill>
+                            <a:srgbClr val="1A1A2E"/>
+                          </a:solidFill>
+                        </a:rPr>
+                        <a:t> </a:t>
+                      </a:r>
+                      <a:r>
+                        <a:rPr sz="1100" dirty="0" err="1">
+                          <a:solidFill>
+                            <a:srgbClr val="1A1A2E"/>
+                          </a:solidFill>
+                        </a:rPr>
+                        <a:t>동역학</a:t>
+                      </a:r>
+                      <a:endParaRPr sz="1100" dirty="0">
+                        <a:solidFill>
+                          <a:srgbClr val="1A1A2E"/>
+                        </a:solidFill>
+                      </a:endParaRPr>
+                    </a:p>
+                  </a:txBody>
+                  <a:tcPr>
+                    <a:solidFill>
+                      <a:srgbClr val="FFFFFF"/>
+                    </a:solidFill>
+                  </a:tcPr>
+                </a:tc>
+                <a:tc>
+                  <a:txBody>
+                    <a:bodyPr/>
+                    <a:lstStyle/>
+                    <a:p>
+                      <a:pPr algn="ctr"/>
+                      <a:r>
+                        <a:rPr sz="1100" dirty="0">
+                          <a:solidFill>
+                            <a:srgbClr val="1A1A2E"/>
+                          </a:solidFill>
+                        </a:rPr>
+                        <a:t>1.42</a:t>
+                      </a:r>
+                    </a:p>
+                  </a:txBody>
+                  <a:tcPr>
+                    <a:solidFill>
+                      <a:srgbClr val="FFFFFF"/>
+                    </a:solidFill>
+                  </a:tcPr>
+                </a:tc>
+                <a:tc>
+                  <a:txBody>
+                    <a:bodyPr/>
+                    <a:lstStyle/>
+                    <a:p>
+                      <a:pPr algn="ctr"/>
+                      <a:r>
                         <a:rPr sz="1100">
                           <a:solidFill>
                             <a:srgbClr val="1A1A2E"/>
                           </a:solidFill>
                         </a:rPr>
-                        <a:t>평균 절대 기울기 → 곡선 동역학</a:t>
+                        <a:t>✔</a:t>
                       </a:r>
                     </a:p>
                   </a:txBody>
@@ -23987,50 +25450,11 @@
                     </a:solidFill>
                   </a:tcPr>
                 </a:tc>
-                <a:tc>
-                  <a:txBody>
-                    <a:bodyPr/>
-                    <a:lstStyle/>
-                    <a:p>
-                      <a:pPr algn="ctr"/>
-                      <a:r>
-                        <a:rPr sz="1100">
-                          <a:solidFill>
-                            <a:srgbClr val="1A1A2E"/>
-                          </a:solidFill>
-                        </a:rPr>
-                        <a:t>1.42</a:t>
-                      </a:r>
-                    </a:p>
-                  </a:txBody>
-                  <a:tcPr>
-                    <a:solidFill>
-                      <a:srgbClr val="FFFFFF"/>
-                    </a:solidFill>
-                  </a:tcPr>
-                </a:tc>
-                <a:tc>
-                  <a:txBody>
-                    <a:bodyPr/>
-                    <a:lstStyle/>
-                    <a:p>
-                      <a:pPr algn="ctr"/>
-                      <a:r>
-                        <a:rPr sz="1100">
-                          <a:solidFill>
-                            <a:srgbClr val="1A1A2E"/>
-                          </a:solidFill>
-                        </a:rPr>
-                        <a:t>✔</a:t>
-                      </a:r>
-                    </a:p>
-                  </a:txBody>
-                  <a:tcPr>
-                    <a:solidFill>
-                      <a:srgbClr val="FFFFFF"/>
-                    </a:solidFill>
-                  </a:tcPr>
-                </a:tc>
+                <a:extLst>
+                  <a:ext uri="{0D108BD9-81ED-4DB2-BD59-A6C34878D82A}">
+                    <a16:rowId xmlns:a16="http://schemas.microsoft.com/office/drawing/2014/main" val="10004"/>
+                  </a:ext>
+                </a:extLst>
               </a:tr>
               <a:tr h="339634">
                 <a:tc>
@@ -24106,7 +25530,7 @@
                     <a:p>
                       <a:pPr algn="ctr"/>
                       <a:r>
-                        <a:rPr sz="1100">
+                        <a:rPr sz="1100" dirty="0">
                           <a:solidFill>
                             <a:srgbClr val="1A1A2E"/>
                           </a:solidFill>
@@ -24128,13 +25552,26 @@
                     <a:p>
                       <a:pPr algn="ctr"/>
                       <a:r>
-                        <a:rPr sz="1100">
-                          <a:solidFill>
-                            <a:srgbClr val="1A1A2E"/>
-                          </a:solidFill>
-                        </a:rPr>
-                        <a:t>✗ 제외</a:t>
-                      </a:r>
+                        <a:rPr sz="1100" dirty="0">
+                          <a:solidFill>
+                            <a:srgbClr val="1A1A2E"/>
+                          </a:solidFill>
+                        </a:rPr>
+                        <a:t>✗ </a:t>
+                      </a:r>
+                      <a:r>
+                        <a:rPr sz="1100" dirty="0" err="1">
+                          <a:solidFill>
+                            <a:srgbClr val="1A1A2E"/>
+                          </a:solidFill>
+                        </a:rPr>
+                        <a:t>제외</a:t>
+                      </a:r>
+                      <a:endParaRPr sz="1100" dirty="0">
+                        <a:solidFill>
+                          <a:srgbClr val="1A1A2E"/>
+                        </a:solidFill>
+                      </a:endParaRPr>
                     </a:p>
                   </a:txBody>
                   <a:tcPr>
@@ -24143,6 +25580,11 @@
                     </a:solidFill>
                   </a:tcPr>
                 </a:tc>
+                <a:extLst>
+                  <a:ext uri="{0D108BD9-81ED-4DB2-BD59-A6C34878D82A}">
+                    <a16:rowId xmlns:a16="http://schemas.microsoft.com/office/drawing/2014/main" val="10005"/>
+                  </a:ext>
+                </a:extLst>
               </a:tr>
               <a:tr h="339636">
                 <a:tc>
@@ -24240,13 +25682,26 @@
                     <a:p>
                       <a:pPr algn="ctr"/>
                       <a:r>
-                        <a:rPr sz="1100">
-                          <a:solidFill>
-                            <a:srgbClr val="1A1A2E"/>
-                          </a:solidFill>
-                        </a:rPr>
-                        <a:t>✗ 제외</a:t>
-                      </a:r>
+                        <a:rPr sz="1100" dirty="0">
+                          <a:solidFill>
+                            <a:srgbClr val="1A1A2E"/>
+                          </a:solidFill>
+                        </a:rPr>
+                        <a:t>✗ </a:t>
+                      </a:r>
+                      <a:r>
+                        <a:rPr sz="1100" dirty="0" err="1">
+                          <a:solidFill>
+                            <a:srgbClr val="1A1A2E"/>
+                          </a:solidFill>
+                        </a:rPr>
+                        <a:t>제외</a:t>
+                      </a:r>
+                      <a:endParaRPr sz="1100" dirty="0">
+                        <a:solidFill>
+                          <a:srgbClr val="1A1A2E"/>
+                        </a:solidFill>
+                      </a:endParaRPr>
                     </a:p>
                   </a:txBody>
                   <a:tcPr>
@@ -24255,6 +25710,11 @@
                     </a:solidFill>
                   </a:tcPr>
                 </a:tc>
+                <a:extLst>
+                  <a:ext uri="{0D108BD9-81ED-4DB2-BD59-A6C34878D82A}">
+                    <a16:rowId xmlns:a16="http://schemas.microsoft.com/office/drawing/2014/main" val="10006"/>
+                  </a:ext>
+                </a:extLst>
               </a:tr>
             </a:tbl>
           </a:graphicData>
@@ -24284,13 +25744,138 @@
           <a:p>
             <a:pPr algn="l"/>
             <a:r>
-              <a:rPr sz="1200" b="0" i="1">
+              <a:rPr sz="1200" b="0" i="1" dirty="0">
                 <a:solidFill>
                   <a:srgbClr val="FF7F27"/>
                 </a:solidFill>
               </a:rPr>
-              <a:t>⚠  p25·AUC_normalized: mean과 동일 amplitude 그룹(r≥0.88) → 다중공선성 제거 / mean을 대표로 포함</a:t>
-            </a:r>
+              <a:t>⚠  p25·AUC_normalized: </a:t>
+            </a:r>
+            <a:r>
+              <a:rPr sz="1200" b="0" i="1" dirty="0" err="1">
+                <a:solidFill>
+                  <a:srgbClr val="FF7F27"/>
+                </a:solidFill>
+              </a:rPr>
+              <a:t>mean과</a:t>
+            </a:r>
+            <a:r>
+              <a:rPr sz="1200" b="0" i="1" dirty="0">
+                <a:solidFill>
+                  <a:srgbClr val="FF7F27"/>
+                </a:solidFill>
+              </a:rPr>
+              <a:t> </a:t>
+            </a:r>
+            <a:r>
+              <a:rPr sz="1200" b="0" i="1" dirty="0" err="1">
+                <a:solidFill>
+                  <a:srgbClr val="FF7F27"/>
+                </a:solidFill>
+              </a:rPr>
+              <a:t>동일</a:t>
+            </a:r>
+            <a:r>
+              <a:rPr sz="1200" b="0" i="1" dirty="0">
+                <a:solidFill>
+                  <a:srgbClr val="FF7F27"/>
+                </a:solidFill>
+              </a:rPr>
+              <a:t> amplitude </a:t>
+            </a:r>
+            <a:r>
+              <a:rPr sz="1200" b="0" i="1" dirty="0" err="1">
+                <a:solidFill>
+                  <a:srgbClr val="FF7F27"/>
+                </a:solidFill>
+              </a:rPr>
+              <a:t>그룹</a:t>
+            </a:r>
+            <a:r>
+              <a:rPr sz="1200" b="0" i="1" dirty="0">
+                <a:solidFill>
+                  <a:srgbClr val="FF7F27"/>
+                </a:solidFill>
+              </a:rPr>
+              <a:t>(r≥0.88) → </a:t>
+            </a:r>
+            <a:r>
+              <a:rPr sz="1200" b="0" i="1" dirty="0" err="1">
+                <a:solidFill>
+                  <a:srgbClr val="FF7F27"/>
+                </a:solidFill>
+              </a:rPr>
+              <a:t>다중공선성</a:t>
+            </a:r>
+            <a:r>
+              <a:rPr sz="1200" b="0" i="1" dirty="0">
+                <a:solidFill>
+                  <a:srgbClr val="FF7F27"/>
+                </a:solidFill>
+              </a:rPr>
+              <a:t> </a:t>
+            </a:r>
+            <a:r>
+              <a:rPr sz="1200" b="0" i="1" dirty="0" err="1">
+                <a:solidFill>
+                  <a:srgbClr val="FF7F27"/>
+                </a:solidFill>
+              </a:rPr>
+              <a:t>제거</a:t>
+            </a:r>
+            <a:r>
+              <a:rPr sz="1200" b="0" i="1" dirty="0">
+                <a:solidFill>
+                  <a:srgbClr val="FF7F27"/>
+                </a:solidFill>
+              </a:rPr>
+              <a:t> / </a:t>
+            </a:r>
+            <a:r>
+              <a:rPr sz="1200" b="0" i="1" dirty="0" err="1">
+                <a:solidFill>
+                  <a:srgbClr val="FF7F27"/>
+                </a:solidFill>
+              </a:rPr>
+              <a:t>mean을</a:t>
+            </a:r>
+            <a:r>
+              <a:rPr sz="1200" b="0" i="1" dirty="0">
+                <a:solidFill>
+                  <a:srgbClr val="FF7F27"/>
+                </a:solidFill>
+              </a:rPr>
+              <a:t> </a:t>
+            </a:r>
+            <a:r>
+              <a:rPr sz="1200" b="0" i="1" dirty="0" err="1">
+                <a:solidFill>
+                  <a:srgbClr val="FF7F27"/>
+                </a:solidFill>
+              </a:rPr>
+              <a:t>대표로</a:t>
+            </a:r>
+            <a:r>
+              <a:rPr sz="1200" b="0" i="1" dirty="0">
+                <a:solidFill>
+                  <a:srgbClr val="FF7F27"/>
+                </a:solidFill>
+              </a:rPr>
+              <a:t> </a:t>
+            </a:r>
+            <a:r>
+              <a:rPr sz="1200" b="0" i="1" dirty="0" err="1">
+                <a:solidFill>
+                  <a:srgbClr val="FF7F27"/>
+                </a:solidFill>
+              </a:rPr>
+              <a:t>포함</a:t>
+            </a:r>
+            <a:endParaRPr sz="1200" b="0" i="1" dirty="0">
+              <a:solidFill>
+                <a:srgbClr val="FF7F27"/>
+              </a:solidFill>
+            </a:endParaRPr>
           </a:p>
         </p:txBody>
       </p:sp>
@@ -24419,7 +26004,7 @@
 </file>
 
 <file path=ppt/slides/slide8.xml><?xml version="1.0" encoding="utf-8"?>
-<p:sld xmlns:a="http://schemas.openxmlformats.org/drawingml/2006/main" xmlns:p="http://schemas.openxmlformats.org/presentationml/2006/main" xmlns:r="http://schemas.openxmlformats.org/officeDocument/2006/relationships">
+<p:sld xmlns:a="http://schemas.openxmlformats.org/drawingml/2006/main" xmlns:r="http://schemas.openxmlformats.org/officeDocument/2006/relationships" xmlns:p="http://schemas.openxmlformats.org/presentationml/2006/main">
   <p:cSld>
     <p:spTree>
       <p:nvGrpSpPr>
@@ -24427,7 +26012,14 @@
         <p:cNvGrpSpPr/>
         <p:nvPr/>
       </p:nvGrpSpPr>
-      <p:grpSpPr/>
+      <p:grpSpPr>
+        <a:xfrm>
+          <a:off x="0" y="0"/>
+          <a:ext cx="0" cy="0"/>
+          <a:chOff x="0" y="0"/>
+          <a:chExt cx="0" cy="0"/>
+        </a:xfrm>
+      </p:grpSpPr>
       <p:sp>
         <p:nvSpPr>
           <p:cNvPr id="2" name="Rectangle 1"/>
@@ -24468,6 +26060,7 @@
           <a:lstStyle/>
           <a:p>
             <a:pPr algn="ctr"/>
+            <a:endParaRPr/>
           </a:p>
         </p:txBody>
       </p:sp>
@@ -24511,6 +26104,7 @@
           <a:lstStyle/>
           <a:p>
             <a:pPr algn="ctr"/>
+            <a:endParaRPr/>
           </a:p>
         </p:txBody>
       </p:sp>
@@ -24680,6 +26274,7 @@
           <a:lstStyle/>
           <a:p>
             <a:pPr algn="ctr"/>
+            <a:endParaRPr/>
           </a:p>
         </p:txBody>
       </p:sp>
@@ -24707,13 +26302,34 @@
           <a:p>
             <a:pPr algn="l"/>
             <a:r>
-              <a:rPr sz="1200" b="1" i="0">
+              <a:rPr sz="1200" b="1" i="0" dirty="0" err="1">
                 <a:solidFill>
                   <a:srgbClr val="FF7F27"/>
                 </a:solidFill>
               </a:rPr>
-              <a:t>해석 기준</a:t>
-            </a:r>
+              <a:t>해석</a:t>
+            </a:r>
+            <a:r>
+              <a:rPr sz="1200" b="1" i="0" dirty="0">
+                <a:solidFill>
+                  <a:srgbClr val="FF7F27"/>
+                </a:solidFill>
+              </a:rPr>
+              <a:t> </a:t>
+            </a:r>
+            <a:r>
+              <a:rPr sz="1200" b="1" i="0" dirty="0" err="1">
+                <a:solidFill>
+                  <a:srgbClr val="FF7F27"/>
+                </a:solidFill>
+              </a:rPr>
+              <a:t>기준</a:t>
+            </a:r>
+            <a:endParaRPr sz="1200" b="1" i="0" dirty="0">
+              <a:solidFill>
+                <a:srgbClr val="FF7F27"/>
+              </a:solidFill>
+            </a:endParaRPr>
           </a:p>
         </p:txBody>
       </p:sp>
@@ -24741,17 +26357,190 @@
           <a:p>
             <a:pPr algn="l"/>
             <a:r>
-              <a:rPr sz="1100" b="0" i="0">
+              <a:rPr sz="1100" b="0" i="0" dirty="0">
                 <a:solidFill>
                   <a:srgbClr val="FFFFFF"/>
                 </a:solidFill>
               </a:rPr>
-              <a:t>• |r| &lt; 0.5  →  낮은 상관
-• 0.5 ≤ |r| &lt; 0.8  →  중간 상관
-• |r| ≥ 0.8  →  다중공선성 주의
-VIF &gt; 10 과 함께 확인하여
-제거 여부 결정</a:t>
-            </a:r>
+              <a:t>• |r| &lt; 0.5  →  </a:t>
+            </a:r>
+            <a:r>
+              <a:rPr sz="1100" b="0" i="0" dirty="0" err="1">
+                <a:solidFill>
+                  <a:srgbClr val="FFFFFF"/>
+                </a:solidFill>
+              </a:rPr>
+              <a:t>낮은</a:t>
+            </a:r>
+            <a:r>
+              <a:rPr sz="1100" b="0" i="0" dirty="0">
+                <a:solidFill>
+                  <a:srgbClr val="FFFFFF"/>
+                </a:solidFill>
+              </a:rPr>
+              <a:t> </a:t>
+            </a:r>
+            <a:r>
+              <a:rPr sz="1100" b="0" i="0" dirty="0" err="1">
+                <a:solidFill>
+                  <a:srgbClr val="FFFFFF"/>
+                </a:solidFill>
+              </a:rPr>
+              <a:t>상관</a:t>
+            </a:r>
+            <a:r>
+              <a:rPr sz="1100" b="0" i="0" dirty="0">
+                <a:solidFill>
+                  <a:srgbClr val="FFFFFF"/>
+                </a:solidFill>
+              </a:rPr>
+              <a:t>
+• 0.5 ≤ |r| &lt; 0.8  →  </a:t>
+            </a:r>
+            <a:r>
+              <a:rPr sz="1100" b="0" i="0" dirty="0" err="1">
+                <a:solidFill>
+                  <a:srgbClr val="FFFFFF"/>
+                </a:solidFill>
+              </a:rPr>
+              <a:t>중간</a:t>
+            </a:r>
+            <a:r>
+              <a:rPr sz="1100" b="0" i="0" dirty="0">
+                <a:solidFill>
+                  <a:srgbClr val="FFFFFF"/>
+                </a:solidFill>
+              </a:rPr>
+              <a:t> </a:t>
+            </a:r>
+            <a:r>
+              <a:rPr sz="1100" b="0" i="0" dirty="0" err="1">
+                <a:solidFill>
+                  <a:srgbClr val="FFFFFF"/>
+                </a:solidFill>
+              </a:rPr>
+              <a:t>상관</a:t>
+            </a:r>
+            <a:r>
+              <a:rPr sz="1100" b="0" i="0" dirty="0">
+                <a:solidFill>
+                  <a:srgbClr val="FFFFFF"/>
+                </a:solidFill>
+              </a:rPr>
+              <a:t>
+• |r| ≥ 0.8  →  </a:t>
+            </a:r>
+            <a:r>
+              <a:rPr sz="1100" b="0" i="0" dirty="0" err="1">
+                <a:solidFill>
+                  <a:srgbClr val="FFFFFF"/>
+                </a:solidFill>
+              </a:rPr>
+              <a:t>다중공선성</a:t>
+            </a:r>
+            <a:r>
+              <a:rPr sz="1100" b="0" i="0" dirty="0">
+                <a:solidFill>
+                  <a:srgbClr val="FFFFFF"/>
+                </a:solidFill>
+              </a:rPr>
+              <a:t> </a:t>
+            </a:r>
+            <a:r>
+              <a:rPr sz="1100" b="0" i="0" dirty="0" err="1">
+                <a:solidFill>
+                  <a:srgbClr val="FFFFFF"/>
+                </a:solidFill>
+              </a:rPr>
+              <a:t>주의</a:t>
+            </a:r>
+            <a:r>
+              <a:rPr sz="1100" b="0" i="0" dirty="0">
+                <a:solidFill>
+                  <a:srgbClr val="FFFFFF"/>
+                </a:solidFill>
+              </a:rPr>
+              <a:t>
+VIF &gt; 10 과 </a:t>
+            </a:r>
+            <a:r>
+              <a:rPr sz="1100" b="0" i="0" dirty="0" err="1">
+                <a:solidFill>
+                  <a:srgbClr val="FFFFFF"/>
+                </a:solidFill>
+              </a:rPr>
+              <a:t>함께</a:t>
+            </a:r>
+            <a:r>
+              <a:rPr sz="1100" b="0" i="0" dirty="0">
+                <a:solidFill>
+                  <a:srgbClr val="FFFFFF"/>
+                </a:solidFill>
+              </a:rPr>
+              <a:t> </a:t>
+            </a:r>
+            <a:r>
+              <a:rPr sz="1100" b="0" i="0" dirty="0" err="1">
+                <a:solidFill>
+                  <a:srgbClr val="FFFFFF"/>
+                </a:solidFill>
+              </a:rPr>
+              <a:t>확인하여</a:t>
+            </a:r>
+            <a:r>
+              <a:rPr sz="1100" b="0" i="0" dirty="0">
+                <a:solidFill>
+                  <a:srgbClr val="FFFFFF"/>
+                </a:solidFill>
+              </a:rPr>
+              <a:t>
+</a:t>
+            </a:r>
+            <a:r>
+              <a:rPr sz="1100" b="0" i="0" dirty="0" err="1">
+                <a:solidFill>
+                  <a:srgbClr val="FFFFFF"/>
+                </a:solidFill>
+              </a:rPr>
+              <a:t>제거</a:t>
+            </a:r>
+            <a:r>
+              <a:rPr sz="1100" b="0" i="0" dirty="0">
+                <a:solidFill>
+                  <a:srgbClr val="FFFFFF"/>
+                </a:solidFill>
+              </a:rPr>
+              <a:t> </a:t>
+            </a:r>
+            <a:r>
+              <a:rPr sz="1100" b="0" i="0" dirty="0" err="1">
+                <a:solidFill>
+                  <a:srgbClr val="FFFFFF"/>
+                </a:solidFill>
+              </a:rPr>
+              <a:t>여부</a:t>
+            </a:r>
+            <a:r>
+              <a:rPr sz="1100" b="0" i="0" dirty="0">
+                <a:solidFill>
+                  <a:srgbClr val="FFFFFF"/>
+                </a:solidFill>
+              </a:rPr>
+              <a:t> </a:t>
+            </a:r>
+            <a:r>
+              <a:rPr sz="1100" b="0" i="0" dirty="0" err="1">
+                <a:solidFill>
+                  <a:srgbClr val="FFFFFF"/>
+                </a:solidFill>
+              </a:rPr>
+              <a:t>결정</a:t>
+            </a:r>
+            <a:endParaRPr sz="1100" b="0" i="0" dirty="0">
+              <a:solidFill>
+                <a:srgbClr val="FFFFFF"/>
+              </a:solidFill>
+            </a:endParaRPr>
           </a:p>
         </p:txBody>
       </p:sp>
@@ -24797,6 +26586,7 @@
           <a:lstStyle/>
           <a:p>
             <a:pPr algn="ctr"/>
+            <a:endParaRPr/>
           </a:p>
         </p:txBody>
       </p:sp>
@@ -24858,17 +26648,233 @@
           <a:p>
             <a:pPr algn="l"/>
             <a:r>
-              <a:rPr sz="1100" b="0" i="0">
+              <a:rPr sz="1100" b="0" i="0" dirty="0" err="1">
                 <a:solidFill>
                   <a:srgbClr val="1A1A2E"/>
                 </a:solidFill>
               </a:rPr>
-              <a:t>제외된 amplitude 그룹:
-• p25: 제외 (amplitude 중복)
-• AUC_normalized: 제외 (amplitude 중복)
-• peak_max_height: 제외 (amplitude 중복)
-선택 대표: mean
-(VIF 확인 후 포함)</a:t>
+              <a:t>제외된</a:t>
+            </a:r>
+            <a:r>
+              <a:rPr sz="1100" b="0" i="0" dirty="0">
+                <a:solidFill>
+                  <a:srgbClr val="1A1A2E"/>
+                </a:solidFill>
+              </a:rPr>
+              <a:t> amplitude </a:t>
+            </a:r>
+            <a:r>
+              <a:rPr sz="1100" b="0" i="0" dirty="0" err="1">
+                <a:solidFill>
+                  <a:srgbClr val="1A1A2E"/>
+                </a:solidFill>
+              </a:rPr>
+              <a:t>그룹</a:t>
+            </a:r>
+            <a:r>
+              <a:rPr sz="1100" b="0" i="0" dirty="0">
+                <a:solidFill>
+                  <a:srgbClr val="1A1A2E"/>
+                </a:solidFill>
+              </a:rPr>
+              <a:t>:
+• p25: </a:t>
+            </a:r>
+            <a:r>
+              <a:rPr sz="1100" b="0" i="0" dirty="0" err="1">
+                <a:solidFill>
+                  <a:srgbClr val="1A1A2E"/>
+                </a:solidFill>
+              </a:rPr>
+              <a:t>제외</a:t>
+            </a:r>
+            <a:r>
+              <a:rPr sz="1100" b="0" i="0" dirty="0">
+                <a:solidFill>
+                  <a:srgbClr val="1A1A2E"/>
+                </a:solidFill>
+              </a:rPr>
+              <a:t> (amplitude </a:t>
+            </a:r>
+            <a:r>
+              <a:rPr sz="1100" b="0" i="0" dirty="0" err="1">
+                <a:solidFill>
+                  <a:srgbClr val="1A1A2E"/>
+                </a:solidFill>
+              </a:rPr>
+              <a:t>중복</a:t>
+            </a:r>
+            <a:r>
+              <a:rPr sz="1100" b="0" i="0" dirty="0">
+                <a:solidFill>
+                  <a:srgbClr val="1A1A2E"/>
+                </a:solidFill>
+              </a:rPr>
+              <a:t>)
+• </a:t>
+            </a:r>
+            <a:r>
+              <a:rPr sz="1100" b="0" i="0" dirty="0" err="1">
+                <a:solidFill>
+                  <a:srgbClr val="1A1A2E"/>
+                </a:solidFill>
+              </a:rPr>
+              <a:t>AUC_normalized</a:t>
+            </a:r>
+            <a:r>
+              <a:rPr sz="1100" b="0" i="0" dirty="0">
+                <a:solidFill>
+                  <a:srgbClr val="1A1A2E"/>
+                </a:solidFill>
+              </a:rPr>
+              <a:t>: </a:t>
+            </a:r>
+            <a:r>
+              <a:rPr sz="1100" b="0" i="0" dirty="0" err="1">
+                <a:solidFill>
+                  <a:srgbClr val="1A1A2E"/>
+                </a:solidFill>
+              </a:rPr>
+              <a:t>제외</a:t>
+            </a:r>
+            <a:r>
+              <a:rPr sz="1100" b="0" i="0" dirty="0">
+                <a:solidFill>
+                  <a:srgbClr val="1A1A2E"/>
+                </a:solidFill>
+              </a:rPr>
+              <a:t> (amplitude </a:t>
+            </a:r>
+            <a:r>
+              <a:rPr sz="1100" b="0" i="0" dirty="0" err="1">
+                <a:solidFill>
+                  <a:srgbClr val="1A1A2E"/>
+                </a:solidFill>
+              </a:rPr>
+              <a:t>중복</a:t>
+            </a:r>
+            <a:r>
+              <a:rPr sz="1100" b="0" i="0" dirty="0">
+                <a:solidFill>
+                  <a:srgbClr val="1A1A2E"/>
+                </a:solidFill>
+              </a:rPr>
+              <a:t>)
+• </a:t>
+            </a:r>
+            <a:r>
+              <a:rPr sz="1100" b="0" i="0" dirty="0" err="1">
+                <a:solidFill>
+                  <a:srgbClr val="1A1A2E"/>
+                </a:solidFill>
+              </a:rPr>
+              <a:t>peak_max_height</a:t>
+            </a:r>
+            <a:r>
+              <a:rPr sz="1100" b="0" i="0" dirty="0">
+                <a:solidFill>
+                  <a:srgbClr val="1A1A2E"/>
+                </a:solidFill>
+              </a:rPr>
+              <a:t>: </a:t>
+            </a:r>
+            <a:r>
+              <a:rPr sz="1100" b="0" i="0" dirty="0" err="1">
+                <a:solidFill>
+                  <a:srgbClr val="1A1A2E"/>
+                </a:solidFill>
+              </a:rPr>
+              <a:t>제외</a:t>
+            </a:r>
+            <a:r>
+              <a:rPr sz="1100" b="0" i="0" dirty="0">
+                <a:solidFill>
+                  <a:srgbClr val="1A1A2E"/>
+                </a:solidFill>
+              </a:rPr>
+              <a:t> (amplitude </a:t>
+            </a:r>
+            <a:r>
+              <a:rPr sz="1100" b="0" i="0" dirty="0" err="1">
+                <a:solidFill>
+                  <a:srgbClr val="1A1A2E"/>
+                </a:solidFill>
+              </a:rPr>
+              <a:t>중복</a:t>
+            </a:r>
+            <a:r>
+              <a:rPr sz="1100" b="0" i="0" dirty="0">
+                <a:solidFill>
+                  <a:srgbClr val="1A1A2E"/>
+                </a:solidFill>
+              </a:rPr>
+              <a:t>)
+</a:t>
+            </a:r>
+            <a:r>
+              <a:rPr sz="1100" b="0" i="0" dirty="0" err="1">
+                <a:solidFill>
+                  <a:srgbClr val="1A1A2E"/>
+                </a:solidFill>
+              </a:rPr>
+              <a:t>선택</a:t>
+            </a:r>
+            <a:r>
+              <a:rPr sz="1100" b="0" i="0" dirty="0">
+                <a:solidFill>
+                  <a:srgbClr val="1A1A2E"/>
+                </a:solidFill>
+              </a:rPr>
+              <a:t> </a:t>
+            </a:r>
+            <a:r>
+              <a:rPr sz="1100" b="0" i="0" dirty="0" err="1">
+                <a:solidFill>
+                  <a:srgbClr val="1A1A2E"/>
+                </a:solidFill>
+              </a:rPr>
+              <a:t>대표</a:t>
+            </a:r>
+            <a:r>
+              <a:rPr sz="1100" b="0" i="0" dirty="0">
+                <a:solidFill>
+                  <a:srgbClr val="1A1A2E"/>
+                </a:solidFill>
+              </a:rPr>
+              <a:t>: mean
+(VIF </a:t>
+            </a:r>
+            <a:r>
+              <a:rPr sz="1100" b="0" i="0" dirty="0" err="1">
+                <a:solidFill>
+                  <a:srgbClr val="1A1A2E"/>
+                </a:solidFill>
+              </a:rPr>
+              <a:t>확인</a:t>
+            </a:r>
+            <a:r>
+              <a:rPr sz="1100" b="0" i="0" dirty="0">
+                <a:solidFill>
+                  <a:srgbClr val="1A1A2E"/>
+                </a:solidFill>
+              </a:rPr>
+              <a:t> 후 </a:t>
+            </a:r>
+            <a:r>
+              <a:rPr sz="1100" b="0" i="0" dirty="0" err="1">
+                <a:solidFill>
+                  <a:srgbClr val="1A1A2E"/>
+                </a:solidFill>
+              </a:rPr>
+              <a:t>포함</a:t>
+            </a:r>
+            <a:r>
+              <a:rPr sz="1100" b="0" i="0" dirty="0">
+                <a:solidFill>
+                  <a:srgbClr val="1A1A2E"/>
+                </a:solidFill>
+              </a:rPr>
+              <a:t>)</a:t>
             </a:r>
           </a:p>
         </p:txBody>
@@ -24882,7 +26888,7 @@
 </file>
 
 <file path=ppt/slides/slide9.xml><?xml version="1.0" encoding="utf-8"?>
-<p:sld xmlns:a="http://schemas.openxmlformats.org/drawingml/2006/main" xmlns:p="http://schemas.openxmlformats.org/presentationml/2006/main" xmlns:r="http://schemas.openxmlformats.org/officeDocument/2006/relationships">
+<p:sld xmlns:a="http://schemas.openxmlformats.org/drawingml/2006/main" xmlns:r="http://schemas.openxmlformats.org/officeDocument/2006/relationships" xmlns:p="http://schemas.openxmlformats.org/presentationml/2006/main">
   <p:cSld>
     <p:spTree>
       <p:nvGrpSpPr>
@@ -24890,7 +26896,14 @@
         <p:cNvGrpSpPr/>
         <p:nvPr/>
       </p:nvGrpSpPr>
-      <p:grpSpPr/>
+      <p:grpSpPr>
+        <a:xfrm>
+          <a:off x="0" y="0"/>
+          <a:ext cx="0" cy="0"/>
+          <a:chOff x="0" y="0"/>
+          <a:chExt cx="0" cy="0"/>
+        </a:xfrm>
+      </p:grpSpPr>
       <p:sp>
         <p:nvSpPr>
           <p:cNvPr id="2" name="Rectangle 1"/>
@@ -24931,6 +26944,7 @@
           <a:lstStyle/>
           <a:p>
             <a:pPr algn="ctr"/>
+            <a:endParaRPr/>
           </a:p>
         </p:txBody>
       </p:sp>
@@ -24974,6 +26988,7 @@
           <a:lstStyle/>
           <a:p>
             <a:pPr algn="ctr"/>
+            <a:endParaRPr/>
           </a:p>
         </p:txBody>
       </p:sp>
@@ -25089,7 +27104,7 @@
         </p:nvGraphicFramePr>
         <p:xfrm>
           <a:off x="320040" y="1508760"/>
-          <a:ext cx="5486400" cy="1920240"/>
+          <a:ext cx="5486400" cy="1962912"/>
         </p:xfrm>
         <a:graphic>
           <a:graphicData uri="http://schemas.openxmlformats.org/drawingml/2006/table">
@@ -25098,8 +27113,20 @@
                 <a:tableStyleId>{5C22544A-7EE6-4342-B048-85BDC9FD1C3A}</a:tableStyleId>
               </a:tblPr>
               <a:tblGrid>
-                <a:gridCol w="2743200"/>
-                <a:gridCol w="2743200"/>
+                <a:gridCol w="2743200">
+                  <a:extLst>
+                    <a:ext uri="{9D8B030D-6E8A-4147-A177-3AD203B41FA5}">
+                      <a16:colId xmlns:a16="http://schemas.microsoft.com/office/drawing/2014/main" val="20000"/>
+                    </a:ext>
+                  </a:extLst>
+                </a:gridCol>
+                <a:gridCol w="2743200">
+                  <a:extLst>
+                    <a:ext uri="{9D8B030D-6E8A-4147-A177-3AD203B41FA5}">
+                      <a16:colId xmlns:a16="http://schemas.microsoft.com/office/drawing/2014/main" val="20001"/>
+                    </a:ext>
+                  </a:extLst>
+                </a:gridCol>
               </a:tblGrid>
               <a:tr h="384048">
                 <a:tc>
@@ -25109,7 +27136,7 @@
                     <a:p>
                       <a:pPr algn="ctr"/>
                       <a:r>
-                        <a:rPr b="1" sz="1100">
+                        <a:rPr sz="1100" b="1">
                           <a:solidFill>
                             <a:srgbClr val="FFFFFF"/>
                           </a:solidFill>
@@ -25131,7 +27158,7 @@
                     <a:p>
                       <a:pPr algn="ctr"/>
                       <a:r>
-                        <a:rPr b="1" sz="1100">
+                        <a:rPr sz="1100" b="1">
                           <a:solidFill>
                             <a:srgbClr val="FFFFFF"/>
                           </a:solidFill>
@@ -25146,6 +27173,11 @@
                     </a:solidFill>
                   </a:tcPr>
                 </a:tc>
+                <a:extLst>
+                  <a:ext uri="{0D108BD9-81ED-4DB2-BD59-A6C34878D82A}">
+                    <a16:rowId xmlns:a16="http://schemas.microsoft.com/office/drawing/2014/main" val="10000"/>
+                  </a:ext>
+                </a:extLst>
               </a:tr>
               <a:tr h="384048">
                 <a:tc>
@@ -25192,6 +27224,11 @@
                     </a:solidFill>
                   </a:tcPr>
                 </a:tc>
+                <a:extLst>
+                  <a:ext uri="{0D108BD9-81ED-4DB2-BD59-A6C34878D82A}">
+                    <a16:rowId xmlns:a16="http://schemas.microsoft.com/office/drawing/2014/main" val="10001"/>
+                  </a:ext>
+                </a:extLst>
               </a:tr>
               <a:tr h="384048">
                 <a:tc>
@@ -25238,6 +27275,11 @@
                     </a:solidFill>
                   </a:tcPr>
                 </a:tc>
+                <a:extLst>
+                  <a:ext uri="{0D108BD9-81ED-4DB2-BD59-A6C34878D82A}">
+                    <a16:rowId xmlns:a16="http://schemas.microsoft.com/office/drawing/2014/main" val="10002"/>
+                  </a:ext>
+                </a:extLst>
               </a:tr>
               <a:tr h="384048">
                 <a:tc>
@@ -25284,6 +27326,11 @@
                     </a:solidFill>
                   </a:tcPr>
                 </a:tc>
+                <a:extLst>
+                  <a:ext uri="{0D108BD9-81ED-4DB2-BD59-A6C34878D82A}">
+                    <a16:rowId xmlns:a16="http://schemas.microsoft.com/office/drawing/2014/main" val="10003"/>
+                  </a:ext>
+                </a:extLst>
               </a:tr>
               <a:tr h="384048">
                 <a:tc>
@@ -25330,6 +27377,11 @@
                     </a:solidFill>
                   </a:tcPr>
                 </a:tc>
+                <a:extLst>
+                  <a:ext uri="{0D108BD9-81ED-4DB2-BD59-A6C34878D82A}">
+                    <a16:rowId xmlns:a16="http://schemas.microsoft.com/office/drawing/2014/main" val="10004"/>
+                  </a:ext>
+                </a:extLst>
               </a:tr>
             </a:tbl>
           </a:graphicData>
@@ -25411,6 +27463,7 @@
           <a:lstStyle/>
           <a:p>
             <a:pPr algn="ctr"/>
+            <a:endParaRPr/>
           </a:p>
         </p:txBody>
       </p:sp>
@@ -25525,6 +27578,7 @@
           <a:lstStyle/>
           <a:p>
             <a:pPr algn="ctr"/>
+            <a:endParaRPr/>
           </a:p>
         </p:txBody>
       </p:sp>
@@ -25650,8 +27704,20 @@
                 <a:tableStyleId>{5C22544A-7EE6-4342-B048-85BDC9FD1C3A}</a:tableStyleId>
               </a:tblPr>
               <a:tblGrid>
-                <a:gridCol w="5760720"/>
-                <a:gridCol w="5760720"/>
+                <a:gridCol w="5760720">
+                  <a:extLst>
+                    <a:ext uri="{9D8B030D-6E8A-4147-A177-3AD203B41FA5}">
+                      <a16:colId xmlns:a16="http://schemas.microsoft.com/office/drawing/2014/main" val="20000"/>
+                    </a:ext>
+                  </a:extLst>
+                </a:gridCol>
+                <a:gridCol w="5760720">
+                  <a:extLst>
+                    <a:ext uri="{9D8B030D-6E8A-4147-A177-3AD203B41FA5}">
+                      <a16:colId xmlns:a16="http://schemas.microsoft.com/office/drawing/2014/main" val="20001"/>
+                    </a:ext>
+                  </a:extLst>
+                </a:gridCol>
               </a:tblGrid>
               <a:tr h="384048">
                 <a:tc>
@@ -25661,7 +27727,7 @@
                     <a:p>
                       <a:pPr algn="ctr"/>
                       <a:r>
-                        <a:rPr b="1" sz="1100">
+                        <a:rPr sz="1100" b="1">
                           <a:solidFill>
                             <a:srgbClr val="FFFFFF"/>
                           </a:solidFill>
@@ -25683,7 +27749,7 @@
                     <a:p>
                       <a:pPr algn="ctr"/>
                       <a:r>
-                        <a:rPr b="1" sz="1100">
+                        <a:rPr sz="1100" b="1">
                           <a:solidFill>
                             <a:srgbClr val="FFFFFF"/>
                           </a:solidFill>
@@ -25698,6 +27764,11 @@
                     </a:solidFill>
                   </a:tcPr>
                 </a:tc>
+                <a:extLst>
+                  <a:ext uri="{0D108BD9-81ED-4DB2-BD59-A6C34878D82A}">
+                    <a16:rowId xmlns:a16="http://schemas.microsoft.com/office/drawing/2014/main" val="10000"/>
+                  </a:ext>
+                </a:extLst>
               </a:tr>
               <a:tr h="384048">
                 <a:tc>
@@ -25744,6 +27815,11 @@
                     </a:solidFill>
                   </a:tcPr>
                 </a:tc>
+                <a:extLst>
+                  <a:ext uri="{0D108BD9-81ED-4DB2-BD59-A6C34878D82A}">
+                    <a16:rowId xmlns:a16="http://schemas.microsoft.com/office/drawing/2014/main" val="10001"/>
+                  </a:ext>
+                </a:extLst>
               </a:tr>
               <a:tr h="384048">
                 <a:tc>
@@ -25790,6 +27866,11 @@
                     </a:solidFill>
                   </a:tcPr>
                 </a:tc>
+                <a:extLst>
+                  <a:ext uri="{0D108BD9-81ED-4DB2-BD59-A6C34878D82A}">
+                    <a16:rowId xmlns:a16="http://schemas.microsoft.com/office/drawing/2014/main" val="10002"/>
+                  </a:ext>
+                </a:extLst>
               </a:tr>
               <a:tr h="384048">
                 <a:tc>
@@ -25836,6 +27917,11 @@
                     </a:solidFill>
                   </a:tcPr>
                 </a:tc>
+                <a:extLst>
+                  <a:ext uri="{0D108BD9-81ED-4DB2-BD59-A6C34878D82A}">
+                    <a16:rowId xmlns:a16="http://schemas.microsoft.com/office/drawing/2014/main" val="10003"/>
+                  </a:ext>
+                </a:extLst>
               </a:tr>
               <a:tr h="384048">
                 <a:tc>
@@ -25882,6 +27968,11 @@
                     </a:solidFill>
                   </a:tcPr>
                 </a:tc>
+                <a:extLst>
+                  <a:ext uri="{0D108BD9-81ED-4DB2-BD59-A6C34878D82A}">
+                    <a16:rowId xmlns:a16="http://schemas.microsoft.com/office/drawing/2014/main" val="10004"/>
+                  </a:ext>
+                </a:extLst>
               </a:tr>
             </a:tbl>
           </a:graphicData>

--- a/연구코드/aec/results/강남_TAMA_연구보고서.pptx
+++ b/연구코드/aec/results/강남_TAMA_연구보고서.pptx
@@ -5,29 +5,29 @@
     <p:sldMasterId id="2147483648" r:id="rId1"/>
   </p:sldMasterIdLst>
   <p:sldIdLst>
-    <p:sldId id="256" r:id="rId2"/>
-    <p:sldId id="257" r:id="rId3"/>
-    <p:sldId id="258" r:id="rId4"/>
-    <p:sldId id="259" r:id="rId5"/>
-    <p:sldId id="260" r:id="rId6"/>
-    <p:sldId id="261" r:id="rId7"/>
-    <p:sldId id="262" r:id="rId8"/>
-    <p:sldId id="263" r:id="rId9"/>
-    <p:sldId id="264" r:id="rId10"/>
-    <p:sldId id="265" r:id="rId11"/>
-    <p:sldId id="266" r:id="rId12"/>
-    <p:sldId id="267" r:id="rId13"/>
-    <p:sldId id="268" r:id="rId14"/>
-    <p:sldId id="269" r:id="rId15"/>
-    <p:sldId id="270" r:id="rId16"/>
-    <p:sldId id="271" r:id="rId17"/>
-    <p:sldId id="272" r:id="rId18"/>
-    <p:sldId id="273" r:id="rId19"/>
-    <p:sldId id="274" r:id="rId20"/>
-    <p:sldId id="275" r:id="rId21"/>
-    <p:sldId id="276" r:id="rId22"/>
+    <p:sldId id="256" r:id="rId7"/>
+    <p:sldId id="257" r:id="rId8"/>
+    <p:sldId id="258" r:id="rId9"/>
+    <p:sldId id="259" r:id="rId10"/>
+    <p:sldId id="260" r:id="rId11"/>
+    <p:sldId id="261" r:id="rId12"/>
+    <p:sldId id="262" r:id="rId13"/>
+    <p:sldId id="263" r:id="rId14"/>
+    <p:sldId id="264" r:id="rId15"/>
+    <p:sldId id="265" r:id="rId16"/>
+    <p:sldId id="266" r:id="rId17"/>
+    <p:sldId id="267" r:id="rId18"/>
+    <p:sldId id="268" r:id="rId19"/>
+    <p:sldId id="269" r:id="rId20"/>
+    <p:sldId id="270" r:id="rId21"/>
+    <p:sldId id="271" r:id="rId22"/>
+    <p:sldId id="272" r:id="rId23"/>
+    <p:sldId id="273" r:id="rId24"/>
+    <p:sldId id="274" r:id="rId25"/>
+    <p:sldId id="275" r:id="rId26"/>
+    <p:sldId id="276" r:id="rId27"/>
   </p:sldIdLst>
-  <p:sldSz cx="12188825" cy="6858000"/>
+  <p:sldSz cx="12188952" cy="6858000" type="screen4x3"/>
   <p:notesSz cx="6858000" cy="9144000"/>
   <p:defaultTextStyle>
     <a:defPPr>
@@ -124,22 +124,6 @@
       </a:defRPr>
     </a:lvl9pPr>
   </p:defaultTextStyle>
-  <p:extLst>
-    <p:ext uri="{EFAFB233-063F-42B5-8137-9DF3F51BA10A}">
-      <p15:sldGuideLst xmlns:p15="http://schemas.microsoft.com/office/powerpoint/2012/main">
-        <p15:guide id="1" orient="horz" pos="2160">
-          <p15:clr>
-            <a:srgbClr val="A4A3A4"/>
-          </p15:clr>
-        </p15:guide>
-        <p15:guide id="2" pos="2880">
-          <p15:clr>
-            <a:srgbClr val="A4A3A4"/>
-          </p15:clr>
-        </p15:guide>
-      </p15:sldGuideLst>
-    </p:ext>
-  </p:extLst>
 </p:presentation>
 </file>
 
@@ -181,9 +165,10 @@
           <a:lstStyle/>
           <a:p>
             <a:r>
-              <a:rPr lang="en-US"/>
+              <a:rPr lang="en-US" smtClean="0"/>
               <a:t>Click to edit Master title style</a:t>
             </a:r>
+            <a:endParaRPr lang="en-US"/>
           </a:p>
         </p:txBody>
       </p:sp>
@@ -299,9 +284,10 @@
           </a:lstStyle>
           <a:p>
             <a:r>
-              <a:rPr lang="en-US"/>
+              <a:rPr lang="en-US" smtClean="0"/>
               <a:t>Click to edit Master subtitle style</a:t>
             </a:r>
+            <a:endParaRPr lang="en-US"/>
           </a:p>
         </p:txBody>
       </p:sp>
@@ -322,7 +308,7 @@
           <a:p>
             <a:fld id="{5BCAD085-E8A6-8845-BD4E-CB4CCA059FC4}" type="datetimeFigureOut">
               <a:rPr lang="en-US" smtClean="0"/>
-              <a:t>4/23/2026</a:t>
+              <a:t>1/27/13</a:t>
             </a:fld>
             <a:endParaRPr lang="en-US"/>
           </a:p>
@@ -416,9 +402,10 @@
           <a:lstStyle/>
           <a:p>
             <a:r>
-              <a:rPr lang="en-US"/>
+              <a:rPr lang="en-US" smtClean="0"/>
               <a:t>Click to edit Master title style</a:t>
             </a:r>
+            <a:endParaRPr lang="en-US"/>
           </a:p>
         </p:txBody>
       </p:sp>
@@ -439,37 +426,38 @@
           <a:p>
             <a:pPr lvl="0"/>
             <a:r>
-              <a:rPr lang="en-US"/>
+              <a:rPr lang="en-US" smtClean="0"/>
               <a:t>Click to edit Master text styles</a:t>
             </a:r>
           </a:p>
           <a:p>
             <a:pPr lvl="1"/>
             <a:r>
-              <a:rPr lang="en-US"/>
+              <a:rPr lang="en-US" smtClean="0"/>
               <a:t>Second level</a:t>
             </a:r>
           </a:p>
           <a:p>
             <a:pPr lvl="2"/>
             <a:r>
-              <a:rPr lang="en-US"/>
+              <a:rPr lang="en-US" smtClean="0"/>
               <a:t>Third level</a:t>
             </a:r>
           </a:p>
           <a:p>
             <a:pPr lvl="3"/>
             <a:r>
-              <a:rPr lang="en-US"/>
+              <a:rPr lang="en-US" smtClean="0"/>
               <a:t>Fourth level</a:t>
             </a:r>
           </a:p>
           <a:p>
             <a:pPr lvl="4"/>
             <a:r>
-              <a:rPr lang="en-US"/>
+              <a:rPr lang="en-US" smtClean="0"/>
               <a:t>Fifth level</a:t>
             </a:r>
+            <a:endParaRPr lang="en-US"/>
           </a:p>
         </p:txBody>
       </p:sp>
@@ -490,7 +478,7 @@
           <a:p>
             <a:fld id="{5BCAD085-E8A6-8845-BD4E-CB4CCA059FC4}" type="datetimeFigureOut">
               <a:rPr lang="en-US" smtClean="0"/>
-              <a:t>4/23/2026</a:t>
+              <a:t>1/27/13</a:t>
             </a:fld>
             <a:endParaRPr lang="en-US"/>
           </a:p>
@@ -589,9 +577,10 @@
           <a:lstStyle/>
           <a:p>
             <a:r>
-              <a:rPr lang="en-US"/>
+              <a:rPr lang="en-US" smtClean="0"/>
               <a:t>Click to edit Master title style</a:t>
             </a:r>
+            <a:endParaRPr lang="en-US"/>
           </a:p>
         </p:txBody>
       </p:sp>
@@ -617,37 +606,38 @@
           <a:p>
             <a:pPr lvl="0"/>
             <a:r>
-              <a:rPr lang="en-US"/>
+              <a:rPr lang="en-US" smtClean="0"/>
               <a:t>Click to edit Master text styles</a:t>
             </a:r>
           </a:p>
           <a:p>
             <a:pPr lvl="1"/>
             <a:r>
-              <a:rPr lang="en-US"/>
+              <a:rPr lang="en-US" smtClean="0"/>
               <a:t>Second level</a:t>
             </a:r>
           </a:p>
           <a:p>
             <a:pPr lvl="2"/>
             <a:r>
-              <a:rPr lang="en-US"/>
+              <a:rPr lang="en-US" smtClean="0"/>
               <a:t>Third level</a:t>
             </a:r>
           </a:p>
           <a:p>
             <a:pPr lvl="3"/>
             <a:r>
-              <a:rPr lang="en-US"/>
+              <a:rPr lang="en-US" smtClean="0"/>
               <a:t>Fourth level</a:t>
             </a:r>
           </a:p>
           <a:p>
             <a:pPr lvl="4"/>
             <a:r>
-              <a:rPr lang="en-US"/>
+              <a:rPr lang="en-US" smtClean="0"/>
               <a:t>Fifth level</a:t>
             </a:r>
+            <a:endParaRPr lang="en-US"/>
           </a:p>
         </p:txBody>
       </p:sp>
@@ -668,7 +658,7 @@
           <a:p>
             <a:fld id="{5BCAD085-E8A6-8845-BD4E-CB4CCA059FC4}" type="datetimeFigureOut">
               <a:rPr lang="en-US" smtClean="0"/>
-              <a:t>4/23/2026</a:t>
+              <a:t>1/27/13</a:t>
             </a:fld>
             <a:endParaRPr lang="en-US"/>
           </a:p>
@@ -762,9 +752,10 @@
           <a:lstStyle/>
           <a:p>
             <a:r>
-              <a:rPr lang="en-US"/>
+              <a:rPr lang="en-US" smtClean="0"/>
               <a:t>Click to edit Master title style</a:t>
             </a:r>
+            <a:endParaRPr lang="en-US"/>
           </a:p>
         </p:txBody>
       </p:sp>
@@ -785,37 +776,38 @@
           <a:p>
             <a:pPr lvl="0"/>
             <a:r>
-              <a:rPr lang="en-US"/>
+              <a:rPr lang="en-US" smtClean="0"/>
               <a:t>Click to edit Master text styles</a:t>
             </a:r>
           </a:p>
           <a:p>
             <a:pPr lvl="1"/>
             <a:r>
-              <a:rPr lang="en-US"/>
+              <a:rPr lang="en-US" smtClean="0"/>
               <a:t>Second level</a:t>
             </a:r>
           </a:p>
           <a:p>
             <a:pPr lvl="2"/>
             <a:r>
-              <a:rPr lang="en-US"/>
+              <a:rPr lang="en-US" smtClean="0"/>
               <a:t>Third level</a:t>
             </a:r>
           </a:p>
           <a:p>
             <a:pPr lvl="3"/>
             <a:r>
-              <a:rPr lang="en-US"/>
+              <a:rPr lang="en-US" smtClean="0"/>
               <a:t>Fourth level</a:t>
             </a:r>
           </a:p>
           <a:p>
             <a:pPr lvl="4"/>
             <a:r>
-              <a:rPr lang="en-US"/>
+              <a:rPr lang="en-US" smtClean="0"/>
               <a:t>Fifth level</a:t>
             </a:r>
+            <a:endParaRPr lang="en-US"/>
           </a:p>
         </p:txBody>
       </p:sp>
@@ -836,7 +828,7 @@
           <a:p>
             <a:fld id="{5BCAD085-E8A6-8845-BD4E-CB4CCA059FC4}" type="datetimeFigureOut">
               <a:rPr lang="en-US" smtClean="0"/>
-              <a:t>4/23/2026</a:t>
+              <a:t>1/27/13</a:t>
             </a:fld>
             <a:endParaRPr lang="en-US"/>
           </a:p>
@@ -939,9 +931,10 @@
           </a:lstStyle>
           <a:p>
             <a:r>
-              <a:rPr lang="en-US"/>
+              <a:rPr lang="en-US" smtClean="0"/>
               <a:t>Click to edit Master title style</a:t>
             </a:r>
+            <a:endParaRPr lang="en-US"/>
           </a:p>
         </p:txBody>
       </p:sp>
@@ -1058,7 +1051,7 @@
           <a:p>
             <a:pPr lvl="0"/>
             <a:r>
-              <a:rPr lang="en-US"/>
+              <a:rPr lang="en-US" smtClean="0"/>
               <a:t>Click to edit Master text styles</a:t>
             </a:r>
           </a:p>
@@ -1081,7 +1074,7 @@
           <a:p>
             <a:fld id="{5BCAD085-E8A6-8845-BD4E-CB4CCA059FC4}" type="datetimeFigureOut">
               <a:rPr lang="en-US" smtClean="0"/>
-              <a:t>4/23/2026</a:t>
+              <a:t>1/27/13</a:t>
             </a:fld>
             <a:endParaRPr lang="en-US"/>
           </a:p>
@@ -1175,9 +1168,10 @@
           <a:lstStyle/>
           <a:p>
             <a:r>
-              <a:rPr lang="en-US"/>
+              <a:rPr lang="en-US" smtClean="0"/>
               <a:t>Click to edit Master title style</a:t>
             </a:r>
+            <a:endParaRPr lang="en-US"/>
           </a:p>
         </p:txBody>
       </p:sp>
@@ -1231,37 +1225,38 @@
           <a:p>
             <a:pPr lvl="0"/>
             <a:r>
-              <a:rPr lang="en-US"/>
+              <a:rPr lang="en-US" smtClean="0"/>
               <a:t>Click to edit Master text styles</a:t>
             </a:r>
           </a:p>
           <a:p>
             <a:pPr lvl="1"/>
             <a:r>
-              <a:rPr lang="en-US"/>
+              <a:rPr lang="en-US" smtClean="0"/>
               <a:t>Second level</a:t>
             </a:r>
           </a:p>
           <a:p>
             <a:pPr lvl="2"/>
             <a:r>
-              <a:rPr lang="en-US"/>
+              <a:rPr lang="en-US" smtClean="0"/>
               <a:t>Third level</a:t>
             </a:r>
           </a:p>
           <a:p>
             <a:pPr lvl="3"/>
             <a:r>
-              <a:rPr lang="en-US"/>
+              <a:rPr lang="en-US" smtClean="0"/>
               <a:t>Fourth level</a:t>
             </a:r>
           </a:p>
           <a:p>
             <a:pPr lvl="4"/>
             <a:r>
-              <a:rPr lang="en-US"/>
+              <a:rPr lang="en-US" smtClean="0"/>
               <a:t>Fifth level</a:t>
             </a:r>
+            <a:endParaRPr lang="en-US"/>
           </a:p>
         </p:txBody>
       </p:sp>
@@ -1315,37 +1310,38 @@
           <a:p>
             <a:pPr lvl="0"/>
             <a:r>
-              <a:rPr lang="en-US"/>
+              <a:rPr lang="en-US" smtClean="0"/>
               <a:t>Click to edit Master text styles</a:t>
             </a:r>
           </a:p>
           <a:p>
             <a:pPr lvl="1"/>
             <a:r>
-              <a:rPr lang="en-US"/>
+              <a:rPr lang="en-US" smtClean="0"/>
               <a:t>Second level</a:t>
             </a:r>
           </a:p>
           <a:p>
             <a:pPr lvl="2"/>
             <a:r>
-              <a:rPr lang="en-US"/>
+              <a:rPr lang="en-US" smtClean="0"/>
               <a:t>Third level</a:t>
             </a:r>
           </a:p>
           <a:p>
             <a:pPr lvl="3"/>
             <a:r>
-              <a:rPr lang="en-US"/>
+              <a:rPr lang="en-US" smtClean="0"/>
               <a:t>Fourth level</a:t>
             </a:r>
           </a:p>
           <a:p>
             <a:pPr lvl="4"/>
             <a:r>
-              <a:rPr lang="en-US"/>
+              <a:rPr lang="en-US" smtClean="0"/>
               <a:t>Fifth level</a:t>
             </a:r>
+            <a:endParaRPr lang="en-US"/>
           </a:p>
         </p:txBody>
       </p:sp>
@@ -1366,7 +1362,7 @@
           <a:p>
             <a:fld id="{5BCAD085-E8A6-8845-BD4E-CB4CCA059FC4}" type="datetimeFigureOut">
               <a:rPr lang="en-US" smtClean="0"/>
-              <a:t>4/23/2026</a:t>
+              <a:t>1/27/13</a:t>
             </a:fld>
             <a:endParaRPr lang="en-US"/>
           </a:p>
@@ -1464,9 +1460,10 @@
           </a:lstStyle>
           <a:p>
             <a:r>
-              <a:rPr lang="en-US"/>
+              <a:rPr lang="en-US" smtClean="0"/>
               <a:t>Click to edit Master title style</a:t>
             </a:r>
+            <a:endParaRPr lang="en-US"/>
           </a:p>
         </p:txBody>
       </p:sp>
@@ -1529,7 +1526,7 @@
           <a:p>
             <a:pPr lvl="0"/>
             <a:r>
-              <a:rPr lang="en-US"/>
+              <a:rPr lang="en-US" smtClean="0"/>
               <a:t>Click to edit Master text styles</a:t>
             </a:r>
           </a:p>
@@ -1585,37 +1582,38 @@
           <a:p>
             <a:pPr lvl="0"/>
             <a:r>
-              <a:rPr lang="en-US"/>
+              <a:rPr lang="en-US" smtClean="0"/>
               <a:t>Click to edit Master text styles</a:t>
             </a:r>
           </a:p>
           <a:p>
             <a:pPr lvl="1"/>
             <a:r>
-              <a:rPr lang="en-US"/>
+              <a:rPr lang="en-US" smtClean="0"/>
               <a:t>Second level</a:t>
             </a:r>
           </a:p>
           <a:p>
             <a:pPr lvl="2"/>
             <a:r>
-              <a:rPr lang="en-US"/>
+              <a:rPr lang="en-US" smtClean="0"/>
               <a:t>Third level</a:t>
             </a:r>
           </a:p>
           <a:p>
             <a:pPr lvl="3"/>
             <a:r>
-              <a:rPr lang="en-US"/>
+              <a:rPr lang="en-US" smtClean="0"/>
               <a:t>Fourth level</a:t>
             </a:r>
           </a:p>
           <a:p>
             <a:pPr lvl="4"/>
             <a:r>
-              <a:rPr lang="en-US"/>
+              <a:rPr lang="en-US" smtClean="0"/>
               <a:t>Fifth level</a:t>
             </a:r>
+            <a:endParaRPr lang="en-US"/>
           </a:p>
         </p:txBody>
       </p:sp>
@@ -1678,7 +1676,7 @@
           <a:p>
             <a:pPr lvl="0"/>
             <a:r>
-              <a:rPr lang="en-US"/>
+              <a:rPr lang="en-US" smtClean="0"/>
               <a:t>Click to edit Master text styles</a:t>
             </a:r>
           </a:p>
@@ -1734,37 +1732,38 @@
           <a:p>
             <a:pPr lvl="0"/>
             <a:r>
-              <a:rPr lang="en-US"/>
+              <a:rPr lang="en-US" smtClean="0"/>
               <a:t>Click to edit Master text styles</a:t>
             </a:r>
           </a:p>
           <a:p>
             <a:pPr lvl="1"/>
             <a:r>
-              <a:rPr lang="en-US"/>
+              <a:rPr lang="en-US" smtClean="0"/>
               <a:t>Second level</a:t>
             </a:r>
           </a:p>
           <a:p>
             <a:pPr lvl="2"/>
             <a:r>
-              <a:rPr lang="en-US"/>
+              <a:rPr lang="en-US" smtClean="0"/>
               <a:t>Third level</a:t>
             </a:r>
           </a:p>
           <a:p>
             <a:pPr lvl="3"/>
             <a:r>
-              <a:rPr lang="en-US"/>
+              <a:rPr lang="en-US" smtClean="0"/>
               <a:t>Fourth level</a:t>
             </a:r>
           </a:p>
           <a:p>
             <a:pPr lvl="4"/>
             <a:r>
-              <a:rPr lang="en-US"/>
+              <a:rPr lang="en-US" smtClean="0"/>
               <a:t>Fifth level</a:t>
             </a:r>
+            <a:endParaRPr lang="en-US"/>
           </a:p>
         </p:txBody>
       </p:sp>
@@ -1785,7 +1784,7 @@
           <a:p>
             <a:fld id="{5BCAD085-E8A6-8845-BD4E-CB4CCA059FC4}" type="datetimeFigureOut">
               <a:rPr lang="en-US" smtClean="0"/>
-              <a:t>4/23/2026</a:t>
+              <a:t>1/27/13</a:t>
             </a:fld>
             <a:endParaRPr lang="en-US"/>
           </a:p>
@@ -1879,9 +1878,10 @@
           <a:lstStyle/>
           <a:p>
             <a:r>
-              <a:rPr lang="en-US"/>
+              <a:rPr lang="en-US" smtClean="0"/>
               <a:t>Click to edit Master title style</a:t>
             </a:r>
+            <a:endParaRPr lang="en-US"/>
           </a:p>
         </p:txBody>
       </p:sp>
@@ -1902,7 +1902,7 @@
           <a:p>
             <a:fld id="{5BCAD085-E8A6-8845-BD4E-CB4CCA059FC4}" type="datetimeFigureOut">
               <a:rPr lang="en-US" smtClean="0"/>
-              <a:t>4/23/2026</a:t>
+              <a:t>1/27/13</a:t>
             </a:fld>
             <a:endParaRPr lang="en-US"/>
           </a:p>
@@ -1997,7 +1997,7 @@
           <a:p>
             <a:fld id="{5BCAD085-E8A6-8845-BD4E-CB4CCA059FC4}" type="datetimeFigureOut">
               <a:rPr lang="en-US" smtClean="0"/>
-              <a:t>4/23/2026</a:t>
+              <a:t>1/27/13</a:t>
             </a:fld>
             <a:endParaRPr lang="en-US"/>
           </a:p>
@@ -2100,9 +2100,10 @@
           </a:lstStyle>
           <a:p>
             <a:r>
-              <a:rPr lang="en-US"/>
+              <a:rPr lang="en-US" smtClean="0"/>
               <a:t>Click to edit Master title style</a:t>
             </a:r>
+            <a:endParaRPr lang="en-US"/>
           </a:p>
         </p:txBody>
       </p:sp>
@@ -2156,37 +2157,38 @@
           <a:p>
             <a:pPr lvl="0"/>
             <a:r>
-              <a:rPr lang="en-US"/>
+              <a:rPr lang="en-US" smtClean="0"/>
               <a:t>Click to edit Master text styles</a:t>
             </a:r>
           </a:p>
           <a:p>
             <a:pPr lvl="1"/>
             <a:r>
-              <a:rPr lang="en-US"/>
+              <a:rPr lang="en-US" smtClean="0"/>
               <a:t>Second level</a:t>
             </a:r>
           </a:p>
           <a:p>
             <a:pPr lvl="2"/>
             <a:r>
-              <a:rPr lang="en-US"/>
+              <a:rPr lang="en-US" smtClean="0"/>
               <a:t>Third level</a:t>
             </a:r>
           </a:p>
           <a:p>
             <a:pPr lvl="3"/>
             <a:r>
-              <a:rPr lang="en-US"/>
+              <a:rPr lang="en-US" smtClean="0"/>
               <a:t>Fourth level</a:t>
             </a:r>
           </a:p>
           <a:p>
             <a:pPr lvl="4"/>
             <a:r>
-              <a:rPr lang="en-US"/>
+              <a:rPr lang="en-US" smtClean="0"/>
               <a:t>Fifth level</a:t>
             </a:r>
+            <a:endParaRPr lang="en-US"/>
           </a:p>
         </p:txBody>
       </p:sp>
@@ -2249,7 +2251,7 @@
           <a:p>
             <a:pPr lvl="0"/>
             <a:r>
-              <a:rPr lang="en-US"/>
+              <a:rPr lang="en-US" smtClean="0"/>
               <a:t>Click to edit Master text styles</a:t>
             </a:r>
           </a:p>
@@ -2272,7 +2274,7 @@
           <a:p>
             <a:fld id="{5BCAD085-E8A6-8845-BD4E-CB4CCA059FC4}" type="datetimeFigureOut">
               <a:rPr lang="en-US" smtClean="0"/>
-              <a:t>4/23/2026</a:t>
+              <a:t>1/27/13</a:t>
             </a:fld>
             <a:endParaRPr lang="en-US"/>
           </a:p>
@@ -2375,9 +2377,10 @@
           </a:lstStyle>
           <a:p>
             <a:r>
-              <a:rPr lang="en-US"/>
+              <a:rPr lang="en-US" smtClean="0"/>
               <a:t>Click to edit Master title style</a:t>
             </a:r>
+            <a:endParaRPr lang="en-US"/>
           </a:p>
         </p:txBody>
       </p:sp>
@@ -2501,7 +2504,7 @@
           <a:p>
             <a:pPr lvl="0"/>
             <a:r>
-              <a:rPr lang="en-US"/>
+              <a:rPr lang="en-US" smtClean="0"/>
               <a:t>Click to edit Master text styles</a:t>
             </a:r>
           </a:p>
@@ -2524,7 +2527,7 @@
           <a:p>
             <a:fld id="{5BCAD085-E8A6-8845-BD4E-CB4CCA059FC4}" type="datetimeFigureOut">
               <a:rPr lang="en-US" smtClean="0"/>
-              <a:t>4/23/2026</a:t>
+              <a:t>1/27/13</a:t>
             </a:fld>
             <a:endParaRPr lang="en-US"/>
           </a:p>
@@ -2633,9 +2636,10 @@
           <a:lstStyle/>
           <a:p>
             <a:r>
-              <a:rPr lang="en-US"/>
+              <a:rPr lang="en-US" smtClean="0"/>
               <a:t>Click to edit Master title style</a:t>
             </a:r>
+            <a:endParaRPr lang="en-US"/>
           </a:p>
         </p:txBody>
       </p:sp>
@@ -2666,37 +2670,38 @@
           <a:p>
             <a:pPr lvl="0"/>
             <a:r>
-              <a:rPr lang="en-US"/>
+              <a:rPr lang="en-US" smtClean="0"/>
               <a:t>Click to edit Master text styles</a:t>
             </a:r>
           </a:p>
           <a:p>
             <a:pPr lvl="1"/>
             <a:r>
-              <a:rPr lang="en-US"/>
+              <a:rPr lang="en-US" smtClean="0"/>
               <a:t>Second level</a:t>
             </a:r>
           </a:p>
           <a:p>
             <a:pPr lvl="2"/>
             <a:r>
-              <a:rPr lang="en-US"/>
+              <a:rPr lang="en-US" smtClean="0"/>
               <a:t>Third level</a:t>
             </a:r>
           </a:p>
           <a:p>
             <a:pPr lvl="3"/>
             <a:r>
-              <a:rPr lang="en-US"/>
+              <a:rPr lang="en-US" smtClean="0"/>
               <a:t>Fourth level</a:t>
             </a:r>
           </a:p>
           <a:p>
             <a:pPr lvl="4"/>
             <a:r>
-              <a:rPr lang="en-US"/>
+              <a:rPr lang="en-US" smtClean="0"/>
               <a:t>Fifth level</a:t>
             </a:r>
+            <a:endParaRPr lang="en-US"/>
           </a:p>
         </p:txBody>
       </p:sp>
@@ -2735,7 +2740,7 @@
           <a:p>
             <a:fld id="{5BCAD085-E8A6-8845-BD4E-CB4CCA059FC4}" type="datetimeFigureOut">
               <a:rPr lang="en-US" smtClean="0"/>
-              <a:t>4/23/2026</a:t>
+              <a:t>1/27/13</a:t>
             </a:fld>
             <a:endParaRPr lang="en-US"/>
           </a:p>
@@ -3094,7 +3099,7 @@
 </file>
 
 <file path=ppt/slides/slide1.xml><?xml version="1.0" encoding="utf-8"?>
-<p:sld xmlns:a="http://schemas.openxmlformats.org/drawingml/2006/main" xmlns:r="http://schemas.openxmlformats.org/officeDocument/2006/relationships" xmlns:p="http://schemas.openxmlformats.org/presentationml/2006/main">
+<p:sld xmlns:a="http://schemas.openxmlformats.org/drawingml/2006/main" xmlns:p="http://schemas.openxmlformats.org/presentationml/2006/main" xmlns:r="http://schemas.openxmlformats.org/officeDocument/2006/relationships">
   <p:cSld>
     <p:spTree>
       <p:nvGrpSpPr>
@@ -3102,14 +3107,7 @@
         <p:cNvGrpSpPr/>
         <p:nvPr/>
       </p:nvGrpSpPr>
-      <p:grpSpPr>
-        <a:xfrm>
-          <a:off x="0" y="0"/>
-          <a:ext cx="0" cy="0"/>
-          <a:chOff x="0" y="0"/>
-          <a:chExt cx="0" cy="0"/>
-        </a:xfrm>
-      </p:grpSpPr>
+      <p:grpSpPr/>
       <p:sp>
         <p:nvSpPr>
           <p:cNvPr id="2" name="Rectangle 1"/>
@@ -3150,7 +3148,6 @@
           <a:lstStyle/>
           <a:p>
             <a:pPr algn="ctr"/>
-            <a:endParaRPr/>
           </a:p>
         </p:txBody>
       </p:sp>
@@ -3194,7 +3191,6 @@
           <a:lstStyle/>
           <a:p>
             <a:pPr algn="ctr"/>
-            <a:endParaRPr/>
           </a:p>
         </p:txBody>
       </p:sp>
@@ -3238,7 +3234,6 @@
           <a:lstStyle/>
           <a:p>
             <a:pPr algn="ctr"/>
-            <a:endParaRPr/>
           </a:p>
         </p:txBody>
       </p:sp>
@@ -3389,7 +3384,7 @@
 </file>
 
 <file path=ppt/slides/slide10.xml><?xml version="1.0" encoding="utf-8"?>
-<p:sld xmlns:a="http://schemas.openxmlformats.org/drawingml/2006/main" xmlns:r="http://schemas.openxmlformats.org/officeDocument/2006/relationships" xmlns:p="http://schemas.openxmlformats.org/presentationml/2006/main">
+<p:sld xmlns:a="http://schemas.openxmlformats.org/drawingml/2006/main" xmlns:p="http://schemas.openxmlformats.org/presentationml/2006/main" xmlns:r="http://schemas.openxmlformats.org/officeDocument/2006/relationships">
   <p:cSld>
     <p:spTree>
       <p:nvGrpSpPr>
@@ -3397,14 +3392,7 @@
         <p:cNvGrpSpPr/>
         <p:nvPr/>
       </p:nvGrpSpPr>
-      <p:grpSpPr>
-        <a:xfrm>
-          <a:off x="0" y="0"/>
-          <a:ext cx="0" cy="0"/>
-          <a:chOff x="0" y="0"/>
-          <a:chExt cx="0" cy="0"/>
-        </a:xfrm>
-      </p:grpSpPr>
+      <p:grpSpPr/>
       <p:sp>
         <p:nvSpPr>
           <p:cNvPr id="2" name="Rectangle 1"/>
@@ -3445,7 +3433,6 @@
           <a:lstStyle/>
           <a:p>
             <a:pPr algn="ctr"/>
-            <a:endParaRPr/>
           </a:p>
         </p:txBody>
       </p:sp>
@@ -3489,7 +3476,6 @@
           <a:lstStyle/>
           <a:p>
             <a:pPr algn="ctr"/>
-            <a:endParaRPr/>
           </a:p>
         </p:txBody>
       </p:sp>
@@ -3580,41 +3566,11 @@
                 <a:tableStyleId>{5C22544A-7EE6-4342-B048-85BDC9FD1C3A}</a:tableStyleId>
               </a:tblPr>
               <a:tblGrid>
-                <a:gridCol w="2304288">
-                  <a:extLst>
-                    <a:ext uri="{9D8B030D-6E8A-4147-A177-3AD203B41FA5}">
-                      <a16:colId xmlns:a16="http://schemas.microsoft.com/office/drawing/2014/main" val="20000"/>
-                    </a:ext>
-                  </a:extLst>
-                </a:gridCol>
-                <a:gridCol w="2304288">
-                  <a:extLst>
-                    <a:ext uri="{9D8B030D-6E8A-4147-A177-3AD203B41FA5}">
-                      <a16:colId xmlns:a16="http://schemas.microsoft.com/office/drawing/2014/main" val="20001"/>
-                    </a:ext>
-                  </a:extLst>
-                </a:gridCol>
-                <a:gridCol w="2304288">
-                  <a:extLst>
-                    <a:ext uri="{9D8B030D-6E8A-4147-A177-3AD203B41FA5}">
-                      <a16:colId xmlns:a16="http://schemas.microsoft.com/office/drawing/2014/main" val="20002"/>
-                    </a:ext>
-                  </a:extLst>
-                </a:gridCol>
-                <a:gridCol w="2304288">
-                  <a:extLst>
-                    <a:ext uri="{9D8B030D-6E8A-4147-A177-3AD203B41FA5}">
-                      <a16:colId xmlns:a16="http://schemas.microsoft.com/office/drawing/2014/main" val="20003"/>
-                    </a:ext>
-                  </a:extLst>
-                </a:gridCol>
-                <a:gridCol w="2304288">
-                  <a:extLst>
-                    <a:ext uri="{9D8B030D-6E8A-4147-A177-3AD203B41FA5}">
-                      <a16:colId xmlns:a16="http://schemas.microsoft.com/office/drawing/2014/main" val="20004"/>
-                    </a:ext>
-                  </a:extLst>
-                </a:gridCol>
+                <a:gridCol w="2304288"/>
+                <a:gridCol w="2304288"/>
+                <a:gridCol w="2304288"/>
+                <a:gridCol w="2304288"/>
+                <a:gridCol w="2304288"/>
               </a:tblGrid>
               <a:tr h="377190">
                 <a:tc>
@@ -3624,7 +3580,7 @@
                     <a:p>
                       <a:pPr algn="ctr"/>
                       <a:r>
-                        <a:rPr sz="1100" b="1">
+                        <a:rPr b="1" sz="1100">
                           <a:solidFill>
                             <a:srgbClr val="FFFFFF"/>
                           </a:solidFill>
@@ -3646,7 +3602,7 @@
                     <a:p>
                       <a:pPr algn="ctr"/>
                       <a:r>
-                        <a:rPr sz="1100" b="1">
+                        <a:rPr b="1" sz="1100">
                           <a:solidFill>
                             <a:srgbClr val="FFFFFF"/>
                           </a:solidFill>
@@ -3668,7 +3624,7 @@
                     <a:p>
                       <a:pPr algn="ctr"/>
                       <a:r>
-                        <a:rPr sz="1100" b="1">
+                        <a:rPr b="1" sz="1100">
                           <a:solidFill>
                             <a:srgbClr val="FFFFFF"/>
                           </a:solidFill>
@@ -3690,7 +3646,7 @@
                     <a:p>
                       <a:pPr algn="ctr"/>
                       <a:r>
-                        <a:rPr sz="1100" b="1">
+                        <a:rPr b="1" sz="1100">
                           <a:solidFill>
                             <a:srgbClr val="FFFFFF"/>
                           </a:solidFill>
@@ -3712,7 +3668,7 @@
                     <a:p>
                       <a:pPr algn="ctr"/>
                       <a:r>
-                        <a:rPr sz="1100" b="1">
+                        <a:rPr b="1" sz="1100">
                           <a:solidFill>
                             <a:srgbClr val="FFFFFF"/>
                           </a:solidFill>
@@ -3727,11 +3683,6 @@
                     </a:solidFill>
                   </a:tcPr>
                 </a:tc>
-                <a:extLst>
-                  <a:ext uri="{0D108BD9-81ED-4DB2-BD59-A6C34878D82A}">
-                    <a16:rowId xmlns:a16="http://schemas.microsoft.com/office/drawing/2014/main" val="10000"/>
-                  </a:ext>
-                </a:extLst>
               </a:tr>
               <a:tr h="377190">
                 <a:tc>
@@ -3844,11 +3795,6 @@
                     </a:solidFill>
                   </a:tcPr>
                 </a:tc>
-                <a:extLst>
-                  <a:ext uri="{0D108BD9-81ED-4DB2-BD59-A6C34878D82A}">
-                    <a16:rowId xmlns:a16="http://schemas.microsoft.com/office/drawing/2014/main" val="10001"/>
-                  </a:ext>
-                </a:extLst>
               </a:tr>
               <a:tr h="377190">
                 <a:tc>
@@ -3961,11 +3907,6 @@
                     </a:solidFill>
                   </a:tcPr>
                 </a:tc>
-                <a:extLst>
-                  <a:ext uri="{0D108BD9-81ED-4DB2-BD59-A6C34878D82A}">
-                    <a16:rowId xmlns:a16="http://schemas.microsoft.com/office/drawing/2014/main" val="10002"/>
-                  </a:ext>
-                </a:extLst>
               </a:tr>
               <a:tr h="377190">
                 <a:tc>
@@ -4078,11 +4019,6 @@
                     </a:solidFill>
                   </a:tcPr>
                 </a:tc>
-                <a:extLst>
-                  <a:ext uri="{0D108BD9-81ED-4DB2-BD59-A6C34878D82A}">
-                    <a16:rowId xmlns:a16="http://schemas.microsoft.com/office/drawing/2014/main" val="10003"/>
-                  </a:ext>
-                </a:extLst>
               </a:tr>
               <a:tr h="377190">
                 <a:tc>
@@ -4195,11 +4131,6 @@
                     </a:solidFill>
                   </a:tcPr>
                 </a:tc>
-                <a:extLst>
-                  <a:ext uri="{0D108BD9-81ED-4DB2-BD59-A6C34878D82A}">
-                    <a16:rowId xmlns:a16="http://schemas.microsoft.com/office/drawing/2014/main" val="10004"/>
-                  </a:ext>
-                </a:extLst>
               </a:tr>
               <a:tr h="377190">
                 <a:tc>
@@ -4312,11 +4243,6 @@
                     </a:solidFill>
                   </a:tcPr>
                 </a:tc>
-                <a:extLst>
-                  <a:ext uri="{0D108BD9-81ED-4DB2-BD59-A6C34878D82A}">
-                    <a16:rowId xmlns:a16="http://schemas.microsoft.com/office/drawing/2014/main" val="10005"/>
-                  </a:ext>
-                </a:extLst>
               </a:tr>
               <a:tr h="377190">
                 <a:tc>
@@ -4429,11 +4355,6 @@
                     </a:solidFill>
                   </a:tcPr>
                 </a:tc>
-                <a:extLst>
-                  <a:ext uri="{0D108BD9-81ED-4DB2-BD59-A6C34878D82A}">
-                    <a16:rowId xmlns:a16="http://schemas.microsoft.com/office/drawing/2014/main" val="10006"/>
-                  </a:ext>
-                </a:extLst>
               </a:tr>
               <a:tr h="377190">
                 <a:tc>
@@ -4531,7 +4452,7 @@
                     <a:p>
                       <a:pPr algn="ctr"/>
                       <a:r>
-                        <a:rPr sz="1100" dirty="0">
+                        <a:rPr sz="1100">
                           <a:solidFill>
                             <a:srgbClr val="1A1A2E"/>
                           </a:solidFill>
@@ -4546,11 +4467,6 @@
                     </a:solidFill>
                   </a:tcPr>
                 </a:tc>
-                <a:extLst>
-                  <a:ext uri="{0D108BD9-81ED-4DB2-BD59-A6C34878D82A}">
-                    <a16:rowId xmlns:a16="http://schemas.microsoft.com/office/drawing/2014/main" val="10007"/>
-                  </a:ext>
-                </a:extLst>
               </a:tr>
             </a:tbl>
           </a:graphicData>
@@ -4715,7 +4631,7 @@
 </file>
 
 <file path=ppt/slides/slide11.xml><?xml version="1.0" encoding="utf-8"?>
-<p:sld xmlns:a="http://schemas.openxmlformats.org/drawingml/2006/main" xmlns:r="http://schemas.openxmlformats.org/officeDocument/2006/relationships" xmlns:p="http://schemas.openxmlformats.org/presentationml/2006/main">
+<p:sld xmlns:a="http://schemas.openxmlformats.org/drawingml/2006/main" xmlns:p="http://schemas.openxmlformats.org/presentationml/2006/main" xmlns:r="http://schemas.openxmlformats.org/officeDocument/2006/relationships">
   <p:cSld>
     <p:spTree>
       <p:nvGrpSpPr>
@@ -4723,14 +4639,7 @@
         <p:cNvGrpSpPr/>
         <p:nvPr/>
       </p:nvGrpSpPr>
-      <p:grpSpPr>
-        <a:xfrm>
-          <a:off x="0" y="0"/>
-          <a:ext cx="0" cy="0"/>
-          <a:chOff x="0" y="0"/>
-          <a:chExt cx="0" cy="0"/>
-        </a:xfrm>
-      </p:grpSpPr>
+      <p:grpSpPr/>
       <p:sp>
         <p:nvSpPr>
           <p:cNvPr id="2" name="Rectangle 1"/>
@@ -4771,7 +4680,6 @@
           <a:lstStyle/>
           <a:p>
             <a:pPr algn="ctr"/>
-            <a:endParaRPr/>
           </a:p>
         </p:txBody>
       </p:sp>
@@ -4815,7 +4723,6 @@
           <a:lstStyle/>
           <a:p>
             <a:pPr algn="ctr"/>
-            <a:endParaRPr/>
           </a:p>
         </p:txBody>
       </p:sp>
@@ -4927,7 +4834,6 @@
           <a:lstStyle/>
           <a:p>
             <a:pPr algn="ctr"/>
-            <a:endParaRPr/>
           </a:p>
         </p:txBody>
       </p:sp>
@@ -5039,7 +4945,6 @@
           <a:lstStyle/>
           <a:p>
             <a:pPr algn="ctr"/>
-            <a:endParaRPr/>
           </a:p>
         </p:txBody>
       </p:sp>
@@ -5151,7 +5056,6 @@
           <a:lstStyle/>
           <a:p>
             <a:pPr algn="ctr"/>
-            <a:endParaRPr/>
           </a:p>
         </p:txBody>
       </p:sp>
@@ -5263,7 +5167,6 @@
           <a:lstStyle/>
           <a:p>
             <a:pPr algn="ctr"/>
-            <a:endParaRPr/>
           </a:p>
         </p:txBody>
       </p:sp>
@@ -5375,7 +5278,6 @@
           <a:lstStyle/>
           <a:p>
             <a:pPr algn="ctr"/>
-            <a:endParaRPr/>
           </a:p>
         </p:txBody>
       </p:sp>
@@ -5488,7 +5390,6 @@
           <a:lstStyle/>
           <a:p>
             <a:pPr algn="ctr"/>
-            <a:endParaRPr/>
           </a:p>
         </p:txBody>
       </p:sp>
@@ -5614,34 +5515,10 @@
                 <a:tableStyleId>{5C22544A-7EE6-4342-B048-85BDC9FD1C3A}</a:tableStyleId>
               </a:tblPr>
               <a:tblGrid>
-                <a:gridCol w="1485900">
-                  <a:extLst>
-                    <a:ext uri="{9D8B030D-6E8A-4147-A177-3AD203B41FA5}">
-                      <a16:colId xmlns:a16="http://schemas.microsoft.com/office/drawing/2014/main" val="20000"/>
-                    </a:ext>
-                  </a:extLst>
-                </a:gridCol>
-                <a:gridCol w="1485900">
-                  <a:extLst>
-                    <a:ext uri="{9D8B030D-6E8A-4147-A177-3AD203B41FA5}">
-                      <a16:colId xmlns:a16="http://schemas.microsoft.com/office/drawing/2014/main" val="20001"/>
-                    </a:ext>
-                  </a:extLst>
-                </a:gridCol>
-                <a:gridCol w="1485900">
-                  <a:extLst>
-                    <a:ext uri="{9D8B030D-6E8A-4147-A177-3AD203B41FA5}">
-                      <a16:colId xmlns:a16="http://schemas.microsoft.com/office/drawing/2014/main" val="20002"/>
-                    </a:ext>
-                  </a:extLst>
-                </a:gridCol>
-                <a:gridCol w="1485900">
-                  <a:extLst>
-                    <a:ext uri="{9D8B030D-6E8A-4147-A177-3AD203B41FA5}">
-                      <a16:colId xmlns:a16="http://schemas.microsoft.com/office/drawing/2014/main" val="20003"/>
-                    </a:ext>
-                  </a:extLst>
-                </a:gridCol>
+                <a:gridCol w="1485900"/>
+                <a:gridCol w="1485900"/>
+                <a:gridCol w="1485900"/>
+                <a:gridCol w="1485900"/>
               </a:tblGrid>
               <a:tr h="365760">
                 <a:tc>
@@ -5651,7 +5528,7 @@
                     <a:p>
                       <a:pPr algn="ctr"/>
                       <a:r>
-                        <a:rPr sz="1100" b="1">
+                        <a:rPr b="1" sz="1100">
                           <a:solidFill>
                             <a:srgbClr val="FFFFFF"/>
                           </a:solidFill>
@@ -5673,7 +5550,7 @@
                     <a:p>
                       <a:pPr algn="ctr"/>
                       <a:r>
-                        <a:rPr sz="1100" b="1">
+                        <a:rPr b="1" sz="1100">
                           <a:solidFill>
                             <a:srgbClr val="FFFFFF"/>
                           </a:solidFill>
@@ -5695,7 +5572,7 @@
                     <a:p>
                       <a:pPr algn="ctr"/>
                       <a:r>
-                        <a:rPr sz="1100" b="1">
+                        <a:rPr b="1" sz="1100">
                           <a:solidFill>
                             <a:srgbClr val="FFFFFF"/>
                           </a:solidFill>
@@ -5717,7 +5594,7 @@
                     <a:p>
                       <a:pPr algn="ctr"/>
                       <a:r>
-                        <a:rPr sz="1100" b="1">
+                        <a:rPr b="1" sz="1100">
                           <a:solidFill>
                             <a:srgbClr val="FFFFFF"/>
                           </a:solidFill>
@@ -5732,11 +5609,6 @@
                     </a:solidFill>
                   </a:tcPr>
                 </a:tc>
-                <a:extLst>
-                  <a:ext uri="{0D108BD9-81ED-4DB2-BD59-A6C34878D82A}">
-                    <a16:rowId xmlns:a16="http://schemas.microsoft.com/office/drawing/2014/main" val="10000"/>
-                  </a:ext>
-                </a:extLst>
               </a:tr>
               <a:tr h="365760">
                 <a:tc>
@@ -5827,11 +5699,6 @@
                     </a:solidFill>
                   </a:tcPr>
                 </a:tc>
-                <a:extLst>
-                  <a:ext uri="{0D108BD9-81ED-4DB2-BD59-A6C34878D82A}">
-                    <a16:rowId xmlns:a16="http://schemas.microsoft.com/office/drawing/2014/main" val="10001"/>
-                  </a:ext>
-                </a:extLst>
               </a:tr>
               <a:tr h="365760">
                 <a:tc>
@@ -5922,11 +5789,6 @@
                     </a:solidFill>
                   </a:tcPr>
                 </a:tc>
-                <a:extLst>
-                  <a:ext uri="{0D108BD9-81ED-4DB2-BD59-A6C34878D82A}">
-                    <a16:rowId xmlns:a16="http://schemas.microsoft.com/office/drawing/2014/main" val="10002"/>
-                  </a:ext>
-                </a:extLst>
               </a:tr>
               <a:tr h="365760">
                 <a:tc>
@@ -6017,11 +5879,6 @@
                     </a:solidFill>
                   </a:tcPr>
                 </a:tc>
-                <a:extLst>
-                  <a:ext uri="{0D108BD9-81ED-4DB2-BD59-A6C34878D82A}">
-                    <a16:rowId xmlns:a16="http://schemas.microsoft.com/office/drawing/2014/main" val="10003"/>
-                  </a:ext>
-                </a:extLst>
               </a:tr>
               <a:tr h="365760">
                 <a:tc>
@@ -6112,11 +5969,6 @@
                     </a:solidFill>
                   </a:tcPr>
                 </a:tc>
-                <a:extLst>
-                  <a:ext uri="{0D108BD9-81ED-4DB2-BD59-A6C34878D82A}">
-                    <a16:rowId xmlns:a16="http://schemas.microsoft.com/office/drawing/2014/main" val="10004"/>
-                  </a:ext>
-                </a:extLst>
               </a:tr>
             </a:tbl>
           </a:graphicData>
@@ -6248,7 +6100,7 @@
 </file>
 
 <file path=ppt/slides/slide12.xml><?xml version="1.0" encoding="utf-8"?>
-<p:sld xmlns:a="http://schemas.openxmlformats.org/drawingml/2006/main" xmlns:r="http://schemas.openxmlformats.org/officeDocument/2006/relationships" xmlns:p="http://schemas.openxmlformats.org/presentationml/2006/main">
+<p:sld xmlns:a="http://schemas.openxmlformats.org/drawingml/2006/main" xmlns:p="http://schemas.openxmlformats.org/presentationml/2006/main" xmlns:r="http://schemas.openxmlformats.org/officeDocument/2006/relationships">
   <p:cSld>
     <p:spTree>
       <p:nvGrpSpPr>
@@ -6256,14 +6108,7 @@
         <p:cNvGrpSpPr/>
         <p:nvPr/>
       </p:nvGrpSpPr>
-      <p:grpSpPr>
-        <a:xfrm>
-          <a:off x="0" y="0"/>
-          <a:ext cx="0" cy="0"/>
-          <a:chOff x="0" y="0"/>
-          <a:chExt cx="0" cy="0"/>
-        </a:xfrm>
-      </p:grpSpPr>
+      <p:grpSpPr/>
       <p:sp>
         <p:nvSpPr>
           <p:cNvPr id="2" name="Rectangle 1"/>
@@ -6304,7 +6149,6 @@
           <a:lstStyle/>
           <a:p>
             <a:pPr algn="ctr"/>
-            <a:endParaRPr/>
           </a:p>
         </p:txBody>
       </p:sp>
@@ -6348,7 +6192,6 @@
           <a:lstStyle/>
           <a:p>
             <a:pPr algn="ctr"/>
-            <a:endParaRPr/>
           </a:p>
         </p:txBody>
       </p:sp>
@@ -6439,48 +6282,12 @@
                 <a:tableStyleId>{5C22544A-7EE6-4342-B048-85BDC9FD1C3A}</a:tableStyleId>
               </a:tblPr>
               <a:tblGrid>
-                <a:gridCol w="1920240">
-                  <a:extLst>
-                    <a:ext uri="{9D8B030D-6E8A-4147-A177-3AD203B41FA5}">
-                      <a16:colId xmlns:a16="http://schemas.microsoft.com/office/drawing/2014/main" val="20000"/>
-                    </a:ext>
-                  </a:extLst>
-                </a:gridCol>
-                <a:gridCol w="1920240">
-                  <a:extLst>
-                    <a:ext uri="{9D8B030D-6E8A-4147-A177-3AD203B41FA5}">
-                      <a16:colId xmlns:a16="http://schemas.microsoft.com/office/drawing/2014/main" val="20001"/>
-                    </a:ext>
-                  </a:extLst>
-                </a:gridCol>
-                <a:gridCol w="1920240">
-                  <a:extLst>
-                    <a:ext uri="{9D8B030D-6E8A-4147-A177-3AD203B41FA5}">
-                      <a16:colId xmlns:a16="http://schemas.microsoft.com/office/drawing/2014/main" val="20002"/>
-                    </a:ext>
-                  </a:extLst>
-                </a:gridCol>
-                <a:gridCol w="1920240">
-                  <a:extLst>
-                    <a:ext uri="{9D8B030D-6E8A-4147-A177-3AD203B41FA5}">
-                      <a16:colId xmlns:a16="http://schemas.microsoft.com/office/drawing/2014/main" val="20003"/>
-                    </a:ext>
-                  </a:extLst>
-                </a:gridCol>
-                <a:gridCol w="1920240">
-                  <a:extLst>
-                    <a:ext uri="{9D8B030D-6E8A-4147-A177-3AD203B41FA5}">
-                      <a16:colId xmlns:a16="http://schemas.microsoft.com/office/drawing/2014/main" val="20004"/>
-                    </a:ext>
-                  </a:extLst>
-                </a:gridCol>
-                <a:gridCol w="1920240">
-                  <a:extLst>
-                    <a:ext uri="{9D8B030D-6E8A-4147-A177-3AD203B41FA5}">
-                      <a16:colId xmlns:a16="http://schemas.microsoft.com/office/drawing/2014/main" val="20005"/>
-                    </a:ext>
-                  </a:extLst>
-                </a:gridCol>
+                <a:gridCol w="1920240"/>
+                <a:gridCol w="1920240"/>
+                <a:gridCol w="1920240"/>
+                <a:gridCol w="1920240"/>
+                <a:gridCol w="1920240"/>
+                <a:gridCol w="1920240"/>
               </a:tblGrid>
               <a:tr h="489857">
                 <a:tc>
@@ -6490,18 +6297,13 @@
                     <a:p>
                       <a:pPr algn="ctr"/>
                       <a:r>
-                        <a:rPr sz="1100" b="1" dirty="0" err="1">
+                        <a:rPr b="1" sz="1100">
                           <a:solidFill>
                             <a:srgbClr val="FFFFFF"/>
                           </a:solidFill>
                         </a:rPr>
                         <a:t>변수</a:t>
                       </a:r>
-                      <a:endParaRPr sz="1100" b="1" dirty="0">
-                        <a:solidFill>
-                          <a:srgbClr val="FFFFFF"/>
-                        </a:solidFill>
-                      </a:endParaRPr>
                     </a:p>
                   </a:txBody>
                   <a:tcPr>
@@ -6517,7 +6319,7 @@
                     <a:p>
                       <a:pPr algn="ctr"/>
                       <a:r>
-                        <a:rPr sz="1100" b="1">
+                        <a:rPr b="1" sz="1100">
                           <a:solidFill>
                             <a:srgbClr val="FFFFFF"/>
                           </a:solidFill>
@@ -6539,7 +6341,7 @@
                     <a:p>
                       <a:pPr algn="ctr"/>
                       <a:r>
-                        <a:rPr sz="1100" b="1">
+                        <a:rPr b="1" sz="1100">
                           <a:solidFill>
                             <a:srgbClr val="FFFFFF"/>
                           </a:solidFill>
@@ -6561,7 +6363,7 @@
                     <a:p>
                       <a:pPr algn="ctr"/>
                       <a:r>
-                        <a:rPr sz="1100" b="1">
+                        <a:rPr b="1" sz="1100">
                           <a:solidFill>
                             <a:srgbClr val="FFFFFF"/>
                           </a:solidFill>
@@ -6583,7 +6385,7 @@
                     <a:p>
                       <a:pPr algn="ctr"/>
                       <a:r>
-                        <a:rPr sz="1100" b="1">
+                        <a:rPr b="1" sz="1100">
                           <a:solidFill>
                             <a:srgbClr val="FFFFFF"/>
                           </a:solidFill>
@@ -6605,7 +6407,7 @@
                     <a:p>
                       <a:pPr algn="ctr"/>
                       <a:r>
-                        <a:rPr sz="1100" b="1">
+                        <a:rPr b="1" sz="1100">
                           <a:solidFill>
                             <a:srgbClr val="FFFFFF"/>
                           </a:solidFill>
@@ -6620,11 +6422,6 @@
                     </a:solidFill>
                   </a:tcPr>
                 </a:tc>
-                <a:extLst>
-                  <a:ext uri="{0D108BD9-81ED-4DB2-BD59-A6C34878D82A}">
-                    <a16:rowId xmlns:a16="http://schemas.microsoft.com/office/drawing/2014/main" val="10000"/>
-                  </a:ext>
-                </a:extLst>
               </a:tr>
               <a:tr h="489857">
                 <a:tc>
@@ -6759,11 +6556,6 @@
                     </a:solidFill>
                   </a:tcPr>
                 </a:tc>
-                <a:extLst>
-                  <a:ext uri="{0D108BD9-81ED-4DB2-BD59-A6C34878D82A}">
-                    <a16:rowId xmlns:a16="http://schemas.microsoft.com/office/drawing/2014/main" val="10001"/>
-                  </a:ext>
-                </a:extLst>
               </a:tr>
               <a:tr h="489857">
                 <a:tc>
@@ -6898,11 +6690,6 @@
                     </a:solidFill>
                   </a:tcPr>
                 </a:tc>
-                <a:extLst>
-                  <a:ext uri="{0D108BD9-81ED-4DB2-BD59-A6C34878D82A}">
-                    <a16:rowId xmlns:a16="http://schemas.microsoft.com/office/drawing/2014/main" val="10002"/>
-                  </a:ext>
-                </a:extLst>
               </a:tr>
               <a:tr h="489857">
                 <a:tc>
@@ -7037,11 +6824,6 @@
                     </a:solidFill>
                   </a:tcPr>
                 </a:tc>
-                <a:extLst>
-                  <a:ext uri="{0D108BD9-81ED-4DB2-BD59-A6C34878D82A}">
-                    <a16:rowId xmlns:a16="http://schemas.microsoft.com/office/drawing/2014/main" val="10003"/>
-                  </a:ext>
-                </a:extLst>
               </a:tr>
               <a:tr h="489857">
                 <a:tc>
@@ -7176,11 +6958,6 @@
                     </a:solidFill>
                   </a:tcPr>
                 </a:tc>
-                <a:extLst>
-                  <a:ext uri="{0D108BD9-81ED-4DB2-BD59-A6C34878D82A}">
-                    <a16:rowId xmlns:a16="http://schemas.microsoft.com/office/drawing/2014/main" val="10004"/>
-                  </a:ext>
-                </a:extLst>
               </a:tr>
               <a:tr h="489857">
                 <a:tc>
@@ -7315,11 +7092,6 @@
                     </a:solidFill>
                   </a:tcPr>
                 </a:tc>
-                <a:extLst>
-                  <a:ext uri="{0D108BD9-81ED-4DB2-BD59-A6C34878D82A}">
-                    <a16:rowId xmlns:a16="http://schemas.microsoft.com/office/drawing/2014/main" val="10005"/>
-                  </a:ext>
-                </a:extLst>
               </a:tr>
               <a:tr h="489858">
                 <a:tc>
@@ -7439,7 +7211,7 @@
                     <a:p>
                       <a:pPr algn="ctr"/>
                       <a:r>
-                        <a:rPr sz="1100" dirty="0">
+                        <a:rPr sz="1100">
                           <a:solidFill>
                             <a:srgbClr val="1A1A2E"/>
                           </a:solidFill>
@@ -7454,11 +7226,6 @@
                     </a:solidFill>
                   </a:tcPr>
                 </a:tc>
-                <a:extLst>
-                  <a:ext uri="{0D108BD9-81ED-4DB2-BD59-A6C34878D82A}">
-                    <a16:rowId xmlns:a16="http://schemas.microsoft.com/office/drawing/2014/main" val="10006"/>
-                  </a:ext>
-                </a:extLst>
               </a:tr>
             </a:tbl>
           </a:graphicData>
@@ -7565,7 +7332,7 @@
 </file>
 
 <file path=ppt/slides/slide13.xml><?xml version="1.0" encoding="utf-8"?>
-<p:sld xmlns:a="http://schemas.openxmlformats.org/drawingml/2006/main" xmlns:r="http://schemas.openxmlformats.org/officeDocument/2006/relationships" xmlns:p="http://schemas.openxmlformats.org/presentationml/2006/main">
+<p:sld xmlns:a="http://schemas.openxmlformats.org/drawingml/2006/main" xmlns:p="http://schemas.openxmlformats.org/presentationml/2006/main" xmlns:r="http://schemas.openxmlformats.org/officeDocument/2006/relationships">
   <p:cSld>
     <p:spTree>
       <p:nvGrpSpPr>
@@ -7573,14 +7340,7 @@
         <p:cNvGrpSpPr/>
         <p:nvPr/>
       </p:nvGrpSpPr>
-      <p:grpSpPr>
-        <a:xfrm>
-          <a:off x="0" y="0"/>
-          <a:ext cx="0" cy="0"/>
-          <a:chOff x="0" y="0"/>
-          <a:chExt cx="0" cy="0"/>
-        </a:xfrm>
-      </p:grpSpPr>
+      <p:grpSpPr/>
       <p:sp>
         <p:nvSpPr>
           <p:cNvPr id="2" name="Rectangle 1"/>
@@ -7621,7 +7381,6 @@
           <a:lstStyle/>
           <a:p>
             <a:pPr algn="ctr"/>
-            <a:endParaRPr/>
           </a:p>
         </p:txBody>
       </p:sp>
@@ -7665,7 +7424,6 @@
           <a:lstStyle/>
           <a:p>
             <a:pPr algn="ctr"/>
-            <a:endParaRPr/>
           </a:p>
         </p:txBody>
       </p:sp>
@@ -7756,41 +7514,11 @@
                 <a:tableStyleId>{5C22544A-7EE6-4342-B048-85BDC9FD1C3A}</a:tableStyleId>
               </a:tblPr>
               <a:tblGrid>
-                <a:gridCol w="2304288">
-                  <a:extLst>
-                    <a:ext uri="{9D8B030D-6E8A-4147-A177-3AD203B41FA5}">
-                      <a16:colId xmlns:a16="http://schemas.microsoft.com/office/drawing/2014/main" val="20000"/>
-                    </a:ext>
-                  </a:extLst>
-                </a:gridCol>
-                <a:gridCol w="2304288">
-                  <a:extLst>
-                    <a:ext uri="{9D8B030D-6E8A-4147-A177-3AD203B41FA5}">
-                      <a16:colId xmlns:a16="http://schemas.microsoft.com/office/drawing/2014/main" val="20001"/>
-                    </a:ext>
-                  </a:extLst>
-                </a:gridCol>
-                <a:gridCol w="2304288">
-                  <a:extLst>
-                    <a:ext uri="{9D8B030D-6E8A-4147-A177-3AD203B41FA5}">
-                      <a16:colId xmlns:a16="http://schemas.microsoft.com/office/drawing/2014/main" val="20002"/>
-                    </a:ext>
-                  </a:extLst>
-                </a:gridCol>
-                <a:gridCol w="2304288">
-                  <a:extLst>
-                    <a:ext uri="{9D8B030D-6E8A-4147-A177-3AD203B41FA5}">
-                      <a16:colId xmlns:a16="http://schemas.microsoft.com/office/drawing/2014/main" val="20003"/>
-                    </a:ext>
-                  </a:extLst>
-                </a:gridCol>
-                <a:gridCol w="2304288">
-                  <a:extLst>
-                    <a:ext uri="{9D8B030D-6E8A-4147-A177-3AD203B41FA5}">
-                      <a16:colId xmlns:a16="http://schemas.microsoft.com/office/drawing/2014/main" val="20004"/>
-                    </a:ext>
-                  </a:extLst>
-                </a:gridCol>
+                <a:gridCol w="2304288"/>
+                <a:gridCol w="2304288"/>
+                <a:gridCol w="2304288"/>
+                <a:gridCol w="2304288"/>
+                <a:gridCol w="2304288"/>
               </a:tblGrid>
               <a:tr h="377190">
                 <a:tc>
@@ -7800,7 +7528,7 @@
                     <a:p>
                       <a:pPr algn="ctr"/>
                       <a:r>
-                        <a:rPr sz="1100" b="1">
+                        <a:rPr b="1" sz="1100">
                           <a:solidFill>
                             <a:srgbClr val="FFFFFF"/>
                           </a:solidFill>
@@ -7822,7 +7550,7 @@
                     <a:p>
                       <a:pPr algn="ctr"/>
                       <a:r>
-                        <a:rPr sz="1100" b="1">
+                        <a:rPr b="1" sz="1100">
                           <a:solidFill>
                             <a:srgbClr val="FFFFFF"/>
                           </a:solidFill>
@@ -7844,7 +7572,7 @@
                     <a:p>
                       <a:pPr algn="ctr"/>
                       <a:r>
-                        <a:rPr sz="1100" b="1">
+                        <a:rPr b="1" sz="1100">
                           <a:solidFill>
                             <a:srgbClr val="FFFFFF"/>
                           </a:solidFill>
@@ -7866,7 +7594,7 @@
                     <a:p>
                       <a:pPr algn="ctr"/>
                       <a:r>
-                        <a:rPr sz="1100" b="1">
+                        <a:rPr b="1" sz="1100">
                           <a:solidFill>
                             <a:srgbClr val="FFFFFF"/>
                           </a:solidFill>
@@ -7888,7 +7616,7 @@
                     <a:p>
                       <a:pPr algn="ctr"/>
                       <a:r>
-                        <a:rPr sz="1100" b="1">
+                        <a:rPr b="1" sz="1100">
                           <a:solidFill>
                             <a:srgbClr val="FFFFFF"/>
                           </a:solidFill>
@@ -7903,11 +7631,6 @@
                     </a:solidFill>
                   </a:tcPr>
                 </a:tc>
-                <a:extLst>
-                  <a:ext uri="{0D108BD9-81ED-4DB2-BD59-A6C34878D82A}">
-                    <a16:rowId xmlns:a16="http://schemas.microsoft.com/office/drawing/2014/main" val="10000"/>
-                  </a:ext>
-                </a:extLst>
               </a:tr>
               <a:tr h="377190">
                 <a:tc>
@@ -8020,11 +7743,6 @@
                     </a:solidFill>
                   </a:tcPr>
                 </a:tc>
-                <a:extLst>
-                  <a:ext uri="{0D108BD9-81ED-4DB2-BD59-A6C34878D82A}">
-                    <a16:rowId xmlns:a16="http://schemas.microsoft.com/office/drawing/2014/main" val="10001"/>
-                  </a:ext>
-                </a:extLst>
               </a:tr>
               <a:tr h="377190">
                 <a:tc>
@@ -8137,11 +7855,6 @@
                     </a:solidFill>
                   </a:tcPr>
                 </a:tc>
-                <a:extLst>
-                  <a:ext uri="{0D108BD9-81ED-4DB2-BD59-A6C34878D82A}">
-                    <a16:rowId xmlns:a16="http://schemas.microsoft.com/office/drawing/2014/main" val="10002"/>
-                  </a:ext>
-                </a:extLst>
               </a:tr>
               <a:tr h="377190">
                 <a:tc>
@@ -8254,11 +7967,6 @@
                     </a:solidFill>
                   </a:tcPr>
                 </a:tc>
-                <a:extLst>
-                  <a:ext uri="{0D108BD9-81ED-4DB2-BD59-A6C34878D82A}">
-                    <a16:rowId xmlns:a16="http://schemas.microsoft.com/office/drawing/2014/main" val="10003"/>
-                  </a:ext>
-                </a:extLst>
               </a:tr>
               <a:tr h="377190">
                 <a:tc>
@@ -8371,11 +8079,6 @@
                     </a:solidFill>
                   </a:tcPr>
                 </a:tc>
-                <a:extLst>
-                  <a:ext uri="{0D108BD9-81ED-4DB2-BD59-A6C34878D82A}">
-                    <a16:rowId xmlns:a16="http://schemas.microsoft.com/office/drawing/2014/main" val="10004"/>
-                  </a:ext>
-                </a:extLst>
               </a:tr>
               <a:tr h="377190">
                 <a:tc>
@@ -8488,11 +8191,6 @@
                     </a:solidFill>
                   </a:tcPr>
                 </a:tc>
-                <a:extLst>
-                  <a:ext uri="{0D108BD9-81ED-4DB2-BD59-A6C34878D82A}">
-                    <a16:rowId xmlns:a16="http://schemas.microsoft.com/office/drawing/2014/main" val="10005"/>
-                  </a:ext>
-                </a:extLst>
               </a:tr>
               <a:tr h="377190">
                 <a:tc>
@@ -8605,11 +8303,6 @@
                     </a:solidFill>
                   </a:tcPr>
                 </a:tc>
-                <a:extLst>
-                  <a:ext uri="{0D108BD9-81ED-4DB2-BD59-A6C34878D82A}">
-                    <a16:rowId xmlns:a16="http://schemas.microsoft.com/office/drawing/2014/main" val="10006"/>
-                  </a:ext>
-                </a:extLst>
               </a:tr>
               <a:tr h="377190">
                 <a:tc>
@@ -8722,11 +8415,6 @@
                     </a:solidFill>
                   </a:tcPr>
                 </a:tc>
-                <a:extLst>
-                  <a:ext uri="{0D108BD9-81ED-4DB2-BD59-A6C34878D82A}">
-                    <a16:rowId xmlns:a16="http://schemas.microsoft.com/office/drawing/2014/main" val="10007"/>
-                  </a:ext>
-                </a:extLst>
               </a:tr>
             </a:tbl>
           </a:graphicData>
@@ -8891,7 +8579,7 @@
 </file>
 
 <file path=ppt/slides/slide14.xml><?xml version="1.0" encoding="utf-8"?>
-<p:sld xmlns:a="http://schemas.openxmlformats.org/drawingml/2006/main" xmlns:r="http://schemas.openxmlformats.org/officeDocument/2006/relationships" xmlns:p="http://schemas.openxmlformats.org/presentationml/2006/main">
+<p:sld xmlns:a="http://schemas.openxmlformats.org/drawingml/2006/main" xmlns:p="http://schemas.openxmlformats.org/presentationml/2006/main" xmlns:r="http://schemas.openxmlformats.org/officeDocument/2006/relationships">
   <p:cSld>
     <p:spTree>
       <p:nvGrpSpPr>
@@ -8899,14 +8587,7 @@
         <p:cNvGrpSpPr/>
         <p:nvPr/>
       </p:nvGrpSpPr>
-      <p:grpSpPr>
-        <a:xfrm>
-          <a:off x="0" y="0"/>
-          <a:ext cx="0" cy="0"/>
-          <a:chOff x="0" y="0"/>
-          <a:chExt cx="0" cy="0"/>
-        </a:xfrm>
-      </p:grpSpPr>
+      <p:grpSpPr/>
       <p:sp>
         <p:nvSpPr>
           <p:cNvPr id="2" name="Rectangle 1"/>
@@ -8947,7 +8628,6 @@
           <a:lstStyle/>
           <a:p>
             <a:pPr algn="ctr"/>
-            <a:endParaRPr/>
           </a:p>
         </p:txBody>
       </p:sp>
@@ -8991,7 +8671,6 @@
           <a:lstStyle/>
           <a:p>
             <a:pPr algn="ctr"/>
-            <a:endParaRPr/>
           </a:p>
         </p:txBody>
       </p:sp>
@@ -9103,7 +8782,6 @@
           <a:lstStyle/>
           <a:p>
             <a:pPr algn="ctr"/>
-            <a:endParaRPr/>
           </a:p>
         </p:txBody>
       </p:sp>
@@ -9215,7 +8893,6 @@
           <a:lstStyle/>
           <a:p>
             <a:pPr algn="ctr"/>
-            <a:endParaRPr/>
           </a:p>
         </p:txBody>
       </p:sp>
@@ -9327,7 +9004,6 @@
           <a:lstStyle/>
           <a:p>
             <a:pPr algn="ctr"/>
-            <a:endParaRPr/>
           </a:p>
         </p:txBody>
       </p:sp>
@@ -9439,7 +9115,6 @@
           <a:lstStyle/>
           <a:p>
             <a:pPr algn="ctr"/>
-            <a:endParaRPr/>
           </a:p>
         </p:txBody>
       </p:sp>
@@ -9551,7 +9226,6 @@
           <a:lstStyle/>
           <a:p>
             <a:pPr algn="ctr"/>
-            <a:endParaRPr/>
           </a:p>
         </p:txBody>
       </p:sp>
@@ -9663,7 +9337,6 @@
           <a:lstStyle/>
           <a:p>
             <a:pPr algn="ctr"/>
-            <a:endParaRPr/>
           </a:p>
         </p:txBody>
       </p:sp>
@@ -9779,7 +9452,7 @@
         </p:nvGraphicFramePr>
         <p:xfrm>
           <a:off x="320040" y="3749039"/>
-          <a:ext cx="6400800" cy="1558290"/>
+          <a:ext cx="6400800" cy="1508760"/>
         </p:xfrm>
         <a:graphic>
           <a:graphicData uri="http://schemas.openxmlformats.org/drawingml/2006/table">
@@ -9788,27 +9461,9 @@
                 <a:tableStyleId>{5C22544A-7EE6-4342-B048-85BDC9FD1C3A}</a:tableStyleId>
               </a:tblPr>
               <a:tblGrid>
-                <a:gridCol w="2133600">
-                  <a:extLst>
-                    <a:ext uri="{9D8B030D-6E8A-4147-A177-3AD203B41FA5}">
-                      <a16:colId xmlns:a16="http://schemas.microsoft.com/office/drawing/2014/main" val="20000"/>
-                    </a:ext>
-                  </a:extLst>
-                </a:gridCol>
-                <a:gridCol w="2133600">
-                  <a:extLst>
-                    <a:ext uri="{9D8B030D-6E8A-4147-A177-3AD203B41FA5}">
-                      <a16:colId xmlns:a16="http://schemas.microsoft.com/office/drawing/2014/main" val="20001"/>
-                    </a:ext>
-                  </a:extLst>
-                </a:gridCol>
-                <a:gridCol w="2133600">
-                  <a:extLst>
-                    <a:ext uri="{9D8B030D-6E8A-4147-A177-3AD203B41FA5}">
-                      <a16:colId xmlns:a16="http://schemas.microsoft.com/office/drawing/2014/main" val="20002"/>
-                    </a:ext>
-                  </a:extLst>
-                </a:gridCol>
+                <a:gridCol w="2133600"/>
+                <a:gridCol w="2133600"/>
+                <a:gridCol w="2133600"/>
               </a:tblGrid>
               <a:tr h="377190">
                 <a:tc>
@@ -9818,7 +9473,7 @@
                     <a:p>
                       <a:pPr algn="ctr"/>
                       <a:r>
-                        <a:rPr sz="1100" b="1">
+                        <a:rPr b="1" sz="1100">
                           <a:solidFill>
                             <a:srgbClr val="FFFFFF"/>
                           </a:solidFill>
@@ -9840,7 +9495,7 @@
                     <a:p>
                       <a:pPr algn="ctr"/>
                       <a:r>
-                        <a:rPr sz="1100" b="1">
+                        <a:rPr b="1" sz="1100">
                           <a:solidFill>
                             <a:srgbClr val="FFFFFF"/>
                           </a:solidFill>
@@ -9862,7 +9517,7 @@
                     <a:p>
                       <a:pPr algn="ctr"/>
                       <a:r>
-                        <a:rPr sz="1100" b="1">
+                        <a:rPr b="1" sz="1100">
                           <a:solidFill>
                             <a:srgbClr val="FFFFFF"/>
                           </a:solidFill>
@@ -9877,11 +9532,6 @@
                     </a:solidFill>
                   </a:tcPr>
                 </a:tc>
-                <a:extLst>
-                  <a:ext uri="{0D108BD9-81ED-4DB2-BD59-A6C34878D82A}">
-                    <a16:rowId xmlns:a16="http://schemas.microsoft.com/office/drawing/2014/main" val="10000"/>
-                  </a:ext>
-                </a:extLst>
               </a:tr>
               <a:tr h="377190">
                 <a:tc>
@@ -9950,11 +9600,6 @@
                     </a:solidFill>
                   </a:tcPr>
                 </a:tc>
-                <a:extLst>
-                  <a:ext uri="{0D108BD9-81ED-4DB2-BD59-A6C34878D82A}">
-                    <a16:rowId xmlns:a16="http://schemas.microsoft.com/office/drawing/2014/main" val="10001"/>
-                  </a:ext>
-                </a:extLst>
               </a:tr>
               <a:tr h="377190">
                 <a:tc>
@@ -10023,11 +9668,6 @@
                     </a:solidFill>
                   </a:tcPr>
                 </a:tc>
-                <a:extLst>
-                  <a:ext uri="{0D108BD9-81ED-4DB2-BD59-A6C34878D82A}">
-                    <a16:rowId xmlns:a16="http://schemas.microsoft.com/office/drawing/2014/main" val="10002"/>
-                  </a:ext>
-                </a:extLst>
               </a:tr>
               <a:tr h="377190">
                 <a:tc>
@@ -10096,11 +9736,6 @@
                     </a:solidFill>
                   </a:tcPr>
                 </a:tc>
-                <a:extLst>
-                  <a:ext uri="{0D108BD9-81ED-4DB2-BD59-A6C34878D82A}">
-                    <a16:rowId xmlns:a16="http://schemas.microsoft.com/office/drawing/2014/main" val="10003"/>
-                  </a:ext>
-                </a:extLst>
               </a:tr>
             </a:tbl>
           </a:graphicData>
@@ -10231,7 +9866,7 @@
 </file>
 
 <file path=ppt/slides/slide15.xml><?xml version="1.0" encoding="utf-8"?>
-<p:sld xmlns:a="http://schemas.openxmlformats.org/drawingml/2006/main" xmlns:r="http://schemas.openxmlformats.org/officeDocument/2006/relationships" xmlns:p="http://schemas.openxmlformats.org/presentationml/2006/main">
+<p:sld xmlns:a="http://schemas.openxmlformats.org/drawingml/2006/main" xmlns:p="http://schemas.openxmlformats.org/presentationml/2006/main" xmlns:r="http://schemas.openxmlformats.org/officeDocument/2006/relationships">
   <p:cSld>
     <p:spTree>
       <p:nvGrpSpPr>
@@ -10239,14 +9874,7 @@
         <p:cNvGrpSpPr/>
         <p:nvPr/>
       </p:nvGrpSpPr>
-      <p:grpSpPr>
-        <a:xfrm>
-          <a:off x="0" y="0"/>
-          <a:ext cx="0" cy="0"/>
-          <a:chOff x="0" y="0"/>
-          <a:chExt cx="0" cy="0"/>
-        </a:xfrm>
-      </p:grpSpPr>
+      <p:grpSpPr/>
       <p:sp>
         <p:nvSpPr>
           <p:cNvPr id="2" name="Rectangle 1"/>
@@ -10287,7 +9915,6 @@
           <a:lstStyle/>
           <a:p>
             <a:pPr algn="ctr"/>
-            <a:endParaRPr/>
           </a:p>
         </p:txBody>
       </p:sp>
@@ -10331,7 +9958,6 @@
           <a:lstStyle/>
           <a:p>
             <a:pPr algn="ctr"/>
-            <a:endParaRPr/>
           </a:p>
         </p:txBody>
       </p:sp>
@@ -10422,34 +10048,10 @@
                 <a:tableStyleId>{5C22544A-7EE6-4342-B048-85BDC9FD1C3A}</a:tableStyleId>
               </a:tblPr>
               <a:tblGrid>
-                <a:gridCol w="1828800">
-                  <a:extLst>
-                    <a:ext uri="{9D8B030D-6E8A-4147-A177-3AD203B41FA5}">
-                      <a16:colId xmlns:a16="http://schemas.microsoft.com/office/drawing/2014/main" val="20000"/>
-                    </a:ext>
-                  </a:extLst>
-                </a:gridCol>
-                <a:gridCol w="1828800">
-                  <a:extLst>
-                    <a:ext uri="{9D8B030D-6E8A-4147-A177-3AD203B41FA5}">
-                      <a16:colId xmlns:a16="http://schemas.microsoft.com/office/drawing/2014/main" val="20001"/>
-                    </a:ext>
-                  </a:extLst>
-                </a:gridCol>
-                <a:gridCol w="1828800">
-                  <a:extLst>
-                    <a:ext uri="{9D8B030D-6E8A-4147-A177-3AD203B41FA5}">
-                      <a16:colId xmlns:a16="http://schemas.microsoft.com/office/drawing/2014/main" val="20002"/>
-                    </a:ext>
-                  </a:extLst>
-                </a:gridCol>
-                <a:gridCol w="1828800">
-                  <a:extLst>
-                    <a:ext uri="{9D8B030D-6E8A-4147-A177-3AD203B41FA5}">
-                      <a16:colId xmlns:a16="http://schemas.microsoft.com/office/drawing/2014/main" val="20003"/>
-                    </a:ext>
-                  </a:extLst>
-                </a:gridCol>
+                <a:gridCol w="1828800"/>
+                <a:gridCol w="1828800"/>
+                <a:gridCol w="1828800"/>
+                <a:gridCol w="1828800"/>
               </a:tblGrid>
               <a:tr h="513370">
                 <a:tc>
@@ -10459,7 +10061,7 @@
                     <a:p>
                       <a:pPr algn="ctr"/>
                       <a:r>
-                        <a:rPr sz="1100" b="1">
+                        <a:rPr b="1" sz="1100">
                           <a:solidFill>
                             <a:srgbClr val="FFFFFF"/>
                           </a:solidFill>
@@ -10481,7 +10083,7 @@
                     <a:p>
                       <a:pPr algn="ctr"/>
                       <a:r>
-                        <a:rPr sz="1100" b="1">
+                        <a:rPr b="1" sz="1100">
                           <a:solidFill>
                             <a:srgbClr val="FFFFFF"/>
                           </a:solidFill>
@@ -10503,7 +10105,7 @@
                     <a:p>
                       <a:pPr algn="ctr"/>
                       <a:r>
-                        <a:rPr sz="1100" b="1">
+                        <a:rPr b="1" sz="1100">
                           <a:solidFill>
                             <a:srgbClr val="FFFFFF"/>
                           </a:solidFill>
@@ -10525,7 +10127,7 @@
                     <a:p>
                       <a:pPr algn="ctr"/>
                       <a:r>
-                        <a:rPr sz="1100" b="1">
+                        <a:rPr b="1" sz="1100">
                           <a:solidFill>
                             <a:srgbClr val="FFFFFF"/>
                           </a:solidFill>
@@ -10540,11 +10142,6 @@
                     </a:solidFill>
                   </a:tcPr>
                 </a:tc>
-                <a:extLst>
-                  <a:ext uri="{0D108BD9-81ED-4DB2-BD59-A6C34878D82A}">
-                    <a16:rowId xmlns:a16="http://schemas.microsoft.com/office/drawing/2014/main" val="10000"/>
-                  </a:ext>
-                </a:extLst>
               </a:tr>
               <a:tr h="513370">
                 <a:tc>
@@ -10635,11 +10232,6 @@
                     </a:solidFill>
                   </a:tcPr>
                 </a:tc>
-                <a:extLst>
-                  <a:ext uri="{0D108BD9-81ED-4DB2-BD59-A6C34878D82A}">
-                    <a16:rowId xmlns:a16="http://schemas.microsoft.com/office/drawing/2014/main" val="10001"/>
-                  </a:ext>
-                </a:extLst>
               </a:tr>
               <a:tr h="513370">
                 <a:tc>
@@ -10730,11 +10322,6 @@
                     </a:solidFill>
                   </a:tcPr>
                 </a:tc>
-                <a:extLst>
-                  <a:ext uri="{0D108BD9-81ED-4DB2-BD59-A6C34878D82A}">
-                    <a16:rowId xmlns:a16="http://schemas.microsoft.com/office/drawing/2014/main" val="10002"/>
-                  </a:ext>
-                </a:extLst>
               </a:tr>
               <a:tr h="513370">
                 <a:tc>
@@ -10825,11 +10412,6 @@
                     </a:solidFill>
                   </a:tcPr>
                 </a:tc>
-                <a:extLst>
-                  <a:ext uri="{0D108BD9-81ED-4DB2-BD59-A6C34878D82A}">
-                    <a16:rowId xmlns:a16="http://schemas.microsoft.com/office/drawing/2014/main" val="10003"/>
-                  </a:ext>
-                </a:extLst>
               </a:tr>
               <a:tr h="513370">
                 <a:tc>
@@ -10920,11 +10502,6 @@
                     </a:solidFill>
                   </a:tcPr>
                 </a:tc>
-                <a:extLst>
-                  <a:ext uri="{0D108BD9-81ED-4DB2-BD59-A6C34878D82A}">
-                    <a16:rowId xmlns:a16="http://schemas.microsoft.com/office/drawing/2014/main" val="10004"/>
-                  </a:ext>
-                </a:extLst>
               </a:tr>
               <a:tr h="513370">
                 <a:tc>
@@ -11015,11 +10592,6 @@
                     </a:solidFill>
                   </a:tcPr>
                 </a:tc>
-                <a:extLst>
-                  <a:ext uri="{0D108BD9-81ED-4DB2-BD59-A6C34878D82A}">
-                    <a16:rowId xmlns:a16="http://schemas.microsoft.com/office/drawing/2014/main" val="10005"/>
-                  </a:ext>
-                </a:extLst>
               </a:tr>
               <a:tr h="513371">
                 <a:tc>
@@ -11110,11 +10682,6 @@
                     </a:solidFill>
                   </a:tcPr>
                 </a:tc>
-                <a:extLst>
-                  <a:ext uri="{0D108BD9-81ED-4DB2-BD59-A6C34878D82A}">
-                    <a16:rowId xmlns:a16="http://schemas.microsoft.com/office/drawing/2014/main" val="10006"/>
-                  </a:ext>
-                </a:extLst>
               </a:tr>
             </a:tbl>
           </a:graphicData>
@@ -11222,7 +10789,7 @@
 </file>
 
 <file path=ppt/slides/slide16.xml><?xml version="1.0" encoding="utf-8"?>
-<p:sld xmlns:a="http://schemas.openxmlformats.org/drawingml/2006/main" xmlns:r="http://schemas.openxmlformats.org/officeDocument/2006/relationships" xmlns:p="http://schemas.openxmlformats.org/presentationml/2006/main">
+<p:sld xmlns:a="http://schemas.openxmlformats.org/drawingml/2006/main" xmlns:p="http://schemas.openxmlformats.org/presentationml/2006/main" xmlns:r="http://schemas.openxmlformats.org/officeDocument/2006/relationships">
   <p:cSld>
     <p:spTree>
       <p:nvGrpSpPr>
@@ -11230,14 +10797,7 @@
         <p:cNvGrpSpPr/>
         <p:nvPr/>
       </p:nvGrpSpPr>
-      <p:grpSpPr>
-        <a:xfrm>
-          <a:off x="0" y="0"/>
-          <a:ext cx="0" cy="0"/>
-          <a:chOff x="0" y="0"/>
-          <a:chExt cx="0" cy="0"/>
-        </a:xfrm>
-      </p:grpSpPr>
+      <p:grpSpPr/>
       <p:sp>
         <p:nvSpPr>
           <p:cNvPr id="2" name="Rectangle 1"/>
@@ -11278,7 +10838,6 @@
           <a:lstStyle/>
           <a:p>
             <a:pPr algn="ctr"/>
-            <a:endParaRPr/>
           </a:p>
         </p:txBody>
       </p:sp>
@@ -11322,7 +10881,6 @@
           <a:lstStyle/>
           <a:p>
             <a:pPr algn="ctr"/>
-            <a:endParaRPr/>
           </a:p>
         </p:txBody>
       </p:sp>
@@ -11404,7 +10962,7 @@
         </p:nvGraphicFramePr>
         <p:xfrm>
           <a:off x="320040" y="1143000"/>
-          <a:ext cx="11521440" cy="2200656"/>
+          <a:ext cx="11521440" cy="2103120"/>
         </p:xfrm>
         <a:graphic>
           <a:graphicData uri="http://schemas.openxmlformats.org/drawingml/2006/table">
@@ -11413,55 +10971,13 @@
                 <a:tableStyleId>{5C22544A-7EE6-4342-B048-85BDC9FD1C3A}</a:tableStyleId>
               </a:tblPr>
               <a:tblGrid>
-                <a:gridCol w="1645920">
-                  <a:extLst>
-                    <a:ext uri="{9D8B030D-6E8A-4147-A177-3AD203B41FA5}">
-                      <a16:colId xmlns:a16="http://schemas.microsoft.com/office/drawing/2014/main" val="20000"/>
-                    </a:ext>
-                  </a:extLst>
-                </a:gridCol>
-                <a:gridCol w="1645920">
-                  <a:extLst>
-                    <a:ext uri="{9D8B030D-6E8A-4147-A177-3AD203B41FA5}">
-                      <a16:colId xmlns:a16="http://schemas.microsoft.com/office/drawing/2014/main" val="20001"/>
-                    </a:ext>
-                  </a:extLst>
-                </a:gridCol>
-                <a:gridCol w="1645920">
-                  <a:extLst>
-                    <a:ext uri="{9D8B030D-6E8A-4147-A177-3AD203B41FA5}">
-                      <a16:colId xmlns:a16="http://schemas.microsoft.com/office/drawing/2014/main" val="20002"/>
-                    </a:ext>
-                  </a:extLst>
-                </a:gridCol>
-                <a:gridCol w="1645920">
-                  <a:extLst>
-                    <a:ext uri="{9D8B030D-6E8A-4147-A177-3AD203B41FA5}">
-                      <a16:colId xmlns:a16="http://schemas.microsoft.com/office/drawing/2014/main" val="20003"/>
-                    </a:ext>
-                  </a:extLst>
-                </a:gridCol>
-                <a:gridCol w="1645920">
-                  <a:extLst>
-                    <a:ext uri="{9D8B030D-6E8A-4147-A177-3AD203B41FA5}">
-                      <a16:colId xmlns:a16="http://schemas.microsoft.com/office/drawing/2014/main" val="20004"/>
-                    </a:ext>
-                  </a:extLst>
-                </a:gridCol>
-                <a:gridCol w="1645920">
-                  <a:extLst>
-                    <a:ext uri="{9D8B030D-6E8A-4147-A177-3AD203B41FA5}">
-                      <a16:colId xmlns:a16="http://schemas.microsoft.com/office/drawing/2014/main" val="20005"/>
-                    </a:ext>
-                  </a:extLst>
-                </a:gridCol>
-                <a:gridCol w="1645920">
-                  <a:extLst>
-                    <a:ext uri="{9D8B030D-6E8A-4147-A177-3AD203B41FA5}">
-                      <a16:colId xmlns:a16="http://schemas.microsoft.com/office/drawing/2014/main" val="20006"/>
-                    </a:ext>
-                  </a:extLst>
-                </a:gridCol>
+                <a:gridCol w="1645920"/>
+                <a:gridCol w="1645920"/>
+                <a:gridCol w="1645920"/>
+                <a:gridCol w="1645920"/>
+                <a:gridCol w="1645920"/>
+                <a:gridCol w="1645920"/>
+                <a:gridCol w="1645920"/>
               </a:tblGrid>
               <a:tr h="420624">
                 <a:tc>
@@ -11471,7 +10987,7 @@
                     <a:p>
                       <a:pPr algn="ctr"/>
                       <a:r>
-                        <a:rPr sz="1000" b="1">
+                        <a:rPr b="1" sz="1000">
                           <a:solidFill>
                             <a:srgbClr val="FFFFFF"/>
                           </a:solidFill>
@@ -11493,7 +11009,7 @@
                     <a:p>
                       <a:pPr algn="ctr"/>
                       <a:r>
-                        <a:rPr sz="1000" b="1">
+                        <a:rPr b="1" sz="1000">
                           <a:solidFill>
                             <a:srgbClr val="FFFFFF"/>
                           </a:solidFill>
@@ -11520,7 +11036,7 @@
                     <a:p>
                       <a:pPr algn="ctr"/>
                       <a:r>
-                        <a:rPr sz="1000" b="1">
+                        <a:rPr b="1" sz="1000">
                           <a:solidFill>
                             <a:srgbClr val="FFFFFF"/>
                           </a:solidFill>
@@ -11547,7 +11063,7 @@
                     <a:p>
                       <a:pPr algn="ctr"/>
                       <a:r>
-                        <a:rPr sz="1000" b="1">
+                        <a:rPr b="1" sz="1000">
                           <a:solidFill>
                             <a:srgbClr val="FFFFFF"/>
                           </a:solidFill>
@@ -11574,7 +11090,7 @@
                     <a:p>
                       <a:pPr algn="ctr"/>
                       <a:r>
-                        <a:rPr sz="1000" b="1">
+                        <a:rPr b="1" sz="1000">
                           <a:solidFill>
                             <a:srgbClr val="FFFFFF"/>
                           </a:solidFill>
@@ -11601,7 +11117,7 @@
                     <a:p>
                       <a:pPr algn="ctr"/>
                       <a:r>
-                        <a:rPr sz="1000" b="1">
+                        <a:rPr b="1" sz="1000">
                           <a:solidFill>
                             <a:srgbClr val="FFFFFF"/>
                           </a:solidFill>
@@ -11623,7 +11139,7 @@
                     <a:p>
                       <a:pPr algn="ctr"/>
                       <a:r>
-                        <a:rPr sz="1000" b="1">
+                        <a:rPr b="1" sz="1000">
                           <a:solidFill>
                             <a:srgbClr val="FFFFFF"/>
                           </a:solidFill>
@@ -11638,11 +11154,6 @@
                     </a:solidFill>
                   </a:tcPr>
                 </a:tc>
-                <a:extLst>
-                  <a:ext uri="{0D108BD9-81ED-4DB2-BD59-A6C34878D82A}">
-                    <a16:rowId xmlns:a16="http://schemas.microsoft.com/office/drawing/2014/main" val="10000"/>
-                  </a:ext>
-                </a:extLst>
               </a:tr>
               <a:tr h="420624">
                 <a:tc>
@@ -11799,11 +11310,6 @@
                     </a:solidFill>
                   </a:tcPr>
                 </a:tc>
-                <a:extLst>
-                  <a:ext uri="{0D108BD9-81ED-4DB2-BD59-A6C34878D82A}">
-                    <a16:rowId xmlns:a16="http://schemas.microsoft.com/office/drawing/2014/main" val="10001"/>
-                  </a:ext>
-                </a:extLst>
               </a:tr>
               <a:tr h="420624">
                 <a:tc>
@@ -11960,11 +11466,6 @@
                     </a:solidFill>
                   </a:tcPr>
                 </a:tc>
-                <a:extLst>
-                  <a:ext uri="{0D108BD9-81ED-4DB2-BD59-A6C34878D82A}">
-                    <a16:rowId xmlns:a16="http://schemas.microsoft.com/office/drawing/2014/main" val="10002"/>
-                  </a:ext>
-                </a:extLst>
               </a:tr>
               <a:tr h="420624">
                 <a:tc>
@@ -12121,11 +11622,6 @@
                     </a:solidFill>
                   </a:tcPr>
                 </a:tc>
-                <a:extLst>
-                  <a:ext uri="{0D108BD9-81ED-4DB2-BD59-A6C34878D82A}">
-                    <a16:rowId xmlns:a16="http://schemas.microsoft.com/office/drawing/2014/main" val="10003"/>
-                  </a:ext>
-                </a:extLst>
               </a:tr>
               <a:tr h="420624">
                 <a:tc>
@@ -12282,11 +11778,6 @@
                     </a:solidFill>
                   </a:tcPr>
                 </a:tc>
-                <a:extLst>
-                  <a:ext uri="{0D108BD9-81ED-4DB2-BD59-A6C34878D82A}">
-                    <a16:rowId xmlns:a16="http://schemas.microsoft.com/office/drawing/2014/main" val="10004"/>
-                  </a:ext>
-                </a:extLst>
               </a:tr>
             </a:tbl>
           </a:graphicData>
@@ -12316,124 +11807,12 @@
           <a:p>
             <a:pPr algn="l"/>
             <a:r>
-              <a:rPr sz="1300" b="1" i="0" dirty="0">
+              <a:rPr sz="1300" b="1" i="0">
                 <a:solidFill>
                   <a:srgbClr val="2E75B6"/>
                 </a:solidFill>
               </a:rPr>
-              <a:t>AEC </a:t>
-            </a:r>
-            <a:r>
-              <a:rPr sz="1300" b="1" i="0" dirty="0" err="1">
-                <a:solidFill>
-                  <a:srgbClr val="2E75B6"/>
-                </a:solidFill>
-              </a:rPr>
-              <a:t>특징</a:t>
-            </a:r>
-            <a:r>
-              <a:rPr sz="1300" b="1" i="0" dirty="0">
-                <a:solidFill>
-                  <a:srgbClr val="2E75B6"/>
-                </a:solidFill>
-              </a:rPr>
-              <a:t> </a:t>
-            </a:r>
-            <a:r>
-              <a:rPr sz="1300" b="1" i="0" dirty="0" err="1">
-                <a:solidFill>
-                  <a:srgbClr val="2E75B6"/>
-                </a:solidFill>
-              </a:rPr>
-              <a:t>추가</a:t>
-            </a:r>
-            <a:r>
-              <a:rPr sz="1300" b="1" i="0" dirty="0">
-                <a:solidFill>
-                  <a:srgbClr val="2E75B6"/>
-                </a:solidFill>
-              </a:rPr>
-              <a:t>(Case1→2)로 R² +8.5%p </a:t>
-            </a:r>
-            <a:r>
-              <a:rPr sz="1300" b="1" i="0" dirty="0" err="1">
-                <a:solidFill>
-                  <a:srgbClr val="2E75B6"/>
-                </a:solidFill>
-              </a:rPr>
-              <a:t>향상</a:t>
-            </a:r>
-            <a:r>
-              <a:rPr sz="1300" b="1" i="0" dirty="0">
-                <a:solidFill>
-                  <a:srgbClr val="2E75B6"/>
-                </a:solidFill>
-              </a:rPr>
-              <a:t>  |  CT </a:t>
-            </a:r>
-            <a:r>
-              <a:rPr sz="1300" b="1" i="0" dirty="0" err="1">
-                <a:solidFill>
-                  <a:srgbClr val="2E75B6"/>
-                </a:solidFill>
-              </a:rPr>
-              <a:t>모델명</a:t>
-            </a:r>
-            <a:r>
-              <a:rPr sz="1300" b="1" i="0" dirty="0">
-                <a:solidFill>
-                  <a:srgbClr val="2E75B6"/>
-                </a:solidFill>
-              </a:rPr>
-              <a:t>/</a:t>
-            </a:r>
-            <a:r>
-              <a:rPr sz="1300" b="1" i="0" dirty="0" err="1">
-                <a:solidFill>
-                  <a:srgbClr val="2E75B6"/>
-                </a:solidFill>
-              </a:rPr>
-              <a:t>kVp</a:t>
-            </a:r>
-            <a:r>
-              <a:rPr sz="1300" b="1" i="0" dirty="0">
-                <a:solidFill>
-                  <a:srgbClr val="2E75B6"/>
-                </a:solidFill>
-              </a:rPr>
-              <a:t> </a:t>
-            </a:r>
-            <a:r>
-              <a:rPr sz="1300" b="1" i="0" dirty="0" err="1">
-                <a:solidFill>
-                  <a:srgbClr val="2E75B6"/>
-                </a:solidFill>
-              </a:rPr>
-              <a:t>추가</a:t>
-            </a:r>
-            <a:r>
-              <a:rPr sz="1300" b="1" i="0" dirty="0">
-                <a:solidFill>
-                  <a:srgbClr val="2E75B6"/>
-                </a:solidFill>
-              </a:rPr>
-              <a:t>(Case2→3)로 </a:t>
-            </a:r>
-            <a:r>
-              <a:rPr sz="1300" b="1" i="0" dirty="0" err="1">
-                <a:solidFill>
-                  <a:srgbClr val="2E75B6"/>
-                </a:solidFill>
-              </a:rPr>
-              <a:t>추가</a:t>
-            </a:r>
-            <a:r>
-              <a:rPr sz="1300" b="1" i="0" dirty="0">
-                <a:solidFill>
-                  <a:srgbClr val="2E75B6"/>
-                </a:solidFill>
-              </a:rPr>
-              <a:t> +2.4%p</a:t>
+              <a:t>AEC 특징 추가(Case1→2)로 R² +15.4% 향상  |  CT 모델명/kVp 추가(Case2→3)로 추가 +3.8% 향상</a:t>
             </a:r>
           </a:p>
         </p:txBody>
@@ -12563,7 +11942,7 @@
 </file>
 
 <file path=ppt/slides/slide17.xml><?xml version="1.0" encoding="utf-8"?>
-<p:sld xmlns:a="http://schemas.openxmlformats.org/drawingml/2006/main" xmlns:r="http://schemas.openxmlformats.org/officeDocument/2006/relationships" xmlns:p="http://schemas.openxmlformats.org/presentationml/2006/main">
+<p:sld xmlns:a="http://schemas.openxmlformats.org/drawingml/2006/main" xmlns:p="http://schemas.openxmlformats.org/presentationml/2006/main" xmlns:r="http://schemas.openxmlformats.org/officeDocument/2006/relationships">
   <p:cSld>
     <p:spTree>
       <p:nvGrpSpPr>
@@ -12571,14 +11950,7 @@
         <p:cNvGrpSpPr/>
         <p:nvPr/>
       </p:nvGrpSpPr>
-      <p:grpSpPr>
-        <a:xfrm>
-          <a:off x="0" y="0"/>
-          <a:ext cx="0" cy="0"/>
-          <a:chOff x="0" y="0"/>
-          <a:chExt cx="0" cy="0"/>
-        </a:xfrm>
-      </p:grpSpPr>
+      <p:grpSpPr/>
       <p:sp>
         <p:nvSpPr>
           <p:cNvPr id="2" name="Rectangle 1"/>
@@ -12619,7 +11991,6 @@
           <a:lstStyle/>
           <a:p>
             <a:pPr algn="ctr"/>
-            <a:endParaRPr/>
           </a:p>
         </p:txBody>
       </p:sp>
@@ -12663,7 +12034,6 @@
           <a:lstStyle/>
           <a:p>
             <a:pPr algn="ctr"/>
-            <a:endParaRPr/>
           </a:p>
         </p:txBody>
       </p:sp>
@@ -12745,7 +12115,7 @@
         </p:nvGraphicFramePr>
         <p:xfrm>
           <a:off x="320040" y="1143000"/>
-          <a:ext cx="11521440" cy="2200656"/>
+          <a:ext cx="11521440" cy="2103120"/>
         </p:xfrm>
         <a:graphic>
           <a:graphicData uri="http://schemas.openxmlformats.org/drawingml/2006/table">
@@ -12754,55 +12124,13 @@
                 <a:tableStyleId>{5C22544A-7EE6-4342-B048-85BDC9FD1C3A}</a:tableStyleId>
               </a:tblPr>
               <a:tblGrid>
-                <a:gridCol w="1645920">
-                  <a:extLst>
-                    <a:ext uri="{9D8B030D-6E8A-4147-A177-3AD203B41FA5}">
-                      <a16:colId xmlns:a16="http://schemas.microsoft.com/office/drawing/2014/main" val="20000"/>
-                    </a:ext>
-                  </a:extLst>
-                </a:gridCol>
-                <a:gridCol w="1645920">
-                  <a:extLst>
-                    <a:ext uri="{9D8B030D-6E8A-4147-A177-3AD203B41FA5}">
-                      <a16:colId xmlns:a16="http://schemas.microsoft.com/office/drawing/2014/main" val="20001"/>
-                    </a:ext>
-                  </a:extLst>
-                </a:gridCol>
-                <a:gridCol w="1645920">
-                  <a:extLst>
-                    <a:ext uri="{9D8B030D-6E8A-4147-A177-3AD203B41FA5}">
-                      <a16:colId xmlns:a16="http://schemas.microsoft.com/office/drawing/2014/main" val="20002"/>
-                    </a:ext>
-                  </a:extLst>
-                </a:gridCol>
-                <a:gridCol w="1645920">
-                  <a:extLst>
-                    <a:ext uri="{9D8B030D-6E8A-4147-A177-3AD203B41FA5}">
-                      <a16:colId xmlns:a16="http://schemas.microsoft.com/office/drawing/2014/main" val="20003"/>
-                    </a:ext>
-                  </a:extLst>
-                </a:gridCol>
-                <a:gridCol w="1645920">
-                  <a:extLst>
-                    <a:ext uri="{9D8B030D-6E8A-4147-A177-3AD203B41FA5}">
-                      <a16:colId xmlns:a16="http://schemas.microsoft.com/office/drawing/2014/main" val="20004"/>
-                    </a:ext>
-                  </a:extLst>
-                </a:gridCol>
-                <a:gridCol w="1645920">
-                  <a:extLst>
-                    <a:ext uri="{9D8B030D-6E8A-4147-A177-3AD203B41FA5}">
-                      <a16:colId xmlns:a16="http://schemas.microsoft.com/office/drawing/2014/main" val="20005"/>
-                    </a:ext>
-                  </a:extLst>
-                </a:gridCol>
-                <a:gridCol w="1645920">
-                  <a:extLst>
-                    <a:ext uri="{9D8B030D-6E8A-4147-A177-3AD203B41FA5}">
-                      <a16:colId xmlns:a16="http://schemas.microsoft.com/office/drawing/2014/main" val="20006"/>
-                    </a:ext>
-                  </a:extLst>
-                </a:gridCol>
+                <a:gridCol w="1645920"/>
+                <a:gridCol w="1645920"/>
+                <a:gridCol w="1645920"/>
+                <a:gridCol w="1645920"/>
+                <a:gridCol w="1645920"/>
+                <a:gridCol w="1645920"/>
+                <a:gridCol w="1645920"/>
               </a:tblGrid>
               <a:tr h="420624">
                 <a:tc>
@@ -12812,7 +12140,7 @@
                     <a:p>
                       <a:pPr algn="ctr"/>
                       <a:r>
-                        <a:rPr sz="1000" b="1">
+                        <a:rPr b="1" sz="1000">
                           <a:solidFill>
                             <a:srgbClr val="FFFFFF"/>
                           </a:solidFill>
@@ -12834,7 +12162,7 @@
                     <a:p>
                       <a:pPr algn="ctr"/>
                       <a:r>
-                        <a:rPr sz="1000" b="1">
+                        <a:rPr b="1" sz="1000">
                           <a:solidFill>
                             <a:srgbClr val="FFFFFF"/>
                           </a:solidFill>
@@ -12861,7 +12189,7 @@
                     <a:p>
                       <a:pPr algn="ctr"/>
                       <a:r>
-                        <a:rPr sz="1000" b="1">
+                        <a:rPr b="1" sz="1000">
                           <a:solidFill>
                             <a:srgbClr val="FFFFFF"/>
                           </a:solidFill>
@@ -12888,7 +12216,7 @@
                     <a:p>
                       <a:pPr algn="ctr"/>
                       <a:r>
-                        <a:rPr sz="1000" b="1">
+                        <a:rPr b="1" sz="1000">
                           <a:solidFill>
                             <a:srgbClr val="FFFFFF"/>
                           </a:solidFill>
@@ -12915,7 +12243,7 @@
                     <a:p>
                       <a:pPr algn="ctr"/>
                       <a:r>
-                        <a:rPr sz="1000" b="1">
+                        <a:rPr b="1" sz="1000">
                           <a:solidFill>
                             <a:srgbClr val="FFFFFF"/>
                           </a:solidFill>
@@ -12942,7 +12270,7 @@
                     <a:p>
                       <a:pPr algn="ctr"/>
                       <a:r>
-                        <a:rPr sz="1000" b="1">
+                        <a:rPr b="1" sz="1000">
                           <a:solidFill>
                             <a:srgbClr val="FFFFFF"/>
                           </a:solidFill>
@@ -12964,7 +12292,7 @@
                     <a:p>
                       <a:pPr algn="ctr"/>
                       <a:r>
-                        <a:rPr sz="1000" b="1">
+                        <a:rPr b="1" sz="1000">
                           <a:solidFill>
                             <a:srgbClr val="FFFFFF"/>
                           </a:solidFill>
@@ -12979,11 +12307,6 @@
                     </a:solidFill>
                   </a:tcPr>
                 </a:tc>
-                <a:extLst>
-                  <a:ext uri="{0D108BD9-81ED-4DB2-BD59-A6C34878D82A}">
-                    <a16:rowId xmlns:a16="http://schemas.microsoft.com/office/drawing/2014/main" val="10000"/>
-                  </a:ext>
-                </a:extLst>
               </a:tr>
               <a:tr h="420624">
                 <a:tc>
@@ -13140,11 +12463,6 @@
                     </a:solidFill>
                   </a:tcPr>
                 </a:tc>
-                <a:extLst>
-                  <a:ext uri="{0D108BD9-81ED-4DB2-BD59-A6C34878D82A}">
-                    <a16:rowId xmlns:a16="http://schemas.microsoft.com/office/drawing/2014/main" val="10001"/>
-                  </a:ext>
-                </a:extLst>
               </a:tr>
               <a:tr h="420624">
                 <a:tc>
@@ -13301,11 +12619,6 @@
                     </a:solidFill>
                   </a:tcPr>
                 </a:tc>
-                <a:extLst>
-                  <a:ext uri="{0D108BD9-81ED-4DB2-BD59-A6C34878D82A}">
-                    <a16:rowId xmlns:a16="http://schemas.microsoft.com/office/drawing/2014/main" val="10002"/>
-                  </a:ext>
-                </a:extLst>
               </a:tr>
               <a:tr h="420624">
                 <a:tc>
@@ -13462,11 +12775,6 @@
                     </a:solidFill>
                   </a:tcPr>
                 </a:tc>
-                <a:extLst>
-                  <a:ext uri="{0D108BD9-81ED-4DB2-BD59-A6C34878D82A}">
-                    <a16:rowId xmlns:a16="http://schemas.microsoft.com/office/drawing/2014/main" val="10003"/>
-                  </a:ext>
-                </a:extLst>
               </a:tr>
               <a:tr h="420624">
                 <a:tc>
@@ -13623,11 +12931,6 @@
                     </a:solidFill>
                   </a:tcPr>
                 </a:tc>
-                <a:extLst>
-                  <a:ext uri="{0D108BD9-81ED-4DB2-BD59-A6C34878D82A}">
-                    <a16:rowId xmlns:a16="http://schemas.microsoft.com/office/drawing/2014/main" val="10004"/>
-                  </a:ext>
-                </a:extLst>
               </a:tr>
             </a:tbl>
           </a:graphicData>
@@ -13657,122 +12960,13 @@
           <a:p>
             <a:pPr algn="l"/>
             <a:r>
-              <a:rPr sz="1300" b="1" i="0" dirty="0">
+              <a:rPr sz="1300" b="1" i="0">
                 <a:solidFill>
                   <a:srgbClr val="2E75B6"/>
                 </a:solidFill>
               </a:rPr>
-              <a:t>AEC </a:t>
-            </a:r>
-            <a:r>
-              <a:rPr sz="1300" b="1" i="0" dirty="0" err="1">
-                <a:solidFill>
-                  <a:srgbClr val="2E75B6"/>
-                </a:solidFill>
-              </a:rPr>
-              <a:t>추가</a:t>
-            </a:r>
-            <a:r>
-              <a:rPr sz="1300" b="1" i="0" dirty="0">
-                <a:solidFill>
-                  <a:srgbClr val="2E75B6"/>
-                </a:solidFill>
-              </a:rPr>
-              <a:t>(Case1→2)로 AUC +9.5%p </a:t>
-            </a:r>
-            <a:r>
-              <a:rPr sz="1300" b="1" i="0" dirty="0" err="1">
-                <a:solidFill>
-                  <a:srgbClr val="2E75B6"/>
-                </a:solidFill>
-              </a:rPr>
-              <a:t>향상</a:t>
-            </a:r>
-            <a:r>
-              <a:rPr sz="1300" b="1" i="0" dirty="0">
-                <a:solidFill>
-                  <a:srgbClr val="2E75B6"/>
-                </a:solidFill>
-              </a:rPr>
-              <a:t>  |  CT </a:t>
-            </a:r>
-            <a:r>
-              <a:rPr sz="1300" b="1" i="0" dirty="0" err="1">
-                <a:solidFill>
-                  <a:srgbClr val="2E75B6"/>
-                </a:solidFill>
-              </a:rPr>
-              <a:t>모델명</a:t>
-            </a:r>
-            <a:r>
-              <a:rPr sz="1300" b="1" i="0" dirty="0">
-                <a:solidFill>
-                  <a:srgbClr val="2E75B6"/>
-                </a:solidFill>
-              </a:rPr>
-              <a:t>/</a:t>
-            </a:r>
-            <a:r>
-              <a:rPr sz="1300" b="1" i="0" dirty="0" err="1">
-                <a:solidFill>
-                  <a:srgbClr val="2E75B6"/>
-                </a:solidFill>
-              </a:rPr>
-              <a:t>kVp</a:t>
-            </a:r>
-            <a:r>
-              <a:rPr sz="1300" b="1" i="0" dirty="0">
-                <a:solidFill>
-                  <a:srgbClr val="2E75B6"/>
-                </a:solidFill>
-              </a:rPr>
-              <a:t> </a:t>
-            </a:r>
-            <a:r>
-              <a:rPr sz="1300" b="1" i="0" dirty="0" err="1">
-                <a:solidFill>
-                  <a:srgbClr val="2E75B6"/>
-                </a:solidFill>
-              </a:rPr>
-              <a:t>추가</a:t>
-            </a:r>
-            <a:r>
-              <a:rPr sz="1300" b="1" i="0" dirty="0">
-                <a:solidFill>
-                  <a:srgbClr val="2E75B6"/>
-                </a:solidFill>
-              </a:rPr>
-              <a:t>(Case2→3)로 +3.5%p </a:t>
-            </a:r>
-            <a:r>
-              <a:rPr sz="1300" b="1" i="0" dirty="0" err="1">
-                <a:solidFill>
-                  <a:srgbClr val="2E75B6"/>
-                </a:solidFill>
-              </a:rPr>
-              <a:t>추가</a:t>
-            </a:r>
-            <a:r>
-              <a:rPr sz="1300" b="1" i="0" dirty="0">
-                <a:solidFill>
-                  <a:srgbClr val="2E75B6"/>
-                </a:solidFill>
-              </a:rPr>
-              <a:t> </a:t>
-            </a:r>
-            <a:r>
-              <a:rPr sz="1300" b="1" i="0" dirty="0" err="1">
-                <a:solidFill>
-                  <a:srgbClr val="2E75B6"/>
-                </a:solidFill>
-              </a:rPr>
-              <a:t>개선</a:t>
-            </a:r>
-            <a:endParaRPr sz="1300" b="1" i="0" dirty="0">
-              <a:solidFill>
-                <a:srgbClr val="2E75B6"/>
-              </a:solidFill>
-            </a:endParaRPr>
+              <a:t>AEC 추가(Case1→2)로 AUC +15.2% 향상  |  CT 모델명/kVp 추가(Case2→3)로 +4.9% 추가 개선</a:t>
+            </a:r>
           </a:p>
         </p:txBody>
       </p:sp>
@@ -13901,7 +13095,7 @@
 </file>
 
 <file path=ppt/slides/slide18.xml><?xml version="1.0" encoding="utf-8"?>
-<p:sld xmlns:a="http://schemas.openxmlformats.org/drawingml/2006/main" xmlns:r="http://schemas.openxmlformats.org/officeDocument/2006/relationships" xmlns:p="http://schemas.openxmlformats.org/presentationml/2006/main">
+<p:sld xmlns:a="http://schemas.openxmlformats.org/drawingml/2006/main" xmlns:p="http://schemas.openxmlformats.org/presentationml/2006/main" xmlns:r="http://schemas.openxmlformats.org/officeDocument/2006/relationships">
   <p:cSld>
     <p:spTree>
       <p:nvGrpSpPr>
@@ -13909,14 +13103,7 @@
         <p:cNvGrpSpPr/>
         <p:nvPr/>
       </p:nvGrpSpPr>
-      <p:grpSpPr>
-        <a:xfrm>
-          <a:off x="0" y="0"/>
-          <a:ext cx="0" cy="0"/>
-          <a:chOff x="0" y="0"/>
-          <a:chExt cx="0" cy="0"/>
-        </a:xfrm>
-      </p:grpSpPr>
+      <p:grpSpPr/>
       <p:sp>
         <p:nvSpPr>
           <p:cNvPr id="2" name="Rectangle 1"/>
@@ -13957,7 +13144,6 @@
           <a:lstStyle/>
           <a:p>
             <a:pPr algn="ctr"/>
-            <a:endParaRPr/>
           </a:p>
         </p:txBody>
       </p:sp>
@@ -14001,7 +13187,6 @@
           <a:lstStyle/>
           <a:p>
             <a:pPr algn="ctr"/>
-            <a:endParaRPr/>
           </a:p>
         </p:txBody>
       </p:sp>
@@ -14147,7 +13332,6 @@
           <a:lstStyle/>
           <a:p>
             <a:pPr algn="ctr"/>
-            <a:endParaRPr/>
           </a:p>
         </p:txBody>
       </p:sp>
@@ -14294,7 +13478,6 @@
           <a:lstStyle/>
           <a:p>
             <a:pPr algn="ctr"/>
-            <a:endParaRPr/>
           </a:p>
         </p:txBody>
       </p:sp>
@@ -14441,7 +13624,6 @@
           <a:lstStyle/>
           <a:p>
             <a:pPr algn="ctr"/>
-            <a:endParaRPr/>
           </a:p>
         </p:txBody>
       </p:sp>
@@ -14588,7 +13770,6 @@
           <a:lstStyle/>
           <a:p>
             <a:pPr algn="ctr"/>
-            <a:endParaRPr/>
           </a:p>
         </p:txBody>
       </p:sp>
@@ -14705,7 +13886,7 @@
         </p:nvGraphicFramePr>
         <p:xfrm>
           <a:off x="320040" y="3200400"/>
-          <a:ext cx="11521440" cy="2200656"/>
+          <a:ext cx="11521440" cy="2103120"/>
         </p:xfrm>
         <a:graphic>
           <a:graphicData uri="http://schemas.openxmlformats.org/drawingml/2006/table">
@@ -14714,41 +13895,11 @@
                 <a:tableStyleId>{5C22544A-7EE6-4342-B048-85BDC9FD1C3A}</a:tableStyleId>
               </a:tblPr>
               <a:tblGrid>
-                <a:gridCol w="2304288">
-                  <a:extLst>
-                    <a:ext uri="{9D8B030D-6E8A-4147-A177-3AD203B41FA5}">
-                      <a16:colId xmlns:a16="http://schemas.microsoft.com/office/drawing/2014/main" val="20000"/>
-                    </a:ext>
-                  </a:extLst>
-                </a:gridCol>
-                <a:gridCol w="2304288">
-                  <a:extLst>
-                    <a:ext uri="{9D8B030D-6E8A-4147-A177-3AD203B41FA5}">
-                      <a16:colId xmlns:a16="http://schemas.microsoft.com/office/drawing/2014/main" val="20001"/>
-                    </a:ext>
-                  </a:extLst>
-                </a:gridCol>
-                <a:gridCol w="2304288">
-                  <a:extLst>
-                    <a:ext uri="{9D8B030D-6E8A-4147-A177-3AD203B41FA5}">
-                      <a16:colId xmlns:a16="http://schemas.microsoft.com/office/drawing/2014/main" val="20002"/>
-                    </a:ext>
-                  </a:extLst>
-                </a:gridCol>
-                <a:gridCol w="2304288">
-                  <a:extLst>
-                    <a:ext uri="{9D8B030D-6E8A-4147-A177-3AD203B41FA5}">
-                      <a16:colId xmlns:a16="http://schemas.microsoft.com/office/drawing/2014/main" val="20003"/>
-                    </a:ext>
-                  </a:extLst>
-                </a:gridCol>
-                <a:gridCol w="2304288">
-                  <a:extLst>
-                    <a:ext uri="{9D8B030D-6E8A-4147-A177-3AD203B41FA5}">
-                      <a16:colId xmlns:a16="http://schemas.microsoft.com/office/drawing/2014/main" val="20004"/>
-                    </a:ext>
-                  </a:extLst>
-                </a:gridCol>
+                <a:gridCol w="2304288"/>
+                <a:gridCol w="2304288"/>
+                <a:gridCol w="2304288"/>
+                <a:gridCol w="2304288"/>
+                <a:gridCol w="2304288"/>
               </a:tblGrid>
               <a:tr h="420624">
                 <a:tc>
@@ -14758,7 +13909,7 @@
                     <a:p>
                       <a:pPr algn="ctr"/>
                       <a:r>
-                        <a:rPr sz="1000" b="1">
+                        <a:rPr b="1" sz="1000">
                           <a:solidFill>
                             <a:srgbClr val="FFFFFF"/>
                           </a:solidFill>
@@ -14780,7 +13931,7 @@
                     <a:p>
                       <a:pPr algn="ctr"/>
                       <a:r>
-                        <a:rPr sz="1000" b="1">
+                        <a:rPr b="1" sz="1000">
                           <a:solidFill>
                             <a:srgbClr val="FFFFFF"/>
                           </a:solidFill>
@@ -14807,7 +13958,7 @@
                     <a:p>
                       <a:pPr algn="ctr"/>
                       <a:r>
-                        <a:rPr sz="1000" b="1">
+                        <a:rPr b="1" sz="1000">
                           <a:solidFill>
                             <a:srgbClr val="FFFFFF"/>
                           </a:solidFill>
@@ -14834,7 +13985,7 @@
                     <a:p>
                       <a:pPr algn="ctr"/>
                       <a:r>
-                        <a:rPr sz="1000" b="1">
+                        <a:rPr b="1" sz="1000">
                           <a:solidFill>
                             <a:srgbClr val="FFFFFF"/>
                           </a:solidFill>
@@ -14856,7 +14007,7 @@
                     <a:p>
                       <a:pPr algn="ctr"/>
                       <a:r>
-                        <a:rPr sz="1000" b="1">
+                        <a:rPr b="1" sz="1000">
                           <a:solidFill>
                             <a:srgbClr val="FFFFFF"/>
                           </a:solidFill>
@@ -14871,11 +14022,6 @@
                     </a:solidFill>
                   </a:tcPr>
                 </a:tc>
-                <a:extLst>
-                  <a:ext uri="{0D108BD9-81ED-4DB2-BD59-A6C34878D82A}">
-                    <a16:rowId xmlns:a16="http://schemas.microsoft.com/office/drawing/2014/main" val="10000"/>
-                  </a:ext>
-                </a:extLst>
               </a:tr>
               <a:tr h="420624">
                 <a:tc>
@@ -14988,11 +14134,6 @@
                     </a:solidFill>
                   </a:tcPr>
                 </a:tc>
-                <a:extLst>
-                  <a:ext uri="{0D108BD9-81ED-4DB2-BD59-A6C34878D82A}">
-                    <a16:rowId xmlns:a16="http://schemas.microsoft.com/office/drawing/2014/main" val="10001"/>
-                  </a:ext>
-                </a:extLst>
               </a:tr>
               <a:tr h="420624">
                 <a:tc>
@@ -15105,11 +14246,6 @@
                     </a:solidFill>
                   </a:tcPr>
                 </a:tc>
-                <a:extLst>
-                  <a:ext uri="{0D108BD9-81ED-4DB2-BD59-A6C34878D82A}">
-                    <a16:rowId xmlns:a16="http://schemas.microsoft.com/office/drawing/2014/main" val="10002"/>
-                  </a:ext>
-                </a:extLst>
               </a:tr>
               <a:tr h="420624">
                 <a:tc>
@@ -15222,11 +14358,6 @@
                     </a:solidFill>
                   </a:tcPr>
                 </a:tc>
-                <a:extLst>
-                  <a:ext uri="{0D108BD9-81ED-4DB2-BD59-A6C34878D82A}">
-                    <a16:rowId xmlns:a16="http://schemas.microsoft.com/office/drawing/2014/main" val="10003"/>
-                  </a:ext>
-                </a:extLst>
               </a:tr>
               <a:tr h="420624">
                 <a:tc>
@@ -15339,11 +14470,6 @@
                     </a:solidFill>
                   </a:tcPr>
                 </a:tc>
-                <a:extLst>
-                  <a:ext uri="{0D108BD9-81ED-4DB2-BD59-A6C34878D82A}">
-                    <a16:rowId xmlns:a16="http://schemas.microsoft.com/office/drawing/2014/main" val="10004"/>
-                  </a:ext>
-                </a:extLst>
               </a:tr>
             </a:tbl>
           </a:graphicData>
@@ -15389,7 +14515,6 @@
           <a:lstStyle/>
           <a:p>
             <a:pPr algn="ctr"/>
-            <a:endParaRPr/>
           </a:p>
         </p:txBody>
       </p:sp>
@@ -15436,7 +14561,7 @@
 </file>
 
 <file path=ppt/slides/slide19.xml><?xml version="1.0" encoding="utf-8"?>
-<p:sld xmlns:a="http://schemas.openxmlformats.org/drawingml/2006/main" xmlns:r="http://schemas.openxmlformats.org/officeDocument/2006/relationships" xmlns:p="http://schemas.openxmlformats.org/presentationml/2006/main">
+<p:sld xmlns:a="http://schemas.openxmlformats.org/drawingml/2006/main" xmlns:p="http://schemas.openxmlformats.org/presentationml/2006/main" xmlns:r="http://schemas.openxmlformats.org/officeDocument/2006/relationships">
   <p:cSld>
     <p:spTree>
       <p:nvGrpSpPr>
@@ -15444,14 +14569,7 @@
         <p:cNvGrpSpPr/>
         <p:nvPr/>
       </p:nvGrpSpPr>
-      <p:grpSpPr>
-        <a:xfrm>
-          <a:off x="0" y="0"/>
-          <a:ext cx="0" cy="0"/>
-          <a:chOff x="0" y="0"/>
-          <a:chExt cx="0" cy="0"/>
-        </a:xfrm>
-      </p:grpSpPr>
+      <p:grpSpPr/>
       <p:sp>
         <p:nvSpPr>
           <p:cNvPr id="2" name="Rectangle 1"/>
@@ -15492,7 +14610,6 @@
           <a:lstStyle/>
           <a:p>
             <a:pPr algn="ctr"/>
-            <a:endParaRPr/>
           </a:p>
         </p:txBody>
       </p:sp>
@@ -15536,7 +14653,6 @@
           <a:lstStyle/>
           <a:p>
             <a:pPr algn="ctr"/>
-            <a:endParaRPr/>
           </a:p>
         </p:txBody>
       </p:sp>
@@ -15661,20 +14777,8 @@
                 <a:tableStyleId>{5C22544A-7EE6-4342-B048-85BDC9FD1C3A}</a:tableStyleId>
               </a:tblPr>
               <a:tblGrid>
-                <a:gridCol w="2880360">
-                  <a:extLst>
-                    <a:ext uri="{9D8B030D-6E8A-4147-A177-3AD203B41FA5}">
-                      <a16:colId xmlns:a16="http://schemas.microsoft.com/office/drawing/2014/main" val="20000"/>
-                    </a:ext>
-                  </a:extLst>
-                </a:gridCol>
-                <a:gridCol w="2880360">
-                  <a:extLst>
-                    <a:ext uri="{9D8B030D-6E8A-4147-A177-3AD203B41FA5}">
-                      <a16:colId xmlns:a16="http://schemas.microsoft.com/office/drawing/2014/main" val="20001"/>
-                    </a:ext>
-                  </a:extLst>
-                </a:gridCol>
+                <a:gridCol w="2880360"/>
+                <a:gridCol w="2880360"/>
               </a:tblGrid>
               <a:tr h="431074">
                 <a:tc>
@@ -15684,7 +14788,7 @@
                     <a:p>
                       <a:pPr algn="ctr"/>
                       <a:r>
-                        <a:rPr sz="1000" b="1">
+                        <a:rPr b="1" sz="1000">
                           <a:solidFill>
                             <a:srgbClr val="FFFFFF"/>
                           </a:solidFill>
@@ -15706,7 +14810,7 @@
                     <a:p>
                       <a:pPr algn="ctr"/>
                       <a:r>
-                        <a:rPr sz="1000" b="1">
+                        <a:rPr b="1" sz="1000">
                           <a:solidFill>
                             <a:srgbClr val="FFFFFF"/>
                           </a:solidFill>
@@ -15721,11 +14825,6 @@
                     </a:solidFill>
                   </a:tcPr>
                 </a:tc>
-                <a:extLst>
-                  <a:ext uri="{0D108BD9-81ED-4DB2-BD59-A6C34878D82A}">
-                    <a16:rowId xmlns:a16="http://schemas.microsoft.com/office/drawing/2014/main" val="10000"/>
-                  </a:ext>
-                </a:extLst>
               </a:tr>
               <a:tr h="431074">
                 <a:tc>
@@ -15772,11 +14871,6 @@
                     </a:solidFill>
                   </a:tcPr>
                 </a:tc>
-                <a:extLst>
-                  <a:ext uri="{0D108BD9-81ED-4DB2-BD59-A6C34878D82A}">
-                    <a16:rowId xmlns:a16="http://schemas.microsoft.com/office/drawing/2014/main" val="10001"/>
-                  </a:ext>
-                </a:extLst>
               </a:tr>
               <a:tr h="431074">
                 <a:tc>
@@ -15823,11 +14917,6 @@
                     </a:solidFill>
                   </a:tcPr>
                 </a:tc>
-                <a:extLst>
-                  <a:ext uri="{0D108BD9-81ED-4DB2-BD59-A6C34878D82A}">
-                    <a16:rowId xmlns:a16="http://schemas.microsoft.com/office/drawing/2014/main" val="10002"/>
-                  </a:ext>
-                </a:extLst>
               </a:tr>
               <a:tr h="431074">
                 <a:tc>
@@ -15874,11 +14963,6 @@
                     </a:solidFill>
                   </a:tcPr>
                 </a:tc>
-                <a:extLst>
-                  <a:ext uri="{0D108BD9-81ED-4DB2-BD59-A6C34878D82A}">
-                    <a16:rowId xmlns:a16="http://schemas.microsoft.com/office/drawing/2014/main" val="10003"/>
-                  </a:ext>
-                </a:extLst>
               </a:tr>
               <a:tr h="431074">
                 <a:tc>
@@ -15925,11 +15009,6 @@
                     </a:solidFill>
                   </a:tcPr>
                 </a:tc>
-                <a:extLst>
-                  <a:ext uri="{0D108BD9-81ED-4DB2-BD59-A6C34878D82A}">
-                    <a16:rowId xmlns:a16="http://schemas.microsoft.com/office/drawing/2014/main" val="10004"/>
-                  </a:ext>
-                </a:extLst>
               </a:tr>
               <a:tr h="431074">
                 <a:tc>
@@ -15976,11 +15055,6 @@
                     </a:solidFill>
                   </a:tcPr>
                 </a:tc>
-                <a:extLst>
-                  <a:ext uri="{0D108BD9-81ED-4DB2-BD59-A6C34878D82A}">
-                    <a16:rowId xmlns:a16="http://schemas.microsoft.com/office/drawing/2014/main" val="10005"/>
-                  </a:ext>
-                </a:extLst>
               </a:tr>
               <a:tr h="431076">
                 <a:tc>
@@ -16027,11 +15101,6 @@
                     </a:solidFill>
                   </a:tcPr>
                 </a:tc>
-                <a:extLst>
-                  <a:ext uri="{0D108BD9-81ED-4DB2-BD59-A6C34878D82A}">
-                    <a16:rowId xmlns:a16="http://schemas.microsoft.com/office/drawing/2014/main" val="10006"/>
-                  </a:ext>
-                </a:extLst>
               </a:tr>
             </a:tbl>
           </a:graphicData>
@@ -16090,20 +15159,8 @@
                 <a:tableStyleId>{5C22544A-7EE6-4342-B048-85BDC9FD1C3A}</a:tableStyleId>
               </a:tblPr>
               <a:tblGrid>
-                <a:gridCol w="2825496">
-                  <a:extLst>
-                    <a:ext uri="{9D8B030D-6E8A-4147-A177-3AD203B41FA5}">
-                      <a16:colId xmlns:a16="http://schemas.microsoft.com/office/drawing/2014/main" val="20000"/>
-                    </a:ext>
-                  </a:extLst>
-                </a:gridCol>
-                <a:gridCol w="2825496">
-                  <a:extLst>
-                    <a:ext uri="{9D8B030D-6E8A-4147-A177-3AD203B41FA5}">
-                      <a16:colId xmlns:a16="http://schemas.microsoft.com/office/drawing/2014/main" val="20001"/>
-                    </a:ext>
-                  </a:extLst>
-                </a:gridCol>
+                <a:gridCol w="2825496"/>
+                <a:gridCol w="2825496"/>
               </a:tblGrid>
               <a:tr h="422910">
                 <a:tc>
@@ -16113,7 +15170,7 @@
                     <a:p>
                       <a:pPr algn="ctr"/>
                       <a:r>
-                        <a:rPr sz="1000" b="1">
+                        <a:rPr b="1" sz="1000">
                           <a:solidFill>
                             <a:srgbClr val="FFFFFF"/>
                           </a:solidFill>
@@ -16135,7 +15192,7 @@
                     <a:p>
                       <a:pPr algn="ctr"/>
                       <a:r>
-                        <a:rPr sz="1000" b="1">
+                        <a:rPr b="1" sz="1000">
                           <a:solidFill>
                             <a:srgbClr val="FFFFFF"/>
                           </a:solidFill>
@@ -16150,11 +15207,6 @@
                     </a:solidFill>
                   </a:tcPr>
                 </a:tc>
-                <a:extLst>
-                  <a:ext uri="{0D108BD9-81ED-4DB2-BD59-A6C34878D82A}">
-                    <a16:rowId xmlns:a16="http://schemas.microsoft.com/office/drawing/2014/main" val="10000"/>
-                  </a:ext>
-                </a:extLst>
               </a:tr>
               <a:tr h="422910">
                 <a:tc>
@@ -16201,11 +15253,6 @@
                     </a:solidFill>
                   </a:tcPr>
                 </a:tc>
-                <a:extLst>
-                  <a:ext uri="{0D108BD9-81ED-4DB2-BD59-A6C34878D82A}">
-                    <a16:rowId xmlns:a16="http://schemas.microsoft.com/office/drawing/2014/main" val="10001"/>
-                  </a:ext>
-                </a:extLst>
               </a:tr>
               <a:tr h="422910">
                 <a:tc>
@@ -16252,11 +15299,6 @@
                     </a:solidFill>
                   </a:tcPr>
                 </a:tc>
-                <a:extLst>
-                  <a:ext uri="{0D108BD9-81ED-4DB2-BD59-A6C34878D82A}">
-                    <a16:rowId xmlns:a16="http://schemas.microsoft.com/office/drawing/2014/main" val="10002"/>
-                  </a:ext>
-                </a:extLst>
               </a:tr>
               <a:tr h="422910">
                 <a:tc>
@@ -16303,11 +15345,6 @@
                     </a:solidFill>
                   </a:tcPr>
                 </a:tc>
-                <a:extLst>
-                  <a:ext uri="{0D108BD9-81ED-4DB2-BD59-A6C34878D82A}">
-                    <a16:rowId xmlns:a16="http://schemas.microsoft.com/office/drawing/2014/main" val="10003"/>
-                  </a:ext>
-                </a:extLst>
               </a:tr>
               <a:tr h="422910">
                 <a:tc>
@@ -16354,11 +15391,6 @@
                     </a:solidFill>
                   </a:tcPr>
                 </a:tc>
-                <a:extLst>
-                  <a:ext uri="{0D108BD9-81ED-4DB2-BD59-A6C34878D82A}">
-                    <a16:rowId xmlns:a16="http://schemas.microsoft.com/office/drawing/2014/main" val="10004"/>
-                  </a:ext>
-                </a:extLst>
               </a:tr>
               <a:tr h="422910">
                 <a:tc>
@@ -16405,11 +15437,6 @@
                     </a:solidFill>
                   </a:tcPr>
                 </a:tc>
-                <a:extLst>
-                  <a:ext uri="{0D108BD9-81ED-4DB2-BD59-A6C34878D82A}">
-                    <a16:rowId xmlns:a16="http://schemas.microsoft.com/office/drawing/2014/main" val="10005"/>
-                  </a:ext>
-                </a:extLst>
               </a:tr>
               <a:tr h="422910">
                 <a:tc>
@@ -16456,11 +15483,6 @@
                     </a:solidFill>
                   </a:tcPr>
                 </a:tc>
-                <a:extLst>
-                  <a:ext uri="{0D108BD9-81ED-4DB2-BD59-A6C34878D82A}">
-                    <a16:rowId xmlns:a16="http://schemas.microsoft.com/office/drawing/2014/main" val="10006"/>
-                  </a:ext>
-                </a:extLst>
               </a:tr>
               <a:tr h="422910">
                 <a:tc>
@@ -16507,11 +15529,6 @@
                     </a:solidFill>
                   </a:tcPr>
                 </a:tc>
-                <a:extLst>
-                  <a:ext uri="{0D108BD9-81ED-4DB2-BD59-A6C34878D82A}">
-                    <a16:rowId xmlns:a16="http://schemas.microsoft.com/office/drawing/2014/main" val="10007"/>
-                  </a:ext>
-                </a:extLst>
               </a:tr>
             </a:tbl>
           </a:graphicData>
@@ -16557,7 +15574,6 @@
           <a:lstStyle/>
           <a:p>
             <a:pPr algn="ctr"/>
-            <a:endParaRPr/>
           </a:p>
         </p:txBody>
       </p:sp>
@@ -16671,7 +15687,6 @@
           <a:lstStyle/>
           <a:p>
             <a:pPr algn="ctr"/>
-            <a:endParaRPr/>
           </a:p>
         </p:txBody>
       </p:sp>
@@ -16754,7 +15769,7 @@
 </file>
 
 <file path=ppt/slides/slide2.xml><?xml version="1.0" encoding="utf-8"?>
-<p:sld xmlns:a="http://schemas.openxmlformats.org/drawingml/2006/main" xmlns:r="http://schemas.openxmlformats.org/officeDocument/2006/relationships" xmlns:p="http://schemas.openxmlformats.org/presentationml/2006/main">
+<p:sld xmlns:a="http://schemas.openxmlformats.org/drawingml/2006/main" xmlns:p="http://schemas.openxmlformats.org/presentationml/2006/main" xmlns:r="http://schemas.openxmlformats.org/officeDocument/2006/relationships">
   <p:cSld>
     <p:spTree>
       <p:nvGrpSpPr>
@@ -16762,14 +15777,7 @@
         <p:cNvGrpSpPr/>
         <p:nvPr/>
       </p:nvGrpSpPr>
-      <p:grpSpPr>
-        <a:xfrm>
-          <a:off x="0" y="0"/>
-          <a:ext cx="0" cy="0"/>
-          <a:chOff x="0" y="0"/>
-          <a:chExt cx="0" cy="0"/>
-        </a:xfrm>
-      </p:grpSpPr>
+      <p:grpSpPr/>
       <p:sp>
         <p:nvSpPr>
           <p:cNvPr id="2" name="Rectangle 1"/>
@@ -16810,7 +15818,6 @@
           <a:lstStyle/>
           <a:p>
             <a:pPr algn="ctr"/>
-            <a:endParaRPr/>
           </a:p>
         </p:txBody>
       </p:sp>
@@ -16854,7 +15861,6 @@
           <a:lstStyle/>
           <a:p>
             <a:pPr algn="ctr"/>
-            <a:endParaRPr/>
           </a:p>
         </p:txBody>
       </p:sp>
@@ -16966,7 +15972,6 @@
           <a:lstStyle/>
           <a:p>
             <a:pPr algn="ctr"/>
-            <a:endParaRPr/>
           </a:p>
         </p:txBody>
       </p:sp>
@@ -17112,7 +16117,6 @@
           <a:lstStyle/>
           <a:p>
             <a:pPr algn="ctr"/>
-            <a:endParaRPr/>
           </a:p>
         </p:txBody>
       </p:sp>
@@ -17258,7 +16262,6 @@
           <a:lstStyle/>
           <a:p>
             <a:pPr algn="ctr"/>
-            <a:endParaRPr/>
           </a:p>
         </p:txBody>
       </p:sp>
@@ -17404,7 +16407,6 @@
           <a:lstStyle/>
           <a:p>
             <a:pPr algn="ctr"/>
-            <a:endParaRPr/>
           </a:p>
         </p:txBody>
       </p:sp>
@@ -17550,7 +16552,6 @@
           <a:lstStyle/>
           <a:p>
             <a:pPr algn="ctr"/>
-            <a:endParaRPr/>
           </a:p>
         </p:txBody>
       </p:sp>
@@ -17696,7 +16697,6 @@
           <a:lstStyle/>
           <a:p>
             <a:pPr algn="ctr"/>
-            <a:endParaRPr/>
           </a:p>
         </p:txBody>
       </p:sp>
@@ -17842,7 +16842,6 @@
           <a:lstStyle/>
           <a:p>
             <a:pPr algn="ctr"/>
-            <a:endParaRPr/>
           </a:p>
         </p:txBody>
       </p:sp>
@@ -17957,7 +16956,7 @@
 </file>
 
 <file path=ppt/slides/slide20.xml><?xml version="1.0" encoding="utf-8"?>
-<p:sld xmlns:a="http://schemas.openxmlformats.org/drawingml/2006/main" xmlns:r="http://schemas.openxmlformats.org/officeDocument/2006/relationships" xmlns:p="http://schemas.openxmlformats.org/presentationml/2006/main">
+<p:sld xmlns:a="http://schemas.openxmlformats.org/drawingml/2006/main" xmlns:p="http://schemas.openxmlformats.org/presentationml/2006/main" xmlns:r="http://schemas.openxmlformats.org/officeDocument/2006/relationships">
   <p:cSld>
     <p:spTree>
       <p:nvGrpSpPr>
@@ -17965,14 +16964,7 @@
         <p:cNvGrpSpPr/>
         <p:nvPr/>
       </p:nvGrpSpPr>
-      <p:grpSpPr>
-        <a:xfrm>
-          <a:off x="0" y="0"/>
-          <a:ext cx="0" cy="0"/>
-          <a:chOff x="0" y="0"/>
-          <a:chExt cx="0" cy="0"/>
-        </a:xfrm>
-      </p:grpSpPr>
+      <p:grpSpPr/>
       <p:sp>
         <p:nvSpPr>
           <p:cNvPr id="2" name="Rectangle 1"/>
@@ -18013,7 +17005,6 @@
           <a:lstStyle/>
           <a:p>
             <a:pPr algn="ctr"/>
-            <a:endParaRPr/>
           </a:p>
         </p:txBody>
       </p:sp>
@@ -18057,7 +17048,6 @@
           <a:lstStyle/>
           <a:p>
             <a:pPr algn="ctr"/>
-            <a:endParaRPr/>
           </a:p>
         </p:txBody>
       </p:sp>
@@ -18169,7 +17159,6 @@
           <a:lstStyle/>
           <a:p>
             <a:pPr algn="ctr"/>
-            <a:endParaRPr/>
           </a:p>
         </p:txBody>
       </p:sp>
@@ -18213,7 +17202,6 @@
           <a:lstStyle/>
           <a:p>
             <a:pPr algn="ctr"/>
-            <a:endParaRPr/>
           </a:p>
         </p:txBody>
       </p:sp>
@@ -18326,7 +17314,6 @@
           <a:lstStyle/>
           <a:p>
             <a:pPr algn="ctr"/>
-            <a:endParaRPr/>
           </a:p>
         </p:txBody>
       </p:sp>
@@ -18370,7 +17357,6 @@
           <a:lstStyle/>
           <a:p>
             <a:pPr algn="ctr"/>
-            <a:endParaRPr/>
           </a:p>
         </p:txBody>
       </p:sp>
@@ -18484,7 +17470,6 @@
           <a:lstStyle/>
           <a:p>
             <a:pPr algn="ctr"/>
-            <a:endParaRPr/>
           </a:p>
         </p:txBody>
       </p:sp>
@@ -18528,7 +17513,6 @@
           <a:lstStyle/>
           <a:p>
             <a:pPr algn="ctr"/>
-            <a:endParaRPr/>
           </a:p>
         </p:txBody>
       </p:sp>
@@ -18641,7 +17625,6 @@
           <a:lstStyle/>
           <a:p>
             <a:pPr algn="ctr"/>
-            <a:endParaRPr/>
           </a:p>
         </p:txBody>
       </p:sp>
@@ -18685,7 +17668,6 @@
           <a:lstStyle/>
           <a:p>
             <a:pPr algn="ctr"/>
-            <a:endParaRPr/>
           </a:p>
         </p:txBody>
       </p:sp>
@@ -18802,7 +17784,7 @@
 </file>
 
 <file path=ppt/slides/slide21.xml><?xml version="1.0" encoding="utf-8"?>
-<p:sld xmlns:a="http://schemas.openxmlformats.org/drawingml/2006/main" xmlns:r="http://schemas.openxmlformats.org/officeDocument/2006/relationships" xmlns:p="http://schemas.openxmlformats.org/presentationml/2006/main">
+<p:sld xmlns:a="http://schemas.openxmlformats.org/drawingml/2006/main" xmlns:p="http://schemas.openxmlformats.org/presentationml/2006/main" xmlns:r="http://schemas.openxmlformats.org/officeDocument/2006/relationships">
   <p:cSld>
     <p:spTree>
       <p:nvGrpSpPr>
@@ -18810,14 +17792,7 @@
         <p:cNvGrpSpPr/>
         <p:nvPr/>
       </p:nvGrpSpPr>
-      <p:grpSpPr>
-        <a:xfrm>
-          <a:off x="0" y="0"/>
-          <a:ext cx="0" cy="0"/>
-          <a:chOff x="0" y="0"/>
-          <a:chExt cx="0" cy="0"/>
-        </a:xfrm>
-      </p:grpSpPr>
+      <p:grpSpPr/>
       <p:sp>
         <p:nvSpPr>
           <p:cNvPr id="2" name="Rectangle 1"/>
@@ -18858,7 +17833,6 @@
           <a:lstStyle/>
           <a:p>
             <a:pPr algn="ctr"/>
-            <a:endParaRPr/>
           </a:p>
         </p:txBody>
       </p:sp>
@@ -18902,7 +17876,6 @@
           <a:lstStyle/>
           <a:p>
             <a:pPr algn="ctr"/>
-            <a:endParaRPr/>
           </a:p>
         </p:txBody>
       </p:sp>
@@ -19016,7 +17989,6 @@
           <a:lstStyle/>
           <a:p>
             <a:pPr algn="ctr"/>
-            <a:endParaRPr/>
           </a:p>
         </p:txBody>
       </p:sp>
@@ -19232,7 +18204,6 @@
           <a:lstStyle/>
           <a:p>
             <a:pPr algn="ctr"/>
-            <a:endParaRPr/>
           </a:p>
         </p:txBody>
       </p:sp>
@@ -19480,7 +18451,6 @@
           <a:lstStyle/>
           <a:p>
             <a:pPr algn="ctr"/>
-            <a:endParaRPr/>
           </a:p>
         </p:txBody>
       </p:sp>
@@ -19562,7 +18532,7 @@
 </file>
 
 <file path=ppt/slides/slide3.xml><?xml version="1.0" encoding="utf-8"?>
-<p:sld xmlns:a="http://schemas.openxmlformats.org/drawingml/2006/main" xmlns:r="http://schemas.openxmlformats.org/officeDocument/2006/relationships" xmlns:p="http://schemas.openxmlformats.org/presentationml/2006/main">
+<p:sld xmlns:a="http://schemas.openxmlformats.org/drawingml/2006/main" xmlns:p="http://schemas.openxmlformats.org/presentationml/2006/main" xmlns:r="http://schemas.openxmlformats.org/officeDocument/2006/relationships">
   <p:cSld>
     <p:spTree>
       <p:nvGrpSpPr>
@@ -19570,14 +18540,7 @@
         <p:cNvGrpSpPr/>
         <p:nvPr/>
       </p:nvGrpSpPr>
-      <p:grpSpPr>
-        <a:xfrm>
-          <a:off x="0" y="0"/>
-          <a:ext cx="0" cy="0"/>
-          <a:chOff x="0" y="0"/>
-          <a:chExt cx="0" cy="0"/>
-        </a:xfrm>
-      </p:grpSpPr>
+      <p:grpSpPr/>
       <p:sp>
         <p:nvSpPr>
           <p:cNvPr id="2" name="Rectangle 1"/>
@@ -19618,7 +18581,6 @@
           <a:lstStyle/>
           <a:p>
             <a:pPr algn="ctr"/>
-            <a:endParaRPr/>
           </a:p>
         </p:txBody>
       </p:sp>
@@ -19662,7 +18624,6 @@
           <a:lstStyle/>
           <a:p>
             <a:pPr algn="ctr"/>
-            <a:endParaRPr/>
           </a:p>
         </p:txBody>
       </p:sp>
@@ -19774,7 +18735,6 @@
           <a:lstStyle/>
           <a:p>
             <a:pPr algn="ctr"/>
-            <a:endParaRPr/>
           </a:p>
         </p:txBody>
       </p:sp>
@@ -19888,7 +18848,6 @@
           <a:lstStyle/>
           <a:p>
             <a:pPr algn="ctr"/>
-            <a:endParaRPr/>
           </a:p>
         </p:txBody>
       </p:sp>
@@ -20037,7 +18996,6 @@
           <a:lstStyle/>
           <a:p>
             <a:pPr algn="ctr"/>
-            <a:endParaRPr/>
           </a:p>
         </p:txBody>
       </p:sp>
@@ -20186,7 +19144,6 @@
           <a:lstStyle/>
           <a:p>
             <a:pPr algn="ctr"/>
-            <a:endParaRPr/>
           </a:p>
         </p:txBody>
       </p:sp>
@@ -20367,13 +19324,7 @@
           <p:cNvGraphicFramePr>
             <a:graphicFrameLocks noGrp="1"/>
           </p:cNvGraphicFramePr>
-          <p:nvPr>
-            <p:extLst>
-              <p:ext uri="{D42A27DB-BD31-4B8C-83A1-F6EECF244321}">
-                <p14:modId xmlns:p14="http://schemas.microsoft.com/office/powerpoint/2010/main" val="3935484648"/>
-              </p:ext>
-            </p:extLst>
-          </p:nvPr>
+          <p:nvPr/>
         </p:nvGraphicFramePr>
         <p:xfrm>
           <a:off x="320040" y="4800600"/>
@@ -20386,27 +19337,9 @@
                 <a:tableStyleId>{5C22544A-7EE6-4342-B048-85BDC9FD1C3A}</a:tableStyleId>
               </a:tblPr>
               <a:tblGrid>
-                <a:gridCol w="3840480">
-                  <a:extLst>
-                    <a:ext uri="{9D8B030D-6E8A-4147-A177-3AD203B41FA5}">
-                      <a16:colId xmlns:a16="http://schemas.microsoft.com/office/drawing/2014/main" val="20000"/>
-                    </a:ext>
-                  </a:extLst>
-                </a:gridCol>
-                <a:gridCol w="3840480">
-                  <a:extLst>
-                    <a:ext uri="{9D8B030D-6E8A-4147-A177-3AD203B41FA5}">
-                      <a16:colId xmlns:a16="http://schemas.microsoft.com/office/drawing/2014/main" val="20001"/>
-                    </a:ext>
-                  </a:extLst>
-                </a:gridCol>
-                <a:gridCol w="3840480">
-                  <a:extLst>
-                    <a:ext uri="{9D8B030D-6E8A-4147-A177-3AD203B41FA5}">
-                      <a16:colId xmlns:a16="http://schemas.microsoft.com/office/drawing/2014/main" val="20002"/>
-                    </a:ext>
-                  </a:extLst>
-                </a:gridCol>
+                <a:gridCol w="3840480"/>
+                <a:gridCol w="3840480"/>
+                <a:gridCol w="3840480"/>
               </a:tblGrid>
               <a:tr h="365760">
                 <a:tc>
@@ -20416,7 +19349,7 @@
                     <a:p>
                       <a:pPr algn="ctr"/>
                       <a:r>
-                        <a:rPr sz="1000" b="1">
+                        <a:rPr b="1" sz="1000">
                           <a:solidFill>
                             <a:srgbClr val="FFFFFF"/>
                           </a:solidFill>
@@ -20438,7 +19371,7 @@
                     <a:p>
                       <a:pPr algn="ctr"/>
                       <a:r>
-                        <a:rPr sz="1000" b="1">
+                        <a:rPr b="1" sz="1000">
                           <a:solidFill>
                             <a:srgbClr val="FFFFFF"/>
                           </a:solidFill>
@@ -20460,7 +19393,7 @@
                     <a:p>
                       <a:pPr algn="ctr"/>
                       <a:r>
-                        <a:rPr sz="1000" b="1">
+                        <a:rPr b="1" sz="1000">
                           <a:solidFill>
                             <a:srgbClr val="FFFFFF"/>
                           </a:solidFill>
@@ -20475,11 +19408,6 @@
                     </a:solidFill>
                   </a:tcPr>
                 </a:tc>
-                <a:extLst>
-                  <a:ext uri="{0D108BD9-81ED-4DB2-BD59-A6C34878D82A}">
-                    <a16:rowId xmlns:a16="http://schemas.microsoft.com/office/drawing/2014/main" val="10000"/>
-                  </a:ext>
-                </a:extLst>
               </a:tr>
               <a:tr h="365760">
                 <a:tc>
@@ -20489,7 +19417,7 @@
                     <a:p>
                       <a:pPr algn="ctr"/>
                       <a:r>
-                        <a:rPr sz="1000" dirty="0">
+                        <a:rPr sz="1000">
                           <a:solidFill>
                             <a:srgbClr val="1A1A2E"/>
                           </a:solidFill>
@@ -20497,6 +19425,11 @@
                         <a:t>Case 0</a:t>
                       </a:r>
                     </a:p>
+                    <a:p>
+                      <a:r>
+                        <a:t>(AEC 단독)</a:t>
+                      </a:r>
+                    </a:p>
                   </a:txBody>
                   <a:tcPr>
                     <a:solidFill>
@@ -20548,11 +19481,6 @@
                     </a:solidFill>
                   </a:tcPr>
                 </a:tc>
-                <a:extLst>
-                  <a:ext uri="{0D108BD9-81ED-4DB2-BD59-A6C34878D82A}">
-                    <a16:rowId xmlns:a16="http://schemas.microsoft.com/office/drawing/2014/main" val="10001"/>
-                  </a:ext>
-                </a:extLst>
               </a:tr>
               <a:tr h="365760">
                 <a:tc>
@@ -20621,11 +19549,6 @@
                     </a:solidFill>
                   </a:tcPr>
                 </a:tc>
-                <a:extLst>
-                  <a:ext uri="{0D108BD9-81ED-4DB2-BD59-A6C34878D82A}">
-                    <a16:rowId xmlns:a16="http://schemas.microsoft.com/office/drawing/2014/main" val="10002"/>
-                  </a:ext>
-                </a:extLst>
               </a:tr>
               <a:tr h="365760">
                 <a:tc>
@@ -20694,11 +19617,6 @@
                     </a:solidFill>
                   </a:tcPr>
                 </a:tc>
-                <a:extLst>
-                  <a:ext uri="{0D108BD9-81ED-4DB2-BD59-A6C34878D82A}">
-                    <a16:rowId xmlns:a16="http://schemas.microsoft.com/office/drawing/2014/main" val="10003"/>
-                  </a:ext>
-                </a:extLst>
               </a:tr>
               <a:tr h="365760">
                 <a:tc>
@@ -20752,34 +19670,13 @@
                     <a:p>
                       <a:pPr algn="ctr"/>
                       <a:r>
-                        <a:rPr sz="1000" dirty="0" err="1">
-                          <a:solidFill>
-                            <a:srgbClr val="1A1A2E"/>
-                          </a:solidFill>
-                        </a:rPr>
-                        <a:t>스캐너·전압</a:t>
-                      </a:r>
-                      <a:r>
-                        <a:rPr sz="1000" dirty="0">
-                          <a:solidFill>
-                            <a:srgbClr val="1A1A2E"/>
-                          </a:solidFill>
-                        </a:rPr>
-                        <a:t> </a:t>
-                      </a:r>
-                      <a:r>
-                        <a:rPr sz="1000" dirty="0" err="1">
-                          <a:solidFill>
-                            <a:srgbClr val="1A1A2E"/>
-                          </a:solidFill>
-                        </a:rPr>
-                        <a:t>보정</a:t>
-                      </a:r>
-                      <a:endParaRPr sz="1000" dirty="0">
-                        <a:solidFill>
-                          <a:srgbClr val="1A1A2E"/>
-                        </a:solidFill>
-                      </a:endParaRPr>
+                        <a:rPr sz="1000">
+                          <a:solidFill>
+                            <a:srgbClr val="1A1A2E"/>
+                          </a:solidFill>
+                        </a:rPr>
+                        <a:t>스캐너·전압 보정</a:t>
+                      </a:r>
                     </a:p>
                   </a:txBody>
                   <a:tcPr>
@@ -20788,11 +19685,6 @@
                     </a:solidFill>
                   </a:tcPr>
                 </a:tc>
-                <a:extLst>
-                  <a:ext uri="{0D108BD9-81ED-4DB2-BD59-A6C34878D82A}">
-                    <a16:rowId xmlns:a16="http://schemas.microsoft.com/office/drawing/2014/main" val="10004"/>
-                  </a:ext>
-                </a:extLst>
               </a:tr>
             </a:tbl>
           </a:graphicData>
@@ -20807,7 +19699,7 @@
 </file>
 
 <file path=ppt/slides/slide4.xml><?xml version="1.0" encoding="utf-8"?>
-<p:sld xmlns:a="http://schemas.openxmlformats.org/drawingml/2006/main" xmlns:r="http://schemas.openxmlformats.org/officeDocument/2006/relationships" xmlns:p="http://schemas.openxmlformats.org/presentationml/2006/main">
+<p:sld xmlns:a="http://schemas.openxmlformats.org/drawingml/2006/main" xmlns:p="http://schemas.openxmlformats.org/presentationml/2006/main" xmlns:r="http://schemas.openxmlformats.org/officeDocument/2006/relationships">
   <p:cSld>
     <p:spTree>
       <p:nvGrpSpPr>
@@ -20815,14 +19707,7 @@
         <p:cNvGrpSpPr/>
         <p:nvPr/>
       </p:nvGrpSpPr>
-      <p:grpSpPr>
-        <a:xfrm>
-          <a:off x="0" y="0"/>
-          <a:ext cx="0" cy="0"/>
-          <a:chOff x="0" y="0"/>
-          <a:chExt cx="0" cy="0"/>
-        </a:xfrm>
-      </p:grpSpPr>
+      <p:grpSpPr/>
       <p:sp>
         <p:nvSpPr>
           <p:cNvPr id="2" name="Rectangle 1"/>
@@ -20863,7 +19748,6 @@
           <a:lstStyle/>
           <a:p>
             <a:pPr algn="ctr"/>
-            <a:endParaRPr/>
           </a:p>
         </p:txBody>
       </p:sp>
@@ -20907,7 +19791,6 @@
           <a:lstStyle/>
           <a:p>
             <a:pPr algn="ctr"/>
-            <a:endParaRPr/>
           </a:p>
         </p:txBody>
       </p:sp>
@@ -21021,7 +19904,6 @@
           <a:lstStyle/>
           <a:p>
             <a:pPr algn="ctr"/>
-            <a:endParaRPr/>
           </a:p>
         </p:txBody>
       </p:sp>
@@ -21135,7 +20017,6 @@
           <a:lstStyle/>
           <a:p>
             <a:pPr algn="ctr"/>
-            <a:endParaRPr/>
           </a:p>
         </p:txBody>
       </p:sp>
@@ -21249,7 +20130,6 @@
           <a:lstStyle/>
           <a:p>
             <a:pPr algn="ctr"/>
-            <a:endParaRPr/>
           </a:p>
         </p:txBody>
       </p:sp>
@@ -21363,7 +20243,6 @@
           <a:lstStyle/>
           <a:p>
             <a:pPr algn="ctr"/>
-            <a:endParaRPr/>
           </a:p>
         </p:txBody>
       </p:sp>
@@ -21477,7 +20356,6 @@
           <a:lstStyle/>
           <a:p>
             <a:pPr algn="ctr"/>
-            <a:endParaRPr/>
           </a:p>
         </p:txBody>
       </p:sp>
@@ -21591,7 +20469,6 @@
           <a:lstStyle/>
           <a:p>
             <a:pPr algn="ctr"/>
-            <a:endParaRPr/>
           </a:p>
         </p:txBody>
       </p:sp>
@@ -21716,55 +20593,13 @@
                 <a:tableStyleId>{5C22544A-7EE6-4342-B048-85BDC9FD1C3A}</a:tableStyleId>
               </a:tblPr>
               <a:tblGrid>
-                <a:gridCol w="979714">
-                  <a:extLst>
-                    <a:ext uri="{9D8B030D-6E8A-4147-A177-3AD203B41FA5}">
-                      <a16:colId xmlns:a16="http://schemas.microsoft.com/office/drawing/2014/main" val="20000"/>
-                    </a:ext>
-                  </a:extLst>
-                </a:gridCol>
-                <a:gridCol w="979714">
-                  <a:extLst>
-                    <a:ext uri="{9D8B030D-6E8A-4147-A177-3AD203B41FA5}">
-                      <a16:colId xmlns:a16="http://schemas.microsoft.com/office/drawing/2014/main" val="20001"/>
-                    </a:ext>
-                  </a:extLst>
-                </a:gridCol>
-                <a:gridCol w="979714">
-                  <a:extLst>
-                    <a:ext uri="{9D8B030D-6E8A-4147-A177-3AD203B41FA5}">
-                      <a16:colId xmlns:a16="http://schemas.microsoft.com/office/drawing/2014/main" val="20002"/>
-                    </a:ext>
-                  </a:extLst>
-                </a:gridCol>
-                <a:gridCol w="979714">
-                  <a:extLst>
-                    <a:ext uri="{9D8B030D-6E8A-4147-A177-3AD203B41FA5}">
-                      <a16:colId xmlns:a16="http://schemas.microsoft.com/office/drawing/2014/main" val="20003"/>
-                    </a:ext>
-                  </a:extLst>
-                </a:gridCol>
-                <a:gridCol w="979714">
-                  <a:extLst>
-                    <a:ext uri="{9D8B030D-6E8A-4147-A177-3AD203B41FA5}">
-                      <a16:colId xmlns:a16="http://schemas.microsoft.com/office/drawing/2014/main" val="20004"/>
-                    </a:ext>
-                  </a:extLst>
-                </a:gridCol>
-                <a:gridCol w="979714">
-                  <a:extLst>
-                    <a:ext uri="{9D8B030D-6E8A-4147-A177-3AD203B41FA5}">
-                      <a16:colId xmlns:a16="http://schemas.microsoft.com/office/drawing/2014/main" val="20005"/>
-                    </a:ext>
-                  </a:extLst>
-                </a:gridCol>
-                <a:gridCol w="979714">
-                  <a:extLst>
-                    <a:ext uri="{9D8B030D-6E8A-4147-A177-3AD203B41FA5}">
-                      <a16:colId xmlns:a16="http://schemas.microsoft.com/office/drawing/2014/main" val="20006"/>
-                    </a:ext>
-                  </a:extLst>
-                </a:gridCol>
+                <a:gridCol w="979714"/>
+                <a:gridCol w="979714"/>
+                <a:gridCol w="979714"/>
+                <a:gridCol w="979714"/>
+                <a:gridCol w="979714"/>
+                <a:gridCol w="979714"/>
+                <a:gridCol w="979714"/>
               </a:tblGrid>
               <a:tr h="411480">
                 <a:tc>
@@ -21774,7 +20609,7 @@
                     <a:p>
                       <a:pPr algn="ctr"/>
                       <a:r>
-                        <a:rPr sz="1100" b="1">
+                        <a:rPr b="1" sz="1100">
                           <a:solidFill>
                             <a:srgbClr val="FFFFFF"/>
                           </a:solidFill>
@@ -21796,7 +20631,7 @@
                     <a:p>
                       <a:pPr algn="ctr"/>
                       <a:r>
-                        <a:rPr sz="1100" b="1">
+                        <a:rPr b="1" sz="1100">
                           <a:solidFill>
                             <a:srgbClr val="FFFFFF"/>
                           </a:solidFill>
@@ -21818,7 +20653,7 @@
                     <a:p>
                       <a:pPr algn="ctr"/>
                       <a:r>
-                        <a:rPr sz="1100" b="1">
+                        <a:rPr b="1" sz="1100">
                           <a:solidFill>
                             <a:srgbClr val="FFFFFF"/>
                           </a:solidFill>
@@ -21840,7 +20675,7 @@
                     <a:p>
                       <a:pPr algn="ctr"/>
                       <a:r>
-                        <a:rPr sz="1100" b="1">
+                        <a:rPr b="1" sz="1100">
                           <a:solidFill>
                             <a:srgbClr val="FFFFFF"/>
                           </a:solidFill>
@@ -21862,7 +20697,7 @@
                     <a:p>
                       <a:pPr algn="ctr"/>
                       <a:r>
-                        <a:rPr sz="1100" b="1">
+                        <a:rPr b="1" sz="1100">
                           <a:solidFill>
                             <a:srgbClr val="FFFFFF"/>
                           </a:solidFill>
@@ -21884,7 +20719,7 @@
                     <a:p>
                       <a:pPr algn="ctr"/>
                       <a:r>
-                        <a:rPr sz="1100" b="1">
+                        <a:rPr b="1" sz="1100">
                           <a:solidFill>
                             <a:srgbClr val="FFFFFF"/>
                           </a:solidFill>
@@ -21906,7 +20741,7 @@
                     <a:p>
                       <a:pPr algn="ctr"/>
                       <a:r>
-                        <a:rPr sz="1100" b="1">
+                        <a:rPr b="1" sz="1100">
                           <a:solidFill>
                             <a:srgbClr val="FFFFFF"/>
                           </a:solidFill>
@@ -21921,11 +20756,6 @@
                     </a:solidFill>
                   </a:tcPr>
                 </a:tc>
-                <a:extLst>
-                  <a:ext uri="{0D108BD9-81ED-4DB2-BD59-A6C34878D82A}">
-                    <a16:rowId xmlns:a16="http://schemas.microsoft.com/office/drawing/2014/main" val="10000"/>
-                  </a:ext>
-                </a:extLst>
               </a:tr>
               <a:tr h="411480">
                 <a:tc>
@@ -22082,11 +20912,6 @@
                     </a:solidFill>
                   </a:tcPr>
                 </a:tc>
-                <a:extLst>
-                  <a:ext uri="{0D108BD9-81ED-4DB2-BD59-A6C34878D82A}">
-                    <a16:rowId xmlns:a16="http://schemas.microsoft.com/office/drawing/2014/main" val="10001"/>
-                  </a:ext>
-                </a:extLst>
               </a:tr>
               <a:tr h="411480">
                 <a:tc>
@@ -22243,11 +21068,6 @@
                     </a:solidFill>
                   </a:tcPr>
                 </a:tc>
-                <a:extLst>
-                  <a:ext uri="{0D108BD9-81ED-4DB2-BD59-A6C34878D82A}">
-                    <a16:rowId xmlns:a16="http://schemas.microsoft.com/office/drawing/2014/main" val="10002"/>
-                  </a:ext>
-                </a:extLst>
               </a:tr>
             </a:tbl>
           </a:graphicData>
@@ -22293,7 +21113,6 @@
           <a:lstStyle/>
           <a:p>
             <a:pPr algn="ctr"/>
-            <a:endParaRPr/>
           </a:p>
         </p:txBody>
       </p:sp>
@@ -22475,7 +21294,7 @@
         </p:blipFill>
         <p:spPr>
           <a:xfrm>
-            <a:off x="6080760" y="5244436"/>
+            <a:off x="6080760" y="5230368"/>
             <a:ext cx="5788152" cy="1417320"/>
           </a:xfrm>
           <a:prstGeom prst="rect">
@@ -22492,7 +21311,7 @@
 </file>
 
 <file path=ppt/slides/slide5.xml><?xml version="1.0" encoding="utf-8"?>
-<p:sld xmlns:a="http://schemas.openxmlformats.org/drawingml/2006/main" xmlns:r="http://schemas.openxmlformats.org/officeDocument/2006/relationships" xmlns:p="http://schemas.openxmlformats.org/presentationml/2006/main">
+<p:sld xmlns:a="http://schemas.openxmlformats.org/drawingml/2006/main" xmlns:p="http://schemas.openxmlformats.org/presentationml/2006/main" xmlns:r="http://schemas.openxmlformats.org/officeDocument/2006/relationships">
   <p:cSld>
     <p:spTree>
       <p:nvGrpSpPr>
@@ -22500,14 +21319,7 @@
         <p:cNvGrpSpPr/>
         <p:nvPr/>
       </p:nvGrpSpPr>
-      <p:grpSpPr>
-        <a:xfrm>
-          <a:off x="0" y="0"/>
-          <a:ext cx="0" cy="0"/>
-          <a:chOff x="0" y="0"/>
-          <a:chExt cx="0" cy="0"/>
-        </a:xfrm>
-      </p:grpSpPr>
+      <p:grpSpPr/>
       <p:sp>
         <p:nvSpPr>
           <p:cNvPr id="2" name="Rectangle 1"/>
@@ -22548,7 +21360,6 @@
           <a:lstStyle/>
           <a:p>
             <a:pPr algn="ctr"/>
-            <a:endParaRPr/>
           </a:p>
         </p:txBody>
       </p:sp>
@@ -22592,7 +21403,6 @@
           <a:lstStyle/>
           <a:p>
             <a:pPr algn="ctr"/>
-            <a:endParaRPr/>
           </a:p>
         </p:txBody>
       </p:sp>
@@ -22738,7 +21548,6 @@
           <a:lstStyle/>
           <a:p>
             <a:pPr algn="ctr"/>
-            <a:endParaRPr/>
           </a:p>
         </p:txBody>
       </p:sp>
@@ -22818,7 +21627,6 @@
           <a:lstStyle/>
           <a:p>
             <a:pPr algn="ctr"/>
-            <a:endParaRPr/>
           </a:p>
         </p:txBody>
       </p:sp>
@@ -22930,7 +21738,6 @@
           <a:lstStyle/>
           <a:p>
             <a:pPr algn="ctr"/>
-            <a:endParaRPr/>
           </a:p>
         </p:txBody>
       </p:sp>
@@ -23010,7 +21817,6 @@
           <a:lstStyle/>
           <a:p>
             <a:pPr algn="ctr"/>
-            <a:endParaRPr/>
           </a:p>
         </p:txBody>
       </p:sp>
@@ -23122,7 +21928,6 @@
           <a:lstStyle/>
           <a:p>
             <a:pPr algn="ctr"/>
-            <a:endParaRPr/>
           </a:p>
         </p:txBody>
       </p:sp>
@@ -23202,7 +22007,6 @@
           <a:lstStyle/>
           <a:p>
             <a:pPr algn="ctr"/>
-            <a:endParaRPr/>
           </a:p>
         </p:txBody>
       </p:sp>
@@ -23314,7 +22118,6 @@
           <a:lstStyle/>
           <a:p>
             <a:pPr algn="ctr"/>
-            <a:endParaRPr/>
           </a:p>
         </p:txBody>
       </p:sp>
@@ -23394,7 +22197,6 @@
           <a:lstStyle/>
           <a:p>
             <a:pPr algn="ctr"/>
-            <a:endParaRPr/>
           </a:p>
         </p:txBody>
       </p:sp>
@@ -23506,7 +22308,6 @@
           <a:lstStyle/>
           <a:p>
             <a:pPr algn="ctr"/>
-            <a:endParaRPr/>
           </a:p>
         </p:txBody>
       </p:sp>
@@ -23586,7 +22387,6 @@
           <a:lstStyle/>
           <a:p>
             <a:pPr algn="ctr"/>
-            <a:endParaRPr/>
           </a:p>
         </p:txBody>
       </p:sp>
@@ -23664,7 +22464,6 @@
           <a:lstStyle/>
           <a:p>
             <a:pPr algn="ctr"/>
-            <a:endParaRPr/>
           </a:p>
         </p:txBody>
       </p:sp>
@@ -23711,7 +22510,7 @@
 </file>
 
 <file path=ppt/slides/slide6.xml><?xml version="1.0" encoding="utf-8"?>
-<p:sld xmlns:a="http://schemas.openxmlformats.org/drawingml/2006/main" xmlns:r="http://schemas.openxmlformats.org/officeDocument/2006/relationships" xmlns:p="http://schemas.openxmlformats.org/presentationml/2006/main">
+<p:sld xmlns:a="http://schemas.openxmlformats.org/drawingml/2006/main" xmlns:p="http://schemas.openxmlformats.org/presentationml/2006/main" xmlns:r="http://schemas.openxmlformats.org/officeDocument/2006/relationships">
   <p:cSld>
     <p:spTree>
       <p:nvGrpSpPr>
@@ -23719,14 +22518,7 @@
         <p:cNvGrpSpPr/>
         <p:nvPr/>
       </p:nvGrpSpPr>
-      <p:grpSpPr>
-        <a:xfrm>
-          <a:off x="0" y="0"/>
-          <a:ext cx="0" cy="0"/>
-          <a:chOff x="0" y="0"/>
-          <a:chExt cx="0" cy="0"/>
-        </a:xfrm>
-      </p:grpSpPr>
+      <p:grpSpPr/>
       <p:sp>
         <p:nvSpPr>
           <p:cNvPr id="2" name="Rectangle 1"/>
@@ -23767,7 +22559,6 @@
           <a:lstStyle/>
           <a:p>
             <a:pPr algn="ctr"/>
-            <a:endParaRPr/>
           </a:p>
         </p:txBody>
       </p:sp>
@@ -23811,7 +22602,6 @@
           <a:lstStyle/>
           <a:p>
             <a:pPr algn="ctr"/>
-            <a:endParaRPr/>
           </a:p>
         </p:txBody>
       </p:sp>
@@ -23925,7 +22715,6 @@
           <a:lstStyle/>
           <a:p>
             <a:pPr algn="ctr"/>
-            <a:endParaRPr/>
           </a:p>
         </p:txBody>
       </p:sp>
@@ -24039,7 +22828,6 @@
           <a:lstStyle/>
           <a:p>
             <a:pPr algn="ctr"/>
-            <a:endParaRPr/>
           </a:p>
         </p:txBody>
       </p:sp>
@@ -24153,7 +22941,6 @@
           <a:lstStyle/>
           <a:p>
             <a:pPr algn="ctr"/>
-            <a:endParaRPr/>
           </a:p>
         </p:txBody>
       </p:sp>
@@ -24267,7 +23054,6 @@
           <a:lstStyle/>
           <a:p>
             <a:pPr algn="ctr"/>
-            <a:endParaRPr/>
           </a:p>
         </p:txBody>
       </p:sp>
@@ -24464,7 +23250,7 @@
 </file>
 
 <file path=ppt/slides/slide7.xml><?xml version="1.0" encoding="utf-8"?>
-<p:sld xmlns:a="http://schemas.openxmlformats.org/drawingml/2006/main" xmlns:r="http://schemas.openxmlformats.org/officeDocument/2006/relationships" xmlns:p="http://schemas.openxmlformats.org/presentationml/2006/main">
+<p:sld xmlns:a="http://schemas.openxmlformats.org/drawingml/2006/main" xmlns:p="http://schemas.openxmlformats.org/presentationml/2006/main" xmlns:r="http://schemas.openxmlformats.org/officeDocument/2006/relationships">
   <p:cSld>
     <p:spTree>
       <p:nvGrpSpPr>
@@ -24472,14 +23258,7 @@
         <p:cNvGrpSpPr/>
         <p:nvPr/>
       </p:nvGrpSpPr>
-      <p:grpSpPr>
-        <a:xfrm>
-          <a:off x="0" y="0"/>
-          <a:ext cx="0" cy="0"/>
-          <a:chOff x="0" y="0"/>
-          <a:chExt cx="0" cy="0"/>
-        </a:xfrm>
-      </p:grpSpPr>
+      <p:grpSpPr/>
       <p:sp>
         <p:nvSpPr>
           <p:cNvPr id="2" name="Rectangle 1"/>
@@ -24520,7 +23299,6 @@
           <a:lstStyle/>
           <a:p>
             <a:pPr algn="ctr"/>
-            <a:endParaRPr/>
           </a:p>
         </p:txBody>
       </p:sp>
@@ -24564,7 +23342,6 @@
           <a:lstStyle/>
           <a:p>
             <a:pPr algn="ctr"/>
-            <a:endParaRPr/>
           </a:p>
         </p:txBody>
       </p:sp>
@@ -24680,7 +23457,7 @@
         </p:nvGraphicFramePr>
         <p:xfrm>
           <a:off x="320040" y="1508760"/>
-          <a:ext cx="11521440" cy="2725784"/>
+          <a:ext cx="11521440" cy="2377440"/>
         </p:xfrm>
         <a:graphic>
           <a:graphicData uri="http://schemas.openxmlformats.org/drawingml/2006/table">
@@ -24689,41 +23466,11 @@
                 <a:tableStyleId>{5C22544A-7EE6-4342-B048-85BDC9FD1C3A}</a:tableStyleId>
               </a:tblPr>
               <a:tblGrid>
-                <a:gridCol w="2304288">
-                  <a:extLst>
-                    <a:ext uri="{9D8B030D-6E8A-4147-A177-3AD203B41FA5}">
-                      <a16:colId xmlns:a16="http://schemas.microsoft.com/office/drawing/2014/main" val="20000"/>
-                    </a:ext>
-                  </a:extLst>
-                </a:gridCol>
-                <a:gridCol w="2304288">
-                  <a:extLst>
-                    <a:ext uri="{9D8B030D-6E8A-4147-A177-3AD203B41FA5}">
-                      <a16:colId xmlns:a16="http://schemas.microsoft.com/office/drawing/2014/main" val="20001"/>
-                    </a:ext>
-                  </a:extLst>
-                </a:gridCol>
-                <a:gridCol w="2304288">
-                  <a:extLst>
-                    <a:ext uri="{9D8B030D-6E8A-4147-A177-3AD203B41FA5}">
-                      <a16:colId xmlns:a16="http://schemas.microsoft.com/office/drawing/2014/main" val="20002"/>
-                    </a:ext>
-                  </a:extLst>
-                </a:gridCol>
-                <a:gridCol w="2304288">
-                  <a:extLst>
-                    <a:ext uri="{9D8B030D-6E8A-4147-A177-3AD203B41FA5}">
-                      <a16:colId xmlns:a16="http://schemas.microsoft.com/office/drawing/2014/main" val="20003"/>
-                    </a:ext>
-                  </a:extLst>
-                </a:gridCol>
-                <a:gridCol w="2304288">
-                  <a:extLst>
-                    <a:ext uri="{9D8B030D-6E8A-4147-A177-3AD203B41FA5}">
-                      <a16:colId xmlns:a16="http://schemas.microsoft.com/office/drawing/2014/main" val="20004"/>
-                    </a:ext>
-                  </a:extLst>
-                </a:gridCol>
+                <a:gridCol w="2304288"/>
+                <a:gridCol w="2304288"/>
+                <a:gridCol w="2304288"/>
+                <a:gridCol w="2304288"/>
+                <a:gridCol w="2304288"/>
               </a:tblGrid>
               <a:tr h="339634">
                 <a:tc>
@@ -24733,7 +23480,7 @@
                     <a:p>
                       <a:pPr algn="ctr"/>
                       <a:r>
-                        <a:rPr sz="1100" b="1">
+                        <a:rPr b="1" sz="1100">
                           <a:solidFill>
                             <a:srgbClr val="FFFFFF"/>
                           </a:solidFill>
@@ -24755,7 +23502,7 @@
                     <a:p>
                       <a:pPr algn="ctr"/>
                       <a:r>
-                        <a:rPr sz="1100" b="1">
+                        <a:rPr b="1" sz="1100">
                           <a:solidFill>
                             <a:srgbClr val="FFFFFF"/>
                           </a:solidFill>
@@ -24777,7 +23524,7 @@
                     <a:p>
                       <a:pPr algn="ctr"/>
                       <a:r>
-                        <a:rPr sz="1100" b="1">
+                        <a:rPr b="1" sz="1100">
                           <a:solidFill>
                             <a:srgbClr val="FFFFFF"/>
                           </a:solidFill>
@@ -24799,7 +23546,7 @@
                     <a:p>
                       <a:pPr algn="ctr"/>
                       <a:r>
-                        <a:rPr sz="1100" b="1">
+                        <a:rPr b="1" sz="1100">
                           <a:solidFill>
                             <a:srgbClr val="FFFFFF"/>
                           </a:solidFill>
@@ -24821,7 +23568,7 @@
                     <a:p>
                       <a:pPr algn="ctr"/>
                       <a:r>
-                        <a:rPr sz="1100" b="1">
+                        <a:rPr b="1" sz="1100">
                           <a:solidFill>
                             <a:srgbClr val="FFFFFF"/>
                           </a:solidFill>
@@ -24836,11 +23583,6 @@
                     </a:solidFill>
                   </a:tcPr>
                 </a:tc>
-                <a:extLst>
-                  <a:ext uri="{0D108BD9-81ED-4DB2-BD59-A6C34878D82A}">
-                    <a16:rowId xmlns:a16="http://schemas.microsoft.com/office/drawing/2014/main" val="10000"/>
-                  </a:ext>
-                </a:extLst>
               </a:tr>
               <a:tr h="339634">
                 <a:tc>
@@ -24850,7 +23592,7 @@
                     <a:p>
                       <a:pPr algn="ctr"/>
                       <a:r>
-                        <a:rPr sz="1100" dirty="0">
+                        <a:rPr sz="1100">
                           <a:solidFill>
                             <a:srgbClr val="1A1A2E"/>
                           </a:solidFill>
@@ -24953,11 +23695,6 @@
                     </a:solidFill>
                   </a:tcPr>
                 </a:tc>
-                <a:extLst>
-                  <a:ext uri="{0D108BD9-81ED-4DB2-BD59-A6C34878D82A}">
-                    <a16:rowId xmlns:a16="http://schemas.microsoft.com/office/drawing/2014/main" val="10001"/>
-                  </a:ext>
-                </a:extLst>
               </a:tr>
               <a:tr h="339634">
                 <a:tc>
@@ -24989,7 +23726,7 @@
                     <a:p>
                       <a:pPr algn="ctr"/>
                       <a:r>
-                        <a:rPr sz="1100" dirty="0">
+                        <a:rPr sz="1100">
                           <a:solidFill>
                             <a:srgbClr val="1A1A2E"/>
                           </a:solidFill>
@@ -25070,11 +23807,6 @@
                     </a:solidFill>
                   </a:tcPr>
                 </a:tc>
-                <a:extLst>
-                  <a:ext uri="{0D108BD9-81ED-4DB2-BD59-A6C34878D82A}">
-                    <a16:rowId xmlns:a16="http://schemas.microsoft.com/office/drawing/2014/main" val="10002"/>
-                  </a:ext>
-                </a:extLst>
               </a:tr>
               <a:tr h="339634">
                 <a:tc>
@@ -25106,7 +23838,7 @@
                     <a:p>
                       <a:pPr algn="ctr"/>
                       <a:r>
-                        <a:rPr sz="1100" dirty="0">
+                        <a:rPr sz="1100">
                           <a:solidFill>
                             <a:srgbClr val="1A1A2E"/>
                           </a:solidFill>
@@ -25128,90 +23860,13 @@
                     <a:p>
                       <a:pPr algn="ctr"/>
                       <a:r>
-                        <a:rPr sz="1100" dirty="0">
-                          <a:solidFill>
-                            <a:srgbClr val="1A1A2E"/>
-                          </a:solidFill>
-                        </a:rPr>
-                        <a:t>AEC </a:t>
-                      </a:r>
-                      <a:r>
-                        <a:rPr sz="1100" dirty="0" err="1">
-                          <a:solidFill>
-                            <a:srgbClr val="1A1A2E"/>
-                          </a:solidFill>
-                        </a:rPr>
-                        <a:t>곡선</a:t>
-                      </a:r>
-                      <a:r>
-                        <a:rPr sz="1100" dirty="0">
-                          <a:solidFill>
-                            <a:srgbClr val="1A1A2E"/>
-                          </a:solidFill>
-                        </a:rPr>
-                        <a:t> </a:t>
-                      </a:r>
-                      <a:r>
-                        <a:rPr sz="1100" dirty="0" err="1">
-                          <a:solidFill>
-                            <a:srgbClr val="1A1A2E"/>
-                          </a:solidFill>
-                        </a:rPr>
-                        <a:t>비대칭성</a:t>
-                      </a:r>
-                      <a:r>
-                        <a:rPr sz="1100" dirty="0">
-                          <a:solidFill>
-                            <a:srgbClr val="1A1A2E"/>
-                          </a:solidFill>
-                        </a:rPr>
-                        <a:t> → </a:t>
-                      </a:r>
-                      <a:r>
-                        <a:rPr sz="1100" dirty="0" err="1">
-                          <a:solidFill>
-                            <a:srgbClr val="1A1A2E"/>
-                          </a:solidFill>
-                        </a:rPr>
-                        <a:t>체형</a:t>
-                      </a:r>
-                      <a:r>
-                        <a:rPr sz="1100" dirty="0">
-                          <a:solidFill>
-                            <a:srgbClr val="1A1A2E"/>
-                          </a:solidFill>
-                        </a:rPr>
-                        <a:t> </a:t>
-                      </a:r>
-                      <a:r>
-                        <a:rPr sz="1100" dirty="0" err="1">
-                          <a:solidFill>
-                            <a:srgbClr val="1A1A2E"/>
-                          </a:solidFill>
-                        </a:rPr>
-                        <a:t>분포</a:t>
-                      </a:r>
-                      <a:r>
-                        <a:rPr sz="1100" dirty="0">
-                          <a:solidFill>
-                            <a:srgbClr val="1A1A2E"/>
-                          </a:solidFill>
-                        </a:rPr>
-                        <a:t> </a:t>
-                      </a:r>
-                      <a:r>
-                        <a:rPr sz="1100" dirty="0" err="1">
-                          <a:solidFill>
-                            <a:srgbClr val="1A1A2E"/>
-                          </a:solidFill>
-                        </a:rPr>
-                        <a:t>특성</a:t>
-                      </a:r>
-                      <a:endParaRPr sz="1100" dirty="0">
-                        <a:solidFill>
-                          <a:srgbClr val="1A1A2E"/>
-                        </a:solidFill>
-                      </a:endParaRPr>
+                        <a:rPr sz="1100">
+                          <a:solidFill>
+                            <a:srgbClr val="1A1A2E"/>
+                          </a:solidFill>
+                        </a:rPr>
+                        <a:t>AEC 곡선 비대칭성 → 체형 분포 특성</a:t>
+                      </a:r>
                     </a:p>
                   </a:txBody>
                   <a:tcPr>
@@ -25264,11 +23919,6 @@
                     </a:solidFill>
                   </a:tcPr>
                 </a:tc>
-                <a:extLst>
-                  <a:ext uri="{0D108BD9-81ED-4DB2-BD59-A6C34878D82A}">
-                    <a16:rowId xmlns:a16="http://schemas.microsoft.com/office/drawing/2014/main" val="10003"/>
-                  </a:ext>
-                </a:extLst>
               </a:tr>
               <a:tr h="339634">
                 <a:tc>
@@ -25322,82 +23972,13 @@
                     <a:p>
                       <a:pPr algn="ctr"/>
                       <a:r>
-                        <a:rPr sz="1100" dirty="0" err="1">
-                          <a:solidFill>
-                            <a:srgbClr val="1A1A2E"/>
-                          </a:solidFill>
-                        </a:rPr>
-                        <a:t>평균</a:t>
-                      </a:r>
-                      <a:r>
-                        <a:rPr sz="1100" dirty="0">
-                          <a:solidFill>
-                            <a:srgbClr val="1A1A2E"/>
-                          </a:solidFill>
-                        </a:rPr>
-                        <a:t> </a:t>
-                      </a:r>
-                      <a:r>
-                        <a:rPr sz="1100" dirty="0" err="1">
-                          <a:solidFill>
-                            <a:srgbClr val="1A1A2E"/>
-                          </a:solidFill>
-                        </a:rPr>
-                        <a:t>절대</a:t>
-                      </a:r>
-                      <a:r>
-                        <a:rPr sz="1100" dirty="0">
-                          <a:solidFill>
-                            <a:srgbClr val="1A1A2E"/>
-                          </a:solidFill>
-                        </a:rPr>
-                        <a:t> </a:t>
-                      </a:r>
-                      <a:r>
-                        <a:rPr sz="1100" dirty="0" err="1">
-                          <a:solidFill>
-                            <a:srgbClr val="1A1A2E"/>
-                          </a:solidFill>
-                        </a:rPr>
-                        <a:t>기울기</a:t>
-                      </a:r>
-                      <a:r>
-                        <a:rPr sz="1100" dirty="0">
-                          <a:solidFill>
-                            <a:srgbClr val="1A1A2E"/>
-                          </a:solidFill>
-                        </a:rPr>
-                        <a:t> → </a:t>
-                      </a:r>
-                      <a:r>
-                        <a:rPr sz="1100" dirty="0" err="1">
-                          <a:solidFill>
-                            <a:srgbClr val="1A1A2E"/>
-                          </a:solidFill>
-                        </a:rPr>
-                        <a:t>곡선</a:t>
-                      </a:r>
-                      <a:r>
-                        <a:rPr sz="1100" dirty="0">
-                          <a:solidFill>
-                            <a:srgbClr val="1A1A2E"/>
-                          </a:solidFill>
-                        </a:rPr>
-                        <a:t> </a:t>
-                      </a:r>
-                      <a:r>
-                        <a:rPr sz="1100" dirty="0" err="1">
-                          <a:solidFill>
-                            <a:srgbClr val="1A1A2E"/>
-                          </a:solidFill>
-                        </a:rPr>
-                        <a:t>동역학</a:t>
-                      </a:r>
-                      <a:endParaRPr sz="1100" dirty="0">
-                        <a:solidFill>
-                          <a:srgbClr val="1A1A2E"/>
-                        </a:solidFill>
-                      </a:endParaRPr>
+                        <a:rPr sz="1100">
+                          <a:solidFill>
+                            <a:srgbClr val="1A1A2E"/>
+                          </a:solidFill>
+                        </a:rPr>
+                        <a:t>평균 절대 기울기 → 곡선 동역학</a:t>
+                      </a:r>
                     </a:p>
                   </a:txBody>
                   <a:tcPr>
@@ -25413,7 +23994,7 @@
                     <a:p>
                       <a:pPr algn="ctr"/>
                       <a:r>
-                        <a:rPr sz="1100" dirty="0">
+                        <a:rPr sz="1100">
                           <a:solidFill>
                             <a:srgbClr val="1A1A2E"/>
                           </a:solidFill>
@@ -25450,11 +24031,6 @@
                     </a:solidFill>
                   </a:tcPr>
                 </a:tc>
-                <a:extLst>
-                  <a:ext uri="{0D108BD9-81ED-4DB2-BD59-A6C34878D82A}">
-                    <a16:rowId xmlns:a16="http://schemas.microsoft.com/office/drawing/2014/main" val="10004"/>
-                  </a:ext>
-                </a:extLst>
               </a:tr>
               <a:tr h="339634">
                 <a:tc>
@@ -25530,7 +24106,7 @@
                     <a:p>
                       <a:pPr algn="ctr"/>
                       <a:r>
-                        <a:rPr sz="1100" dirty="0">
+                        <a:rPr sz="1100">
                           <a:solidFill>
                             <a:srgbClr val="1A1A2E"/>
                           </a:solidFill>
@@ -25552,26 +24128,13 @@
                     <a:p>
                       <a:pPr algn="ctr"/>
                       <a:r>
-                        <a:rPr sz="1100" dirty="0">
-                          <a:solidFill>
-                            <a:srgbClr val="1A1A2E"/>
-                          </a:solidFill>
-                        </a:rPr>
-                        <a:t>✗ </a:t>
-                      </a:r>
-                      <a:r>
-                        <a:rPr sz="1100" dirty="0" err="1">
-                          <a:solidFill>
-                            <a:srgbClr val="1A1A2E"/>
-                          </a:solidFill>
-                        </a:rPr>
-                        <a:t>제외</a:t>
-                      </a:r>
-                      <a:endParaRPr sz="1100" dirty="0">
-                        <a:solidFill>
-                          <a:srgbClr val="1A1A2E"/>
-                        </a:solidFill>
-                      </a:endParaRPr>
+                        <a:rPr sz="1100">
+                          <a:solidFill>
+                            <a:srgbClr val="1A1A2E"/>
+                          </a:solidFill>
+                        </a:rPr>
+                        <a:t>✗ 제외</a:t>
+                      </a:r>
                     </a:p>
                   </a:txBody>
                   <a:tcPr>
@@ -25580,11 +24143,6 @@
                     </a:solidFill>
                   </a:tcPr>
                 </a:tc>
-                <a:extLst>
-                  <a:ext uri="{0D108BD9-81ED-4DB2-BD59-A6C34878D82A}">
-                    <a16:rowId xmlns:a16="http://schemas.microsoft.com/office/drawing/2014/main" val="10005"/>
-                  </a:ext>
-                </a:extLst>
               </a:tr>
               <a:tr h="339636">
                 <a:tc>
@@ -25682,26 +24240,13 @@
                     <a:p>
                       <a:pPr algn="ctr"/>
                       <a:r>
-                        <a:rPr sz="1100" dirty="0">
-                          <a:solidFill>
-                            <a:srgbClr val="1A1A2E"/>
-                          </a:solidFill>
-                        </a:rPr>
-                        <a:t>✗ </a:t>
-                      </a:r>
-                      <a:r>
-                        <a:rPr sz="1100" dirty="0" err="1">
-                          <a:solidFill>
-                            <a:srgbClr val="1A1A2E"/>
-                          </a:solidFill>
-                        </a:rPr>
-                        <a:t>제외</a:t>
-                      </a:r>
-                      <a:endParaRPr sz="1100" dirty="0">
-                        <a:solidFill>
-                          <a:srgbClr val="1A1A2E"/>
-                        </a:solidFill>
-                      </a:endParaRPr>
+                        <a:rPr sz="1100">
+                          <a:solidFill>
+                            <a:srgbClr val="1A1A2E"/>
+                          </a:solidFill>
+                        </a:rPr>
+                        <a:t>✗ 제외</a:t>
+                      </a:r>
                     </a:p>
                   </a:txBody>
                   <a:tcPr>
@@ -25710,11 +24255,6 @@
                     </a:solidFill>
                   </a:tcPr>
                 </a:tc>
-                <a:extLst>
-                  <a:ext uri="{0D108BD9-81ED-4DB2-BD59-A6C34878D82A}">
-                    <a16:rowId xmlns:a16="http://schemas.microsoft.com/office/drawing/2014/main" val="10006"/>
-                  </a:ext>
-                </a:extLst>
               </a:tr>
             </a:tbl>
           </a:graphicData>
@@ -25744,138 +24284,13 @@
           <a:p>
             <a:pPr algn="l"/>
             <a:r>
-              <a:rPr sz="1200" b="0" i="1" dirty="0">
+              <a:rPr sz="1200" b="0" i="1">
                 <a:solidFill>
                   <a:srgbClr val="FF7F27"/>
                 </a:solidFill>
               </a:rPr>
-              <a:t>⚠  p25·AUC_normalized: </a:t>
-            </a:r>
-            <a:r>
-              <a:rPr sz="1200" b="0" i="1" dirty="0" err="1">
-                <a:solidFill>
-                  <a:srgbClr val="FF7F27"/>
-                </a:solidFill>
-              </a:rPr>
-              <a:t>mean과</a:t>
-            </a:r>
-            <a:r>
-              <a:rPr sz="1200" b="0" i="1" dirty="0">
-                <a:solidFill>
-                  <a:srgbClr val="FF7F27"/>
-                </a:solidFill>
-              </a:rPr>
-              <a:t> </a:t>
-            </a:r>
-            <a:r>
-              <a:rPr sz="1200" b="0" i="1" dirty="0" err="1">
-                <a:solidFill>
-                  <a:srgbClr val="FF7F27"/>
-                </a:solidFill>
-              </a:rPr>
-              <a:t>동일</a:t>
-            </a:r>
-            <a:r>
-              <a:rPr sz="1200" b="0" i="1" dirty="0">
-                <a:solidFill>
-                  <a:srgbClr val="FF7F27"/>
-                </a:solidFill>
-              </a:rPr>
-              <a:t> amplitude </a:t>
-            </a:r>
-            <a:r>
-              <a:rPr sz="1200" b="0" i="1" dirty="0" err="1">
-                <a:solidFill>
-                  <a:srgbClr val="FF7F27"/>
-                </a:solidFill>
-              </a:rPr>
-              <a:t>그룹</a:t>
-            </a:r>
-            <a:r>
-              <a:rPr sz="1200" b="0" i="1" dirty="0">
-                <a:solidFill>
-                  <a:srgbClr val="FF7F27"/>
-                </a:solidFill>
-              </a:rPr>
-              <a:t>(r≥0.88) → </a:t>
-            </a:r>
-            <a:r>
-              <a:rPr sz="1200" b="0" i="1" dirty="0" err="1">
-                <a:solidFill>
-                  <a:srgbClr val="FF7F27"/>
-                </a:solidFill>
-              </a:rPr>
-              <a:t>다중공선성</a:t>
-            </a:r>
-            <a:r>
-              <a:rPr sz="1200" b="0" i="1" dirty="0">
-                <a:solidFill>
-                  <a:srgbClr val="FF7F27"/>
-                </a:solidFill>
-              </a:rPr>
-              <a:t> </a:t>
-            </a:r>
-            <a:r>
-              <a:rPr sz="1200" b="0" i="1" dirty="0" err="1">
-                <a:solidFill>
-                  <a:srgbClr val="FF7F27"/>
-                </a:solidFill>
-              </a:rPr>
-              <a:t>제거</a:t>
-            </a:r>
-            <a:r>
-              <a:rPr sz="1200" b="0" i="1" dirty="0">
-                <a:solidFill>
-                  <a:srgbClr val="FF7F27"/>
-                </a:solidFill>
-              </a:rPr>
-              <a:t> / </a:t>
-            </a:r>
-            <a:r>
-              <a:rPr sz="1200" b="0" i="1" dirty="0" err="1">
-                <a:solidFill>
-                  <a:srgbClr val="FF7F27"/>
-                </a:solidFill>
-              </a:rPr>
-              <a:t>mean을</a:t>
-            </a:r>
-            <a:r>
-              <a:rPr sz="1200" b="0" i="1" dirty="0">
-                <a:solidFill>
-                  <a:srgbClr val="FF7F27"/>
-                </a:solidFill>
-              </a:rPr>
-              <a:t> </a:t>
-            </a:r>
-            <a:r>
-              <a:rPr sz="1200" b="0" i="1" dirty="0" err="1">
-                <a:solidFill>
-                  <a:srgbClr val="FF7F27"/>
-                </a:solidFill>
-              </a:rPr>
-              <a:t>대표로</a:t>
-            </a:r>
-            <a:r>
-              <a:rPr sz="1200" b="0" i="1" dirty="0">
-                <a:solidFill>
-                  <a:srgbClr val="FF7F27"/>
-                </a:solidFill>
-              </a:rPr>
-              <a:t> </a:t>
-            </a:r>
-            <a:r>
-              <a:rPr sz="1200" b="0" i="1" dirty="0" err="1">
-                <a:solidFill>
-                  <a:srgbClr val="FF7F27"/>
-                </a:solidFill>
-              </a:rPr>
-              <a:t>포함</a:t>
-            </a:r>
-            <a:endParaRPr sz="1200" b="0" i="1" dirty="0">
-              <a:solidFill>
-                <a:srgbClr val="FF7F27"/>
-              </a:solidFill>
-            </a:endParaRPr>
+              <a:t>⚠  p25·AUC_normalized: mean과 동일 amplitude 그룹(r≥0.88) → 다중공선성 제거 / mean을 대표로 포함</a:t>
+            </a:r>
           </a:p>
         </p:txBody>
       </p:sp>
@@ -26004,7 +24419,7 @@
 </file>
 
 <file path=ppt/slides/slide8.xml><?xml version="1.0" encoding="utf-8"?>
-<p:sld xmlns:a="http://schemas.openxmlformats.org/drawingml/2006/main" xmlns:r="http://schemas.openxmlformats.org/officeDocument/2006/relationships" xmlns:p="http://schemas.openxmlformats.org/presentationml/2006/main">
+<p:sld xmlns:a="http://schemas.openxmlformats.org/drawingml/2006/main" xmlns:p="http://schemas.openxmlformats.org/presentationml/2006/main" xmlns:r="http://schemas.openxmlformats.org/officeDocument/2006/relationships">
   <p:cSld>
     <p:spTree>
       <p:nvGrpSpPr>
@@ -26012,14 +24427,7 @@
         <p:cNvGrpSpPr/>
         <p:nvPr/>
       </p:nvGrpSpPr>
-      <p:grpSpPr>
-        <a:xfrm>
-          <a:off x="0" y="0"/>
-          <a:ext cx="0" cy="0"/>
-          <a:chOff x="0" y="0"/>
-          <a:chExt cx="0" cy="0"/>
-        </a:xfrm>
-      </p:grpSpPr>
+      <p:grpSpPr/>
       <p:sp>
         <p:nvSpPr>
           <p:cNvPr id="2" name="Rectangle 1"/>
@@ -26060,7 +24468,6 @@
           <a:lstStyle/>
           <a:p>
             <a:pPr algn="ctr"/>
-            <a:endParaRPr/>
           </a:p>
         </p:txBody>
       </p:sp>
@@ -26104,7 +24511,6 @@
           <a:lstStyle/>
           <a:p>
             <a:pPr algn="ctr"/>
-            <a:endParaRPr/>
           </a:p>
         </p:txBody>
       </p:sp>
@@ -26274,7 +24680,6 @@
           <a:lstStyle/>
           <a:p>
             <a:pPr algn="ctr"/>
-            <a:endParaRPr/>
           </a:p>
         </p:txBody>
       </p:sp>
@@ -26302,34 +24707,13 @@
           <a:p>
             <a:pPr algn="l"/>
             <a:r>
-              <a:rPr sz="1200" b="1" i="0" dirty="0" err="1">
+              <a:rPr sz="1200" b="1" i="0">
                 <a:solidFill>
                   <a:srgbClr val="FF7F27"/>
                 </a:solidFill>
               </a:rPr>
-              <a:t>해석</a:t>
-            </a:r>
-            <a:r>
-              <a:rPr sz="1200" b="1" i="0" dirty="0">
-                <a:solidFill>
-                  <a:srgbClr val="FF7F27"/>
-                </a:solidFill>
-              </a:rPr>
-              <a:t> </a:t>
-            </a:r>
-            <a:r>
-              <a:rPr sz="1200" b="1" i="0" dirty="0" err="1">
-                <a:solidFill>
-                  <a:srgbClr val="FF7F27"/>
-                </a:solidFill>
-              </a:rPr>
-              <a:t>기준</a:t>
-            </a:r>
-            <a:endParaRPr sz="1200" b="1" i="0" dirty="0">
-              <a:solidFill>
-                <a:srgbClr val="FF7F27"/>
-              </a:solidFill>
-            </a:endParaRPr>
+              <a:t>해석 기준</a:t>
+            </a:r>
           </a:p>
         </p:txBody>
       </p:sp>
@@ -26357,190 +24741,17 @@
           <a:p>
             <a:pPr algn="l"/>
             <a:r>
-              <a:rPr sz="1100" b="0" i="0" dirty="0">
+              <a:rPr sz="1100" b="0" i="0">
                 <a:solidFill>
                   <a:srgbClr val="FFFFFF"/>
                 </a:solidFill>
               </a:rPr>
-              <a:t>• |r| &lt; 0.5  →  </a:t>
-            </a:r>
-            <a:r>
-              <a:rPr sz="1100" b="0" i="0" dirty="0" err="1">
-                <a:solidFill>
-                  <a:srgbClr val="FFFFFF"/>
-                </a:solidFill>
-              </a:rPr>
-              <a:t>낮은</a:t>
-            </a:r>
-            <a:r>
-              <a:rPr sz="1100" b="0" i="0" dirty="0">
-                <a:solidFill>
-                  <a:srgbClr val="FFFFFF"/>
-                </a:solidFill>
-              </a:rPr>
-              <a:t> </a:t>
-            </a:r>
-            <a:r>
-              <a:rPr sz="1100" b="0" i="0" dirty="0" err="1">
-                <a:solidFill>
-                  <a:srgbClr val="FFFFFF"/>
-                </a:solidFill>
-              </a:rPr>
-              <a:t>상관</a:t>
-            </a:r>
-            <a:r>
-              <a:rPr sz="1100" b="0" i="0" dirty="0">
-                <a:solidFill>
-                  <a:srgbClr val="FFFFFF"/>
-                </a:solidFill>
-              </a:rPr>
-              <a:t>
-• 0.5 ≤ |r| &lt; 0.8  →  </a:t>
-            </a:r>
-            <a:r>
-              <a:rPr sz="1100" b="0" i="0" dirty="0" err="1">
-                <a:solidFill>
-                  <a:srgbClr val="FFFFFF"/>
-                </a:solidFill>
-              </a:rPr>
-              <a:t>중간</a:t>
-            </a:r>
-            <a:r>
-              <a:rPr sz="1100" b="0" i="0" dirty="0">
-                <a:solidFill>
-                  <a:srgbClr val="FFFFFF"/>
-                </a:solidFill>
-              </a:rPr>
-              <a:t> </a:t>
-            </a:r>
-            <a:r>
-              <a:rPr sz="1100" b="0" i="0" dirty="0" err="1">
-                <a:solidFill>
-                  <a:srgbClr val="FFFFFF"/>
-                </a:solidFill>
-              </a:rPr>
-              <a:t>상관</a:t>
-            </a:r>
-            <a:r>
-              <a:rPr sz="1100" b="0" i="0" dirty="0">
-                <a:solidFill>
-                  <a:srgbClr val="FFFFFF"/>
-                </a:solidFill>
-              </a:rPr>
-              <a:t>
-• |r| ≥ 0.8  →  </a:t>
-            </a:r>
-            <a:r>
-              <a:rPr sz="1100" b="0" i="0" dirty="0" err="1">
-                <a:solidFill>
-                  <a:srgbClr val="FFFFFF"/>
-                </a:solidFill>
-              </a:rPr>
-              <a:t>다중공선성</a:t>
-            </a:r>
-            <a:r>
-              <a:rPr sz="1100" b="0" i="0" dirty="0">
-                <a:solidFill>
-                  <a:srgbClr val="FFFFFF"/>
-                </a:solidFill>
-              </a:rPr>
-              <a:t> </a:t>
-            </a:r>
-            <a:r>
-              <a:rPr sz="1100" b="0" i="0" dirty="0" err="1">
-                <a:solidFill>
-                  <a:srgbClr val="FFFFFF"/>
-                </a:solidFill>
-              </a:rPr>
-              <a:t>주의</a:t>
-            </a:r>
-            <a:r>
-              <a:rPr sz="1100" b="0" i="0" dirty="0">
-                <a:solidFill>
-                  <a:srgbClr val="FFFFFF"/>
-                </a:solidFill>
-              </a:rPr>
-              <a:t>
-VIF &gt; 10 과 </a:t>
-            </a:r>
-            <a:r>
-              <a:rPr sz="1100" b="0" i="0" dirty="0" err="1">
-                <a:solidFill>
-                  <a:srgbClr val="FFFFFF"/>
-                </a:solidFill>
-              </a:rPr>
-              <a:t>함께</a:t>
-            </a:r>
-            <a:r>
-              <a:rPr sz="1100" b="0" i="0" dirty="0">
-                <a:solidFill>
-                  <a:srgbClr val="FFFFFF"/>
-                </a:solidFill>
-              </a:rPr>
-              <a:t> </a:t>
-            </a:r>
-            <a:r>
-              <a:rPr sz="1100" b="0" i="0" dirty="0" err="1">
-                <a:solidFill>
-                  <a:srgbClr val="FFFFFF"/>
-                </a:solidFill>
-              </a:rPr>
-              <a:t>확인하여</a:t>
-            </a:r>
-            <a:r>
-              <a:rPr sz="1100" b="0" i="0" dirty="0">
-                <a:solidFill>
-                  <a:srgbClr val="FFFFFF"/>
-                </a:solidFill>
-              </a:rPr>
-              <a:t>
-</a:t>
-            </a:r>
-            <a:r>
-              <a:rPr sz="1100" b="0" i="0" dirty="0" err="1">
-                <a:solidFill>
-                  <a:srgbClr val="FFFFFF"/>
-                </a:solidFill>
-              </a:rPr>
-              <a:t>제거</a:t>
-            </a:r>
-            <a:r>
-              <a:rPr sz="1100" b="0" i="0" dirty="0">
-                <a:solidFill>
-                  <a:srgbClr val="FFFFFF"/>
-                </a:solidFill>
-              </a:rPr>
-              <a:t> </a:t>
-            </a:r>
-            <a:r>
-              <a:rPr sz="1100" b="0" i="0" dirty="0" err="1">
-                <a:solidFill>
-                  <a:srgbClr val="FFFFFF"/>
-                </a:solidFill>
-              </a:rPr>
-              <a:t>여부</a:t>
-            </a:r>
-            <a:r>
-              <a:rPr sz="1100" b="0" i="0" dirty="0">
-                <a:solidFill>
-                  <a:srgbClr val="FFFFFF"/>
-                </a:solidFill>
-              </a:rPr>
-              <a:t> </a:t>
-            </a:r>
-            <a:r>
-              <a:rPr sz="1100" b="0" i="0" dirty="0" err="1">
-                <a:solidFill>
-                  <a:srgbClr val="FFFFFF"/>
-                </a:solidFill>
-              </a:rPr>
-              <a:t>결정</a:t>
-            </a:r>
-            <a:endParaRPr sz="1100" b="0" i="0" dirty="0">
-              <a:solidFill>
-                <a:srgbClr val="FFFFFF"/>
-              </a:solidFill>
-            </a:endParaRPr>
+              <a:t>• |r| &lt; 0.5  →  낮은 상관
+• 0.5 ≤ |r| &lt; 0.8  →  중간 상관
+• |r| ≥ 0.8  →  다중공선성 주의
+VIF &gt; 10 과 함께 확인하여
+제거 여부 결정</a:t>
+            </a:r>
           </a:p>
         </p:txBody>
       </p:sp>
@@ -26586,7 +24797,6 @@
           <a:lstStyle/>
           <a:p>
             <a:pPr algn="ctr"/>
-            <a:endParaRPr/>
           </a:p>
         </p:txBody>
       </p:sp>
@@ -26648,233 +24858,17 @@
           <a:p>
             <a:pPr algn="l"/>
             <a:r>
-              <a:rPr sz="1100" b="0" i="0" dirty="0" err="1">
+              <a:rPr sz="1100" b="0" i="0">
                 <a:solidFill>
                   <a:srgbClr val="1A1A2E"/>
                 </a:solidFill>
               </a:rPr>
-              <a:t>제외된</a:t>
-            </a:r>
-            <a:r>
-              <a:rPr sz="1100" b="0" i="0" dirty="0">
-                <a:solidFill>
-                  <a:srgbClr val="1A1A2E"/>
-                </a:solidFill>
-              </a:rPr>
-              <a:t> amplitude </a:t>
-            </a:r>
-            <a:r>
-              <a:rPr sz="1100" b="0" i="0" dirty="0" err="1">
-                <a:solidFill>
-                  <a:srgbClr val="1A1A2E"/>
-                </a:solidFill>
-              </a:rPr>
-              <a:t>그룹</a:t>
-            </a:r>
-            <a:r>
-              <a:rPr sz="1100" b="0" i="0" dirty="0">
-                <a:solidFill>
-                  <a:srgbClr val="1A1A2E"/>
-                </a:solidFill>
-              </a:rPr>
-              <a:t>:
-• p25: </a:t>
-            </a:r>
-            <a:r>
-              <a:rPr sz="1100" b="0" i="0" dirty="0" err="1">
-                <a:solidFill>
-                  <a:srgbClr val="1A1A2E"/>
-                </a:solidFill>
-              </a:rPr>
-              <a:t>제외</a:t>
-            </a:r>
-            <a:r>
-              <a:rPr sz="1100" b="0" i="0" dirty="0">
-                <a:solidFill>
-                  <a:srgbClr val="1A1A2E"/>
-                </a:solidFill>
-              </a:rPr>
-              <a:t> (amplitude </a:t>
-            </a:r>
-            <a:r>
-              <a:rPr sz="1100" b="0" i="0" dirty="0" err="1">
-                <a:solidFill>
-                  <a:srgbClr val="1A1A2E"/>
-                </a:solidFill>
-              </a:rPr>
-              <a:t>중복</a:t>
-            </a:r>
-            <a:r>
-              <a:rPr sz="1100" b="0" i="0" dirty="0">
-                <a:solidFill>
-                  <a:srgbClr val="1A1A2E"/>
-                </a:solidFill>
-              </a:rPr>
-              <a:t>)
-• </a:t>
-            </a:r>
-            <a:r>
-              <a:rPr sz="1100" b="0" i="0" dirty="0" err="1">
-                <a:solidFill>
-                  <a:srgbClr val="1A1A2E"/>
-                </a:solidFill>
-              </a:rPr>
-              <a:t>AUC_normalized</a:t>
-            </a:r>
-            <a:r>
-              <a:rPr sz="1100" b="0" i="0" dirty="0">
-                <a:solidFill>
-                  <a:srgbClr val="1A1A2E"/>
-                </a:solidFill>
-              </a:rPr>
-              <a:t>: </a:t>
-            </a:r>
-            <a:r>
-              <a:rPr sz="1100" b="0" i="0" dirty="0" err="1">
-                <a:solidFill>
-                  <a:srgbClr val="1A1A2E"/>
-                </a:solidFill>
-              </a:rPr>
-              <a:t>제외</a:t>
-            </a:r>
-            <a:r>
-              <a:rPr sz="1100" b="0" i="0" dirty="0">
-                <a:solidFill>
-                  <a:srgbClr val="1A1A2E"/>
-                </a:solidFill>
-              </a:rPr>
-              <a:t> (amplitude </a:t>
-            </a:r>
-            <a:r>
-              <a:rPr sz="1100" b="0" i="0" dirty="0" err="1">
-                <a:solidFill>
-                  <a:srgbClr val="1A1A2E"/>
-                </a:solidFill>
-              </a:rPr>
-              <a:t>중복</a:t>
-            </a:r>
-            <a:r>
-              <a:rPr sz="1100" b="0" i="0" dirty="0">
-                <a:solidFill>
-                  <a:srgbClr val="1A1A2E"/>
-                </a:solidFill>
-              </a:rPr>
-              <a:t>)
-• </a:t>
-            </a:r>
-            <a:r>
-              <a:rPr sz="1100" b="0" i="0" dirty="0" err="1">
-                <a:solidFill>
-                  <a:srgbClr val="1A1A2E"/>
-                </a:solidFill>
-              </a:rPr>
-              <a:t>peak_max_height</a:t>
-            </a:r>
-            <a:r>
-              <a:rPr sz="1100" b="0" i="0" dirty="0">
-                <a:solidFill>
-                  <a:srgbClr val="1A1A2E"/>
-                </a:solidFill>
-              </a:rPr>
-              <a:t>: </a:t>
-            </a:r>
-            <a:r>
-              <a:rPr sz="1100" b="0" i="0" dirty="0" err="1">
-                <a:solidFill>
-                  <a:srgbClr val="1A1A2E"/>
-                </a:solidFill>
-              </a:rPr>
-              <a:t>제외</a:t>
-            </a:r>
-            <a:r>
-              <a:rPr sz="1100" b="0" i="0" dirty="0">
-                <a:solidFill>
-                  <a:srgbClr val="1A1A2E"/>
-                </a:solidFill>
-              </a:rPr>
-              <a:t> (amplitude </a:t>
-            </a:r>
-            <a:r>
-              <a:rPr sz="1100" b="0" i="0" dirty="0" err="1">
-                <a:solidFill>
-                  <a:srgbClr val="1A1A2E"/>
-                </a:solidFill>
-              </a:rPr>
-              <a:t>중복</a:t>
-            </a:r>
-            <a:r>
-              <a:rPr sz="1100" b="0" i="0" dirty="0">
-                <a:solidFill>
-                  <a:srgbClr val="1A1A2E"/>
-                </a:solidFill>
-              </a:rPr>
-              <a:t>)
-</a:t>
-            </a:r>
-            <a:r>
-              <a:rPr sz="1100" b="0" i="0" dirty="0" err="1">
-                <a:solidFill>
-                  <a:srgbClr val="1A1A2E"/>
-                </a:solidFill>
-              </a:rPr>
-              <a:t>선택</a:t>
-            </a:r>
-            <a:r>
-              <a:rPr sz="1100" b="0" i="0" dirty="0">
-                <a:solidFill>
-                  <a:srgbClr val="1A1A2E"/>
-                </a:solidFill>
-              </a:rPr>
-              <a:t> </a:t>
-            </a:r>
-            <a:r>
-              <a:rPr sz="1100" b="0" i="0" dirty="0" err="1">
-                <a:solidFill>
-                  <a:srgbClr val="1A1A2E"/>
-                </a:solidFill>
-              </a:rPr>
-              <a:t>대표</a:t>
-            </a:r>
-            <a:r>
-              <a:rPr sz="1100" b="0" i="0" dirty="0">
-                <a:solidFill>
-                  <a:srgbClr val="1A1A2E"/>
-                </a:solidFill>
-              </a:rPr>
-              <a:t>: mean
-(VIF </a:t>
-            </a:r>
-            <a:r>
-              <a:rPr sz="1100" b="0" i="0" dirty="0" err="1">
-                <a:solidFill>
-                  <a:srgbClr val="1A1A2E"/>
-                </a:solidFill>
-              </a:rPr>
-              <a:t>확인</a:t>
-            </a:r>
-            <a:r>
-              <a:rPr sz="1100" b="0" i="0" dirty="0">
-                <a:solidFill>
-                  <a:srgbClr val="1A1A2E"/>
-                </a:solidFill>
-              </a:rPr>
-              <a:t> 후 </a:t>
-            </a:r>
-            <a:r>
-              <a:rPr sz="1100" b="0" i="0" dirty="0" err="1">
-                <a:solidFill>
-                  <a:srgbClr val="1A1A2E"/>
-                </a:solidFill>
-              </a:rPr>
-              <a:t>포함</a:t>
-            </a:r>
-            <a:r>
-              <a:rPr sz="1100" b="0" i="0" dirty="0">
-                <a:solidFill>
-                  <a:srgbClr val="1A1A2E"/>
-                </a:solidFill>
-              </a:rPr>
-              <a:t>)</a:t>
+              <a:t>제외된 amplitude 그룹:
+• p25: 제외 (amplitude 중복)
+• AUC_normalized: 제외 (amplitude 중복)
+• peak_max_height: 제외 (amplitude 중복)
+선택 대표: mean
+(VIF 확인 후 포함)</a:t>
             </a:r>
           </a:p>
         </p:txBody>
@@ -26888,7 +24882,7 @@
 </file>
 
 <file path=ppt/slides/slide9.xml><?xml version="1.0" encoding="utf-8"?>
-<p:sld xmlns:a="http://schemas.openxmlformats.org/drawingml/2006/main" xmlns:r="http://schemas.openxmlformats.org/officeDocument/2006/relationships" xmlns:p="http://schemas.openxmlformats.org/presentationml/2006/main">
+<p:sld xmlns:a="http://schemas.openxmlformats.org/drawingml/2006/main" xmlns:p="http://schemas.openxmlformats.org/presentationml/2006/main" xmlns:r="http://schemas.openxmlformats.org/officeDocument/2006/relationships">
   <p:cSld>
     <p:spTree>
       <p:nvGrpSpPr>
@@ -26896,14 +24890,7 @@
         <p:cNvGrpSpPr/>
         <p:nvPr/>
       </p:nvGrpSpPr>
-      <p:grpSpPr>
-        <a:xfrm>
-          <a:off x="0" y="0"/>
-          <a:ext cx="0" cy="0"/>
-          <a:chOff x="0" y="0"/>
-          <a:chExt cx="0" cy="0"/>
-        </a:xfrm>
-      </p:grpSpPr>
+      <p:grpSpPr/>
       <p:sp>
         <p:nvSpPr>
           <p:cNvPr id="2" name="Rectangle 1"/>
@@ -26944,7 +24931,6 @@
           <a:lstStyle/>
           <a:p>
             <a:pPr algn="ctr"/>
-            <a:endParaRPr/>
           </a:p>
         </p:txBody>
       </p:sp>
@@ -26988,7 +24974,6 @@
           <a:lstStyle/>
           <a:p>
             <a:pPr algn="ctr"/>
-            <a:endParaRPr/>
           </a:p>
         </p:txBody>
       </p:sp>
@@ -27104,7 +25089,7 @@
         </p:nvGraphicFramePr>
         <p:xfrm>
           <a:off x="320040" y="1508760"/>
-          <a:ext cx="5486400" cy="1962912"/>
+          <a:ext cx="5486400" cy="1920240"/>
         </p:xfrm>
         <a:graphic>
           <a:graphicData uri="http://schemas.openxmlformats.org/drawingml/2006/table">
@@ -27113,20 +25098,8 @@
                 <a:tableStyleId>{5C22544A-7EE6-4342-B048-85BDC9FD1C3A}</a:tableStyleId>
               </a:tblPr>
               <a:tblGrid>
-                <a:gridCol w="2743200">
-                  <a:extLst>
-                    <a:ext uri="{9D8B030D-6E8A-4147-A177-3AD203B41FA5}">
-                      <a16:colId xmlns:a16="http://schemas.microsoft.com/office/drawing/2014/main" val="20000"/>
-                    </a:ext>
-                  </a:extLst>
-                </a:gridCol>
-                <a:gridCol w="2743200">
-                  <a:extLst>
-                    <a:ext uri="{9D8B030D-6E8A-4147-A177-3AD203B41FA5}">
-                      <a16:colId xmlns:a16="http://schemas.microsoft.com/office/drawing/2014/main" val="20001"/>
-                    </a:ext>
-                  </a:extLst>
-                </a:gridCol>
+                <a:gridCol w="2743200"/>
+                <a:gridCol w="2743200"/>
               </a:tblGrid>
               <a:tr h="384048">
                 <a:tc>
@@ -27136,7 +25109,7 @@
                     <a:p>
                       <a:pPr algn="ctr"/>
                       <a:r>
-                        <a:rPr sz="1100" b="1">
+                        <a:rPr b="1" sz="1100">
                           <a:solidFill>
                             <a:srgbClr val="FFFFFF"/>
                           </a:solidFill>
@@ -27158,7 +25131,7 @@
                     <a:p>
                       <a:pPr algn="ctr"/>
                       <a:r>
-                        <a:rPr sz="1100" b="1">
+                        <a:rPr b="1" sz="1100">
                           <a:solidFill>
                             <a:srgbClr val="FFFFFF"/>
                           </a:solidFill>
@@ -27173,11 +25146,6 @@
                     </a:solidFill>
                   </a:tcPr>
                 </a:tc>
-                <a:extLst>
-                  <a:ext uri="{0D108BD9-81ED-4DB2-BD59-A6C34878D82A}">
-                    <a16:rowId xmlns:a16="http://schemas.microsoft.com/office/drawing/2014/main" val="10000"/>
-                  </a:ext>
-                </a:extLst>
               </a:tr>
               <a:tr h="384048">
                 <a:tc>
@@ -27224,11 +25192,6 @@
                     </a:solidFill>
                   </a:tcPr>
                 </a:tc>
-                <a:extLst>
-                  <a:ext uri="{0D108BD9-81ED-4DB2-BD59-A6C34878D82A}">
-                    <a16:rowId xmlns:a16="http://schemas.microsoft.com/office/drawing/2014/main" val="10001"/>
-                  </a:ext>
-                </a:extLst>
               </a:tr>
               <a:tr h="384048">
                 <a:tc>
@@ -27275,11 +25238,6 @@
                     </a:solidFill>
                   </a:tcPr>
                 </a:tc>
-                <a:extLst>
-                  <a:ext uri="{0D108BD9-81ED-4DB2-BD59-A6C34878D82A}">
-                    <a16:rowId xmlns:a16="http://schemas.microsoft.com/office/drawing/2014/main" val="10002"/>
-                  </a:ext>
-                </a:extLst>
               </a:tr>
               <a:tr h="384048">
                 <a:tc>
@@ -27326,11 +25284,6 @@
                     </a:solidFill>
                   </a:tcPr>
                 </a:tc>
-                <a:extLst>
-                  <a:ext uri="{0D108BD9-81ED-4DB2-BD59-A6C34878D82A}">
-                    <a16:rowId xmlns:a16="http://schemas.microsoft.com/office/drawing/2014/main" val="10003"/>
-                  </a:ext>
-                </a:extLst>
               </a:tr>
               <a:tr h="384048">
                 <a:tc>
@@ -27377,11 +25330,6 @@
                     </a:solidFill>
                   </a:tcPr>
                 </a:tc>
-                <a:extLst>
-                  <a:ext uri="{0D108BD9-81ED-4DB2-BD59-A6C34878D82A}">
-                    <a16:rowId xmlns:a16="http://schemas.microsoft.com/office/drawing/2014/main" val="10004"/>
-                  </a:ext>
-                </a:extLst>
               </a:tr>
             </a:tbl>
           </a:graphicData>
@@ -27463,7 +25411,6 @@
           <a:lstStyle/>
           <a:p>
             <a:pPr algn="ctr"/>
-            <a:endParaRPr/>
           </a:p>
         </p:txBody>
       </p:sp>
@@ -27578,7 +25525,6 @@
           <a:lstStyle/>
           <a:p>
             <a:pPr algn="ctr"/>
-            <a:endParaRPr/>
           </a:p>
         </p:txBody>
       </p:sp>
@@ -27704,20 +25650,8 @@
                 <a:tableStyleId>{5C22544A-7EE6-4342-B048-85BDC9FD1C3A}</a:tableStyleId>
               </a:tblPr>
               <a:tblGrid>
-                <a:gridCol w="5760720">
-                  <a:extLst>
-                    <a:ext uri="{9D8B030D-6E8A-4147-A177-3AD203B41FA5}">
-                      <a16:colId xmlns:a16="http://schemas.microsoft.com/office/drawing/2014/main" val="20000"/>
-                    </a:ext>
-                  </a:extLst>
-                </a:gridCol>
-                <a:gridCol w="5760720">
-                  <a:extLst>
-                    <a:ext uri="{9D8B030D-6E8A-4147-A177-3AD203B41FA5}">
-                      <a16:colId xmlns:a16="http://schemas.microsoft.com/office/drawing/2014/main" val="20001"/>
-                    </a:ext>
-                  </a:extLst>
-                </a:gridCol>
+                <a:gridCol w="5760720"/>
+                <a:gridCol w="5760720"/>
               </a:tblGrid>
               <a:tr h="384048">
                 <a:tc>
@@ -27727,7 +25661,7 @@
                     <a:p>
                       <a:pPr algn="ctr"/>
                       <a:r>
-                        <a:rPr sz="1100" b="1">
+                        <a:rPr b="1" sz="1100">
                           <a:solidFill>
                             <a:srgbClr val="FFFFFF"/>
                           </a:solidFill>
@@ -27749,7 +25683,7 @@
                     <a:p>
                       <a:pPr algn="ctr"/>
                       <a:r>
-                        <a:rPr sz="1100" b="1">
+                        <a:rPr b="1" sz="1100">
                           <a:solidFill>
                             <a:srgbClr val="FFFFFF"/>
                           </a:solidFill>
@@ -27764,11 +25698,6 @@
                     </a:solidFill>
                   </a:tcPr>
                 </a:tc>
-                <a:extLst>
-                  <a:ext uri="{0D108BD9-81ED-4DB2-BD59-A6C34878D82A}">
-                    <a16:rowId xmlns:a16="http://schemas.microsoft.com/office/drawing/2014/main" val="10000"/>
-                  </a:ext>
-                </a:extLst>
               </a:tr>
               <a:tr h="384048">
                 <a:tc>
@@ -27815,11 +25744,6 @@
                     </a:solidFill>
                   </a:tcPr>
                 </a:tc>
-                <a:extLst>
-                  <a:ext uri="{0D108BD9-81ED-4DB2-BD59-A6C34878D82A}">
-                    <a16:rowId xmlns:a16="http://schemas.microsoft.com/office/drawing/2014/main" val="10001"/>
-                  </a:ext>
-                </a:extLst>
               </a:tr>
               <a:tr h="384048">
                 <a:tc>
@@ -27866,11 +25790,6 @@
                     </a:solidFill>
                   </a:tcPr>
                 </a:tc>
-                <a:extLst>
-                  <a:ext uri="{0D108BD9-81ED-4DB2-BD59-A6C34878D82A}">
-                    <a16:rowId xmlns:a16="http://schemas.microsoft.com/office/drawing/2014/main" val="10002"/>
-                  </a:ext>
-                </a:extLst>
               </a:tr>
               <a:tr h="384048">
                 <a:tc>
@@ -27917,11 +25836,6 @@
                     </a:solidFill>
                   </a:tcPr>
                 </a:tc>
-                <a:extLst>
-                  <a:ext uri="{0D108BD9-81ED-4DB2-BD59-A6C34878D82A}">
-                    <a16:rowId xmlns:a16="http://schemas.microsoft.com/office/drawing/2014/main" val="10003"/>
-                  </a:ext>
-                </a:extLst>
               </a:tr>
               <a:tr h="384048">
                 <a:tc>
@@ -27968,11 +25882,6 @@
                     </a:solidFill>
                   </a:tcPr>
                 </a:tc>
-                <a:extLst>
-                  <a:ext uri="{0D108BD9-81ED-4DB2-BD59-A6C34878D82A}">
-                    <a16:rowId xmlns:a16="http://schemas.microsoft.com/office/drawing/2014/main" val="10004"/>
-                  </a:ext>
-                </a:extLst>
               </a:tr>
             </a:tbl>
           </a:graphicData>
